--- a/slide/L7_documentazione_ai.pptx
+++ b/slide/L7_documentazione_ai.pptx
@@ -3116,7 +3116,7 @@
             <a:avLst/>
           </a:prstGeom>
           <a:solidFill>
-            <a:srgbClr val="0F2D52"/>
+            <a:srgbClr val="081B33"/>
           </a:solidFill>
           <a:ln>
             <a:noFill/>
@@ -3152,8 +3152,8 @@
         </p:nvSpPr>
         <p:spPr>
           <a:xfrm>
-            <a:off x="0" y="914400"/>
-            <a:ext cx="365760" cy="2286000"/>
+            <a:off x="0" y="0"/>
+            <a:ext cx="12191695" cy="137160"/>
           </a:xfrm>
           <a:prstGeom prst="rect">
             <a:avLst/>
@@ -3189,14 +3189,186 @@
       </p:sp>
       <p:sp>
         <p:nvSpPr>
-          <p:cNvPr id="4" name="TextBox 3"/>
+          <p:cNvPr id="4" name="Oval 3"/>
+          <p:cNvSpPr/>
+          <p:nvPr/>
+        </p:nvSpPr>
+        <p:spPr>
+          <a:xfrm>
+            <a:off x="8686800" y="-914400"/>
+            <a:ext cx="2743200" cy="2743200"/>
+          </a:xfrm>
+          <a:prstGeom prst="ellipse">
+            <a:avLst/>
+          </a:prstGeom>
+          <a:noFill/>
+          <a:ln w="25400">
+            <a:solidFill>
+              <a:srgbClr val="00A0B0"/>
+            </a:solidFill>
+          </a:ln>
+        </p:spPr>
+        <p:style>
+          <a:lnRef idx="1">
+            <a:schemeClr val="accent1"/>
+          </a:lnRef>
+          <a:fillRef idx="3">
+            <a:schemeClr val="accent1"/>
+          </a:fillRef>
+          <a:effectRef idx="2">
+            <a:schemeClr val="accent1"/>
+          </a:effectRef>
+          <a:fontRef idx="minor">
+            <a:schemeClr val="lt1"/>
+          </a:fontRef>
+        </p:style>
+        <p:txBody>
+          <a:bodyPr rtlCol="0" anchor="ctr"/>
+          <a:lstStyle/>
+          <a:p>
+            <a:pPr algn="ctr"/>
+          </a:p>
+        </p:txBody>
+      </p:sp>
+      <p:sp>
+        <p:nvSpPr>
+          <p:cNvPr id="5" name="Oval 4"/>
+          <p:cNvSpPr/>
+          <p:nvPr/>
+        </p:nvSpPr>
+        <p:spPr>
+          <a:xfrm>
+            <a:off x="10515600" y="1371600"/>
+            <a:ext cx="1828800" cy="1828800"/>
+          </a:xfrm>
+          <a:prstGeom prst="ellipse">
+            <a:avLst/>
+          </a:prstGeom>
+          <a:noFill/>
+          <a:ln w="25400">
+            <a:solidFill>
+              <a:srgbClr val="00A0B0"/>
+            </a:solidFill>
+          </a:ln>
+        </p:spPr>
+        <p:style>
+          <a:lnRef idx="1">
+            <a:schemeClr val="accent1"/>
+          </a:lnRef>
+          <a:fillRef idx="3">
+            <a:schemeClr val="accent1"/>
+          </a:fillRef>
+          <a:effectRef idx="2">
+            <a:schemeClr val="accent1"/>
+          </a:effectRef>
+          <a:fontRef idx="minor">
+            <a:schemeClr val="lt1"/>
+          </a:fontRef>
+        </p:style>
+        <p:txBody>
+          <a:bodyPr rtlCol="0" anchor="ctr"/>
+          <a:lstStyle/>
+          <a:p>
+            <a:pPr algn="ctr"/>
+          </a:p>
+        </p:txBody>
+      </p:sp>
+      <p:sp>
+        <p:nvSpPr>
+          <p:cNvPr id="6" name="Oval 5"/>
+          <p:cNvSpPr/>
+          <p:nvPr/>
+        </p:nvSpPr>
+        <p:spPr>
+          <a:xfrm>
+            <a:off x="8458200" y="3429000"/>
+            <a:ext cx="2286000" cy="2286000"/>
+          </a:xfrm>
+          <a:prstGeom prst="ellipse">
+            <a:avLst/>
+          </a:prstGeom>
+          <a:noFill/>
+          <a:ln w="25400">
+            <a:solidFill>
+              <a:srgbClr val="00A0B0"/>
+            </a:solidFill>
+          </a:ln>
+        </p:spPr>
+        <p:style>
+          <a:lnRef idx="1">
+            <a:schemeClr val="accent1"/>
+          </a:lnRef>
+          <a:fillRef idx="3">
+            <a:schemeClr val="accent1"/>
+          </a:fillRef>
+          <a:effectRef idx="2">
+            <a:schemeClr val="accent1"/>
+          </a:effectRef>
+          <a:fontRef idx="minor">
+            <a:schemeClr val="lt1"/>
+          </a:fontRef>
+        </p:style>
+        <p:txBody>
+          <a:bodyPr rtlCol="0" anchor="ctr"/>
+          <a:lstStyle/>
+          <a:p>
+            <a:pPr algn="ctr"/>
+          </a:p>
+        </p:txBody>
+      </p:sp>
+      <p:sp>
+        <p:nvSpPr>
+          <p:cNvPr id="7" name="Rectangle 6"/>
+          <p:cNvSpPr/>
+          <p:nvPr/>
+        </p:nvSpPr>
+        <p:spPr>
+          <a:xfrm>
+            <a:off x="0" y="2286000"/>
+            <a:ext cx="228600" cy="2743200"/>
+          </a:xfrm>
+          <a:prstGeom prst="rect">
+            <a:avLst/>
+          </a:prstGeom>
+          <a:solidFill>
+            <a:srgbClr val="00A0B0"/>
+          </a:solidFill>
+          <a:ln>
+            <a:noFill/>
+          </a:ln>
+        </p:spPr>
+        <p:style>
+          <a:lnRef idx="1">
+            <a:schemeClr val="accent1"/>
+          </a:lnRef>
+          <a:fillRef idx="3">
+            <a:schemeClr val="accent1"/>
+          </a:fillRef>
+          <a:effectRef idx="2">
+            <a:schemeClr val="accent1"/>
+          </a:effectRef>
+          <a:fontRef idx="minor">
+            <a:schemeClr val="lt1"/>
+          </a:fontRef>
+        </p:style>
+        <p:txBody>
+          <a:bodyPr rtlCol="0" anchor="ctr"/>
+          <a:lstStyle/>
+          <a:p>
+            <a:pPr algn="ctr"/>
+          </a:p>
+        </p:txBody>
+      </p:sp>
+      <p:sp>
+        <p:nvSpPr>
+          <p:cNvPr id="8" name="TextBox 7"/>
           <p:cNvSpPr txBox="1"/>
           <p:nvPr/>
         </p:nvSpPr>
         <p:spPr>
           <a:xfrm>
-            <a:off x="731520" y="914400"/>
-            <a:ext cx="10058400" cy="548640"/>
+            <a:off x="548640" y="2286000"/>
+            <a:ext cx="7315200" cy="457200"/>
           </a:xfrm>
           <a:prstGeom prst="rect">
             <a:avLst/>
@@ -3211,7 +3383,7 @@
           <a:p>
             <a:pPr algn="l"/>
             <a:r>
-              <a:rPr sz="1800" b="1" i="0">
+              <a:rPr sz="1600" b="1" i="0">
                 <a:solidFill>
                   <a:srgbClr val="00A0B0"/>
                 </a:solidFill>
@@ -3224,14 +3396,14 @@
       </p:sp>
       <p:sp>
         <p:nvSpPr>
-          <p:cNvPr id="5" name="TextBox 4"/>
+          <p:cNvPr id="9" name="TextBox 8"/>
           <p:cNvSpPr txBox="1"/>
           <p:nvPr/>
         </p:nvSpPr>
         <p:spPr>
           <a:xfrm>
-            <a:off x="731520" y="1554480"/>
-            <a:ext cx="10058400" cy="1828800"/>
+            <a:off x="548640" y="2743200"/>
+            <a:ext cx="10515600" cy="2011680"/>
           </a:xfrm>
           <a:prstGeom prst="rect">
             <a:avLst/>
@@ -3246,7 +3418,7 @@
           <a:p>
             <a:pPr algn="l"/>
             <a:r>
-              <a:rPr sz="5400" b="1" i="0">
+              <a:rPr sz="5600" b="1" i="0">
                 <a:solidFill>
                   <a:srgbClr val="FFFFFF"/>
                 </a:solidFill>
@@ -3259,14 +3431,14 @@
       </p:sp>
       <p:sp>
         <p:nvSpPr>
-          <p:cNvPr id="6" name="TextBox 5"/>
+          <p:cNvPr id="10" name="TextBox 9"/>
           <p:cNvSpPr txBox="1"/>
           <p:nvPr/>
         </p:nvSpPr>
         <p:spPr>
           <a:xfrm>
-            <a:off x="731520" y="3566160"/>
-            <a:ext cx="10058400" cy="1097280"/>
+            <a:off x="548640" y="4572000"/>
+            <a:ext cx="10058400" cy="914400"/>
           </a:xfrm>
           <a:prstGeom prst="rect">
             <a:avLst/>
@@ -3281,27 +3453,107 @@
           <a:p>
             <a:pPr algn="l"/>
             <a:r>
-              <a:rPr sz="2400" b="0" i="1">
+              <a:rPr sz="2200" b="0" i="1">
+                <a:solidFill>
+                  <a:srgbClr val="6FD8E0"/>
+                </a:solidFill>
+                <a:latin typeface="Calibri"/>
+              </a:rPr>
+              <a:t>SECURITY.md, AI come assistente, validare codice generato</a:t>
+            </a:r>
+          </a:p>
+        </p:txBody>
+      </p:sp>
+      <p:sp>
+        <p:nvSpPr>
+          <p:cNvPr id="11" name="Rounded Rectangle 10"/>
+          <p:cNvSpPr/>
+          <p:nvPr/>
+        </p:nvSpPr>
+        <p:spPr>
+          <a:xfrm>
+            <a:off x="548640" y="5669280"/>
+            <a:ext cx="2011680" cy="411480"/>
+          </a:xfrm>
+          <a:prstGeom prst="roundRect">
+            <a:avLst>
+              <a:gd name="adj" fmla="val 8000"/>
+            </a:avLst>
+          </a:prstGeom>
+          <a:solidFill>
+            <a:srgbClr val="00A0B0"/>
+          </a:solidFill>
+          <a:ln>
+            <a:noFill/>
+          </a:ln>
+        </p:spPr>
+        <p:style>
+          <a:lnRef idx="1">
+            <a:schemeClr val="accent1"/>
+          </a:lnRef>
+          <a:fillRef idx="3">
+            <a:schemeClr val="accent1"/>
+          </a:fillRef>
+          <a:effectRef idx="2">
+            <a:schemeClr val="accent1"/>
+          </a:effectRef>
+          <a:fontRef idx="minor">
+            <a:schemeClr val="lt1"/>
+          </a:fontRef>
+        </p:style>
+        <p:txBody>
+          <a:bodyPr rtlCol="0" anchor="ctr"/>
+          <a:lstStyle/>
+          <a:p>
+            <a:pPr algn="ctr"/>
+          </a:p>
+        </p:txBody>
+      </p:sp>
+      <p:sp>
+        <p:nvSpPr>
+          <p:cNvPr id="12" name="TextBox 11"/>
+          <p:cNvSpPr txBox="1"/>
+          <p:nvPr/>
+        </p:nvSpPr>
+        <p:spPr>
+          <a:xfrm>
+            <a:off x="548640" y="5669280"/>
+            <a:ext cx="2011680" cy="411480"/>
+          </a:xfrm>
+          <a:prstGeom prst="rect">
+            <a:avLst/>
+          </a:prstGeom>
+          <a:noFill/>
+        </p:spPr>
+        <p:txBody>
+          <a:bodyPr wrap="square" lIns="45720" rIns="45720" tIns="18288" bIns="18288" anchor="ctr">
+            <a:spAutoFit/>
+          </a:bodyPr>
+          <a:lstStyle/>
+          <a:p>
+            <a:pPr algn="ctr"/>
+            <a:r>
+              <a:rPr sz="1200" b="1" i="0">
                 <a:solidFill>
                   <a:srgbClr val="FFFFFF"/>
                 </a:solidFill>
                 <a:latin typeface="Calibri"/>
               </a:rPr>
-              <a:t>SECURITY.md, AI assistente sicuro, validazione del codice generato</a:t>
-            </a:r>
-          </a:p>
-        </p:txBody>
-      </p:sp>
-      <p:sp>
-        <p:nvSpPr>
-          <p:cNvPr id="7" name="TextBox 6"/>
+              <a:t>⏱  Lezione 7 · 2 ore</a:t>
+            </a:r>
+          </a:p>
+        </p:txBody>
+      </p:sp>
+      <p:sp>
+        <p:nvSpPr>
+          <p:cNvPr id="13" name="TextBox 12"/>
           <p:cNvSpPr txBox="1"/>
           <p:nvPr/>
         </p:nvSpPr>
         <p:spPr>
           <a:xfrm>
-            <a:off x="731520" y="5029200"/>
-            <a:ext cx="10058400" cy="457200"/>
+            <a:off x="548640" y="6263640"/>
+            <a:ext cx="10972800" cy="365760"/>
           </a:xfrm>
           <a:prstGeom prst="rect">
             <a:avLst/>
@@ -3316,83 +3568,13 @@
           <a:p>
             <a:pPr algn="l"/>
             <a:r>
-              <a:rPr sz="1800" b="1" i="0">
-                <a:solidFill>
-                  <a:srgbClr val="00A0B0"/>
-                </a:solidFill>
-                <a:latin typeface="Calibri"/>
-              </a:rPr>
-              <a:t>⏱  Lezione 7 · 2 ore</a:t>
-            </a:r>
-          </a:p>
-        </p:txBody>
-      </p:sp>
-      <p:sp>
-        <p:nvSpPr>
-          <p:cNvPr id="8" name="TextBox 7"/>
-          <p:cNvSpPr txBox="1"/>
-          <p:nvPr/>
-        </p:nvSpPr>
-        <p:spPr>
-          <a:xfrm>
-            <a:off x="731520" y="5943600"/>
-            <a:ext cx="10058400" cy="457200"/>
-          </a:xfrm>
-          <a:prstGeom prst="rect">
-            <a:avLst/>
-          </a:prstGeom>
-          <a:noFill/>
-        </p:spPr>
-        <p:txBody>
-          <a:bodyPr wrap="square" lIns="45720" rIns="45720" tIns="18288" bIns="18288" anchor="t">
-            <a:spAutoFit/>
-          </a:bodyPr>
-          <a:lstStyle/>
-          <a:p>
-            <a:pPr algn="l"/>
-            <a:r>
-              <a:rPr sz="1200" b="0" i="0">
-                <a:solidFill>
-                  <a:srgbClr val="FFFFFF"/>
-                </a:solidFill>
-                <a:latin typeface="Calibri"/>
-              </a:rPr>
-              <a:t>Corso IFTS STEM · Specialista nelle Tecniche di Evoluzione e Manutenzione del Software</a:t>
-            </a:r>
-          </a:p>
-        </p:txBody>
-      </p:sp>
-      <p:sp>
-        <p:nvSpPr>
-          <p:cNvPr id="9" name="TextBox 8"/>
-          <p:cNvSpPr txBox="1"/>
-          <p:nvPr/>
-        </p:nvSpPr>
-        <p:spPr>
-          <a:xfrm>
-            <a:off x="731520" y="6263640"/>
-            <a:ext cx="10058400" cy="365760"/>
-          </a:xfrm>
-          <a:prstGeom prst="rect">
-            <a:avLst/>
-          </a:prstGeom>
-          <a:noFill/>
-        </p:spPr>
-        <p:txBody>
-          <a:bodyPr wrap="square" lIns="45720" rIns="45720" tIns="18288" bIns="18288" anchor="t">
-            <a:spAutoFit/>
-          </a:bodyPr>
-          <a:lstStyle/>
-          <a:p>
-            <a:pPr algn="l"/>
-            <a:r>
-              <a:rPr sz="1100" b="0" i="1">
-                <a:solidFill>
-                  <a:srgbClr val="FFFFFF"/>
-                </a:solidFill>
-                <a:latin typeface="Calibri"/>
-              </a:rPr>
-              <a:t>Ing. Alessandro Manneschi · Anno formativo 2024/2025</a:t>
+              <a:rPr sz="1000" b="0" i="0">
+                <a:solidFill>
+                  <a:srgbClr val="CBD0D8"/>
+                </a:solidFill>
+                <a:latin typeface="Calibri"/>
+              </a:rPr>
+              <a:t>Corso IFTS STEM · Ing. Alessandro Manneschi · 2024/2025</a:t>
             </a:r>
           </a:p>
         </p:txBody>
@@ -3488,7 +3670,7 @@
                 </a:solidFill>
                 <a:latin typeface="Calibri"/>
               </a:rPr>
-              <a:t>Il problema</a:t>
+              <a:t>🔍  Workflow di validazione (4 step)</a:t>
             </a:r>
           </a:p>
         </p:txBody>
@@ -3501,7 +3683,7 @@
         </p:nvSpPr>
         <p:spPr>
           <a:xfrm>
-            <a:off x="640080" y="1005840"/>
+            <a:off x="640080" y="1097280"/>
             <a:ext cx="10972800" cy="5029200"/>
           </a:xfrm>
           <a:prstGeom prst="rect">
@@ -3519,6 +3701,9 @@
               <a:lnSpc>
                 <a:spcPct val="150000"/>
               </a:lnSpc>
+              <a:spcAft>
+                <a:spcPts val="400"/>
+              </a:spcAft>
             </a:pPr>
             <a:r>
               <a:rPr sz="2000" b="1">
@@ -3536,7 +3721,7 @@
                 </a:solidFill>
                 <a:latin typeface="Calibri"/>
               </a:rPr>
-              <a:t>Studi GitHub (2022), Stanford (2023):</a:t>
+              <a:t>1. LEGGI E CAPISCI (30 sec)</a:t>
             </a:r>
           </a:p>
           <a:p>
@@ -3544,6 +3729,9 @@
               <a:lnSpc>
                 <a:spcPct val="150000"/>
               </a:lnSpc>
+              <a:spcAft>
+                <a:spcPts val="400"/>
+              </a:spcAft>
             </a:pPr>
             <a:r>
               <a:rPr sz="2000" b="1">
@@ -3561,7 +3749,7 @@
                 </a:solidFill>
                 <a:latin typeface="Calibri"/>
               </a:rPr>
-              <a:t/>
+              <a:t>   Non sapresti spiegarlo? Non accettare.</a:t>
             </a:r>
           </a:p>
           <a:p>
@@ -3569,6 +3757,9 @@
               <a:lnSpc>
                 <a:spcPct val="150000"/>
               </a:lnSpc>
+              <a:spcAft>
+                <a:spcPts val="400"/>
+              </a:spcAft>
             </a:pPr>
             <a:r>
               <a:rPr sz="2000" b="1">
@@ -3586,7 +3777,7 @@
                 </a:solidFill>
                 <a:latin typeface="Calibri"/>
               </a:rPr>
-              <a:t>~40% dei suggerimenti Copilot in scenari di sicurezza</a:t>
+              <a:t/>
             </a:r>
           </a:p>
           <a:p>
@@ -3594,6 +3785,9 @@
               <a:lnSpc>
                 <a:spcPct val="150000"/>
               </a:lnSpc>
+              <a:spcAft>
+                <a:spcPts val="400"/>
+              </a:spcAft>
             </a:pPr>
             <a:r>
               <a:rPr sz="2000" b="1">
@@ -3611,7 +3805,7 @@
                 </a:solidFill>
                 <a:latin typeface="Calibri"/>
               </a:rPr>
-              <a:t>contengono vulnerabilità</a:t>
+              <a:t>2. SCANSIONA PATTERN (1 min)</a:t>
             </a:r>
           </a:p>
           <a:p>
@@ -3619,6 +3813,9 @@
               <a:lnSpc>
                 <a:spcPct val="150000"/>
               </a:lnSpc>
+              <a:spcAft>
+                <a:spcPts val="400"/>
+              </a:spcAft>
             </a:pPr>
             <a:r>
               <a:rPr sz="2000" b="1">
@@ -3636,7 +3833,7 @@
                 </a:solidFill>
                 <a:latin typeface="Calibri"/>
               </a:rPr>
-              <a:t/>
+              <a:t>   f-string in SQL? eval? hash deboli? cookie?</a:t>
             </a:r>
           </a:p>
           <a:p>
@@ -3644,6 +3841,9 @@
               <a:lnSpc>
                 <a:spcPct val="150000"/>
               </a:lnSpc>
+              <a:spcAft>
+                <a:spcPts val="400"/>
+              </a:spcAft>
             </a:pPr>
             <a:r>
               <a:rPr sz="2000" b="1">
@@ -3661,7 +3861,7 @@
                 </a:solidFill>
                 <a:latin typeface="Calibri"/>
               </a:rPr>
-              <a:t>Gli sviluppatori con AI scrivono codice meno sicuro,</a:t>
+              <a:t/>
             </a:r>
           </a:p>
           <a:p>
@@ -3669,6 +3869,9 @@
               <a:lnSpc>
                 <a:spcPct val="150000"/>
               </a:lnSpc>
+              <a:spcAft>
+                <a:spcPts val="400"/>
+              </a:spcAft>
             </a:pPr>
             <a:r>
               <a:rPr sz="2000" b="1">
@@ -3686,7 +3889,7 @@
                 </a:solidFill>
                 <a:latin typeface="Calibri"/>
               </a:rPr>
-              <a:t>ma sono PIÙ CONVINTI che sia sicuro (bias cognitivo)</a:t>
+              <a:t>3. VERIFICA CONTESTO (1-2 min)</a:t>
             </a:r>
           </a:p>
           <a:p>
@@ -3694,6 +3897,9 @@
               <a:lnSpc>
                 <a:spcPct val="150000"/>
               </a:lnSpc>
+              <a:spcAft>
+                <a:spcPts val="400"/>
+              </a:spcAft>
             </a:pPr>
             <a:r>
               <a:rPr sz="2000" b="1">
@@ -3711,7 +3917,7 @@
                 </a:solidFill>
                 <a:latin typeface="Calibri"/>
               </a:rPr>
-              <a:t/>
+              <a:t>   Coerente con architettura, versioni, convenzioni?</a:t>
             </a:r>
           </a:p>
           <a:p>
@@ -3719,6 +3925,9 @@
               <a:lnSpc>
                 <a:spcPct val="150000"/>
               </a:lnSpc>
+              <a:spcAft>
+                <a:spcPts val="400"/>
+              </a:spcAft>
             </a:pPr>
             <a:r>
               <a:rPr sz="2000" b="1">
@@ -3736,7 +3945,63 @@
                 </a:solidFill>
                 <a:latin typeface="Calibri"/>
               </a:rPr>
-              <a:t>Tradotto: l'IA è uno strumento potente, non un revisore di sicurezza</a:t>
+              <a:t/>
+            </a:r>
+          </a:p>
+          <a:p>
+            <a:pPr>
+              <a:lnSpc>
+                <a:spcPct val="150000"/>
+              </a:lnSpc>
+              <a:spcAft>
+                <a:spcPts val="400"/>
+              </a:spcAft>
+            </a:pPr>
+            <a:r>
+              <a:rPr sz="2000" b="1">
+                <a:solidFill>
+                  <a:srgbClr val="00A0B0"/>
+                </a:solidFill>
+                <a:latin typeface="Calibri"/>
+              </a:rPr>
+              <a:t>▸  </a:t>
+            </a:r>
+            <a:r>
+              <a:rPr sz="2000">
+                <a:solidFill>
+                  <a:srgbClr val="1A1A2E"/>
+                </a:solidFill>
+                <a:latin typeface="Calibri"/>
+              </a:rPr>
+              <a:t>4. TEST + LINTER (5-15 min)</a:t>
+            </a:r>
+          </a:p>
+          <a:p>
+            <a:pPr>
+              <a:lnSpc>
+                <a:spcPct val="150000"/>
+              </a:lnSpc>
+              <a:spcAft>
+                <a:spcPts val="400"/>
+              </a:spcAft>
+            </a:pPr>
+            <a:r>
+              <a:rPr sz="2000" b="1">
+                <a:solidFill>
+                  <a:srgbClr val="00A0B0"/>
+                </a:solidFill>
+                <a:latin typeface="Calibri"/>
+              </a:rPr>
+              <a:t>▸  </a:t>
+            </a:r>
+            <a:r>
+              <a:rPr sz="2000">
+                <a:solidFill>
+                  <a:srgbClr val="1A1A2E"/>
+                </a:solidFill>
+                <a:latin typeface="Calibri"/>
+              </a:rPr>
+              <a:t>   pytest + bandit/semgrep + pip-audit</a:t>
             </a:r>
           </a:p>
         </p:txBody>
@@ -3785,7 +4050,7 @@
         <p:spPr>
           <a:xfrm>
             <a:off x="457200" y="6473952"/>
-            <a:ext cx="7315200" cy="320040"/>
+            <a:ext cx="7315200" cy="292608"/>
           </a:xfrm>
           <a:prstGeom prst="rect">
             <a:avLst/>
@@ -3806,7 +4071,7 @@
                 </a:solidFill>
                 <a:latin typeface="Calibri"/>
               </a:rPr>
-              <a:t>Secure Coding · Corso IFTS STEM · A. Manneschi</a:t>
+              <a:t>Secure Coding · Corso IFTS STEM · A. Manneschi · 2024/2025</a:t>
             </a:r>
           </a:p>
         </p:txBody>
@@ -3820,7 +4085,7 @@
         <p:spPr>
           <a:xfrm>
             <a:off x="10515600" y="6473952"/>
-            <a:ext cx="1188720" cy="320040"/>
+            <a:ext cx="1188720" cy="292608"/>
           </a:xfrm>
           <a:prstGeom prst="rect">
             <a:avLst/>
@@ -3937,7 +4202,7 @@
                 </a:solidFill>
                 <a:latin typeface="Calibri"/>
               </a:rPr>
-              <a:t>I 7 errori tipici del codice IA</a:t>
+              <a:t>🛑  Quando NON usare l'IA</a:t>
             </a:r>
           </a:p>
         </p:txBody>
@@ -3950,7 +4215,7 @@
         </p:nvSpPr>
         <p:spPr>
           <a:xfrm>
-            <a:off x="640080" y="1005840"/>
+            <a:off x="640080" y="1097280"/>
             <a:ext cx="10972800" cy="5029200"/>
           </a:xfrm>
           <a:prstGeom prst="rect">
@@ -3968,6 +4233,9 @@
               <a:lnSpc>
                 <a:spcPct val="150000"/>
               </a:lnSpc>
+              <a:spcAft>
+                <a:spcPts val="400"/>
+              </a:spcAft>
             </a:pPr>
             <a:r>
               <a:rPr sz="2000" b="1">
@@ -3985,7 +4253,7 @@
                 </a:solidFill>
                 <a:latin typeface="Calibri"/>
               </a:rPr>
-              <a:t>1. SQL Injection con f-string</a:t>
+              <a:t>Crittografia 'fatta in casa' (usa librerie standard)</a:t>
             </a:r>
           </a:p>
           <a:p>
@@ -3993,6 +4261,9 @@
               <a:lnSpc>
                 <a:spcPct val="150000"/>
               </a:lnSpc>
+              <a:spcAft>
+                <a:spcPts val="400"/>
+              </a:spcAft>
             </a:pPr>
             <a:r>
               <a:rPr sz="2000" b="1">
@@ -4010,7 +4281,7 @@
                 </a:solidFill>
                 <a:latin typeface="Calibri"/>
               </a:rPr>
-              <a:t>2. Hash deboli (SHA-256) per password</a:t>
+              <a:t>Codice di sicurezza critico (authn/authz)</a:t>
             </a:r>
           </a:p>
           <a:p>
@@ -4018,6 +4289,9 @@
               <a:lnSpc>
                 <a:spcPct val="150000"/>
               </a:lnSpc>
+              <a:spcAft>
+                <a:spcPts val="400"/>
+              </a:spcAft>
             </a:pPr>
             <a:r>
               <a:rPr sz="2000" b="1">
@@ -4035,7 +4309,7 @@
                 </a:solidFill>
                 <a:latin typeface="Calibri"/>
               </a:rPr>
-              <a:t>3. Manca authorization check</a:t>
+              <a:t>Compliance e legale (privacy policy, validation IBAN/CF)</a:t>
             </a:r>
           </a:p>
           <a:p>
@@ -4043,6 +4317,9 @@
               <a:lnSpc>
                 <a:spcPct val="150000"/>
               </a:lnSpc>
+              <a:spcAft>
+                <a:spcPts val="400"/>
+              </a:spcAft>
             </a:pPr>
             <a:r>
               <a:rPr sz="2000" b="1">
@@ -4060,7 +4337,7 @@
                 </a:solidFill>
                 <a:latin typeface="Calibri"/>
               </a:rPr>
-              <a:t>4. Template senza escape</a:t>
+              <a:t>Quando NON sai validare (impara prima)</a:t>
             </a:r>
           </a:p>
           <a:p>
@@ -4068,6 +4345,9 @@
               <a:lnSpc>
                 <a:spcPct val="150000"/>
               </a:lnSpc>
+              <a:spcAft>
+                <a:spcPts val="400"/>
+              </a:spcAft>
             </a:pPr>
             <a:r>
               <a:rPr sz="2000" b="1">
@@ -4085,7 +4365,7 @@
                 </a:solidFill>
                 <a:latin typeface="Calibri"/>
               </a:rPr>
-              <a:t>5. CORS troppo permissivo ('origins': '*')</a:t>
+              <a:t/>
             </a:r>
           </a:p>
           <a:p>
@@ -4093,6 +4373,9 @@
               <a:lnSpc>
                 <a:spcPct val="150000"/>
               </a:lnSpc>
+              <a:spcAft>
+                <a:spcPts val="400"/>
+              </a:spcAft>
             </a:pPr>
             <a:r>
               <a:rPr sz="2000" b="1">
@@ -4110,7 +4393,7 @@
                 </a:solidFill>
                 <a:latin typeface="Calibri"/>
               </a:rPr>
-              <a:t>6. Eccezioni catch-all che falliscono in modo aperto</a:t>
+              <a:t>Caso reale: Samsung 2023</a:t>
             </a:r>
           </a:p>
           <a:p>
@@ -4118,6 +4401,9 @@
               <a:lnSpc>
                 <a:spcPct val="150000"/>
               </a:lnSpc>
+              <a:spcAft>
+                <a:spcPts val="400"/>
+              </a:spcAft>
             </a:pPr>
             <a:r>
               <a:rPr sz="2000" b="1">
@@ -4135,7 +4421,7 @@
                 </a:solidFill>
                 <a:latin typeface="Calibri"/>
               </a:rPr>
-              <a:t>7. Segreti hardcoded ('change-me')</a:t>
+              <a:t>Dipendenti incollarono codice proprietario in ChatGPT</a:t>
             </a:r>
           </a:p>
           <a:p>
@@ -4143,6 +4429,9 @@
               <a:lnSpc>
                 <a:spcPct val="150000"/>
               </a:lnSpc>
+              <a:spcAft>
+                <a:spcPts val="400"/>
+              </a:spcAft>
             </a:pPr>
             <a:r>
               <a:rPr sz="2000" b="1">
@@ -4160,7 +4449,7 @@
                 </a:solidFill>
                 <a:latin typeface="Calibri"/>
               </a:rPr>
-              <a:t/>
+              <a:t>OpenAI lo usò per training → codice leakato indirettamente</a:t>
             </a:r>
           </a:p>
           <a:p>
@@ -4168,6 +4457,9 @@
               <a:lnSpc>
                 <a:spcPct val="150000"/>
               </a:lnSpc>
+              <a:spcAft>
+                <a:spcPts val="400"/>
+              </a:spcAft>
             </a:pPr>
             <a:r>
               <a:rPr sz="2000" b="1">
@@ -4185,7 +4477,7 @@
                 </a:solidFill>
                 <a:latin typeface="Calibri"/>
               </a:rPr>
-              <a:t>BONUS: librerie inventate (hallucination)</a:t>
+              <a:t>Samsung dovette vietare ChatGPT internamente</a:t>
             </a:r>
           </a:p>
         </p:txBody>
@@ -4234,7 +4526,7 @@
         <p:spPr>
           <a:xfrm>
             <a:off x="457200" y="6473952"/>
-            <a:ext cx="7315200" cy="320040"/>
+            <a:ext cx="7315200" cy="292608"/>
           </a:xfrm>
           <a:prstGeom prst="rect">
             <a:avLst/>
@@ -4255,7 +4547,7 @@
                 </a:solidFill>
                 <a:latin typeface="Calibri"/>
               </a:rPr>
-              <a:t>Secure Coding · Corso IFTS STEM · A. Manneschi</a:t>
+              <a:t>Secure Coding · Corso IFTS STEM · A. Manneschi · 2024/2025</a:t>
             </a:r>
           </a:p>
         </p:txBody>
@@ -4269,7 +4561,7 @@
         <p:spPr>
           <a:xfrm>
             <a:off x="10515600" y="6473952"/>
-            <a:ext cx="1188720" cy="320040"/>
+            <a:ext cx="1188720" cy="292608"/>
           </a:xfrm>
           <a:prstGeom prst="rect">
             <a:avLst/>
@@ -4386,21 +4678,64 @@
                 </a:solidFill>
                 <a:latin typeface="Calibri"/>
               </a:rPr>
-              <a:t>Workflow di validazione in 4 step</a:t>
-            </a:r>
-          </a:p>
-        </p:txBody>
-      </p:sp>
-      <p:sp>
-        <p:nvSpPr>
-          <p:cNvPr id="4" name="TextBox 3"/>
+              <a:t>📌  Cosa portare a casa</a:t>
+            </a:r>
+          </a:p>
+        </p:txBody>
+      </p:sp>
+      <p:sp>
+        <p:nvSpPr>
+          <p:cNvPr id="4" name="Oval 3"/>
+          <p:cNvSpPr/>
+          <p:nvPr/>
+        </p:nvSpPr>
+        <p:spPr>
+          <a:xfrm>
+            <a:off x="914400" y="1440180"/>
+            <a:ext cx="777240" cy="777240"/>
+          </a:xfrm>
+          <a:prstGeom prst="ellipse">
+            <a:avLst/>
+          </a:prstGeom>
+          <a:solidFill>
+            <a:srgbClr val="00A0B0"/>
+          </a:solidFill>
+          <a:ln>
+            <a:noFill/>
+          </a:ln>
+        </p:spPr>
+        <p:style>
+          <a:lnRef idx="1">
+            <a:schemeClr val="accent1"/>
+          </a:lnRef>
+          <a:fillRef idx="3">
+            <a:schemeClr val="accent1"/>
+          </a:fillRef>
+          <a:effectRef idx="2">
+            <a:schemeClr val="accent1"/>
+          </a:effectRef>
+          <a:fontRef idx="minor">
+            <a:schemeClr val="lt1"/>
+          </a:fontRef>
+        </p:style>
+        <p:txBody>
+          <a:bodyPr rtlCol="0" anchor="ctr"/>
+          <a:lstStyle/>
+          <a:p>
+            <a:pPr algn="ctr"/>
+          </a:p>
+        </p:txBody>
+      </p:sp>
+      <p:sp>
+        <p:nvSpPr>
+          <p:cNvPr id="5" name="TextBox 4"/>
           <p:cNvSpPr txBox="1"/>
           <p:nvPr/>
         </p:nvSpPr>
         <p:spPr>
           <a:xfrm>
-            <a:off x="640080" y="1005840"/>
-            <a:ext cx="10972800" cy="5029200"/>
+            <a:off x="914400" y="1440180"/>
+            <a:ext cx="777240" cy="777240"/>
           </a:xfrm>
           <a:prstGeom prst="rect">
             <a:avLst/>
@@ -4408,290 +4743,749 @@
           <a:noFill/>
         </p:spPr>
         <p:txBody>
-          <a:bodyPr wrap="square">
+          <a:bodyPr wrap="square" lIns="45720" rIns="45720" tIns="18288" bIns="18288" anchor="ctr">
             <a:spAutoFit/>
           </a:bodyPr>
           <a:lstStyle/>
           <a:p>
-            <a:pPr>
-              <a:lnSpc>
-                <a:spcPct val="150000"/>
-              </a:lnSpc>
-            </a:pPr>
-            <a:r>
-              <a:rPr sz="2000" b="1">
-                <a:solidFill>
-                  <a:srgbClr val="00A0B0"/>
-                </a:solidFill>
-                <a:latin typeface="Calibri"/>
-              </a:rPr>
-              <a:t>▸  </a:t>
-            </a:r>
-            <a:r>
-              <a:rPr sz="2000">
+            <a:pPr algn="ctr"/>
+            <a:r>
+              <a:rPr sz="2800" b="1" i="0">
+                <a:solidFill>
+                  <a:srgbClr val="FFFFFF"/>
+                </a:solidFill>
+                <a:latin typeface="Calibri"/>
+              </a:rPr>
+              <a:t>1</a:t>
+            </a:r>
+          </a:p>
+        </p:txBody>
+      </p:sp>
+      <p:sp>
+        <p:nvSpPr>
+          <p:cNvPr id="6" name="Rounded Rectangle 5"/>
+          <p:cNvSpPr/>
+          <p:nvPr/>
+        </p:nvSpPr>
+        <p:spPr>
+          <a:xfrm>
+            <a:off x="2011680" y="1440180"/>
+            <a:ext cx="9144000" cy="777240"/>
+          </a:xfrm>
+          <a:prstGeom prst="roundRect">
+            <a:avLst>
+              <a:gd name="adj" fmla="val 8000"/>
+            </a:avLst>
+          </a:prstGeom>
+          <a:solidFill>
+            <a:srgbClr val="FBFBFD"/>
+          </a:solidFill>
+          <a:ln w="19050">
+            <a:solidFill>
+              <a:srgbClr val="00A0B0"/>
+            </a:solidFill>
+          </a:ln>
+        </p:spPr>
+        <p:style>
+          <a:lnRef idx="1">
+            <a:schemeClr val="accent1"/>
+          </a:lnRef>
+          <a:fillRef idx="3">
+            <a:schemeClr val="accent1"/>
+          </a:fillRef>
+          <a:effectRef idx="2">
+            <a:schemeClr val="accent1"/>
+          </a:effectRef>
+          <a:fontRef idx="minor">
+            <a:schemeClr val="lt1"/>
+          </a:fontRef>
+        </p:style>
+        <p:txBody>
+          <a:bodyPr rtlCol="0" anchor="ctr"/>
+          <a:lstStyle/>
+          <a:p>
+            <a:pPr algn="ctr"/>
+          </a:p>
+        </p:txBody>
+      </p:sp>
+      <p:sp>
+        <p:nvSpPr>
+          <p:cNvPr id="7" name="TextBox 6"/>
+          <p:cNvSpPr txBox="1"/>
+          <p:nvPr/>
+        </p:nvSpPr>
+        <p:spPr>
+          <a:xfrm>
+            <a:off x="2286000" y="1440180"/>
+            <a:ext cx="8686800" cy="777240"/>
+          </a:xfrm>
+          <a:prstGeom prst="rect">
+            <a:avLst/>
+          </a:prstGeom>
+          <a:noFill/>
+        </p:spPr>
+        <p:txBody>
+          <a:bodyPr wrap="square" lIns="45720" rIns="45720" tIns="18288" bIns="18288" anchor="ctr">
+            <a:spAutoFit/>
+          </a:bodyPr>
+          <a:lstStyle/>
+          <a:p>
+            <a:pPr algn="l"/>
+            <a:r>
+              <a:rPr sz="1800" b="0" i="0">
                 <a:solidFill>
                   <a:srgbClr val="1A1A2E"/>
                 </a:solidFill>
                 <a:latin typeface="Calibri"/>
               </a:rPr>
-              <a:t>1. LEGGI E CAPISCI (30 sec)</a:t>
-            </a:r>
-          </a:p>
-          <a:p>
-            <a:pPr>
-              <a:lnSpc>
-                <a:spcPct val="150000"/>
-              </a:lnSpc>
-            </a:pPr>
-            <a:r>
-              <a:rPr sz="2000" b="1">
-                <a:solidFill>
-                  <a:srgbClr val="00A0B0"/>
-                </a:solidFill>
-                <a:latin typeface="Calibri"/>
-              </a:rPr>
-              <a:t>▸  </a:t>
-            </a:r>
-            <a:r>
-              <a:rPr sz="2000">
+              <a:t>Documentare la sicurezza è un REQUISITO legale e operativo</a:t>
+            </a:r>
+          </a:p>
+        </p:txBody>
+      </p:sp>
+      <p:sp>
+        <p:nvSpPr>
+          <p:cNvPr id="8" name="Oval 7"/>
+          <p:cNvSpPr/>
+          <p:nvPr/>
+        </p:nvSpPr>
+        <p:spPr>
+          <a:xfrm>
+            <a:off x="914400" y="2354580"/>
+            <a:ext cx="777240" cy="777240"/>
+          </a:xfrm>
+          <a:prstGeom prst="ellipse">
+            <a:avLst/>
+          </a:prstGeom>
+          <a:solidFill>
+            <a:srgbClr val="00A0B0"/>
+          </a:solidFill>
+          <a:ln>
+            <a:noFill/>
+          </a:ln>
+        </p:spPr>
+        <p:style>
+          <a:lnRef idx="1">
+            <a:schemeClr val="accent1"/>
+          </a:lnRef>
+          <a:fillRef idx="3">
+            <a:schemeClr val="accent1"/>
+          </a:fillRef>
+          <a:effectRef idx="2">
+            <a:schemeClr val="accent1"/>
+          </a:effectRef>
+          <a:fontRef idx="minor">
+            <a:schemeClr val="lt1"/>
+          </a:fontRef>
+        </p:style>
+        <p:txBody>
+          <a:bodyPr rtlCol="0" anchor="ctr"/>
+          <a:lstStyle/>
+          <a:p>
+            <a:pPr algn="ctr"/>
+          </a:p>
+        </p:txBody>
+      </p:sp>
+      <p:sp>
+        <p:nvSpPr>
+          <p:cNvPr id="9" name="TextBox 8"/>
+          <p:cNvSpPr txBox="1"/>
+          <p:nvPr/>
+        </p:nvSpPr>
+        <p:spPr>
+          <a:xfrm>
+            <a:off x="914400" y="2354580"/>
+            <a:ext cx="777240" cy="777240"/>
+          </a:xfrm>
+          <a:prstGeom prst="rect">
+            <a:avLst/>
+          </a:prstGeom>
+          <a:noFill/>
+        </p:spPr>
+        <p:txBody>
+          <a:bodyPr wrap="square" lIns="45720" rIns="45720" tIns="18288" bIns="18288" anchor="ctr">
+            <a:spAutoFit/>
+          </a:bodyPr>
+          <a:lstStyle/>
+          <a:p>
+            <a:pPr algn="ctr"/>
+            <a:r>
+              <a:rPr sz="2800" b="1" i="0">
+                <a:solidFill>
+                  <a:srgbClr val="FFFFFF"/>
+                </a:solidFill>
+                <a:latin typeface="Calibri"/>
+              </a:rPr>
+              <a:t>2</a:t>
+            </a:r>
+          </a:p>
+        </p:txBody>
+      </p:sp>
+      <p:sp>
+        <p:nvSpPr>
+          <p:cNvPr id="10" name="Rounded Rectangle 9"/>
+          <p:cNvSpPr/>
+          <p:nvPr/>
+        </p:nvSpPr>
+        <p:spPr>
+          <a:xfrm>
+            <a:off x="2011680" y="2354580"/>
+            <a:ext cx="9144000" cy="777240"/>
+          </a:xfrm>
+          <a:prstGeom prst="roundRect">
+            <a:avLst>
+              <a:gd name="adj" fmla="val 8000"/>
+            </a:avLst>
+          </a:prstGeom>
+          <a:solidFill>
+            <a:srgbClr val="FBFBFD"/>
+          </a:solidFill>
+          <a:ln w="19050">
+            <a:solidFill>
+              <a:srgbClr val="00A0B0"/>
+            </a:solidFill>
+          </a:ln>
+        </p:spPr>
+        <p:style>
+          <a:lnRef idx="1">
+            <a:schemeClr val="accent1"/>
+          </a:lnRef>
+          <a:fillRef idx="3">
+            <a:schemeClr val="accent1"/>
+          </a:fillRef>
+          <a:effectRef idx="2">
+            <a:schemeClr val="accent1"/>
+          </a:effectRef>
+          <a:fontRef idx="minor">
+            <a:schemeClr val="lt1"/>
+          </a:fontRef>
+        </p:style>
+        <p:txBody>
+          <a:bodyPr rtlCol="0" anchor="ctr"/>
+          <a:lstStyle/>
+          <a:p>
+            <a:pPr algn="ctr"/>
+          </a:p>
+        </p:txBody>
+      </p:sp>
+      <p:sp>
+        <p:nvSpPr>
+          <p:cNvPr id="11" name="TextBox 10"/>
+          <p:cNvSpPr txBox="1"/>
+          <p:nvPr/>
+        </p:nvSpPr>
+        <p:spPr>
+          <a:xfrm>
+            <a:off x="2286000" y="2354580"/>
+            <a:ext cx="8686800" cy="777240"/>
+          </a:xfrm>
+          <a:prstGeom prst="rect">
+            <a:avLst/>
+          </a:prstGeom>
+          <a:noFill/>
+        </p:spPr>
+        <p:txBody>
+          <a:bodyPr wrap="square" lIns="45720" rIns="45720" tIns="18288" bIns="18288" anchor="ctr">
+            <a:spAutoFit/>
+          </a:bodyPr>
+          <a:lstStyle/>
+          <a:p>
+            <a:pPr algn="l"/>
+            <a:r>
+              <a:rPr sz="1800" b="0" i="0">
                 <a:solidFill>
                   <a:srgbClr val="1A1A2E"/>
                 </a:solidFill>
                 <a:latin typeface="Calibri"/>
               </a:rPr>
-              <a:t>   Se non sapresti spiegarlo a un collega: non accettare</a:t>
-            </a:r>
-          </a:p>
-          <a:p>
-            <a:pPr>
-              <a:lnSpc>
-                <a:spcPct val="150000"/>
-              </a:lnSpc>
-            </a:pPr>
-            <a:r>
-              <a:rPr sz="2000" b="1">
-                <a:solidFill>
-                  <a:srgbClr val="00A0B0"/>
-                </a:solidFill>
-                <a:latin typeface="Calibri"/>
-              </a:rPr>
-              <a:t>▸  </a:t>
-            </a:r>
-            <a:r>
-              <a:rPr sz="2000">
+              <a:t>SECURITY.md versionato con il codice</a:t>
+            </a:r>
+          </a:p>
+        </p:txBody>
+      </p:sp>
+      <p:sp>
+        <p:nvSpPr>
+          <p:cNvPr id="12" name="Oval 11"/>
+          <p:cNvSpPr/>
+          <p:nvPr/>
+        </p:nvSpPr>
+        <p:spPr>
+          <a:xfrm>
+            <a:off x="914400" y="3268980"/>
+            <a:ext cx="777240" cy="777240"/>
+          </a:xfrm>
+          <a:prstGeom prst="ellipse">
+            <a:avLst/>
+          </a:prstGeom>
+          <a:solidFill>
+            <a:srgbClr val="00A0B0"/>
+          </a:solidFill>
+          <a:ln>
+            <a:noFill/>
+          </a:ln>
+        </p:spPr>
+        <p:style>
+          <a:lnRef idx="1">
+            <a:schemeClr val="accent1"/>
+          </a:lnRef>
+          <a:fillRef idx="3">
+            <a:schemeClr val="accent1"/>
+          </a:fillRef>
+          <a:effectRef idx="2">
+            <a:schemeClr val="accent1"/>
+          </a:effectRef>
+          <a:fontRef idx="minor">
+            <a:schemeClr val="lt1"/>
+          </a:fontRef>
+        </p:style>
+        <p:txBody>
+          <a:bodyPr rtlCol="0" anchor="ctr"/>
+          <a:lstStyle/>
+          <a:p>
+            <a:pPr algn="ctr"/>
+          </a:p>
+        </p:txBody>
+      </p:sp>
+      <p:sp>
+        <p:nvSpPr>
+          <p:cNvPr id="13" name="TextBox 12"/>
+          <p:cNvSpPr txBox="1"/>
+          <p:nvPr/>
+        </p:nvSpPr>
+        <p:spPr>
+          <a:xfrm>
+            <a:off x="914400" y="3268980"/>
+            <a:ext cx="777240" cy="777240"/>
+          </a:xfrm>
+          <a:prstGeom prst="rect">
+            <a:avLst/>
+          </a:prstGeom>
+          <a:noFill/>
+        </p:spPr>
+        <p:txBody>
+          <a:bodyPr wrap="square" lIns="45720" rIns="45720" tIns="18288" bIns="18288" anchor="ctr">
+            <a:spAutoFit/>
+          </a:bodyPr>
+          <a:lstStyle/>
+          <a:p>
+            <a:pPr algn="ctr"/>
+            <a:r>
+              <a:rPr sz="2800" b="1" i="0">
+                <a:solidFill>
+                  <a:srgbClr val="FFFFFF"/>
+                </a:solidFill>
+                <a:latin typeface="Calibri"/>
+              </a:rPr>
+              <a:t>3</a:t>
+            </a:r>
+          </a:p>
+        </p:txBody>
+      </p:sp>
+      <p:sp>
+        <p:nvSpPr>
+          <p:cNvPr id="14" name="Rounded Rectangle 13"/>
+          <p:cNvSpPr/>
+          <p:nvPr/>
+        </p:nvSpPr>
+        <p:spPr>
+          <a:xfrm>
+            <a:off x="2011680" y="3268980"/>
+            <a:ext cx="9144000" cy="777240"/>
+          </a:xfrm>
+          <a:prstGeom prst="roundRect">
+            <a:avLst>
+              <a:gd name="adj" fmla="val 8000"/>
+            </a:avLst>
+          </a:prstGeom>
+          <a:solidFill>
+            <a:srgbClr val="FBFBFD"/>
+          </a:solidFill>
+          <a:ln w="19050">
+            <a:solidFill>
+              <a:srgbClr val="00A0B0"/>
+            </a:solidFill>
+          </a:ln>
+        </p:spPr>
+        <p:style>
+          <a:lnRef idx="1">
+            <a:schemeClr val="accent1"/>
+          </a:lnRef>
+          <a:fillRef idx="3">
+            <a:schemeClr val="accent1"/>
+          </a:fillRef>
+          <a:effectRef idx="2">
+            <a:schemeClr val="accent1"/>
+          </a:effectRef>
+          <a:fontRef idx="minor">
+            <a:schemeClr val="lt1"/>
+          </a:fontRef>
+        </p:style>
+        <p:txBody>
+          <a:bodyPr rtlCol="0" anchor="ctr"/>
+          <a:lstStyle/>
+          <a:p>
+            <a:pPr algn="ctr"/>
+          </a:p>
+        </p:txBody>
+      </p:sp>
+      <p:sp>
+        <p:nvSpPr>
+          <p:cNvPr id="15" name="TextBox 14"/>
+          <p:cNvSpPr txBox="1"/>
+          <p:nvPr/>
+        </p:nvSpPr>
+        <p:spPr>
+          <a:xfrm>
+            <a:off x="2286000" y="3268980"/>
+            <a:ext cx="8686800" cy="777240"/>
+          </a:xfrm>
+          <a:prstGeom prst="rect">
+            <a:avLst/>
+          </a:prstGeom>
+          <a:noFill/>
+        </p:spPr>
+        <p:txBody>
+          <a:bodyPr wrap="square" lIns="45720" rIns="45720" tIns="18288" bIns="18288" anchor="ctr">
+            <a:spAutoFit/>
+          </a:bodyPr>
+          <a:lstStyle/>
+          <a:p>
+            <a:pPr algn="l"/>
+            <a:r>
+              <a:rPr sz="1800" b="0" i="0">
                 <a:solidFill>
                   <a:srgbClr val="1A1A2E"/>
                 </a:solidFill>
                 <a:latin typeface="Calibri"/>
               </a:rPr>
-              <a:t/>
-            </a:r>
-          </a:p>
-          <a:p>
-            <a:pPr>
-              <a:lnSpc>
-                <a:spcPct val="150000"/>
-              </a:lnSpc>
-            </a:pPr>
-            <a:r>
-              <a:rPr sz="2000" b="1">
-                <a:solidFill>
-                  <a:srgbClr val="00A0B0"/>
-                </a:solidFill>
-                <a:latin typeface="Calibri"/>
-              </a:rPr>
-              <a:t>▸  </a:t>
-            </a:r>
-            <a:r>
-              <a:rPr sz="2000">
+              <a:t>L'IA non sa di sicurezza: validare ogni suggerimento</a:t>
+            </a:r>
+          </a:p>
+        </p:txBody>
+      </p:sp>
+      <p:sp>
+        <p:nvSpPr>
+          <p:cNvPr id="16" name="Oval 15"/>
+          <p:cNvSpPr/>
+          <p:nvPr/>
+        </p:nvSpPr>
+        <p:spPr>
+          <a:xfrm>
+            <a:off x="914400" y="4183380"/>
+            <a:ext cx="777240" cy="777240"/>
+          </a:xfrm>
+          <a:prstGeom prst="ellipse">
+            <a:avLst/>
+          </a:prstGeom>
+          <a:solidFill>
+            <a:srgbClr val="00A0B0"/>
+          </a:solidFill>
+          <a:ln>
+            <a:noFill/>
+          </a:ln>
+        </p:spPr>
+        <p:style>
+          <a:lnRef idx="1">
+            <a:schemeClr val="accent1"/>
+          </a:lnRef>
+          <a:fillRef idx="3">
+            <a:schemeClr val="accent1"/>
+          </a:fillRef>
+          <a:effectRef idx="2">
+            <a:schemeClr val="accent1"/>
+          </a:effectRef>
+          <a:fontRef idx="minor">
+            <a:schemeClr val="lt1"/>
+          </a:fontRef>
+        </p:style>
+        <p:txBody>
+          <a:bodyPr rtlCol="0" anchor="ctr"/>
+          <a:lstStyle/>
+          <a:p>
+            <a:pPr algn="ctr"/>
+          </a:p>
+        </p:txBody>
+      </p:sp>
+      <p:sp>
+        <p:nvSpPr>
+          <p:cNvPr id="17" name="TextBox 16"/>
+          <p:cNvSpPr txBox="1"/>
+          <p:nvPr/>
+        </p:nvSpPr>
+        <p:spPr>
+          <a:xfrm>
+            <a:off x="914400" y="4183380"/>
+            <a:ext cx="777240" cy="777240"/>
+          </a:xfrm>
+          <a:prstGeom prst="rect">
+            <a:avLst/>
+          </a:prstGeom>
+          <a:noFill/>
+        </p:spPr>
+        <p:txBody>
+          <a:bodyPr wrap="square" lIns="45720" rIns="45720" tIns="18288" bIns="18288" anchor="ctr">
+            <a:spAutoFit/>
+          </a:bodyPr>
+          <a:lstStyle/>
+          <a:p>
+            <a:pPr algn="ctr"/>
+            <a:r>
+              <a:rPr sz="2800" b="1" i="0">
+                <a:solidFill>
+                  <a:srgbClr val="FFFFFF"/>
+                </a:solidFill>
+                <a:latin typeface="Calibri"/>
+              </a:rPr>
+              <a:t>4</a:t>
+            </a:r>
+          </a:p>
+        </p:txBody>
+      </p:sp>
+      <p:sp>
+        <p:nvSpPr>
+          <p:cNvPr id="18" name="Rounded Rectangle 17"/>
+          <p:cNvSpPr/>
+          <p:nvPr/>
+        </p:nvSpPr>
+        <p:spPr>
+          <a:xfrm>
+            <a:off x="2011680" y="4183380"/>
+            <a:ext cx="9144000" cy="777240"/>
+          </a:xfrm>
+          <a:prstGeom prst="roundRect">
+            <a:avLst>
+              <a:gd name="adj" fmla="val 8000"/>
+            </a:avLst>
+          </a:prstGeom>
+          <a:solidFill>
+            <a:srgbClr val="FBFBFD"/>
+          </a:solidFill>
+          <a:ln w="19050">
+            <a:solidFill>
+              <a:srgbClr val="00A0B0"/>
+            </a:solidFill>
+          </a:ln>
+        </p:spPr>
+        <p:style>
+          <a:lnRef idx="1">
+            <a:schemeClr val="accent1"/>
+          </a:lnRef>
+          <a:fillRef idx="3">
+            <a:schemeClr val="accent1"/>
+          </a:fillRef>
+          <a:effectRef idx="2">
+            <a:schemeClr val="accent1"/>
+          </a:effectRef>
+          <a:fontRef idx="minor">
+            <a:schemeClr val="lt1"/>
+          </a:fontRef>
+        </p:style>
+        <p:txBody>
+          <a:bodyPr rtlCol="0" anchor="ctr"/>
+          <a:lstStyle/>
+          <a:p>
+            <a:pPr algn="ctr"/>
+          </a:p>
+        </p:txBody>
+      </p:sp>
+      <p:sp>
+        <p:nvSpPr>
+          <p:cNvPr id="19" name="TextBox 18"/>
+          <p:cNvSpPr txBox="1"/>
+          <p:nvPr/>
+        </p:nvSpPr>
+        <p:spPr>
+          <a:xfrm>
+            <a:off x="2286000" y="4183380"/>
+            <a:ext cx="8686800" cy="777240"/>
+          </a:xfrm>
+          <a:prstGeom prst="rect">
+            <a:avLst/>
+          </a:prstGeom>
+          <a:noFill/>
+        </p:spPr>
+        <p:txBody>
+          <a:bodyPr wrap="square" lIns="45720" rIns="45720" tIns="18288" bIns="18288" anchor="ctr">
+            <a:spAutoFit/>
+          </a:bodyPr>
+          <a:lstStyle/>
+          <a:p>
+            <a:pPr algn="l"/>
+            <a:r>
+              <a:rPr sz="1800" b="0" i="0">
                 <a:solidFill>
                   <a:srgbClr val="1A1A2E"/>
                 </a:solidFill>
                 <a:latin typeface="Calibri"/>
               </a:rPr>
-              <a:t>2. SCANSIONA PATTERN (1 min)</a:t>
-            </a:r>
-          </a:p>
-          <a:p>
-            <a:pPr>
-              <a:lnSpc>
-                <a:spcPct val="150000"/>
-              </a:lnSpc>
-            </a:pPr>
-            <a:r>
-              <a:rPr sz="2000" b="1">
-                <a:solidFill>
-                  <a:srgbClr val="00A0B0"/>
-                </a:solidFill>
-                <a:latin typeface="Calibri"/>
-              </a:rPr>
-              <a:t>▸  </a:t>
-            </a:r>
-            <a:r>
-              <a:rPr sz="2000">
+              <a:t>I 7 errori tipici — riconoscerli a vista</a:t>
+            </a:r>
+          </a:p>
+        </p:txBody>
+      </p:sp>
+      <p:sp>
+        <p:nvSpPr>
+          <p:cNvPr id="20" name="Oval 19"/>
+          <p:cNvSpPr/>
+          <p:nvPr/>
+        </p:nvSpPr>
+        <p:spPr>
+          <a:xfrm>
+            <a:off x="914400" y="5097780"/>
+            <a:ext cx="777240" cy="777240"/>
+          </a:xfrm>
+          <a:prstGeom prst="ellipse">
+            <a:avLst/>
+          </a:prstGeom>
+          <a:solidFill>
+            <a:srgbClr val="00A0B0"/>
+          </a:solidFill>
+          <a:ln>
+            <a:noFill/>
+          </a:ln>
+        </p:spPr>
+        <p:style>
+          <a:lnRef idx="1">
+            <a:schemeClr val="accent1"/>
+          </a:lnRef>
+          <a:fillRef idx="3">
+            <a:schemeClr val="accent1"/>
+          </a:fillRef>
+          <a:effectRef idx="2">
+            <a:schemeClr val="accent1"/>
+          </a:effectRef>
+          <a:fontRef idx="minor">
+            <a:schemeClr val="lt1"/>
+          </a:fontRef>
+        </p:style>
+        <p:txBody>
+          <a:bodyPr rtlCol="0" anchor="ctr"/>
+          <a:lstStyle/>
+          <a:p>
+            <a:pPr algn="ctr"/>
+          </a:p>
+        </p:txBody>
+      </p:sp>
+      <p:sp>
+        <p:nvSpPr>
+          <p:cNvPr id="21" name="TextBox 20"/>
+          <p:cNvSpPr txBox="1"/>
+          <p:nvPr/>
+        </p:nvSpPr>
+        <p:spPr>
+          <a:xfrm>
+            <a:off x="914400" y="5097780"/>
+            <a:ext cx="777240" cy="777240"/>
+          </a:xfrm>
+          <a:prstGeom prst="rect">
+            <a:avLst/>
+          </a:prstGeom>
+          <a:noFill/>
+        </p:spPr>
+        <p:txBody>
+          <a:bodyPr wrap="square" lIns="45720" rIns="45720" tIns="18288" bIns="18288" anchor="ctr">
+            <a:spAutoFit/>
+          </a:bodyPr>
+          <a:lstStyle/>
+          <a:p>
+            <a:pPr algn="ctr"/>
+            <a:r>
+              <a:rPr sz="2800" b="1" i="0">
+                <a:solidFill>
+                  <a:srgbClr val="FFFFFF"/>
+                </a:solidFill>
+                <a:latin typeface="Calibri"/>
+              </a:rPr>
+              <a:t>5</a:t>
+            </a:r>
+          </a:p>
+        </p:txBody>
+      </p:sp>
+      <p:sp>
+        <p:nvSpPr>
+          <p:cNvPr id="22" name="Rounded Rectangle 21"/>
+          <p:cNvSpPr/>
+          <p:nvPr/>
+        </p:nvSpPr>
+        <p:spPr>
+          <a:xfrm>
+            <a:off x="2011680" y="5097780"/>
+            <a:ext cx="9144000" cy="777240"/>
+          </a:xfrm>
+          <a:prstGeom prst="roundRect">
+            <a:avLst>
+              <a:gd name="adj" fmla="val 8000"/>
+            </a:avLst>
+          </a:prstGeom>
+          <a:solidFill>
+            <a:srgbClr val="FBFBFD"/>
+          </a:solidFill>
+          <a:ln w="19050">
+            <a:solidFill>
+              <a:srgbClr val="00A0B0"/>
+            </a:solidFill>
+          </a:ln>
+        </p:spPr>
+        <p:style>
+          <a:lnRef idx="1">
+            <a:schemeClr val="accent1"/>
+          </a:lnRef>
+          <a:fillRef idx="3">
+            <a:schemeClr val="accent1"/>
+          </a:fillRef>
+          <a:effectRef idx="2">
+            <a:schemeClr val="accent1"/>
+          </a:effectRef>
+          <a:fontRef idx="minor">
+            <a:schemeClr val="lt1"/>
+          </a:fontRef>
+        </p:style>
+        <p:txBody>
+          <a:bodyPr rtlCol="0" anchor="ctr"/>
+          <a:lstStyle/>
+          <a:p>
+            <a:pPr algn="ctr"/>
+          </a:p>
+        </p:txBody>
+      </p:sp>
+      <p:sp>
+        <p:nvSpPr>
+          <p:cNvPr id="23" name="TextBox 22"/>
+          <p:cNvSpPr txBox="1"/>
+          <p:nvPr/>
+        </p:nvSpPr>
+        <p:spPr>
+          <a:xfrm>
+            <a:off x="2286000" y="5097780"/>
+            <a:ext cx="8686800" cy="777240"/>
+          </a:xfrm>
+          <a:prstGeom prst="rect">
+            <a:avLst/>
+          </a:prstGeom>
+          <a:noFill/>
+        </p:spPr>
+        <p:txBody>
+          <a:bodyPr wrap="square" lIns="45720" rIns="45720" tIns="18288" bIns="18288" anchor="ctr">
+            <a:spAutoFit/>
+          </a:bodyPr>
+          <a:lstStyle/>
+          <a:p>
+            <a:pPr algn="l"/>
+            <a:r>
+              <a:rPr sz="1800" b="0" i="0">
                 <a:solidFill>
                   <a:srgbClr val="1A1A2E"/>
                 </a:solidFill>
                 <a:latin typeface="Calibri"/>
               </a:rPr>
-              <a:t>   f-string in SQL? hash deboli? eval/exec? cookie senza attributi?</a:t>
-            </a:r>
-          </a:p>
-          <a:p>
-            <a:pPr>
-              <a:lnSpc>
-                <a:spcPct val="150000"/>
-              </a:lnSpc>
-            </a:pPr>
-            <a:r>
-              <a:rPr sz="2000" b="1">
-                <a:solidFill>
-                  <a:srgbClr val="00A0B0"/>
-                </a:solidFill>
-                <a:latin typeface="Calibri"/>
-              </a:rPr>
-              <a:t>▸  </a:t>
-            </a:r>
-            <a:r>
-              <a:rPr sz="2000">
-                <a:solidFill>
-                  <a:srgbClr val="1A1A2E"/>
-                </a:solidFill>
-                <a:latin typeface="Calibri"/>
-              </a:rPr>
-              <a:t/>
-            </a:r>
-          </a:p>
-          <a:p>
-            <a:pPr>
-              <a:lnSpc>
-                <a:spcPct val="150000"/>
-              </a:lnSpc>
-            </a:pPr>
-            <a:r>
-              <a:rPr sz="2000" b="1">
-                <a:solidFill>
-                  <a:srgbClr val="00A0B0"/>
-                </a:solidFill>
-                <a:latin typeface="Calibri"/>
-              </a:rPr>
-              <a:t>▸  </a:t>
-            </a:r>
-            <a:r>
-              <a:rPr sz="2000">
-                <a:solidFill>
-                  <a:srgbClr val="1A1A2E"/>
-                </a:solidFill>
-                <a:latin typeface="Calibri"/>
-              </a:rPr>
-              <a:t>3. VERIFICA CONTESTO (1-2 min)</a:t>
-            </a:r>
-          </a:p>
-          <a:p>
-            <a:pPr>
-              <a:lnSpc>
-                <a:spcPct val="150000"/>
-              </a:lnSpc>
-            </a:pPr>
-            <a:r>
-              <a:rPr sz="2000" b="1">
-                <a:solidFill>
-                  <a:srgbClr val="00A0B0"/>
-                </a:solidFill>
-                <a:latin typeface="Calibri"/>
-              </a:rPr>
-              <a:t>▸  </a:t>
-            </a:r>
-            <a:r>
-              <a:rPr sz="2000">
-                <a:solidFill>
-                  <a:srgbClr val="1A1A2E"/>
-                </a:solidFill>
-                <a:latin typeface="Calibri"/>
-              </a:rPr>
-              <a:t>   Coerente con architettura, versioni, convenzioni?</a:t>
-            </a:r>
-          </a:p>
-          <a:p>
-            <a:pPr>
-              <a:lnSpc>
-                <a:spcPct val="150000"/>
-              </a:lnSpc>
-            </a:pPr>
-            <a:r>
-              <a:rPr sz="2000" b="1">
-                <a:solidFill>
-                  <a:srgbClr val="00A0B0"/>
-                </a:solidFill>
-                <a:latin typeface="Calibri"/>
-              </a:rPr>
-              <a:t>▸  </a:t>
-            </a:r>
-            <a:r>
-              <a:rPr sz="2000">
-                <a:solidFill>
-                  <a:srgbClr val="1A1A2E"/>
-                </a:solidFill>
-                <a:latin typeface="Calibri"/>
-              </a:rPr>
-              <a:t/>
-            </a:r>
-          </a:p>
-          <a:p>
-            <a:pPr>
-              <a:lnSpc>
-                <a:spcPct val="150000"/>
-              </a:lnSpc>
-            </a:pPr>
-            <a:r>
-              <a:rPr sz="2000" b="1">
-                <a:solidFill>
-                  <a:srgbClr val="00A0B0"/>
-                </a:solidFill>
-                <a:latin typeface="Calibri"/>
-              </a:rPr>
-              <a:t>▸  </a:t>
-            </a:r>
-            <a:r>
-              <a:rPr sz="2000">
-                <a:solidFill>
-                  <a:srgbClr val="1A1A2E"/>
-                </a:solidFill>
-                <a:latin typeface="Calibri"/>
-              </a:rPr>
-              <a:t>4. TEST + LINTER (5-15 min)</a:t>
-            </a:r>
-          </a:p>
-          <a:p>
-            <a:pPr>
-              <a:lnSpc>
-                <a:spcPct val="150000"/>
-              </a:lnSpc>
-            </a:pPr>
-            <a:r>
-              <a:rPr sz="2000" b="1">
-                <a:solidFill>
-                  <a:srgbClr val="00A0B0"/>
-                </a:solidFill>
-                <a:latin typeface="Calibri"/>
-              </a:rPr>
-              <a:t>▸  </a:t>
-            </a:r>
-            <a:r>
-              <a:rPr sz="2000">
-                <a:solidFill>
-                  <a:srgbClr val="1A1A2E"/>
-                </a:solidFill>
-                <a:latin typeface="Calibri"/>
-              </a:rPr>
-              <a:t>   pytest + bandit + semgrep</a:t>
+              <a:t>Mai segreti nei prompt, mai crittografia da AI</a:t>
             </a:r>
           </a:p>
         </p:txBody>
       </p:sp>
       <p:cxnSp>
         <p:nvCxnSpPr>
-          <p:cNvPr id="5" name="Connector 4"/>
+          <p:cNvPr id="24" name="Connector 23"/>
           <p:cNvCxnSpPr/>
           <p:nvPr/>
         </p:nvCxnSpPr>
@@ -4726,14 +5520,14 @@
       </p:cxnSp>
       <p:sp>
         <p:nvSpPr>
-          <p:cNvPr id="6" name="TextBox 5"/>
+          <p:cNvPr id="25" name="TextBox 24"/>
           <p:cNvSpPr txBox="1"/>
           <p:nvPr/>
         </p:nvSpPr>
         <p:spPr>
           <a:xfrm>
             <a:off x="457200" y="6473952"/>
-            <a:ext cx="7315200" cy="320040"/>
+            <a:ext cx="7315200" cy="292608"/>
           </a:xfrm>
           <a:prstGeom prst="rect">
             <a:avLst/>
@@ -4754,21 +5548,21 @@
                 </a:solidFill>
                 <a:latin typeface="Calibri"/>
               </a:rPr>
-              <a:t>Secure Coding · Corso IFTS STEM · A. Manneschi</a:t>
-            </a:r>
-          </a:p>
-        </p:txBody>
-      </p:sp>
-      <p:sp>
-        <p:nvSpPr>
-          <p:cNvPr id="7" name="TextBox 6"/>
+              <a:t>Secure Coding · Corso IFTS STEM · A. Manneschi · 2024/2025</a:t>
+            </a:r>
+          </a:p>
+        </p:txBody>
+      </p:sp>
+      <p:sp>
+        <p:nvSpPr>
+          <p:cNvPr id="26" name="TextBox 25"/>
           <p:cNvSpPr txBox="1"/>
           <p:nvPr/>
         </p:nvSpPr>
         <p:spPr>
           <a:xfrm>
             <a:off x="10515600" y="6473952"/>
-            <a:ext cx="1188720" cy="320040"/>
+            <a:ext cx="1188720" cy="292608"/>
           </a:xfrm>
           <a:prstGeom prst="rect">
             <a:avLst/>
@@ -4821,13 +5615,13 @@
         <p:spPr>
           <a:xfrm>
             <a:off x="0" y="0"/>
-            <a:ext cx="12191695" cy="777240"/>
+            <a:ext cx="4114800" cy="6858000"/>
           </a:xfrm>
           <a:prstGeom prst="rect">
             <a:avLst/>
           </a:prstGeom>
           <a:solidFill>
-            <a:srgbClr val="0F2D52"/>
+            <a:srgbClr val="081B33"/>
           </a:solidFill>
           <a:ln>
             <a:noFill/>
@@ -4857,14 +5651,100 @@
       </p:sp>
       <p:sp>
         <p:nvSpPr>
-          <p:cNvPr id="3" name="TextBox 2"/>
+          <p:cNvPr id="3" name="Rectangle 2"/>
+          <p:cNvSpPr/>
+          <p:nvPr/>
+        </p:nvSpPr>
+        <p:spPr>
+          <a:xfrm>
+            <a:off x="4114800" y="0"/>
+            <a:ext cx="8046720" cy="6858000"/>
+          </a:xfrm>
+          <a:prstGeom prst="rect">
+            <a:avLst/>
+          </a:prstGeom>
+          <a:solidFill>
+            <a:srgbClr val="F1F4F8"/>
+          </a:solidFill>
+          <a:ln>
+            <a:noFill/>
+          </a:ln>
+        </p:spPr>
+        <p:style>
+          <a:lnRef idx="1">
+            <a:schemeClr val="accent1"/>
+          </a:lnRef>
+          <a:fillRef idx="3">
+            <a:schemeClr val="accent1"/>
+          </a:fillRef>
+          <a:effectRef idx="2">
+            <a:schemeClr val="accent1"/>
+          </a:effectRef>
+          <a:fontRef idx="minor">
+            <a:schemeClr val="lt1"/>
+          </a:fontRef>
+        </p:style>
+        <p:txBody>
+          <a:bodyPr rtlCol="0" anchor="ctr"/>
+          <a:lstStyle/>
+          <a:p>
+            <a:pPr algn="ctr"/>
+          </a:p>
+        </p:txBody>
+      </p:sp>
+      <p:sp>
+        <p:nvSpPr>
+          <p:cNvPr id="4" name="Rectangle 3"/>
+          <p:cNvSpPr/>
+          <p:nvPr/>
+        </p:nvSpPr>
+        <p:spPr>
+          <a:xfrm>
+            <a:off x="4114800" y="0"/>
+            <a:ext cx="137160" cy="6858000"/>
+          </a:xfrm>
+          <a:prstGeom prst="rect">
+            <a:avLst/>
+          </a:prstGeom>
+          <a:solidFill>
+            <a:srgbClr val="00A0B0"/>
+          </a:solidFill>
+          <a:ln>
+            <a:noFill/>
+          </a:ln>
+        </p:spPr>
+        <p:style>
+          <a:lnRef idx="1">
+            <a:schemeClr val="accent1"/>
+          </a:lnRef>
+          <a:fillRef idx="3">
+            <a:schemeClr val="accent1"/>
+          </a:fillRef>
+          <a:effectRef idx="2">
+            <a:schemeClr val="accent1"/>
+          </a:effectRef>
+          <a:fontRef idx="minor">
+            <a:schemeClr val="lt1"/>
+          </a:fontRef>
+        </p:style>
+        <p:txBody>
+          <a:bodyPr rtlCol="0" anchor="ctr"/>
+          <a:lstStyle/>
+          <a:p>
+            <a:pPr algn="ctr"/>
+          </a:p>
+        </p:txBody>
+      </p:sp>
+      <p:sp>
+        <p:nvSpPr>
+          <p:cNvPr id="5" name="TextBox 4"/>
           <p:cNvSpPr txBox="1"/>
           <p:nvPr/>
         </p:nvSpPr>
         <p:spPr>
           <a:xfrm>
-            <a:off x="457200" y="164592"/>
-            <a:ext cx="10972800" cy="502920"/>
+            <a:off x="274320" y="2103120"/>
+            <a:ext cx="3657600" cy="2286000"/>
           </a:xfrm>
           <a:prstGeom prst="rect">
             <a:avLst/>
@@ -4872,34 +5752,34 @@
           <a:noFill/>
         </p:spPr>
         <p:txBody>
-          <a:bodyPr wrap="square" lIns="45720" rIns="45720" tIns="18288" bIns="18288" anchor="ctr">
+          <a:bodyPr wrap="square" lIns="45720" rIns="45720" tIns="18288" bIns="18288" anchor="t">
             <a:spAutoFit/>
           </a:bodyPr>
           <a:lstStyle/>
           <a:p>
-            <a:pPr algn="l"/>
-            <a:r>
-              <a:rPr sz="2400" b="1" i="0">
-                <a:solidFill>
-                  <a:srgbClr val="FFFFFF"/>
-                </a:solidFill>
-                <a:latin typeface="Calibri"/>
-              </a:rPr>
-              <a:t>Quando NON usare l'IA</a:t>
-            </a:r>
-          </a:p>
-        </p:txBody>
-      </p:sp>
-      <p:sp>
-        <p:nvSpPr>
-          <p:cNvPr id="4" name="TextBox 3"/>
+            <a:pPr algn="ctr"/>
+            <a:r>
+              <a:rPr sz="17000" b="1" i="0">
+                <a:solidFill>
+                  <a:srgbClr val="00A0B0"/>
+                </a:solidFill>
+                <a:latin typeface="Calibri"/>
+              </a:rPr>
+              <a:t>03</a:t>
+            </a:r>
+          </a:p>
+        </p:txBody>
+      </p:sp>
+      <p:sp>
+        <p:nvSpPr>
+          <p:cNvPr id="6" name="TextBox 5"/>
           <p:cNvSpPr txBox="1"/>
           <p:nvPr/>
         </p:nvSpPr>
         <p:spPr>
           <a:xfrm>
-            <a:off x="640080" y="1005840"/>
-            <a:ext cx="10972800" cy="5029200"/>
+            <a:off x="274320" y="4572000"/>
+            <a:ext cx="3657600" cy="457200"/>
           </a:xfrm>
           <a:prstGeom prst="rect">
             <a:avLst/>
@@ -4907,265 +5787,97 @@
           <a:noFill/>
         </p:spPr>
         <p:txBody>
-          <a:bodyPr wrap="square">
+          <a:bodyPr wrap="square" lIns="45720" rIns="45720" tIns="18288" bIns="18288" anchor="t">
             <a:spAutoFit/>
           </a:bodyPr>
           <a:lstStyle/>
           <a:p>
-            <a:pPr>
-              <a:lnSpc>
-                <a:spcPct val="150000"/>
-              </a:lnSpc>
-            </a:pPr>
-            <a:r>
-              <a:rPr sz="2000" b="1">
-                <a:solidFill>
-                  <a:srgbClr val="00A0B0"/>
-                </a:solidFill>
-                <a:latin typeface="Calibri"/>
-              </a:rPr>
-              <a:t>▸  </a:t>
-            </a:r>
-            <a:r>
-              <a:rPr sz="2000">
-                <a:solidFill>
-                  <a:srgbClr val="1A1A2E"/>
-                </a:solidFill>
-                <a:latin typeface="Calibri"/>
-              </a:rPr>
-              <a:t>Crittografia 'fatta in casa' (usa librerie standard)</a:t>
-            </a:r>
-          </a:p>
-          <a:p>
-            <a:pPr>
-              <a:lnSpc>
-                <a:spcPct val="150000"/>
-              </a:lnSpc>
-            </a:pPr>
-            <a:r>
-              <a:rPr sz="2000" b="1">
-                <a:solidFill>
-                  <a:srgbClr val="00A0B0"/>
-                </a:solidFill>
-                <a:latin typeface="Calibri"/>
-              </a:rPr>
-              <a:t>▸  </a:t>
-            </a:r>
-            <a:r>
-              <a:rPr sz="2000">
-                <a:solidFill>
-                  <a:srgbClr val="1A1A2E"/>
-                </a:solidFill>
-                <a:latin typeface="Calibri"/>
-              </a:rPr>
-              <a:t>Codice di sicurezza critico (authn/authz)</a:t>
-            </a:r>
-          </a:p>
-          <a:p>
-            <a:pPr>
-              <a:lnSpc>
-                <a:spcPct val="150000"/>
-              </a:lnSpc>
-            </a:pPr>
-            <a:r>
-              <a:rPr sz="2000" b="1">
-                <a:solidFill>
-                  <a:srgbClr val="00A0B0"/>
-                </a:solidFill>
-                <a:latin typeface="Calibri"/>
-              </a:rPr>
-              <a:t>▸  </a:t>
-            </a:r>
-            <a:r>
-              <a:rPr sz="2000">
-                <a:solidFill>
-                  <a:srgbClr val="1A1A2E"/>
-                </a:solidFill>
-                <a:latin typeface="Calibri"/>
-              </a:rPr>
-              <a:t>Compliance e legale (privacy policy, cookie banner)</a:t>
-            </a:r>
-          </a:p>
-          <a:p>
-            <a:pPr>
-              <a:lnSpc>
-                <a:spcPct val="150000"/>
-              </a:lnSpc>
-            </a:pPr>
-            <a:r>
-              <a:rPr sz="2000" b="1">
-                <a:solidFill>
-                  <a:srgbClr val="00A0B0"/>
-                </a:solidFill>
-                <a:latin typeface="Calibri"/>
-              </a:rPr>
-              <a:t>▸  </a:t>
-            </a:r>
-            <a:r>
-              <a:rPr sz="2000">
-                <a:solidFill>
-                  <a:srgbClr val="1A1A2E"/>
-                </a:solidFill>
-                <a:latin typeface="Calibri"/>
-              </a:rPr>
-              <a:t>Quando NON sai validare (impara prima!)</a:t>
-            </a:r>
-          </a:p>
-          <a:p>
-            <a:pPr>
-              <a:lnSpc>
-                <a:spcPct val="150000"/>
-              </a:lnSpc>
-            </a:pPr>
-            <a:r>
-              <a:rPr sz="2000" b="1">
-                <a:solidFill>
-                  <a:srgbClr val="00A0B0"/>
-                </a:solidFill>
-                <a:latin typeface="Calibri"/>
-              </a:rPr>
-              <a:t>▸  </a:t>
-            </a:r>
-            <a:r>
-              <a:rPr sz="2000">
-                <a:solidFill>
-                  <a:srgbClr val="1A1A2E"/>
-                </a:solidFill>
-                <a:latin typeface="Calibri"/>
-              </a:rPr>
-              <a:t/>
-            </a:r>
-          </a:p>
-          <a:p>
-            <a:pPr>
-              <a:lnSpc>
-                <a:spcPct val="150000"/>
-              </a:lnSpc>
-            </a:pPr>
-            <a:r>
-              <a:rPr sz="2000" b="1">
-                <a:solidFill>
-                  <a:srgbClr val="00A0B0"/>
-                </a:solidFill>
-                <a:latin typeface="Calibri"/>
-              </a:rPr>
-              <a:t>▸  </a:t>
-            </a:r>
-            <a:r>
-              <a:rPr sz="2000">
-                <a:solidFill>
-                  <a:srgbClr val="1A1A2E"/>
-                </a:solidFill>
-                <a:latin typeface="Calibri"/>
-              </a:rPr>
-              <a:t>Caso reale: Samsung 2023</a:t>
-            </a:r>
-          </a:p>
-          <a:p>
-            <a:pPr>
-              <a:lnSpc>
-                <a:spcPct val="150000"/>
-              </a:lnSpc>
-            </a:pPr>
-            <a:r>
-              <a:rPr sz="2000" b="1">
-                <a:solidFill>
-                  <a:srgbClr val="00A0B0"/>
-                </a:solidFill>
-                <a:latin typeface="Calibri"/>
-              </a:rPr>
-              <a:t>▸  </a:t>
-            </a:r>
-            <a:r>
-              <a:rPr sz="2000">
-                <a:solidFill>
-                  <a:srgbClr val="1A1A2E"/>
-                </a:solidFill>
-                <a:latin typeface="Calibri"/>
-              </a:rPr>
-              <a:t>Dipendenti incollarono codice proprietario in ChatGPT</a:t>
-            </a:r>
-          </a:p>
-          <a:p>
-            <a:pPr>
-              <a:lnSpc>
-                <a:spcPct val="150000"/>
-              </a:lnSpc>
-            </a:pPr>
-            <a:r>
-              <a:rPr sz="2000" b="1">
-                <a:solidFill>
-                  <a:srgbClr val="00A0B0"/>
-                </a:solidFill>
-                <a:latin typeface="Calibri"/>
-              </a:rPr>
-              <a:t>▸  </a:t>
-            </a:r>
-            <a:r>
-              <a:rPr sz="2000">
-                <a:solidFill>
-                  <a:srgbClr val="1A1A2E"/>
-                </a:solidFill>
-                <a:latin typeface="Calibri"/>
-              </a:rPr>
-              <a:t>→ OpenAI lo usò per training</a:t>
-            </a:r>
-          </a:p>
-          <a:p>
-            <a:pPr>
-              <a:lnSpc>
-                <a:spcPct val="150000"/>
-              </a:lnSpc>
-            </a:pPr>
-            <a:r>
-              <a:rPr sz="2000" b="1">
-                <a:solidFill>
-                  <a:srgbClr val="00A0B0"/>
-                </a:solidFill>
-                <a:latin typeface="Calibri"/>
-              </a:rPr>
-              <a:t>▸  </a:t>
-            </a:r>
-            <a:r>
-              <a:rPr sz="2000">
-                <a:solidFill>
-                  <a:srgbClr val="1A1A2E"/>
-                </a:solidFill>
-                <a:latin typeface="Calibri"/>
-              </a:rPr>
-              <a:t>→ leakato indirettamente</a:t>
-            </a:r>
-          </a:p>
-          <a:p>
-            <a:pPr>
-              <a:lnSpc>
-                <a:spcPct val="150000"/>
-              </a:lnSpc>
-            </a:pPr>
-            <a:r>
-              <a:rPr sz="2000" b="1">
-                <a:solidFill>
-                  <a:srgbClr val="00A0B0"/>
-                </a:solidFill>
-                <a:latin typeface="Calibri"/>
-              </a:rPr>
-              <a:t>▸  </a:t>
-            </a:r>
-            <a:r>
-              <a:rPr sz="2000">
-                <a:solidFill>
-                  <a:srgbClr val="1A1A2E"/>
-                </a:solidFill>
-                <a:latin typeface="Calibri"/>
-              </a:rPr>
-              <a:t>→ Samsung dovette vietare ChatGPT</a:t>
+            <a:pPr algn="ctr"/>
+            <a:r>
+              <a:rPr sz="2000" b="1" i="0">
+                <a:solidFill>
+                  <a:srgbClr val="6FD8E0"/>
+                </a:solidFill>
+                <a:latin typeface="Calibri"/>
+              </a:rPr>
+              <a:t>PARTE</a:t>
+            </a:r>
+          </a:p>
+        </p:txBody>
+      </p:sp>
+      <p:sp>
+        <p:nvSpPr>
+          <p:cNvPr id="7" name="TextBox 6"/>
+          <p:cNvSpPr txBox="1"/>
+          <p:nvPr/>
+        </p:nvSpPr>
+        <p:spPr>
+          <a:xfrm>
+            <a:off x="4572000" y="2286000"/>
+            <a:ext cx="7315200" cy="1645920"/>
+          </a:xfrm>
+          <a:prstGeom prst="rect">
+            <a:avLst/>
+          </a:prstGeom>
+          <a:noFill/>
+        </p:spPr>
+        <p:txBody>
+          <a:bodyPr wrap="square" lIns="45720" rIns="45720" tIns="18288" bIns="18288" anchor="t">
+            <a:spAutoFit/>
+          </a:bodyPr>
+          <a:lstStyle/>
+          <a:p>
+            <a:pPr algn="l"/>
+            <a:r>
+              <a:rPr sz="4400" b="1" i="0">
+                <a:solidFill>
+                  <a:srgbClr val="0F2D52"/>
+                </a:solidFill>
+                <a:latin typeface="Calibri"/>
+              </a:rPr>
+              <a:t>Lab in aula</a:t>
+            </a:r>
+          </a:p>
+        </p:txBody>
+      </p:sp>
+      <p:sp>
+        <p:nvSpPr>
+          <p:cNvPr id="8" name="TextBox 7"/>
+          <p:cNvSpPr txBox="1"/>
+          <p:nvPr/>
+        </p:nvSpPr>
+        <p:spPr>
+          <a:xfrm>
+            <a:off x="4572000" y="3931920"/>
+            <a:ext cx="7315200" cy="1828800"/>
+          </a:xfrm>
+          <a:prstGeom prst="rect">
+            <a:avLst/>
+          </a:prstGeom>
+          <a:noFill/>
+        </p:spPr>
+        <p:txBody>
+          <a:bodyPr wrap="square" lIns="45720" rIns="45720" tIns="18288" bIns="18288" anchor="t">
+            <a:spAutoFit/>
+          </a:bodyPr>
+          <a:lstStyle/>
+          <a:p>
+            <a:pPr algn="l"/>
+            <a:r>
+              <a:rPr sz="1800" b="0" i="1">
+                <a:solidFill>
+                  <a:srgbClr val="6B7280"/>
+                </a:solidFill>
+                <a:latin typeface="Calibri"/>
+              </a:rPr>
+              <a:t>Validation collettiva di codice AI vulnerabile</a:t>
             </a:r>
           </a:p>
         </p:txBody>
       </p:sp>
       <p:cxnSp>
         <p:nvCxnSpPr>
-          <p:cNvPr id="5" name="Connector 4"/>
+          <p:cNvPr id="9" name="Connector 8"/>
           <p:cNvCxnSpPr/>
           <p:nvPr/>
         </p:nvCxnSpPr>
@@ -5200,14 +5912,14 @@
       </p:cxnSp>
       <p:sp>
         <p:nvSpPr>
-          <p:cNvPr id="6" name="TextBox 5"/>
+          <p:cNvPr id="10" name="TextBox 9"/>
           <p:cNvSpPr txBox="1"/>
           <p:nvPr/>
         </p:nvSpPr>
         <p:spPr>
           <a:xfrm>
             <a:off x="457200" y="6473952"/>
-            <a:ext cx="7315200" cy="320040"/>
+            <a:ext cx="7315200" cy="292608"/>
           </a:xfrm>
           <a:prstGeom prst="rect">
             <a:avLst/>
@@ -5228,21 +5940,21 @@
                 </a:solidFill>
                 <a:latin typeface="Calibri"/>
               </a:rPr>
-              <a:t>Secure Coding · Corso IFTS STEM · A. Manneschi</a:t>
-            </a:r>
-          </a:p>
-        </p:txBody>
-      </p:sp>
-      <p:sp>
-        <p:nvSpPr>
-          <p:cNvPr id="7" name="TextBox 6"/>
+              <a:t>Secure Coding · Corso IFTS STEM · A. Manneschi · 2024/2025</a:t>
+            </a:r>
+          </a:p>
+        </p:txBody>
+      </p:sp>
+      <p:sp>
+        <p:nvSpPr>
+          <p:cNvPr id="11" name="TextBox 10"/>
           <p:cNvSpPr txBox="1"/>
           <p:nvPr/>
         </p:nvSpPr>
         <p:spPr>
           <a:xfrm>
             <a:off x="10515600" y="6473952"/>
-            <a:ext cx="1188720" cy="320040"/>
+            <a:ext cx="1188720" cy="292608"/>
           </a:xfrm>
           <a:prstGeom prst="rect">
             <a:avLst/>
@@ -5301,7 +6013,7 @@
             <a:avLst/>
           </a:prstGeom>
           <a:solidFill>
-            <a:srgbClr val="0F2D52"/>
+            <a:srgbClr val="081B33"/>
           </a:solidFill>
           <a:ln>
             <a:noFill/>
@@ -5337,11 +6049,247 @@
         </p:nvSpPr>
         <p:spPr>
           <a:xfrm>
-            <a:off x="8686800" y="457200"/>
-            <a:ext cx="3200400" cy="3200400"/>
+            <a:off x="8915400" y="228600"/>
+            <a:ext cx="2286000" cy="2286000"/>
           </a:xfrm>
           <a:prstGeom prst="ellipse">
             <a:avLst/>
+          </a:prstGeom>
+          <a:noFill/>
+          <a:ln w="25400">
+            <a:solidFill>
+              <a:srgbClr val="00A0B0"/>
+            </a:solidFill>
+          </a:ln>
+        </p:spPr>
+        <p:style>
+          <a:lnRef idx="1">
+            <a:schemeClr val="accent1"/>
+          </a:lnRef>
+          <a:fillRef idx="3">
+            <a:schemeClr val="accent1"/>
+          </a:fillRef>
+          <a:effectRef idx="2">
+            <a:schemeClr val="accent1"/>
+          </a:effectRef>
+          <a:fontRef idx="minor">
+            <a:schemeClr val="lt1"/>
+          </a:fontRef>
+        </p:style>
+        <p:txBody>
+          <a:bodyPr rtlCol="0" anchor="ctr"/>
+          <a:lstStyle/>
+          <a:p>
+            <a:pPr algn="ctr"/>
+          </a:p>
+        </p:txBody>
+      </p:sp>
+      <p:sp>
+        <p:nvSpPr>
+          <p:cNvPr id="4" name="Oval 3"/>
+          <p:cNvSpPr/>
+          <p:nvPr/>
+        </p:nvSpPr>
+        <p:spPr>
+          <a:xfrm>
+            <a:off x="10149840" y="3749040"/>
+            <a:ext cx="1645920" cy="1645920"/>
+          </a:xfrm>
+          <a:prstGeom prst="ellipse">
+            <a:avLst/>
+          </a:prstGeom>
+          <a:noFill/>
+          <a:ln w="25400">
+            <a:solidFill>
+              <a:srgbClr val="00A0B0"/>
+            </a:solidFill>
+          </a:ln>
+        </p:spPr>
+        <p:style>
+          <a:lnRef idx="1">
+            <a:schemeClr val="accent1"/>
+          </a:lnRef>
+          <a:fillRef idx="3">
+            <a:schemeClr val="accent1"/>
+          </a:fillRef>
+          <a:effectRef idx="2">
+            <a:schemeClr val="accent1"/>
+          </a:effectRef>
+          <a:fontRef idx="minor">
+            <a:schemeClr val="lt1"/>
+          </a:fontRef>
+        </p:style>
+        <p:txBody>
+          <a:bodyPr rtlCol="0" anchor="ctr"/>
+          <a:lstStyle/>
+          <a:p>
+            <a:pPr algn="ctr"/>
+          </a:p>
+        </p:txBody>
+      </p:sp>
+      <p:sp>
+        <p:nvSpPr>
+          <p:cNvPr id="5" name="Oval 4"/>
+          <p:cNvSpPr/>
+          <p:nvPr/>
+        </p:nvSpPr>
+        <p:spPr>
+          <a:xfrm>
+            <a:off x="685800" y="4800600"/>
+            <a:ext cx="1371600" cy="1371600"/>
+          </a:xfrm>
+          <a:prstGeom prst="ellipse">
+            <a:avLst/>
+          </a:prstGeom>
+          <a:noFill/>
+          <a:ln w="25400">
+            <a:solidFill>
+              <a:srgbClr val="00A0B0"/>
+            </a:solidFill>
+          </a:ln>
+        </p:spPr>
+        <p:style>
+          <a:lnRef idx="1">
+            <a:schemeClr val="accent1"/>
+          </a:lnRef>
+          <a:fillRef idx="3">
+            <a:schemeClr val="accent1"/>
+          </a:fillRef>
+          <a:effectRef idx="2">
+            <a:schemeClr val="accent1"/>
+          </a:effectRef>
+          <a:fontRef idx="minor">
+            <a:schemeClr val="lt1"/>
+          </a:fontRef>
+        </p:style>
+        <p:txBody>
+          <a:bodyPr rtlCol="0" anchor="ctr"/>
+          <a:lstStyle/>
+          <a:p>
+            <a:pPr algn="ctr"/>
+          </a:p>
+        </p:txBody>
+      </p:sp>
+      <p:sp>
+        <p:nvSpPr>
+          <p:cNvPr id="6" name="TextBox 5"/>
+          <p:cNvSpPr txBox="1"/>
+          <p:nvPr/>
+        </p:nvSpPr>
+        <p:spPr>
+          <a:xfrm>
+            <a:off x="731520" y="1371600"/>
+            <a:ext cx="10058400" cy="2286000"/>
+          </a:xfrm>
+          <a:prstGeom prst="rect">
+            <a:avLst/>
+          </a:prstGeom>
+          <a:noFill/>
+        </p:spPr>
+        <p:txBody>
+          <a:bodyPr wrap="square" lIns="45720" rIns="45720" tIns="18288" bIns="18288" anchor="t">
+            <a:spAutoFit/>
+          </a:bodyPr>
+          <a:lstStyle/>
+          <a:p>
+            <a:pPr algn="l"/>
+            <a:r>
+              <a:rPr sz="11000" b="1" i="0">
+                <a:solidFill>
+                  <a:srgbClr val="FFFFFF"/>
+                </a:solidFill>
+                <a:latin typeface="Calibri"/>
+              </a:rPr>
+              <a:t>Domande?</a:t>
+            </a:r>
+          </a:p>
+        </p:txBody>
+      </p:sp>
+      <p:cxnSp>
+        <p:nvCxnSpPr>
+          <p:cNvPr id="7" name="Connector 6"/>
+          <p:cNvCxnSpPr/>
+          <p:nvPr/>
+        </p:nvCxnSpPr>
+        <p:spPr>
+          <a:xfrm>
+            <a:off x="731520" y="3840480"/>
+            <a:ext cx="2926080" cy="0"/>
+          </a:xfrm>
+          <a:prstGeom prst="line">
+            <a:avLst/>
+          </a:prstGeom>
+          <a:ln w="50800">
+            <a:solidFill>
+              <a:srgbClr val="00A0B0"/>
+            </a:solidFill>
+          </a:ln>
+        </p:spPr>
+        <p:style>
+          <a:lnRef idx="2">
+            <a:schemeClr val="accent1"/>
+          </a:lnRef>
+          <a:fillRef idx="0">
+            <a:schemeClr val="accent1"/>
+          </a:fillRef>
+          <a:effectRef idx="1">
+            <a:schemeClr val="accent1"/>
+          </a:effectRef>
+          <a:fontRef idx="minor">
+            <a:schemeClr val="tx1"/>
+          </a:fontRef>
+        </p:style>
+      </p:cxnSp>
+      <p:sp>
+        <p:nvSpPr>
+          <p:cNvPr id="8" name="TextBox 7"/>
+          <p:cNvSpPr txBox="1"/>
+          <p:nvPr/>
+        </p:nvSpPr>
+        <p:spPr>
+          <a:xfrm>
+            <a:off x="731520" y="4114800"/>
+            <a:ext cx="10058400" cy="457200"/>
+          </a:xfrm>
+          <a:prstGeom prst="rect">
+            <a:avLst/>
+          </a:prstGeom>
+          <a:noFill/>
+        </p:spPr>
+        <p:txBody>
+          <a:bodyPr wrap="square" lIns="45720" rIns="45720" tIns="18288" bIns="18288" anchor="t">
+            <a:spAutoFit/>
+          </a:bodyPr>
+          <a:lstStyle/>
+          <a:p>
+            <a:pPr algn="l"/>
+            <a:r>
+              <a:rPr sz="2000" b="1" i="0">
+                <a:solidFill>
+                  <a:srgbClr val="00A0B0"/>
+                </a:solidFill>
+                <a:latin typeface="Calibri"/>
+              </a:rPr>
+              <a:t>Riepilogo · Q&amp;A · Discussione</a:t>
+            </a:r>
+          </a:p>
+        </p:txBody>
+      </p:sp>
+      <p:sp>
+        <p:nvSpPr>
+          <p:cNvPr id="9" name="Rounded Rectangle 8"/>
+          <p:cNvSpPr/>
+          <p:nvPr/>
+        </p:nvSpPr>
+        <p:spPr>
+          <a:xfrm>
+            <a:off x="731520" y="5029200"/>
+            <a:ext cx="10058400" cy="914400"/>
+          </a:xfrm>
+          <a:prstGeom prst="roundRect">
+            <a:avLst>
+              <a:gd name="adj" fmla="val 8000"/>
+            </a:avLst>
           </a:prstGeom>
           <a:solidFill>
             <a:srgbClr val="00A0B0"/>
@@ -5374,49 +6322,14 @@
       </p:sp>
       <p:sp>
         <p:nvSpPr>
-          <p:cNvPr id="4" name="TextBox 3"/>
+          <p:cNvPr id="10" name="TextBox 9"/>
           <p:cNvSpPr txBox="1"/>
           <p:nvPr/>
         </p:nvSpPr>
         <p:spPr>
           <a:xfrm>
-            <a:off x="731520" y="1645920"/>
-            <a:ext cx="7315200" cy="2286000"/>
-          </a:xfrm>
-          <a:prstGeom prst="rect">
-            <a:avLst/>
-          </a:prstGeom>
-          <a:noFill/>
-        </p:spPr>
-        <p:txBody>
-          <a:bodyPr wrap="square" lIns="45720" rIns="45720" tIns="18288" bIns="18288" anchor="t">
-            <a:spAutoFit/>
-          </a:bodyPr>
-          <a:lstStyle/>
-          <a:p>
-            <a:pPr algn="l"/>
-            <a:r>
-              <a:rPr sz="8800" b="1" i="0">
-                <a:solidFill>
-                  <a:srgbClr val="FFFFFF"/>
-                </a:solidFill>
-                <a:latin typeface="Calibri"/>
-              </a:rPr>
-              <a:t>Domande?</a:t>
-            </a:r>
-          </a:p>
-        </p:txBody>
-      </p:sp>
-      <p:sp>
-        <p:nvSpPr>
-          <p:cNvPr id="5" name="TextBox 4"/>
-          <p:cNvSpPr txBox="1"/>
-          <p:nvPr/>
-        </p:nvSpPr>
-        <p:spPr>
-          <a:xfrm>
-            <a:off x="8686800" y="457200"/>
-            <a:ext cx="3200400" cy="3200400"/>
+            <a:off x="1005840" y="5029200"/>
+            <a:ext cx="9784080" cy="914400"/>
           </a:xfrm>
           <a:prstGeom prst="rect">
             <a:avLst/>
@@ -5429,79 +6342,9 @@
           </a:bodyPr>
           <a:lstStyle/>
           <a:p>
-            <a:pPr algn="ctr"/>
-            <a:r>
-              <a:rPr sz="18000" b="1" i="0">
-                <a:solidFill>
-                  <a:srgbClr val="FFFFFF"/>
-                </a:solidFill>
-                <a:latin typeface="Calibri"/>
-              </a:rPr>
-              <a:t>?</a:t>
-            </a:r>
-          </a:p>
-        </p:txBody>
-      </p:sp>
-      <p:sp>
-        <p:nvSpPr>
-          <p:cNvPr id="6" name="TextBox 5"/>
-          <p:cNvSpPr txBox="1"/>
-          <p:nvPr/>
-        </p:nvSpPr>
-        <p:spPr>
-          <a:xfrm>
-            <a:off x="731520" y="4114800"/>
-            <a:ext cx="10058400" cy="457200"/>
-          </a:xfrm>
-          <a:prstGeom prst="rect">
-            <a:avLst/>
-          </a:prstGeom>
-          <a:noFill/>
-        </p:spPr>
-        <p:txBody>
-          <a:bodyPr wrap="square" lIns="45720" rIns="45720" tIns="18288" bIns="18288" anchor="t">
-            <a:spAutoFit/>
-          </a:bodyPr>
-          <a:lstStyle/>
-          <a:p>
             <a:pPr algn="l"/>
             <a:r>
-              <a:rPr sz="2200" b="1" i="0">
-                <a:solidFill>
-                  <a:srgbClr val="00A0B0"/>
-                </a:solidFill>
-                <a:latin typeface="Calibri"/>
-              </a:rPr>
-              <a:t>Cosa portarti via:</a:t>
-            </a:r>
-          </a:p>
-        </p:txBody>
-      </p:sp>
-      <p:sp>
-        <p:nvSpPr>
-          <p:cNvPr id="7" name="TextBox 6"/>
-          <p:cNvSpPr txBox="1"/>
-          <p:nvPr/>
-        </p:nvSpPr>
-        <p:spPr>
-          <a:xfrm>
-            <a:off x="731520" y="5303520"/>
-            <a:ext cx="10058400" cy="548640"/>
-          </a:xfrm>
-          <a:prstGeom prst="rect">
-            <a:avLst/>
-          </a:prstGeom>
-          <a:noFill/>
-        </p:spPr>
-        <p:txBody>
-          <a:bodyPr wrap="square" lIns="45720" rIns="45720" tIns="18288" bIns="18288" anchor="t">
-            <a:spAutoFit/>
-          </a:bodyPr>
-          <a:lstStyle/>
-          <a:p>
-            <a:pPr algn="l"/>
-            <a:r>
-              <a:rPr sz="1800" b="0" i="1">
+              <a:rPr sz="1800" b="1" i="1">
                 <a:solidFill>
                   <a:srgbClr val="FFFFFF"/>
                 </a:solidFill>
@@ -5514,7 +6357,7 @@
       </p:sp>
       <p:cxnSp>
         <p:nvCxnSpPr>
-          <p:cNvPr id="8" name="Connector 7"/>
+          <p:cNvPr id="11" name="Connector 10"/>
           <p:cNvCxnSpPr/>
           <p:nvPr/>
         </p:nvCxnSpPr>
@@ -5549,14 +6392,14 @@
       </p:cxnSp>
       <p:sp>
         <p:nvSpPr>
-          <p:cNvPr id="9" name="TextBox 8"/>
+          <p:cNvPr id="12" name="TextBox 11"/>
           <p:cNvSpPr txBox="1"/>
           <p:nvPr/>
         </p:nvSpPr>
         <p:spPr>
           <a:xfrm>
             <a:off x="457200" y="6473952"/>
-            <a:ext cx="7315200" cy="320040"/>
+            <a:ext cx="7315200" cy="292608"/>
           </a:xfrm>
           <a:prstGeom prst="rect">
             <a:avLst/>
@@ -5577,21 +6420,21 @@
                 </a:solidFill>
                 <a:latin typeface="Calibri"/>
               </a:rPr>
-              <a:t>Secure Coding · Corso IFTS STEM · A. Manneschi</a:t>
-            </a:r>
-          </a:p>
-        </p:txBody>
-      </p:sp>
-      <p:sp>
-        <p:nvSpPr>
-          <p:cNvPr id="10" name="TextBox 9"/>
+              <a:t>Secure Coding · Corso IFTS STEM · A. Manneschi · 2024/2025</a:t>
+            </a:r>
+          </a:p>
+        </p:txBody>
+      </p:sp>
+      <p:sp>
+        <p:nvSpPr>
+          <p:cNvPr id="13" name="TextBox 12"/>
           <p:cNvSpPr txBox="1"/>
           <p:nvPr/>
         </p:nvSpPr>
         <p:spPr>
           <a:xfrm>
             <a:off x="10515600" y="6473952"/>
-            <a:ext cx="1188720" cy="320040"/>
+            <a:ext cx="1188720" cy="292608"/>
           </a:xfrm>
           <a:prstGeom prst="rect">
             <a:avLst/>
@@ -5708,7 +6551,7 @@
                 </a:solidFill>
                 <a:latin typeface="Calibri"/>
               </a:rPr>
-              <a:t>Obiettivi</a:t>
+              <a:t>🎯  Obiettivi della lezione</a:t>
             </a:r>
           </a:p>
         </p:txBody>
@@ -5721,8 +6564,8 @@
         </p:nvSpPr>
         <p:spPr>
           <a:xfrm>
-            <a:off x="640080" y="1005840"/>
-            <a:ext cx="10972800" cy="5029200"/>
+            <a:off x="457200" y="914400"/>
+            <a:ext cx="2286000" cy="2286000"/>
           </a:xfrm>
           <a:prstGeom prst="rect">
             <a:avLst/>
@@ -5730,52 +6573,275 @@
           <a:noFill/>
         </p:spPr>
         <p:txBody>
-          <a:bodyPr wrap="square">
+          <a:bodyPr wrap="square" lIns="45720" rIns="45720" tIns="18288" bIns="18288" anchor="t">
             <a:spAutoFit/>
           </a:bodyPr>
           <a:lstStyle/>
           <a:p>
-            <a:pPr>
-              <a:lnSpc>
-                <a:spcPct val="150000"/>
-              </a:lnSpc>
-            </a:pPr>
-            <a:r>
-              <a:rPr sz="2000" b="1">
+            <a:pPr algn="l"/>
+            <a:r>
+              <a:rPr sz="18000" b="1" i="0">
+                <a:solidFill>
+                  <a:srgbClr val="F1F4F8"/>
+                </a:solidFill>
+                <a:latin typeface="Calibri"/>
+              </a:rPr>
+              <a:t>05</a:t>
+            </a:r>
+          </a:p>
+        </p:txBody>
+      </p:sp>
+      <p:sp>
+        <p:nvSpPr>
+          <p:cNvPr id="5" name="TextBox 4"/>
+          <p:cNvSpPr txBox="1"/>
+          <p:nvPr/>
+        </p:nvSpPr>
+        <p:spPr>
+          <a:xfrm>
+            <a:off x="457200" y="3200400"/>
+            <a:ext cx="2286000" cy="457200"/>
+          </a:xfrm>
+          <a:prstGeom prst="rect">
+            <a:avLst/>
+          </a:prstGeom>
+          <a:noFill/>
+        </p:spPr>
+        <p:txBody>
+          <a:bodyPr wrap="square" lIns="45720" rIns="45720" tIns="18288" bIns="18288" anchor="t">
+            <a:spAutoFit/>
+          </a:bodyPr>
+          <a:lstStyle/>
+          <a:p>
+            <a:pPr algn="l"/>
+            <a:r>
+              <a:rPr sz="1800" b="1" i="1">
                 <a:solidFill>
                   <a:srgbClr val="00A0B0"/>
                 </a:solidFill>
                 <a:latin typeface="Calibri"/>
               </a:rPr>
-              <a:t>▸  </a:t>
-            </a:r>
-            <a:r>
-              <a:rPr sz="2000">
+              <a:t>obiettivi</a:t>
+            </a:r>
+          </a:p>
+        </p:txBody>
+      </p:sp>
+      <p:sp>
+        <p:nvSpPr>
+          <p:cNvPr id="6" name="Oval 5"/>
+          <p:cNvSpPr/>
+          <p:nvPr/>
+        </p:nvSpPr>
+        <p:spPr>
+          <a:xfrm>
+            <a:off x="3200400" y="1188720"/>
+            <a:ext cx="548640" cy="548640"/>
+          </a:xfrm>
+          <a:prstGeom prst="ellipse">
+            <a:avLst/>
+          </a:prstGeom>
+          <a:solidFill>
+            <a:srgbClr val="00A0B0"/>
+          </a:solidFill>
+          <a:ln>
+            <a:noFill/>
+          </a:ln>
+        </p:spPr>
+        <p:style>
+          <a:lnRef idx="1">
+            <a:schemeClr val="accent1"/>
+          </a:lnRef>
+          <a:fillRef idx="3">
+            <a:schemeClr val="accent1"/>
+          </a:fillRef>
+          <a:effectRef idx="2">
+            <a:schemeClr val="accent1"/>
+          </a:effectRef>
+          <a:fontRef idx="minor">
+            <a:schemeClr val="lt1"/>
+          </a:fontRef>
+        </p:style>
+        <p:txBody>
+          <a:bodyPr rtlCol="0" anchor="ctr"/>
+          <a:lstStyle/>
+          <a:p>
+            <a:pPr algn="ctr"/>
+          </a:p>
+        </p:txBody>
+      </p:sp>
+      <p:sp>
+        <p:nvSpPr>
+          <p:cNvPr id="7" name="TextBox 6"/>
+          <p:cNvSpPr txBox="1"/>
+          <p:nvPr/>
+        </p:nvSpPr>
+        <p:spPr>
+          <a:xfrm>
+            <a:off x="3200400" y="1188720"/>
+            <a:ext cx="548640" cy="548640"/>
+          </a:xfrm>
+          <a:prstGeom prst="rect">
+            <a:avLst/>
+          </a:prstGeom>
+          <a:noFill/>
+        </p:spPr>
+        <p:txBody>
+          <a:bodyPr wrap="square" lIns="45720" rIns="45720" tIns="18288" bIns="18288" anchor="ctr">
+            <a:spAutoFit/>
+          </a:bodyPr>
+          <a:lstStyle/>
+          <a:p>
+            <a:pPr algn="ctr"/>
+            <a:r>
+              <a:rPr sz="1600" b="1" i="0">
+                <a:solidFill>
+                  <a:srgbClr val="FFFFFF"/>
+                </a:solidFill>
+                <a:latin typeface="Calibri"/>
+              </a:rPr>
+              <a:t>1</a:t>
+            </a:r>
+          </a:p>
+        </p:txBody>
+      </p:sp>
+      <p:sp>
+        <p:nvSpPr>
+          <p:cNvPr id="8" name="TextBox 7"/>
+          <p:cNvSpPr txBox="1"/>
+          <p:nvPr/>
+        </p:nvSpPr>
+        <p:spPr>
+          <a:xfrm>
+            <a:off x="4023360" y="1261872"/>
+            <a:ext cx="7772400" cy="548640"/>
+          </a:xfrm>
+          <a:prstGeom prst="rect">
+            <a:avLst/>
+          </a:prstGeom>
+          <a:noFill/>
+        </p:spPr>
+        <p:txBody>
+          <a:bodyPr wrap="square" lIns="45720" rIns="45720" tIns="18288" bIns="18288" anchor="ctr">
+            <a:spAutoFit/>
+          </a:bodyPr>
+          <a:lstStyle/>
+          <a:p>
+            <a:pPr algn="l"/>
+            <a:r>
+              <a:rPr sz="1600" b="0" i="0">
                 <a:solidFill>
                   <a:srgbClr val="1A1A2E"/>
                 </a:solidFill>
                 <a:latin typeface="Calibri"/>
               </a:rPr>
-              <a:t>Capire perché documentare la sicurezza è un requisito (non burocrazia)</a:t>
-            </a:r>
-          </a:p>
-          <a:p>
-            <a:pPr>
-              <a:lnSpc>
-                <a:spcPct val="150000"/>
-              </a:lnSpc>
-            </a:pPr>
-            <a:r>
-              <a:rPr sz="2000" b="1">
-                <a:solidFill>
-                  <a:srgbClr val="00A0B0"/>
-                </a:solidFill>
-                <a:latin typeface="Calibri"/>
-              </a:rPr>
-              <a:t>▸  </a:t>
-            </a:r>
-            <a:r>
-              <a:rPr sz="2000">
+              <a:t>Capire perché documentare la sicurezza è un requisito</a:t>
+            </a:r>
+          </a:p>
+        </p:txBody>
+      </p:sp>
+      <p:sp>
+        <p:nvSpPr>
+          <p:cNvPr id="9" name="Oval 8"/>
+          <p:cNvSpPr/>
+          <p:nvPr/>
+        </p:nvSpPr>
+        <p:spPr>
+          <a:xfrm>
+            <a:off x="3200400" y="1965960"/>
+            <a:ext cx="548640" cy="548640"/>
+          </a:xfrm>
+          <a:prstGeom prst="ellipse">
+            <a:avLst/>
+          </a:prstGeom>
+          <a:solidFill>
+            <a:srgbClr val="00A0B0"/>
+          </a:solidFill>
+          <a:ln>
+            <a:noFill/>
+          </a:ln>
+        </p:spPr>
+        <p:style>
+          <a:lnRef idx="1">
+            <a:schemeClr val="accent1"/>
+          </a:lnRef>
+          <a:fillRef idx="3">
+            <a:schemeClr val="accent1"/>
+          </a:fillRef>
+          <a:effectRef idx="2">
+            <a:schemeClr val="accent1"/>
+          </a:effectRef>
+          <a:fontRef idx="minor">
+            <a:schemeClr val="lt1"/>
+          </a:fontRef>
+        </p:style>
+        <p:txBody>
+          <a:bodyPr rtlCol="0" anchor="ctr"/>
+          <a:lstStyle/>
+          <a:p>
+            <a:pPr algn="ctr"/>
+          </a:p>
+        </p:txBody>
+      </p:sp>
+      <p:sp>
+        <p:nvSpPr>
+          <p:cNvPr id="10" name="TextBox 9"/>
+          <p:cNvSpPr txBox="1"/>
+          <p:nvPr/>
+        </p:nvSpPr>
+        <p:spPr>
+          <a:xfrm>
+            <a:off x="3200400" y="1965960"/>
+            <a:ext cx="548640" cy="548640"/>
+          </a:xfrm>
+          <a:prstGeom prst="rect">
+            <a:avLst/>
+          </a:prstGeom>
+          <a:noFill/>
+        </p:spPr>
+        <p:txBody>
+          <a:bodyPr wrap="square" lIns="45720" rIns="45720" tIns="18288" bIns="18288" anchor="ctr">
+            <a:spAutoFit/>
+          </a:bodyPr>
+          <a:lstStyle/>
+          <a:p>
+            <a:pPr algn="ctr"/>
+            <a:r>
+              <a:rPr sz="1600" b="1" i="0">
+                <a:solidFill>
+                  <a:srgbClr val="FFFFFF"/>
+                </a:solidFill>
+                <a:latin typeface="Calibri"/>
+              </a:rPr>
+              <a:t>2</a:t>
+            </a:r>
+          </a:p>
+        </p:txBody>
+      </p:sp>
+      <p:sp>
+        <p:nvSpPr>
+          <p:cNvPr id="11" name="TextBox 10"/>
+          <p:cNvSpPr txBox="1"/>
+          <p:nvPr/>
+        </p:nvSpPr>
+        <p:spPr>
+          <a:xfrm>
+            <a:off x="4023360" y="2039112"/>
+            <a:ext cx="7772400" cy="548640"/>
+          </a:xfrm>
+          <a:prstGeom prst="rect">
+            <a:avLst/>
+          </a:prstGeom>
+          <a:noFill/>
+        </p:spPr>
+        <p:txBody>
+          <a:bodyPr wrap="square" lIns="45720" rIns="45720" tIns="18288" bIns="18288" anchor="ctr">
+            <a:spAutoFit/>
+          </a:bodyPr>
+          <a:lstStyle/>
+          <a:p>
+            <a:pPr algn="l"/>
+            <a:r>
+              <a:rPr sz="1600" b="0" i="0">
                 <a:solidFill>
                   <a:srgbClr val="1A1A2E"/>
                 </a:solidFill>
@@ -5784,23 +6850,111 @@
               <a:t>Strutturare un documento SECURITY.md per un progetto</a:t>
             </a:r>
           </a:p>
-          <a:p>
-            <a:pPr>
-              <a:lnSpc>
-                <a:spcPct val="150000"/>
-              </a:lnSpc>
-            </a:pPr>
-            <a:r>
-              <a:rPr sz="2000" b="1">
-                <a:solidFill>
-                  <a:srgbClr val="00A0B0"/>
-                </a:solidFill>
-                <a:latin typeface="Calibri"/>
-              </a:rPr>
-              <a:t>▸  </a:t>
-            </a:r>
-            <a:r>
-              <a:rPr sz="2000">
+        </p:txBody>
+      </p:sp>
+      <p:sp>
+        <p:nvSpPr>
+          <p:cNvPr id="12" name="Oval 11"/>
+          <p:cNvSpPr/>
+          <p:nvPr/>
+        </p:nvSpPr>
+        <p:spPr>
+          <a:xfrm>
+            <a:off x="3200400" y="2743200"/>
+            <a:ext cx="548640" cy="548640"/>
+          </a:xfrm>
+          <a:prstGeom prst="ellipse">
+            <a:avLst/>
+          </a:prstGeom>
+          <a:solidFill>
+            <a:srgbClr val="00A0B0"/>
+          </a:solidFill>
+          <a:ln>
+            <a:noFill/>
+          </a:ln>
+        </p:spPr>
+        <p:style>
+          <a:lnRef idx="1">
+            <a:schemeClr val="accent1"/>
+          </a:lnRef>
+          <a:fillRef idx="3">
+            <a:schemeClr val="accent1"/>
+          </a:fillRef>
+          <a:effectRef idx="2">
+            <a:schemeClr val="accent1"/>
+          </a:effectRef>
+          <a:fontRef idx="minor">
+            <a:schemeClr val="lt1"/>
+          </a:fontRef>
+        </p:style>
+        <p:txBody>
+          <a:bodyPr rtlCol="0" anchor="ctr"/>
+          <a:lstStyle/>
+          <a:p>
+            <a:pPr algn="ctr"/>
+          </a:p>
+        </p:txBody>
+      </p:sp>
+      <p:sp>
+        <p:nvSpPr>
+          <p:cNvPr id="13" name="TextBox 12"/>
+          <p:cNvSpPr txBox="1"/>
+          <p:nvPr/>
+        </p:nvSpPr>
+        <p:spPr>
+          <a:xfrm>
+            <a:off x="3200400" y="2743200"/>
+            <a:ext cx="548640" cy="548640"/>
+          </a:xfrm>
+          <a:prstGeom prst="rect">
+            <a:avLst/>
+          </a:prstGeom>
+          <a:noFill/>
+        </p:spPr>
+        <p:txBody>
+          <a:bodyPr wrap="square" lIns="45720" rIns="45720" tIns="18288" bIns="18288" anchor="ctr">
+            <a:spAutoFit/>
+          </a:bodyPr>
+          <a:lstStyle/>
+          <a:p>
+            <a:pPr algn="ctr"/>
+            <a:r>
+              <a:rPr sz="1600" b="1" i="0">
+                <a:solidFill>
+                  <a:srgbClr val="FFFFFF"/>
+                </a:solidFill>
+                <a:latin typeface="Calibri"/>
+              </a:rPr>
+              <a:t>3</a:t>
+            </a:r>
+          </a:p>
+        </p:txBody>
+      </p:sp>
+      <p:sp>
+        <p:nvSpPr>
+          <p:cNvPr id="14" name="TextBox 13"/>
+          <p:cNvSpPr txBox="1"/>
+          <p:nvPr/>
+        </p:nvSpPr>
+        <p:spPr>
+          <a:xfrm>
+            <a:off x="4023360" y="2816352"/>
+            <a:ext cx="7772400" cy="548640"/>
+          </a:xfrm>
+          <a:prstGeom prst="rect">
+            <a:avLst/>
+          </a:prstGeom>
+          <a:noFill/>
+        </p:spPr>
+        <p:txBody>
+          <a:bodyPr wrap="square" lIns="45720" rIns="45720" tIns="18288" bIns="18288" anchor="ctr">
+            <a:spAutoFit/>
+          </a:bodyPr>
+          <a:lstStyle/>
+          <a:p>
+            <a:pPr algn="l"/>
+            <a:r>
+              <a:rPr sz="1600" b="0" i="0">
                 <a:solidFill>
                   <a:srgbClr val="1A1A2E"/>
                 </a:solidFill>
@@ -5809,23 +6963,111 @@
               <a:t>Conoscere i 7 errori tipici del codice generato da IA</a:t>
             </a:r>
           </a:p>
-          <a:p>
-            <a:pPr>
-              <a:lnSpc>
-                <a:spcPct val="150000"/>
-              </a:lnSpc>
-            </a:pPr>
-            <a:r>
-              <a:rPr sz="2000" b="1">
-                <a:solidFill>
-                  <a:srgbClr val="00A0B0"/>
-                </a:solidFill>
-                <a:latin typeface="Calibri"/>
-              </a:rPr>
-              <a:t>▸  </a:t>
-            </a:r>
-            <a:r>
-              <a:rPr sz="2000">
+        </p:txBody>
+      </p:sp>
+      <p:sp>
+        <p:nvSpPr>
+          <p:cNvPr id="15" name="Oval 14"/>
+          <p:cNvSpPr/>
+          <p:nvPr/>
+        </p:nvSpPr>
+        <p:spPr>
+          <a:xfrm>
+            <a:off x="3200400" y="3520440"/>
+            <a:ext cx="548640" cy="548640"/>
+          </a:xfrm>
+          <a:prstGeom prst="ellipse">
+            <a:avLst/>
+          </a:prstGeom>
+          <a:solidFill>
+            <a:srgbClr val="00A0B0"/>
+          </a:solidFill>
+          <a:ln>
+            <a:noFill/>
+          </a:ln>
+        </p:spPr>
+        <p:style>
+          <a:lnRef idx="1">
+            <a:schemeClr val="accent1"/>
+          </a:lnRef>
+          <a:fillRef idx="3">
+            <a:schemeClr val="accent1"/>
+          </a:fillRef>
+          <a:effectRef idx="2">
+            <a:schemeClr val="accent1"/>
+          </a:effectRef>
+          <a:fontRef idx="minor">
+            <a:schemeClr val="lt1"/>
+          </a:fontRef>
+        </p:style>
+        <p:txBody>
+          <a:bodyPr rtlCol="0" anchor="ctr"/>
+          <a:lstStyle/>
+          <a:p>
+            <a:pPr algn="ctr"/>
+          </a:p>
+        </p:txBody>
+      </p:sp>
+      <p:sp>
+        <p:nvSpPr>
+          <p:cNvPr id="16" name="TextBox 15"/>
+          <p:cNvSpPr txBox="1"/>
+          <p:nvPr/>
+        </p:nvSpPr>
+        <p:spPr>
+          <a:xfrm>
+            <a:off x="3200400" y="3520440"/>
+            <a:ext cx="548640" cy="548640"/>
+          </a:xfrm>
+          <a:prstGeom prst="rect">
+            <a:avLst/>
+          </a:prstGeom>
+          <a:noFill/>
+        </p:spPr>
+        <p:txBody>
+          <a:bodyPr wrap="square" lIns="45720" rIns="45720" tIns="18288" bIns="18288" anchor="ctr">
+            <a:spAutoFit/>
+          </a:bodyPr>
+          <a:lstStyle/>
+          <a:p>
+            <a:pPr algn="ctr"/>
+            <a:r>
+              <a:rPr sz="1600" b="1" i="0">
+                <a:solidFill>
+                  <a:srgbClr val="FFFFFF"/>
+                </a:solidFill>
+                <a:latin typeface="Calibri"/>
+              </a:rPr>
+              <a:t>4</a:t>
+            </a:r>
+          </a:p>
+        </p:txBody>
+      </p:sp>
+      <p:sp>
+        <p:nvSpPr>
+          <p:cNvPr id="17" name="TextBox 16"/>
+          <p:cNvSpPr txBox="1"/>
+          <p:nvPr/>
+        </p:nvSpPr>
+        <p:spPr>
+          <a:xfrm>
+            <a:off x="4023360" y="3593592"/>
+            <a:ext cx="7772400" cy="548640"/>
+          </a:xfrm>
+          <a:prstGeom prst="rect">
+            <a:avLst/>
+          </a:prstGeom>
+          <a:noFill/>
+        </p:spPr>
+        <p:txBody>
+          <a:bodyPr wrap="square" lIns="45720" rIns="45720" tIns="18288" bIns="18288" anchor="ctr">
+            <a:spAutoFit/>
+          </a:bodyPr>
+          <a:lstStyle/>
+          <a:p>
+            <a:pPr algn="l"/>
+            <a:r>
+              <a:rPr sz="1600" b="0" i="0">
                 <a:solidFill>
                   <a:srgbClr val="1A1A2E"/>
                 </a:solidFill>
@@ -5834,23 +7076,111 @@
               <a:t>Applicare il workflow di validazione in 4 step</a:t>
             </a:r>
           </a:p>
-          <a:p>
-            <a:pPr>
-              <a:lnSpc>
-                <a:spcPct val="150000"/>
-              </a:lnSpc>
-            </a:pPr>
-            <a:r>
-              <a:rPr sz="2000" b="1">
-                <a:solidFill>
-                  <a:srgbClr val="00A0B0"/>
-                </a:solidFill>
-                <a:latin typeface="Calibri"/>
-              </a:rPr>
-              <a:t>▸  </a:t>
-            </a:r>
-            <a:r>
-              <a:rPr sz="2000">
+        </p:txBody>
+      </p:sp>
+      <p:sp>
+        <p:nvSpPr>
+          <p:cNvPr id="18" name="Oval 17"/>
+          <p:cNvSpPr/>
+          <p:nvPr/>
+        </p:nvSpPr>
+        <p:spPr>
+          <a:xfrm>
+            <a:off x="3200400" y="4297680"/>
+            <a:ext cx="548640" cy="548640"/>
+          </a:xfrm>
+          <a:prstGeom prst="ellipse">
+            <a:avLst/>
+          </a:prstGeom>
+          <a:solidFill>
+            <a:srgbClr val="00A0B0"/>
+          </a:solidFill>
+          <a:ln>
+            <a:noFill/>
+          </a:ln>
+        </p:spPr>
+        <p:style>
+          <a:lnRef idx="1">
+            <a:schemeClr val="accent1"/>
+          </a:lnRef>
+          <a:fillRef idx="3">
+            <a:schemeClr val="accent1"/>
+          </a:fillRef>
+          <a:effectRef idx="2">
+            <a:schemeClr val="accent1"/>
+          </a:effectRef>
+          <a:fontRef idx="minor">
+            <a:schemeClr val="lt1"/>
+          </a:fontRef>
+        </p:style>
+        <p:txBody>
+          <a:bodyPr rtlCol="0" anchor="ctr"/>
+          <a:lstStyle/>
+          <a:p>
+            <a:pPr algn="ctr"/>
+          </a:p>
+        </p:txBody>
+      </p:sp>
+      <p:sp>
+        <p:nvSpPr>
+          <p:cNvPr id="19" name="TextBox 18"/>
+          <p:cNvSpPr txBox="1"/>
+          <p:nvPr/>
+        </p:nvSpPr>
+        <p:spPr>
+          <a:xfrm>
+            <a:off x="3200400" y="4297680"/>
+            <a:ext cx="548640" cy="548640"/>
+          </a:xfrm>
+          <a:prstGeom prst="rect">
+            <a:avLst/>
+          </a:prstGeom>
+          <a:noFill/>
+        </p:spPr>
+        <p:txBody>
+          <a:bodyPr wrap="square" lIns="45720" rIns="45720" tIns="18288" bIns="18288" anchor="ctr">
+            <a:spAutoFit/>
+          </a:bodyPr>
+          <a:lstStyle/>
+          <a:p>
+            <a:pPr algn="ctr"/>
+            <a:r>
+              <a:rPr sz="1600" b="1" i="0">
+                <a:solidFill>
+                  <a:srgbClr val="FFFFFF"/>
+                </a:solidFill>
+                <a:latin typeface="Calibri"/>
+              </a:rPr>
+              <a:t>5</a:t>
+            </a:r>
+          </a:p>
+        </p:txBody>
+      </p:sp>
+      <p:sp>
+        <p:nvSpPr>
+          <p:cNvPr id="20" name="TextBox 19"/>
+          <p:cNvSpPr txBox="1"/>
+          <p:nvPr/>
+        </p:nvSpPr>
+        <p:spPr>
+          <a:xfrm>
+            <a:off x="4023360" y="4370832"/>
+            <a:ext cx="7772400" cy="548640"/>
+          </a:xfrm>
+          <a:prstGeom prst="rect">
+            <a:avLst/>
+          </a:prstGeom>
+          <a:noFill/>
+        </p:spPr>
+        <p:txBody>
+          <a:bodyPr wrap="square" lIns="45720" rIns="45720" tIns="18288" bIns="18288" anchor="ctr">
+            <a:spAutoFit/>
+          </a:bodyPr>
+          <a:lstStyle/>
+          <a:p>
+            <a:pPr algn="l"/>
+            <a:r>
+              <a:rPr sz="1600" b="0" i="0">
                 <a:solidFill>
                   <a:srgbClr val="1A1A2E"/>
                 </a:solidFill>
@@ -5863,7 +7193,7 @@
       </p:sp>
       <p:cxnSp>
         <p:nvCxnSpPr>
-          <p:cNvPr id="5" name="Connector 4"/>
+          <p:cNvPr id="21" name="Connector 20"/>
           <p:cNvCxnSpPr/>
           <p:nvPr/>
         </p:nvCxnSpPr>
@@ -5898,14 +7228,14 @@
       </p:cxnSp>
       <p:sp>
         <p:nvSpPr>
-          <p:cNvPr id="6" name="TextBox 5"/>
+          <p:cNvPr id="22" name="TextBox 21"/>
           <p:cNvSpPr txBox="1"/>
           <p:nvPr/>
         </p:nvSpPr>
         <p:spPr>
           <a:xfrm>
             <a:off x="457200" y="6473952"/>
-            <a:ext cx="7315200" cy="320040"/>
+            <a:ext cx="7315200" cy="292608"/>
           </a:xfrm>
           <a:prstGeom prst="rect">
             <a:avLst/>
@@ -5926,21 +7256,21 @@
                 </a:solidFill>
                 <a:latin typeface="Calibri"/>
               </a:rPr>
-              <a:t>Secure Coding · Corso IFTS STEM · A. Manneschi</a:t>
-            </a:r>
-          </a:p>
-        </p:txBody>
-      </p:sp>
-      <p:sp>
-        <p:nvSpPr>
-          <p:cNvPr id="7" name="TextBox 6"/>
+              <a:t>Secure Coding · Corso IFTS STEM · A. Manneschi · 2024/2025</a:t>
+            </a:r>
+          </a:p>
+        </p:txBody>
+      </p:sp>
+      <p:sp>
+        <p:nvSpPr>
+          <p:cNvPr id="23" name="TextBox 22"/>
           <p:cNvSpPr txBox="1"/>
           <p:nvPr/>
         </p:nvSpPr>
         <p:spPr>
           <a:xfrm>
             <a:off x="10515600" y="6473952"/>
-            <a:ext cx="1188720" cy="320040"/>
+            <a:ext cx="1188720" cy="292608"/>
           </a:xfrm>
           <a:prstGeom prst="rect">
             <a:avLst/>
@@ -5993,13 +7323,13 @@
         <p:spPr>
           <a:xfrm>
             <a:off x="0" y="0"/>
-            <a:ext cx="2286000" cy="6858000"/>
+            <a:ext cx="4114800" cy="6858000"/>
           </a:xfrm>
           <a:prstGeom prst="rect">
             <a:avLst/>
           </a:prstGeom>
           <a:solidFill>
-            <a:srgbClr val="0F2D52"/>
+            <a:srgbClr val="081B33"/>
           </a:solidFill>
           <a:ln>
             <a:noFill/>
@@ -6029,14 +7359,100 @@
       </p:sp>
       <p:sp>
         <p:nvSpPr>
-          <p:cNvPr id="3" name="TextBox 2"/>
+          <p:cNvPr id="3" name="Rectangle 2"/>
+          <p:cNvSpPr/>
+          <p:nvPr/>
+        </p:nvSpPr>
+        <p:spPr>
+          <a:xfrm>
+            <a:off x="4114800" y="0"/>
+            <a:ext cx="8046720" cy="6858000"/>
+          </a:xfrm>
+          <a:prstGeom prst="rect">
+            <a:avLst/>
+          </a:prstGeom>
+          <a:solidFill>
+            <a:srgbClr val="F1F4F8"/>
+          </a:solidFill>
+          <a:ln>
+            <a:noFill/>
+          </a:ln>
+        </p:spPr>
+        <p:style>
+          <a:lnRef idx="1">
+            <a:schemeClr val="accent1"/>
+          </a:lnRef>
+          <a:fillRef idx="3">
+            <a:schemeClr val="accent1"/>
+          </a:fillRef>
+          <a:effectRef idx="2">
+            <a:schemeClr val="accent1"/>
+          </a:effectRef>
+          <a:fontRef idx="minor">
+            <a:schemeClr val="lt1"/>
+          </a:fontRef>
+        </p:style>
+        <p:txBody>
+          <a:bodyPr rtlCol="0" anchor="ctr"/>
+          <a:lstStyle/>
+          <a:p>
+            <a:pPr algn="ctr"/>
+          </a:p>
+        </p:txBody>
+      </p:sp>
+      <p:sp>
+        <p:nvSpPr>
+          <p:cNvPr id="4" name="Rectangle 3"/>
+          <p:cNvSpPr/>
+          <p:nvPr/>
+        </p:nvSpPr>
+        <p:spPr>
+          <a:xfrm>
+            <a:off x="4114800" y="0"/>
+            <a:ext cx="137160" cy="6858000"/>
+          </a:xfrm>
+          <a:prstGeom prst="rect">
+            <a:avLst/>
+          </a:prstGeom>
+          <a:solidFill>
+            <a:srgbClr val="00A0B0"/>
+          </a:solidFill>
+          <a:ln>
+            <a:noFill/>
+          </a:ln>
+        </p:spPr>
+        <p:style>
+          <a:lnRef idx="1">
+            <a:schemeClr val="accent1"/>
+          </a:lnRef>
+          <a:fillRef idx="3">
+            <a:schemeClr val="accent1"/>
+          </a:fillRef>
+          <a:effectRef idx="2">
+            <a:schemeClr val="accent1"/>
+          </a:effectRef>
+          <a:fontRef idx="minor">
+            <a:schemeClr val="lt1"/>
+          </a:fontRef>
+        </p:style>
+        <p:txBody>
+          <a:bodyPr rtlCol="0" anchor="ctr"/>
+          <a:lstStyle/>
+          <a:p>
+            <a:pPr algn="ctr"/>
+          </a:p>
+        </p:txBody>
+      </p:sp>
+      <p:sp>
+        <p:nvSpPr>
+          <p:cNvPr id="5" name="TextBox 4"/>
           <p:cNvSpPr txBox="1"/>
           <p:nvPr/>
         </p:nvSpPr>
         <p:spPr>
           <a:xfrm>
-            <a:off x="274320" y="2286000"/>
-            <a:ext cx="1828800" cy="1828800"/>
+            <a:off x="274320" y="2103120"/>
+            <a:ext cx="3657600" cy="2286000"/>
           </a:xfrm>
           <a:prstGeom prst="rect">
             <a:avLst/>
@@ -6051,7 +7467,7 @@
           <a:p>
             <a:pPr algn="ctr"/>
             <a:r>
-              <a:rPr sz="12000" b="1" i="0">
+              <a:rPr sz="17000" b="1" i="0">
                 <a:solidFill>
                   <a:srgbClr val="00A0B0"/>
                 </a:solidFill>
@@ -6064,14 +7480,14 @@
       </p:sp>
       <p:sp>
         <p:nvSpPr>
-          <p:cNvPr id="4" name="TextBox 3"/>
+          <p:cNvPr id="6" name="TextBox 5"/>
           <p:cNvSpPr txBox="1"/>
           <p:nvPr/>
         </p:nvSpPr>
         <p:spPr>
           <a:xfrm>
-            <a:off x="2743200" y="2560320"/>
-            <a:ext cx="8961120" cy="1371600"/>
+            <a:off x="274320" y="4572000"/>
+            <a:ext cx="3657600" cy="457200"/>
           </a:xfrm>
           <a:prstGeom prst="rect">
             <a:avLst/>
@@ -6084,29 +7500,29 @@
           </a:bodyPr>
           <a:lstStyle/>
           <a:p>
-            <a:pPr algn="l"/>
-            <a:r>
-              <a:rPr sz="4200" b="1" i="0">
-                <a:solidFill>
-                  <a:srgbClr val="0F2D52"/>
-                </a:solidFill>
-                <a:latin typeface="Calibri"/>
-              </a:rPr>
-              <a:t>Documentazione di sicurezza</a:t>
-            </a:r>
-          </a:p>
-        </p:txBody>
-      </p:sp>
-      <p:sp>
-        <p:nvSpPr>
-          <p:cNvPr id="5" name="TextBox 4"/>
+            <a:pPr algn="ctr"/>
+            <a:r>
+              <a:rPr sz="2000" b="1" i="0">
+                <a:solidFill>
+                  <a:srgbClr val="6FD8E0"/>
+                </a:solidFill>
+                <a:latin typeface="Calibri"/>
+              </a:rPr>
+              <a:t>PARTE</a:t>
+            </a:r>
+          </a:p>
+        </p:txBody>
+      </p:sp>
+      <p:sp>
+        <p:nvSpPr>
+          <p:cNvPr id="7" name="TextBox 6"/>
           <p:cNvSpPr txBox="1"/>
           <p:nvPr/>
         </p:nvSpPr>
         <p:spPr>
           <a:xfrm>
-            <a:off x="2743200" y="3931920"/>
-            <a:ext cx="8961120" cy="1828800"/>
+            <a:off x="4572000" y="2286000"/>
+            <a:ext cx="7315200" cy="1645920"/>
           </a:xfrm>
           <a:prstGeom prst="rect">
             <a:avLst/>
@@ -6121,6 +7537,41 @@
           <a:p>
             <a:pPr algn="l"/>
             <a:r>
+              <a:rPr sz="4400" b="1" i="0">
+                <a:solidFill>
+                  <a:srgbClr val="0F2D52"/>
+                </a:solidFill>
+                <a:latin typeface="Calibri"/>
+              </a:rPr>
+              <a:t>Documentazione di sicurezza</a:t>
+            </a:r>
+          </a:p>
+        </p:txBody>
+      </p:sp>
+      <p:sp>
+        <p:nvSpPr>
+          <p:cNvPr id="8" name="TextBox 7"/>
+          <p:cNvSpPr txBox="1"/>
+          <p:nvPr/>
+        </p:nvSpPr>
+        <p:spPr>
+          <a:xfrm>
+            <a:off x="4572000" y="3931920"/>
+            <a:ext cx="7315200" cy="1828800"/>
+          </a:xfrm>
+          <a:prstGeom prst="rect">
+            <a:avLst/>
+          </a:prstGeom>
+          <a:noFill/>
+        </p:spPr>
+        <p:txBody>
+          <a:bodyPr wrap="square" lIns="45720" rIns="45720" tIns="18288" bIns="18288" anchor="t">
+            <a:spAutoFit/>
+          </a:bodyPr>
+          <a:lstStyle/>
+          <a:p>
+            <a:pPr algn="l"/>
+            <a:r>
               <a:rPr sz="1800" b="0" i="1">
                 <a:solidFill>
                   <a:srgbClr val="6B7280"/>
@@ -6134,7 +7585,7 @@
       </p:sp>
       <p:cxnSp>
         <p:nvCxnSpPr>
-          <p:cNvPr id="6" name="Connector 5"/>
+          <p:cNvPr id="9" name="Connector 8"/>
           <p:cNvCxnSpPr/>
           <p:nvPr/>
         </p:nvCxnSpPr>
@@ -6169,14 +7620,14 @@
       </p:cxnSp>
       <p:sp>
         <p:nvSpPr>
-          <p:cNvPr id="7" name="TextBox 6"/>
+          <p:cNvPr id="10" name="TextBox 9"/>
           <p:cNvSpPr txBox="1"/>
           <p:nvPr/>
         </p:nvSpPr>
         <p:spPr>
           <a:xfrm>
             <a:off x="457200" y="6473952"/>
-            <a:ext cx="7315200" cy="320040"/>
+            <a:ext cx="7315200" cy="292608"/>
           </a:xfrm>
           <a:prstGeom prst="rect">
             <a:avLst/>
@@ -6197,21 +7648,21 @@
                 </a:solidFill>
                 <a:latin typeface="Calibri"/>
               </a:rPr>
-              <a:t>Secure Coding · Corso IFTS STEM · A. Manneschi</a:t>
-            </a:r>
-          </a:p>
-        </p:txBody>
-      </p:sp>
-      <p:sp>
-        <p:nvSpPr>
-          <p:cNvPr id="8" name="TextBox 7"/>
+              <a:t>Secure Coding · Corso IFTS STEM · A. Manneschi · 2024/2025</a:t>
+            </a:r>
+          </a:p>
+        </p:txBody>
+      </p:sp>
+      <p:sp>
+        <p:nvSpPr>
+          <p:cNvPr id="11" name="TextBox 10"/>
           <p:cNvSpPr txBox="1"/>
           <p:nvPr/>
         </p:nvSpPr>
         <p:spPr>
           <a:xfrm>
             <a:off x="10515600" y="6473952"/>
-            <a:ext cx="1188720" cy="320040"/>
+            <a:ext cx="1188720" cy="292608"/>
           </a:xfrm>
           <a:prstGeom prst="rect">
             <a:avLst/>
@@ -6328,7 +7779,7 @@
                 </a:solidFill>
                 <a:latin typeface="Calibri"/>
               </a:rPr>
-              <a:t>Documentare la sicurezza: 3 motivi</a:t>
+              <a:t>📋  Documentare: 3 motivi</a:t>
             </a:r>
           </a:p>
         </p:txBody>
@@ -6341,7 +7792,7 @@
         </p:nvSpPr>
         <p:spPr>
           <a:xfrm>
-            <a:off x="640080" y="1005840"/>
+            <a:off x="640080" y="1097280"/>
             <a:ext cx="10972800" cy="5029200"/>
           </a:xfrm>
           <a:prstGeom prst="rect">
@@ -6359,6 +7810,9 @@
               <a:lnSpc>
                 <a:spcPct val="150000"/>
               </a:lnSpc>
+              <a:spcAft>
+                <a:spcPts val="400"/>
+              </a:spcAft>
             </a:pPr>
             <a:r>
               <a:rPr sz="2000" b="1">
@@ -6384,6 +7838,9 @@
               <a:lnSpc>
                 <a:spcPct val="150000"/>
               </a:lnSpc>
+              <a:spcAft>
+                <a:spcPts val="400"/>
+              </a:spcAft>
             </a:pPr>
             <a:r>
               <a:rPr sz="2000" b="1">
@@ -6409,6 +7866,9 @@
               <a:lnSpc>
                 <a:spcPct val="150000"/>
               </a:lnSpc>
+              <a:spcAft>
+                <a:spcPts val="400"/>
+              </a:spcAft>
             </a:pPr>
             <a:r>
               <a:rPr sz="2000" b="1">
@@ -6434,6 +7894,9 @@
               <a:lnSpc>
                 <a:spcPct val="150000"/>
               </a:lnSpc>
+              <a:spcAft>
+                <a:spcPts val="400"/>
+              </a:spcAft>
             </a:pPr>
             <a:r>
               <a:rPr sz="2000" b="1">
@@ -6459,6 +7922,9 @@
               <a:lnSpc>
                 <a:spcPct val="150000"/>
               </a:lnSpc>
+              <a:spcAft>
+                <a:spcPts val="400"/>
+              </a:spcAft>
             </a:pPr>
             <a:r>
               <a:rPr sz="2000" b="1">
@@ -6484,6 +7950,9 @@
               <a:lnSpc>
                 <a:spcPct val="150000"/>
               </a:lnSpc>
+              <a:spcAft>
+                <a:spcPts val="400"/>
+              </a:spcAft>
             </a:pPr>
             <a:r>
               <a:rPr sz="2000" b="1">
@@ -6509,6 +7978,9 @@
               <a:lnSpc>
                 <a:spcPct val="150000"/>
               </a:lnSpc>
+              <a:spcAft>
+                <a:spcPts val="400"/>
+              </a:spcAft>
             </a:pPr>
             <a:r>
               <a:rPr sz="2000" b="1">
@@ -6534,6 +8006,9 @@
               <a:lnSpc>
                 <a:spcPct val="150000"/>
               </a:lnSpc>
+              <a:spcAft>
+                <a:spcPts val="400"/>
+              </a:spcAft>
             </a:pPr>
             <a:r>
               <a:rPr sz="2000" b="1">
@@ -6559,6 +8034,9 @@
               <a:lnSpc>
                 <a:spcPct val="150000"/>
               </a:lnSpc>
+              <a:spcAft>
+                <a:spcPts val="400"/>
+              </a:spcAft>
             </a:pPr>
             <a:r>
               <a:rPr sz="2000" b="1">
@@ -6625,7 +8103,7 @@
         <p:spPr>
           <a:xfrm>
             <a:off x="457200" y="6473952"/>
-            <a:ext cx="7315200" cy="320040"/>
+            <a:ext cx="7315200" cy="292608"/>
           </a:xfrm>
           <a:prstGeom prst="rect">
             <a:avLst/>
@@ -6646,7 +8124,7 @@
                 </a:solidFill>
                 <a:latin typeface="Calibri"/>
               </a:rPr>
-              <a:t>Secure Coding · Corso IFTS STEM · A. Manneschi</a:t>
+              <a:t>Secure Coding · Corso IFTS STEM · A. Manneschi · 2024/2025</a:t>
             </a:r>
           </a:p>
         </p:txBody>
@@ -6660,7 +8138,7 @@
         <p:spPr>
           <a:xfrm>
             <a:off x="10515600" y="6473952"/>
-            <a:ext cx="1188720" cy="320040"/>
+            <a:ext cx="1188720" cy="292608"/>
           </a:xfrm>
           <a:prstGeom prst="rect">
             <a:avLst/>
@@ -6782,254 +8260,494 @@
           </a:p>
         </p:txBody>
       </p:sp>
-      <p:sp>
-        <p:nvSpPr>
-          <p:cNvPr id="4" name="TextBox 3"/>
-          <p:cNvSpPr txBox="1"/>
-          <p:nvPr/>
-        </p:nvSpPr>
-        <p:spPr>
-          <a:xfrm>
-            <a:off x="640080" y="1005840"/>
-            <a:ext cx="10972800" cy="5029200"/>
-          </a:xfrm>
-          <a:prstGeom prst="rect">
-            <a:avLst/>
-          </a:prstGeom>
-          <a:noFill/>
-        </p:spPr>
-        <p:txBody>
-          <a:bodyPr wrap="square">
-            <a:spAutoFit/>
-          </a:bodyPr>
-          <a:lstStyle/>
-          <a:p>
-            <a:pPr>
-              <a:lnSpc>
-                <a:spcPct val="150000"/>
-              </a:lnSpc>
-            </a:pPr>
-            <a:r>
-              <a:rPr sz="1600" b="1">
-                <a:solidFill>
-                  <a:srgbClr val="00A0B0"/>
-                </a:solidFill>
-                <a:latin typeface="Calibri"/>
-              </a:rPr>
-              <a:t>▸  </a:t>
-            </a:r>
-            <a:r>
-              <a:rPr sz="1600">
-                <a:solidFill>
-                  <a:srgbClr val="1A1A2E"/>
-                </a:solidFill>
-                <a:latin typeface="Calibri"/>
-              </a:rPr>
-              <a:t>1. Informazioni generali (progetto, owner, dati trattati, norme)</a:t>
-            </a:r>
-          </a:p>
-          <a:p>
-            <a:pPr>
-              <a:lnSpc>
-                <a:spcPct val="150000"/>
-              </a:lnSpc>
-            </a:pPr>
-            <a:r>
-              <a:rPr sz="1600" b="1">
-                <a:solidFill>
-                  <a:srgbClr val="00A0B0"/>
-                </a:solidFill>
-                <a:latin typeface="Calibri"/>
-              </a:rPr>
-              <a:t>▸  </a:t>
-            </a:r>
-            <a:r>
-              <a:rPr sz="1600">
-                <a:solidFill>
-                  <a:srgbClr val="1A1A2E"/>
-                </a:solidFill>
-                <a:latin typeface="Calibri"/>
-              </a:rPr>
-              <a:t>2. Threat model (DFD + tabella STRIDE)</a:t>
-            </a:r>
-          </a:p>
-          <a:p>
-            <a:pPr>
-              <a:lnSpc>
-                <a:spcPct val="150000"/>
-              </a:lnSpc>
-            </a:pPr>
-            <a:r>
-              <a:rPr sz="1600" b="1">
-                <a:solidFill>
-                  <a:srgbClr val="00A0B0"/>
-                </a:solidFill>
-                <a:latin typeface="Calibri"/>
-              </a:rPr>
-              <a:t>▸  </a:t>
-            </a:r>
-            <a:r>
-              <a:rPr sz="1600">
-                <a:solidFill>
-                  <a:srgbClr val="1A1A2E"/>
-                </a:solidFill>
-                <a:latin typeface="Calibri"/>
-              </a:rPr>
-              <a:t>3. Controlli applicati (auth, authz, validation, header, cifratura)</a:t>
-            </a:r>
-          </a:p>
-          <a:p>
-            <a:pPr>
-              <a:lnSpc>
-                <a:spcPct val="150000"/>
-              </a:lnSpc>
-            </a:pPr>
-            <a:r>
-              <a:rPr sz="1600" b="1">
-                <a:solidFill>
-                  <a:srgbClr val="00A0B0"/>
-                </a:solidFill>
-                <a:latin typeface="Calibri"/>
-              </a:rPr>
-              <a:t>▸  </a:t>
-            </a:r>
-            <a:r>
-              <a:rPr sz="1600">
-                <a:solidFill>
-                  <a:srgbClr val="1A1A2E"/>
-                </a:solidFill>
-                <a:latin typeface="Calibri"/>
-              </a:rPr>
-              <a:t>4. Vulnerabilità note e debt tecnico (trasparenza)</a:t>
-            </a:r>
-          </a:p>
-          <a:p>
-            <a:pPr>
-              <a:lnSpc>
-                <a:spcPct val="150000"/>
-              </a:lnSpc>
-            </a:pPr>
-            <a:r>
-              <a:rPr sz="1600" b="1">
-                <a:solidFill>
-                  <a:srgbClr val="00A0B0"/>
-                </a:solidFill>
-                <a:latin typeface="Calibri"/>
-              </a:rPr>
-              <a:t>▸  </a:t>
-            </a:r>
-            <a:r>
-              <a:rPr sz="1600">
-                <a:solidFill>
-                  <a:srgbClr val="1A1A2E"/>
-                </a:solidFill>
-                <a:latin typeface="Calibri"/>
-              </a:rPr>
-              <a:t>5. Test di sicurezza (automatici + pentest)</a:t>
-            </a:r>
-          </a:p>
-          <a:p>
-            <a:pPr>
-              <a:lnSpc>
-                <a:spcPct val="150000"/>
-              </a:lnSpc>
-            </a:pPr>
-            <a:r>
-              <a:rPr sz="1600" b="1">
-                <a:solidFill>
-                  <a:srgbClr val="00A0B0"/>
-                </a:solidFill>
-                <a:latin typeface="Calibri"/>
-              </a:rPr>
-              <a:t>▸  </a:t>
-            </a:r>
-            <a:r>
-              <a:rPr sz="1600">
-                <a:solidFill>
-                  <a:srgbClr val="1A1A2E"/>
-                </a:solidFill>
-                <a:latin typeface="Calibri"/>
-              </a:rPr>
-              <a:t>6. Incident response (contatti emergenza, playbook)</a:t>
-            </a:r>
-          </a:p>
-          <a:p>
-            <a:pPr>
-              <a:lnSpc>
-                <a:spcPct val="150000"/>
-              </a:lnSpc>
-            </a:pPr>
-            <a:r>
-              <a:rPr sz="1600" b="1">
-                <a:solidFill>
-                  <a:srgbClr val="00A0B0"/>
-                </a:solidFill>
-                <a:latin typeface="Calibri"/>
-              </a:rPr>
-              <a:t>▸  </a:t>
-            </a:r>
-            <a:r>
-              <a:rPr sz="1600">
-                <a:solidFill>
-                  <a:srgbClr val="1A1A2E"/>
-                </a:solidFill>
-                <a:latin typeface="Calibri"/>
-              </a:rPr>
-              <a:t>7. Compliance (GDPR, NIS 2, CRA)</a:t>
-            </a:r>
-          </a:p>
-          <a:p>
-            <a:pPr>
-              <a:lnSpc>
-                <a:spcPct val="150000"/>
-              </a:lnSpc>
-            </a:pPr>
-            <a:r>
-              <a:rPr sz="1600" b="1">
-                <a:solidFill>
-                  <a:srgbClr val="00A0B0"/>
-                </a:solidFill>
-                <a:latin typeface="Calibri"/>
-              </a:rPr>
-              <a:t>▸  </a:t>
-            </a:r>
-            <a:r>
-              <a:rPr sz="1600">
-                <a:solidFill>
-                  <a:srgbClr val="1A1A2E"/>
-                </a:solidFill>
-                <a:latin typeface="Calibri"/>
-              </a:rPr>
-              <a:t>8. Approvazione e revisione</a:t>
-            </a:r>
-          </a:p>
-          <a:p>
-            <a:pPr>
-              <a:lnSpc>
-                <a:spcPct val="150000"/>
-              </a:lnSpc>
-            </a:pPr>
-            <a:r>
-              <a:rPr sz="1600" b="1">
-                <a:solidFill>
-                  <a:srgbClr val="00A0B0"/>
-                </a:solidFill>
-                <a:latin typeface="Calibri"/>
-              </a:rPr>
-              <a:t>▸  </a:t>
-            </a:r>
-            <a:r>
-              <a:rPr sz="1600">
-                <a:solidFill>
-                  <a:srgbClr val="1A1A2E"/>
-                </a:solidFill>
-                <a:latin typeface="Calibri"/>
-              </a:rPr>
-              <a:t>9. Allegati (DPIA, pentest report, SBOM)</a:t>
-            </a:r>
-          </a:p>
-        </p:txBody>
-      </p:sp>
+      <p:graphicFrame>
+        <p:nvGraphicFramePr>
+          <p:cNvPr id="4" name="Table 3"/>
+          <p:cNvGraphicFramePr>
+            <a:graphicFrameLocks noGrp="1"/>
+          </p:cNvGraphicFramePr>
+          <p:nvPr/>
+        </p:nvGraphicFramePr>
+        <p:xfrm>
+          <a:off x="457200" y="1188720"/>
+          <a:ext cx="11247120" cy="4937760"/>
+        </p:xfrm>
+        <a:graphic>
+          <a:graphicData uri="http://schemas.openxmlformats.org/drawingml/2006/table">
+            <a:tbl>
+              <a:tblPr firstRow="1" bandRow="1">
+                <a:tableStyleId>{5C22544A-7EE6-4342-B048-85BDC9FD1C3A}</a:tableStyleId>
+              </a:tblPr>
+              <a:tblGrid>
+                <a:gridCol w="5623560"/>
+                <a:gridCol w="5623560"/>
+              </a:tblGrid>
+              <a:tr h="493776">
+                <a:tc>
+                  <a:txBody>
+                    <a:bodyPr/>
+                    <a:lstStyle/>
+                    <a:p>
+                      <a:pPr algn="ctr"/>
+                      <a:r>
+                        <a:rPr sz="1300" b="1">
+                          <a:solidFill>
+                            <a:srgbClr val="FFFFFF"/>
+                          </a:solidFill>
+                          <a:latin typeface="Calibri"/>
+                        </a:rPr>
+                        <a:t>#</a:t>
+                      </a:r>
+                    </a:p>
+                  </a:txBody>
+                  <a:tcPr>
+                    <a:solidFill>
+                      <a:srgbClr val="0F2D52"/>
+                    </a:solidFill>
+                  </a:tcPr>
+                </a:tc>
+                <a:tc>
+                  <a:txBody>
+                    <a:bodyPr/>
+                    <a:lstStyle/>
+                    <a:p>
+                      <a:pPr algn="ctr"/>
+                      <a:r>
+                        <a:rPr sz="1300" b="1">
+                          <a:solidFill>
+                            <a:srgbClr val="FFFFFF"/>
+                          </a:solidFill>
+                          <a:latin typeface="Calibri"/>
+                        </a:rPr>
+                        <a:t>Sezione</a:t>
+                      </a:r>
+                    </a:p>
+                  </a:txBody>
+                  <a:tcPr>
+                    <a:solidFill>
+                      <a:srgbClr val="0F2D52"/>
+                    </a:solidFill>
+                  </a:tcPr>
+                </a:tc>
+              </a:tr>
+              <a:tr h="493776">
+                <a:tc>
+                  <a:txBody>
+                    <a:bodyPr/>
+                    <a:lstStyle/>
+                    <a:p>
+                      <a:r>
+                        <a:rPr sz="1100">
+                          <a:solidFill>
+                            <a:srgbClr val="1A1A2E"/>
+                          </a:solidFill>
+                          <a:latin typeface="Calibri"/>
+                        </a:rPr>
+                        <a:t>1</a:t>
+                      </a:r>
+                    </a:p>
+                  </a:txBody>
+                  <a:tcPr>
+                    <a:solidFill>
+                      <a:srgbClr val="F1F4F8"/>
+                    </a:solidFill>
+                  </a:tcPr>
+                </a:tc>
+                <a:tc>
+                  <a:txBody>
+                    <a:bodyPr/>
+                    <a:lstStyle/>
+                    <a:p>
+                      <a:r>
+                        <a:rPr sz="1100">
+                          <a:solidFill>
+                            <a:srgbClr val="1A1A2E"/>
+                          </a:solidFill>
+                          <a:latin typeface="Calibri"/>
+                        </a:rPr>
+                        <a:t>Informazioni generali (progetto, owner, dati)</a:t>
+                      </a:r>
+                    </a:p>
+                  </a:txBody>
+                  <a:tcPr>
+                    <a:solidFill>
+                      <a:srgbClr val="F1F4F8"/>
+                    </a:solidFill>
+                  </a:tcPr>
+                </a:tc>
+              </a:tr>
+              <a:tr h="493776">
+                <a:tc>
+                  <a:txBody>
+                    <a:bodyPr/>
+                    <a:lstStyle/>
+                    <a:p>
+                      <a:r>
+                        <a:rPr sz="1100">
+                          <a:solidFill>
+                            <a:srgbClr val="1A1A2E"/>
+                          </a:solidFill>
+                          <a:latin typeface="Calibri"/>
+                        </a:rPr>
+                        <a:t>2</a:t>
+                      </a:r>
+                    </a:p>
+                  </a:txBody>
+                  <a:tcPr>
+                    <a:solidFill>
+                      <a:srgbClr val="FFFFFF"/>
+                    </a:solidFill>
+                  </a:tcPr>
+                </a:tc>
+                <a:tc>
+                  <a:txBody>
+                    <a:bodyPr/>
+                    <a:lstStyle/>
+                    <a:p>
+                      <a:r>
+                        <a:rPr sz="1100">
+                          <a:solidFill>
+                            <a:srgbClr val="1A1A2E"/>
+                          </a:solidFill>
+                          <a:latin typeface="Calibri"/>
+                        </a:rPr>
+                        <a:t>Threat model (DFD + tabella STRIDE)</a:t>
+                      </a:r>
+                    </a:p>
+                  </a:txBody>
+                  <a:tcPr>
+                    <a:solidFill>
+                      <a:srgbClr val="FFFFFF"/>
+                    </a:solidFill>
+                  </a:tcPr>
+                </a:tc>
+              </a:tr>
+              <a:tr h="493776">
+                <a:tc>
+                  <a:txBody>
+                    <a:bodyPr/>
+                    <a:lstStyle/>
+                    <a:p>
+                      <a:r>
+                        <a:rPr sz="1100">
+                          <a:solidFill>
+                            <a:srgbClr val="1A1A2E"/>
+                          </a:solidFill>
+                          <a:latin typeface="Calibri"/>
+                        </a:rPr>
+                        <a:t>3</a:t>
+                      </a:r>
+                    </a:p>
+                  </a:txBody>
+                  <a:tcPr>
+                    <a:solidFill>
+                      <a:srgbClr val="F1F4F8"/>
+                    </a:solidFill>
+                  </a:tcPr>
+                </a:tc>
+                <a:tc>
+                  <a:txBody>
+                    <a:bodyPr/>
+                    <a:lstStyle/>
+                    <a:p>
+                      <a:r>
+                        <a:rPr sz="1100">
+                          <a:solidFill>
+                            <a:srgbClr val="1A1A2E"/>
+                          </a:solidFill>
+                          <a:latin typeface="Calibri"/>
+                        </a:rPr>
+                        <a:t>Controlli applicati</a:t>
+                      </a:r>
+                    </a:p>
+                  </a:txBody>
+                  <a:tcPr>
+                    <a:solidFill>
+                      <a:srgbClr val="F1F4F8"/>
+                    </a:solidFill>
+                  </a:tcPr>
+                </a:tc>
+              </a:tr>
+              <a:tr h="493776">
+                <a:tc>
+                  <a:txBody>
+                    <a:bodyPr/>
+                    <a:lstStyle/>
+                    <a:p>
+                      <a:r>
+                        <a:rPr sz="1100">
+                          <a:solidFill>
+                            <a:srgbClr val="1A1A2E"/>
+                          </a:solidFill>
+                          <a:latin typeface="Calibri"/>
+                        </a:rPr>
+                        <a:t>4</a:t>
+                      </a:r>
+                    </a:p>
+                  </a:txBody>
+                  <a:tcPr>
+                    <a:solidFill>
+                      <a:srgbClr val="FFFFFF"/>
+                    </a:solidFill>
+                  </a:tcPr>
+                </a:tc>
+                <a:tc>
+                  <a:txBody>
+                    <a:bodyPr/>
+                    <a:lstStyle/>
+                    <a:p>
+                      <a:r>
+                        <a:rPr sz="1100">
+                          <a:solidFill>
+                            <a:srgbClr val="1A1A2E"/>
+                          </a:solidFill>
+                          <a:latin typeface="Calibri"/>
+                        </a:rPr>
+                        <a:t>Vulnerabilità note e debt tecnico</a:t>
+                      </a:r>
+                    </a:p>
+                  </a:txBody>
+                  <a:tcPr>
+                    <a:solidFill>
+                      <a:srgbClr val="FFFFFF"/>
+                    </a:solidFill>
+                  </a:tcPr>
+                </a:tc>
+              </a:tr>
+              <a:tr h="493776">
+                <a:tc>
+                  <a:txBody>
+                    <a:bodyPr/>
+                    <a:lstStyle/>
+                    <a:p>
+                      <a:r>
+                        <a:rPr sz="1100">
+                          <a:solidFill>
+                            <a:srgbClr val="1A1A2E"/>
+                          </a:solidFill>
+                          <a:latin typeface="Calibri"/>
+                        </a:rPr>
+                        <a:t>5</a:t>
+                      </a:r>
+                    </a:p>
+                  </a:txBody>
+                  <a:tcPr>
+                    <a:solidFill>
+                      <a:srgbClr val="F1F4F8"/>
+                    </a:solidFill>
+                  </a:tcPr>
+                </a:tc>
+                <a:tc>
+                  <a:txBody>
+                    <a:bodyPr/>
+                    <a:lstStyle/>
+                    <a:p>
+                      <a:r>
+                        <a:rPr sz="1100">
+                          <a:solidFill>
+                            <a:srgbClr val="1A1A2E"/>
+                          </a:solidFill>
+                          <a:latin typeface="Calibri"/>
+                        </a:rPr>
+                        <a:t>Test di sicurezza</a:t>
+                      </a:r>
+                    </a:p>
+                  </a:txBody>
+                  <a:tcPr>
+                    <a:solidFill>
+                      <a:srgbClr val="F1F4F8"/>
+                    </a:solidFill>
+                  </a:tcPr>
+                </a:tc>
+              </a:tr>
+              <a:tr h="493776">
+                <a:tc>
+                  <a:txBody>
+                    <a:bodyPr/>
+                    <a:lstStyle/>
+                    <a:p>
+                      <a:r>
+                        <a:rPr sz="1100">
+                          <a:solidFill>
+                            <a:srgbClr val="1A1A2E"/>
+                          </a:solidFill>
+                          <a:latin typeface="Calibri"/>
+                        </a:rPr>
+                        <a:t>6</a:t>
+                      </a:r>
+                    </a:p>
+                  </a:txBody>
+                  <a:tcPr>
+                    <a:solidFill>
+                      <a:srgbClr val="FFFFFF"/>
+                    </a:solidFill>
+                  </a:tcPr>
+                </a:tc>
+                <a:tc>
+                  <a:txBody>
+                    <a:bodyPr/>
+                    <a:lstStyle/>
+                    <a:p>
+                      <a:r>
+                        <a:rPr sz="1100">
+                          <a:solidFill>
+                            <a:srgbClr val="1A1A2E"/>
+                          </a:solidFill>
+                          <a:latin typeface="Calibri"/>
+                        </a:rPr>
+                        <a:t>Incident response</a:t>
+                      </a:r>
+                    </a:p>
+                  </a:txBody>
+                  <a:tcPr>
+                    <a:solidFill>
+                      <a:srgbClr val="FFFFFF"/>
+                    </a:solidFill>
+                  </a:tcPr>
+                </a:tc>
+              </a:tr>
+              <a:tr h="493776">
+                <a:tc>
+                  <a:txBody>
+                    <a:bodyPr/>
+                    <a:lstStyle/>
+                    <a:p>
+                      <a:r>
+                        <a:rPr sz="1100">
+                          <a:solidFill>
+                            <a:srgbClr val="1A1A2E"/>
+                          </a:solidFill>
+                          <a:latin typeface="Calibri"/>
+                        </a:rPr>
+                        <a:t>7</a:t>
+                      </a:r>
+                    </a:p>
+                  </a:txBody>
+                  <a:tcPr>
+                    <a:solidFill>
+                      <a:srgbClr val="F1F4F8"/>
+                    </a:solidFill>
+                  </a:tcPr>
+                </a:tc>
+                <a:tc>
+                  <a:txBody>
+                    <a:bodyPr/>
+                    <a:lstStyle/>
+                    <a:p>
+                      <a:r>
+                        <a:rPr sz="1100">
+                          <a:solidFill>
+                            <a:srgbClr val="1A1A2E"/>
+                          </a:solidFill>
+                          <a:latin typeface="Calibri"/>
+                        </a:rPr>
+                        <a:t>Compliance (GDPR, NIS 2, CRA)</a:t>
+                      </a:r>
+                    </a:p>
+                  </a:txBody>
+                  <a:tcPr>
+                    <a:solidFill>
+                      <a:srgbClr val="F1F4F8"/>
+                    </a:solidFill>
+                  </a:tcPr>
+                </a:tc>
+              </a:tr>
+              <a:tr h="493776">
+                <a:tc>
+                  <a:txBody>
+                    <a:bodyPr/>
+                    <a:lstStyle/>
+                    <a:p>
+                      <a:r>
+                        <a:rPr sz="1100">
+                          <a:solidFill>
+                            <a:srgbClr val="1A1A2E"/>
+                          </a:solidFill>
+                          <a:latin typeface="Calibri"/>
+                        </a:rPr>
+                        <a:t>8</a:t>
+                      </a:r>
+                    </a:p>
+                  </a:txBody>
+                  <a:tcPr>
+                    <a:solidFill>
+                      <a:srgbClr val="FFFFFF"/>
+                    </a:solidFill>
+                  </a:tcPr>
+                </a:tc>
+                <a:tc>
+                  <a:txBody>
+                    <a:bodyPr/>
+                    <a:lstStyle/>
+                    <a:p>
+                      <a:r>
+                        <a:rPr sz="1100">
+                          <a:solidFill>
+                            <a:srgbClr val="1A1A2E"/>
+                          </a:solidFill>
+                          <a:latin typeface="Calibri"/>
+                        </a:rPr>
+                        <a:t>Approvazione e revisione</a:t>
+                      </a:r>
+                    </a:p>
+                  </a:txBody>
+                  <a:tcPr>
+                    <a:solidFill>
+                      <a:srgbClr val="FFFFFF"/>
+                    </a:solidFill>
+                  </a:tcPr>
+                </a:tc>
+              </a:tr>
+              <a:tr h="493776">
+                <a:tc>
+                  <a:txBody>
+                    <a:bodyPr/>
+                    <a:lstStyle/>
+                    <a:p>
+                      <a:r>
+                        <a:rPr sz="1100">
+                          <a:solidFill>
+                            <a:srgbClr val="1A1A2E"/>
+                          </a:solidFill>
+                          <a:latin typeface="Calibri"/>
+                        </a:rPr>
+                        <a:t>9</a:t>
+                      </a:r>
+                    </a:p>
+                  </a:txBody>
+                  <a:tcPr>
+                    <a:solidFill>
+                      <a:srgbClr val="F1F4F8"/>
+                    </a:solidFill>
+                  </a:tcPr>
+                </a:tc>
+                <a:tc>
+                  <a:txBody>
+                    <a:bodyPr/>
+                    <a:lstStyle/>
+                    <a:p>
+                      <a:r>
+                        <a:rPr sz="1100">
+                          <a:solidFill>
+                            <a:srgbClr val="1A1A2E"/>
+                          </a:solidFill>
+                          <a:latin typeface="Calibri"/>
+                        </a:rPr>
+                        <a:t>Allegati</a:t>
+                      </a:r>
+                    </a:p>
+                  </a:txBody>
+                  <a:tcPr>
+                    <a:solidFill>
+                      <a:srgbClr val="F1F4F8"/>
+                    </a:solidFill>
+                  </a:tcPr>
+                </a:tc>
+              </a:tr>
+            </a:tbl>
+          </a:graphicData>
+        </a:graphic>
+      </p:graphicFrame>
       <p:cxnSp>
         <p:nvCxnSpPr>
           <p:cNvPr id="5" name="Connector 4"/>
@@ -7074,7 +8792,7 @@
         <p:spPr>
           <a:xfrm>
             <a:off x="457200" y="6473952"/>
-            <a:ext cx="7315200" cy="320040"/>
+            <a:ext cx="7315200" cy="292608"/>
           </a:xfrm>
           <a:prstGeom prst="rect">
             <a:avLst/>
@@ -7095,7 +8813,7 @@
                 </a:solidFill>
                 <a:latin typeface="Calibri"/>
               </a:rPr>
-              <a:t>Secure Coding · Corso IFTS STEM · A. Manneschi</a:t>
+              <a:t>Secure Coding · Corso IFTS STEM · A. Manneschi · 2024/2025</a:t>
             </a:r>
           </a:p>
         </p:txBody>
@@ -7109,7 +8827,7 @@
         <p:spPr>
           <a:xfrm>
             <a:off x="10515600" y="6473952"/>
-            <a:ext cx="1188720" cy="320040"/>
+            <a:ext cx="1188720" cy="292608"/>
           </a:xfrm>
           <a:prstGeom prst="rect">
             <a:avLst/>
@@ -7162,6 +8880,712 @@
         <p:spPr>
           <a:xfrm>
             <a:off x="0" y="0"/>
+            <a:ext cx="4114800" cy="6858000"/>
+          </a:xfrm>
+          <a:prstGeom prst="rect">
+            <a:avLst/>
+          </a:prstGeom>
+          <a:solidFill>
+            <a:srgbClr val="081B33"/>
+          </a:solidFill>
+          <a:ln>
+            <a:noFill/>
+          </a:ln>
+        </p:spPr>
+        <p:style>
+          <a:lnRef idx="1">
+            <a:schemeClr val="accent1"/>
+          </a:lnRef>
+          <a:fillRef idx="3">
+            <a:schemeClr val="accent1"/>
+          </a:fillRef>
+          <a:effectRef idx="2">
+            <a:schemeClr val="accent1"/>
+          </a:effectRef>
+          <a:fontRef idx="minor">
+            <a:schemeClr val="lt1"/>
+          </a:fontRef>
+        </p:style>
+        <p:txBody>
+          <a:bodyPr rtlCol="0" anchor="ctr"/>
+          <a:lstStyle/>
+          <a:p>
+            <a:pPr algn="ctr"/>
+          </a:p>
+        </p:txBody>
+      </p:sp>
+      <p:sp>
+        <p:nvSpPr>
+          <p:cNvPr id="3" name="Rectangle 2"/>
+          <p:cNvSpPr/>
+          <p:nvPr/>
+        </p:nvSpPr>
+        <p:spPr>
+          <a:xfrm>
+            <a:off x="4114800" y="0"/>
+            <a:ext cx="8046720" cy="6858000"/>
+          </a:xfrm>
+          <a:prstGeom prst="rect">
+            <a:avLst/>
+          </a:prstGeom>
+          <a:solidFill>
+            <a:srgbClr val="F1F4F8"/>
+          </a:solidFill>
+          <a:ln>
+            <a:noFill/>
+          </a:ln>
+        </p:spPr>
+        <p:style>
+          <a:lnRef idx="1">
+            <a:schemeClr val="accent1"/>
+          </a:lnRef>
+          <a:fillRef idx="3">
+            <a:schemeClr val="accent1"/>
+          </a:fillRef>
+          <a:effectRef idx="2">
+            <a:schemeClr val="accent1"/>
+          </a:effectRef>
+          <a:fontRef idx="minor">
+            <a:schemeClr val="lt1"/>
+          </a:fontRef>
+        </p:style>
+        <p:txBody>
+          <a:bodyPr rtlCol="0" anchor="ctr"/>
+          <a:lstStyle/>
+          <a:p>
+            <a:pPr algn="ctr"/>
+          </a:p>
+        </p:txBody>
+      </p:sp>
+      <p:sp>
+        <p:nvSpPr>
+          <p:cNvPr id="4" name="Rectangle 3"/>
+          <p:cNvSpPr/>
+          <p:nvPr/>
+        </p:nvSpPr>
+        <p:spPr>
+          <a:xfrm>
+            <a:off x="4114800" y="0"/>
+            <a:ext cx="137160" cy="6858000"/>
+          </a:xfrm>
+          <a:prstGeom prst="rect">
+            <a:avLst/>
+          </a:prstGeom>
+          <a:solidFill>
+            <a:srgbClr val="00A0B0"/>
+          </a:solidFill>
+          <a:ln>
+            <a:noFill/>
+          </a:ln>
+        </p:spPr>
+        <p:style>
+          <a:lnRef idx="1">
+            <a:schemeClr val="accent1"/>
+          </a:lnRef>
+          <a:fillRef idx="3">
+            <a:schemeClr val="accent1"/>
+          </a:fillRef>
+          <a:effectRef idx="2">
+            <a:schemeClr val="accent1"/>
+          </a:effectRef>
+          <a:fontRef idx="minor">
+            <a:schemeClr val="lt1"/>
+          </a:fontRef>
+        </p:style>
+        <p:txBody>
+          <a:bodyPr rtlCol="0" anchor="ctr"/>
+          <a:lstStyle/>
+          <a:p>
+            <a:pPr algn="ctr"/>
+          </a:p>
+        </p:txBody>
+      </p:sp>
+      <p:sp>
+        <p:nvSpPr>
+          <p:cNvPr id="5" name="TextBox 4"/>
+          <p:cNvSpPr txBox="1"/>
+          <p:nvPr/>
+        </p:nvSpPr>
+        <p:spPr>
+          <a:xfrm>
+            <a:off x="274320" y="2103120"/>
+            <a:ext cx="3657600" cy="2286000"/>
+          </a:xfrm>
+          <a:prstGeom prst="rect">
+            <a:avLst/>
+          </a:prstGeom>
+          <a:noFill/>
+        </p:spPr>
+        <p:txBody>
+          <a:bodyPr wrap="square" lIns="45720" rIns="45720" tIns="18288" bIns="18288" anchor="t">
+            <a:spAutoFit/>
+          </a:bodyPr>
+          <a:lstStyle/>
+          <a:p>
+            <a:pPr algn="ctr"/>
+            <a:r>
+              <a:rPr sz="17000" b="1" i="0">
+                <a:solidFill>
+                  <a:srgbClr val="00A0B0"/>
+                </a:solidFill>
+                <a:latin typeface="Calibri"/>
+              </a:rPr>
+              <a:t>02</a:t>
+            </a:r>
+          </a:p>
+        </p:txBody>
+      </p:sp>
+      <p:sp>
+        <p:nvSpPr>
+          <p:cNvPr id="6" name="TextBox 5"/>
+          <p:cNvSpPr txBox="1"/>
+          <p:nvPr/>
+        </p:nvSpPr>
+        <p:spPr>
+          <a:xfrm>
+            <a:off x="274320" y="4572000"/>
+            <a:ext cx="3657600" cy="457200"/>
+          </a:xfrm>
+          <a:prstGeom prst="rect">
+            <a:avLst/>
+          </a:prstGeom>
+          <a:noFill/>
+        </p:spPr>
+        <p:txBody>
+          <a:bodyPr wrap="square" lIns="45720" rIns="45720" tIns="18288" bIns="18288" anchor="t">
+            <a:spAutoFit/>
+          </a:bodyPr>
+          <a:lstStyle/>
+          <a:p>
+            <a:pPr algn="ctr"/>
+            <a:r>
+              <a:rPr sz="2000" b="1" i="0">
+                <a:solidFill>
+                  <a:srgbClr val="6FD8E0"/>
+                </a:solidFill>
+                <a:latin typeface="Calibri"/>
+              </a:rPr>
+              <a:t>PARTE</a:t>
+            </a:r>
+          </a:p>
+        </p:txBody>
+      </p:sp>
+      <p:sp>
+        <p:nvSpPr>
+          <p:cNvPr id="7" name="TextBox 6"/>
+          <p:cNvSpPr txBox="1"/>
+          <p:nvPr/>
+        </p:nvSpPr>
+        <p:spPr>
+          <a:xfrm>
+            <a:off x="4572000" y="2286000"/>
+            <a:ext cx="7315200" cy="1645920"/>
+          </a:xfrm>
+          <a:prstGeom prst="rect">
+            <a:avLst/>
+          </a:prstGeom>
+          <a:noFill/>
+        </p:spPr>
+        <p:txBody>
+          <a:bodyPr wrap="square" lIns="45720" rIns="45720" tIns="18288" bIns="18288" anchor="t">
+            <a:spAutoFit/>
+          </a:bodyPr>
+          <a:lstStyle/>
+          <a:p>
+            <a:pPr algn="l"/>
+            <a:r>
+              <a:rPr sz="4400" b="1" i="0">
+                <a:solidFill>
+                  <a:srgbClr val="0F2D52"/>
+                </a:solidFill>
+                <a:latin typeface="Calibri"/>
+              </a:rPr>
+              <a:t>Uso responsabile dell'IA</a:t>
+            </a:r>
+          </a:p>
+        </p:txBody>
+      </p:sp>
+      <p:sp>
+        <p:nvSpPr>
+          <p:cNvPr id="8" name="TextBox 7"/>
+          <p:cNvSpPr txBox="1"/>
+          <p:nvPr/>
+        </p:nvSpPr>
+        <p:spPr>
+          <a:xfrm>
+            <a:off x="4572000" y="3931920"/>
+            <a:ext cx="7315200" cy="1828800"/>
+          </a:xfrm>
+          <a:prstGeom prst="rect">
+            <a:avLst/>
+          </a:prstGeom>
+          <a:noFill/>
+        </p:spPr>
+        <p:txBody>
+          <a:bodyPr wrap="square" lIns="45720" rIns="45720" tIns="18288" bIns="18288" anchor="t">
+            <a:spAutoFit/>
+          </a:bodyPr>
+          <a:lstStyle/>
+          <a:p>
+            <a:pPr algn="l"/>
+            <a:r>
+              <a:rPr sz="1800" b="0" i="1">
+                <a:solidFill>
+                  <a:srgbClr val="6B7280"/>
+                </a:solidFill>
+                <a:latin typeface="Calibri"/>
+              </a:rPr>
+              <a:t>Copilot, Claude, ChatGPT, Cursor: moltiplicatori di produttività... e di errori</a:t>
+            </a:r>
+          </a:p>
+        </p:txBody>
+      </p:sp>
+      <p:cxnSp>
+        <p:nvCxnSpPr>
+          <p:cNvPr id="9" name="Connector 8"/>
+          <p:cNvCxnSpPr/>
+          <p:nvPr/>
+        </p:nvCxnSpPr>
+        <p:spPr>
+          <a:xfrm>
+            <a:off x="457200" y="6446520"/>
+            <a:ext cx="11274552" cy="0"/>
+          </a:xfrm>
+          <a:prstGeom prst="line">
+            <a:avLst/>
+          </a:prstGeom>
+          <a:ln w="19050">
+            <a:solidFill>
+              <a:srgbClr val="00A0B0"/>
+            </a:solidFill>
+          </a:ln>
+        </p:spPr>
+        <p:style>
+          <a:lnRef idx="2">
+            <a:schemeClr val="accent1"/>
+          </a:lnRef>
+          <a:fillRef idx="0">
+            <a:schemeClr val="accent1"/>
+          </a:fillRef>
+          <a:effectRef idx="1">
+            <a:schemeClr val="accent1"/>
+          </a:effectRef>
+          <a:fontRef idx="minor">
+            <a:schemeClr val="tx1"/>
+          </a:fontRef>
+        </p:style>
+      </p:cxnSp>
+      <p:sp>
+        <p:nvSpPr>
+          <p:cNvPr id="10" name="TextBox 9"/>
+          <p:cNvSpPr txBox="1"/>
+          <p:nvPr/>
+        </p:nvSpPr>
+        <p:spPr>
+          <a:xfrm>
+            <a:off x="457200" y="6473952"/>
+            <a:ext cx="7315200" cy="292608"/>
+          </a:xfrm>
+          <a:prstGeom prst="rect">
+            <a:avLst/>
+          </a:prstGeom>
+          <a:noFill/>
+        </p:spPr>
+        <p:txBody>
+          <a:bodyPr wrap="square" lIns="45720" rIns="45720" tIns="18288" bIns="18288" anchor="t">
+            <a:spAutoFit/>
+          </a:bodyPr>
+          <a:lstStyle/>
+          <a:p>
+            <a:pPr algn="l"/>
+            <a:r>
+              <a:rPr sz="1000" b="0" i="0">
+                <a:solidFill>
+                  <a:srgbClr val="6B7280"/>
+                </a:solidFill>
+                <a:latin typeface="Calibri"/>
+              </a:rPr>
+              <a:t>Secure Coding · Corso IFTS STEM · A. Manneschi · 2024/2025</a:t>
+            </a:r>
+          </a:p>
+        </p:txBody>
+      </p:sp>
+      <p:sp>
+        <p:nvSpPr>
+          <p:cNvPr id="11" name="TextBox 10"/>
+          <p:cNvSpPr txBox="1"/>
+          <p:nvPr/>
+        </p:nvSpPr>
+        <p:spPr>
+          <a:xfrm>
+            <a:off x="10515600" y="6473952"/>
+            <a:ext cx="1188720" cy="292608"/>
+          </a:xfrm>
+          <a:prstGeom prst="rect">
+            <a:avLst/>
+          </a:prstGeom>
+          <a:noFill/>
+        </p:spPr>
+        <p:txBody>
+          <a:bodyPr wrap="square" lIns="45720" rIns="45720" tIns="18288" bIns="18288" anchor="t">
+            <a:spAutoFit/>
+          </a:bodyPr>
+          <a:lstStyle/>
+          <a:p>
+            <a:pPr algn="r"/>
+            <a:r>
+              <a:rPr sz="1000" b="1" i="0">
+                <a:solidFill>
+                  <a:srgbClr val="6B7280"/>
+                </a:solidFill>
+                <a:latin typeface="Calibri"/>
+              </a:rPr>
+              <a:t>L7  ·  6/14</a:t>
+            </a:r>
+          </a:p>
+        </p:txBody>
+      </p:sp>
+    </p:spTree>
+  </p:cSld>
+  <p:clrMapOvr>
+    <a:masterClrMapping/>
+  </p:clrMapOvr>
+</p:sld>
+</file>
+
+<file path=ppt/slides/slide7.xml><?xml version="1.0" encoding="utf-8"?>
+<p:sld xmlns:a="http://schemas.openxmlformats.org/drawingml/2006/main" xmlns:p="http://schemas.openxmlformats.org/presentationml/2006/main" xmlns:r="http://schemas.openxmlformats.org/officeDocument/2006/relationships">
+  <p:cSld>
+    <p:spTree>
+      <p:nvGrpSpPr>
+        <p:cNvPr id="1" name=""/>
+        <p:cNvGrpSpPr/>
+        <p:nvPr/>
+      </p:nvGrpSpPr>
+      <p:grpSpPr/>
+      <p:sp>
+        <p:nvSpPr>
+          <p:cNvPr id="2" name="Rectangle 1"/>
+          <p:cNvSpPr/>
+          <p:nvPr/>
+        </p:nvSpPr>
+        <p:spPr>
+          <a:xfrm>
+            <a:off x="0" y="0"/>
+            <a:ext cx="12191695" cy="6858000"/>
+          </a:xfrm>
+          <a:prstGeom prst="rect">
+            <a:avLst/>
+          </a:prstGeom>
+          <a:solidFill>
+            <a:srgbClr val="F1F4F8"/>
+          </a:solidFill>
+          <a:ln>
+            <a:noFill/>
+          </a:ln>
+        </p:spPr>
+        <p:style>
+          <a:lnRef idx="1">
+            <a:schemeClr val="accent1"/>
+          </a:lnRef>
+          <a:fillRef idx="3">
+            <a:schemeClr val="accent1"/>
+          </a:fillRef>
+          <a:effectRef idx="2">
+            <a:schemeClr val="accent1"/>
+          </a:effectRef>
+          <a:fontRef idx="minor">
+            <a:schemeClr val="lt1"/>
+          </a:fontRef>
+        </p:style>
+        <p:txBody>
+          <a:bodyPr rtlCol="0" anchor="ctr"/>
+          <a:lstStyle/>
+          <a:p>
+            <a:pPr algn="ctr"/>
+          </a:p>
+        </p:txBody>
+      </p:sp>
+      <p:sp>
+        <p:nvSpPr>
+          <p:cNvPr id="3" name="Rectangle 2"/>
+          <p:cNvSpPr/>
+          <p:nvPr/>
+        </p:nvSpPr>
+        <p:spPr>
+          <a:xfrm>
+            <a:off x="0" y="0"/>
+            <a:ext cx="365760" cy="6858000"/>
+          </a:xfrm>
+          <a:prstGeom prst="rect">
+            <a:avLst/>
+          </a:prstGeom>
+          <a:solidFill>
+            <a:srgbClr val="00A0B0"/>
+          </a:solidFill>
+          <a:ln>
+            <a:noFill/>
+          </a:ln>
+        </p:spPr>
+        <p:style>
+          <a:lnRef idx="1">
+            <a:schemeClr val="accent1"/>
+          </a:lnRef>
+          <a:fillRef idx="3">
+            <a:schemeClr val="accent1"/>
+          </a:fillRef>
+          <a:effectRef idx="2">
+            <a:schemeClr val="accent1"/>
+          </a:effectRef>
+          <a:fontRef idx="minor">
+            <a:schemeClr val="lt1"/>
+          </a:fontRef>
+        </p:style>
+        <p:txBody>
+          <a:bodyPr rtlCol="0" anchor="ctr"/>
+          <a:lstStyle/>
+          <a:p>
+            <a:pPr algn="ctr"/>
+          </a:p>
+        </p:txBody>
+      </p:sp>
+      <p:sp>
+        <p:nvSpPr>
+          <p:cNvPr id="4" name="TextBox 3"/>
+          <p:cNvSpPr txBox="1"/>
+          <p:nvPr/>
+        </p:nvSpPr>
+        <p:spPr>
+          <a:xfrm>
+            <a:off x="914400" y="914400"/>
+            <a:ext cx="2286000" cy="2286000"/>
+          </a:xfrm>
+          <a:prstGeom prst="rect">
+            <a:avLst/>
+          </a:prstGeom>
+          <a:noFill/>
+        </p:spPr>
+        <p:txBody>
+          <a:bodyPr wrap="square" lIns="45720" rIns="45720" tIns="18288" bIns="18288" anchor="t">
+            <a:spAutoFit/>
+          </a:bodyPr>
+          <a:lstStyle/>
+          <a:p>
+            <a:pPr algn="l"/>
+            <a:r>
+              <a:rPr sz="25000" b="1" i="0">
+                <a:solidFill>
+                  <a:srgbClr val="00A0B0"/>
+                </a:solidFill>
+                <a:latin typeface="Georgia"/>
+              </a:rPr>
+              <a:t>“</a:t>
+            </a:r>
+          </a:p>
+        </p:txBody>
+      </p:sp>
+      <p:sp>
+        <p:nvSpPr>
+          <p:cNvPr id="5" name="TextBox 4"/>
+          <p:cNvSpPr txBox="1"/>
+          <p:nvPr/>
+        </p:nvSpPr>
+        <p:spPr>
+          <a:xfrm>
+            <a:off x="2286000" y="2286000"/>
+            <a:ext cx="9144000" cy="3200400"/>
+          </a:xfrm>
+          <a:prstGeom prst="rect">
+            <a:avLst/>
+          </a:prstGeom>
+          <a:noFill/>
+        </p:spPr>
+        <p:txBody>
+          <a:bodyPr wrap="square" lIns="45720" rIns="45720" tIns="18288" bIns="18288" anchor="ctr">
+            <a:spAutoFit/>
+          </a:bodyPr>
+          <a:lstStyle/>
+          <a:p>
+            <a:pPr algn="l"/>
+            <a:r>
+              <a:rPr sz="3200" b="1" i="1">
+                <a:solidFill>
+                  <a:srgbClr val="0F2D52"/>
+                </a:solidFill>
+                <a:latin typeface="Georgia"/>
+              </a:rPr>
+              <a:t>L'IA non sa di sicurezza. Tu devi.</a:t>
+            </a:r>
+          </a:p>
+        </p:txBody>
+      </p:sp>
+      <p:cxnSp>
+        <p:nvCxnSpPr>
+          <p:cNvPr id="6" name="Connector 5"/>
+          <p:cNvCxnSpPr/>
+          <p:nvPr/>
+        </p:nvCxnSpPr>
+        <p:spPr>
+          <a:xfrm>
+            <a:off x="2286000" y="5029200"/>
+            <a:ext cx="1828800" cy="0"/>
+          </a:xfrm>
+          <a:prstGeom prst="line">
+            <a:avLst/>
+          </a:prstGeom>
+          <a:ln w="38100">
+            <a:solidFill>
+              <a:srgbClr val="00A0B0"/>
+            </a:solidFill>
+          </a:ln>
+        </p:spPr>
+        <p:style>
+          <a:lnRef idx="2">
+            <a:schemeClr val="accent1"/>
+          </a:lnRef>
+          <a:fillRef idx="0">
+            <a:schemeClr val="accent1"/>
+          </a:fillRef>
+          <a:effectRef idx="1">
+            <a:schemeClr val="accent1"/>
+          </a:effectRef>
+          <a:fontRef idx="minor">
+            <a:schemeClr val="tx1"/>
+          </a:fontRef>
+        </p:style>
+      </p:cxnSp>
+      <p:cxnSp>
+        <p:nvCxnSpPr>
+          <p:cNvPr id="7" name="Connector 6"/>
+          <p:cNvCxnSpPr/>
+          <p:nvPr/>
+        </p:nvCxnSpPr>
+        <p:spPr>
+          <a:xfrm>
+            <a:off x="457200" y="6446520"/>
+            <a:ext cx="11274552" cy="0"/>
+          </a:xfrm>
+          <a:prstGeom prst="line">
+            <a:avLst/>
+          </a:prstGeom>
+          <a:ln w="19050">
+            <a:solidFill>
+              <a:srgbClr val="00A0B0"/>
+            </a:solidFill>
+          </a:ln>
+        </p:spPr>
+        <p:style>
+          <a:lnRef idx="2">
+            <a:schemeClr val="accent1"/>
+          </a:lnRef>
+          <a:fillRef idx="0">
+            <a:schemeClr val="accent1"/>
+          </a:fillRef>
+          <a:effectRef idx="1">
+            <a:schemeClr val="accent1"/>
+          </a:effectRef>
+          <a:fontRef idx="minor">
+            <a:schemeClr val="tx1"/>
+          </a:fontRef>
+        </p:style>
+      </p:cxnSp>
+      <p:sp>
+        <p:nvSpPr>
+          <p:cNvPr id="8" name="TextBox 7"/>
+          <p:cNvSpPr txBox="1"/>
+          <p:nvPr/>
+        </p:nvSpPr>
+        <p:spPr>
+          <a:xfrm>
+            <a:off x="457200" y="6473952"/>
+            <a:ext cx="7315200" cy="292608"/>
+          </a:xfrm>
+          <a:prstGeom prst="rect">
+            <a:avLst/>
+          </a:prstGeom>
+          <a:noFill/>
+        </p:spPr>
+        <p:txBody>
+          <a:bodyPr wrap="square" lIns="45720" rIns="45720" tIns="18288" bIns="18288" anchor="t">
+            <a:spAutoFit/>
+          </a:bodyPr>
+          <a:lstStyle/>
+          <a:p>
+            <a:pPr algn="l"/>
+            <a:r>
+              <a:rPr sz="1000" b="0" i="0">
+                <a:solidFill>
+                  <a:srgbClr val="6B7280"/>
+                </a:solidFill>
+                <a:latin typeface="Calibri"/>
+              </a:rPr>
+              <a:t>Secure Coding · Corso IFTS STEM · A. Manneschi · 2024/2025</a:t>
+            </a:r>
+          </a:p>
+        </p:txBody>
+      </p:sp>
+      <p:sp>
+        <p:nvSpPr>
+          <p:cNvPr id="9" name="TextBox 8"/>
+          <p:cNvSpPr txBox="1"/>
+          <p:nvPr/>
+        </p:nvSpPr>
+        <p:spPr>
+          <a:xfrm>
+            <a:off x="10515600" y="6473952"/>
+            <a:ext cx="1188720" cy="292608"/>
+          </a:xfrm>
+          <a:prstGeom prst="rect">
+            <a:avLst/>
+          </a:prstGeom>
+          <a:noFill/>
+        </p:spPr>
+        <p:txBody>
+          <a:bodyPr wrap="square" lIns="45720" rIns="45720" tIns="18288" bIns="18288" anchor="t">
+            <a:spAutoFit/>
+          </a:bodyPr>
+          <a:lstStyle/>
+          <a:p>
+            <a:pPr algn="r"/>
+            <a:r>
+              <a:rPr sz="1000" b="1" i="0">
+                <a:solidFill>
+                  <a:srgbClr val="6B7280"/>
+                </a:solidFill>
+                <a:latin typeface="Calibri"/>
+              </a:rPr>
+              <a:t>L7  ·  7/14</a:t>
+            </a:r>
+          </a:p>
+        </p:txBody>
+      </p:sp>
+    </p:spTree>
+  </p:cSld>
+  <p:clrMapOvr>
+    <a:masterClrMapping/>
+  </p:clrMapOvr>
+</p:sld>
+</file>
+
+<file path=ppt/slides/slide8.xml><?xml version="1.0" encoding="utf-8"?>
+<p:sld xmlns:a="http://schemas.openxmlformats.org/drawingml/2006/main" xmlns:p="http://schemas.openxmlformats.org/presentationml/2006/main" xmlns:r="http://schemas.openxmlformats.org/officeDocument/2006/relationships">
+  <p:cSld>
+    <p:spTree>
+      <p:nvGrpSpPr>
+        <p:cNvPr id="1" name=""/>
+        <p:cNvGrpSpPr/>
+        <p:nvPr/>
+      </p:nvGrpSpPr>
+      <p:grpSpPr/>
+      <p:sp>
+        <p:nvSpPr>
+          <p:cNvPr id="2" name="Rectangle 1"/>
+          <p:cNvSpPr/>
+          <p:nvPr/>
+        </p:nvSpPr>
+        <p:spPr>
+          <a:xfrm>
+            <a:off x="0" y="0"/>
             <a:ext cx="12191695" cy="777240"/>
           </a:xfrm>
           <a:prstGeom prst="rect">
@@ -7226,7 +9650,483 @@
                 </a:solidFill>
                 <a:latin typeface="Calibri"/>
               </a:rPr>
-              <a:t>Esempio sezione 3.1 — Autenticazione</a:t>
+              <a:t>⚠  Il problema in numeri</a:t>
+            </a:r>
+          </a:p>
+        </p:txBody>
+      </p:sp>
+      <p:sp>
+        <p:nvSpPr>
+          <p:cNvPr id="4" name="TextBox 3"/>
+          <p:cNvSpPr txBox="1"/>
+          <p:nvPr/>
+        </p:nvSpPr>
+        <p:spPr>
+          <a:xfrm>
+            <a:off x="640080" y="1097280"/>
+            <a:ext cx="10972800" cy="5029200"/>
+          </a:xfrm>
+          <a:prstGeom prst="rect">
+            <a:avLst/>
+          </a:prstGeom>
+          <a:noFill/>
+        </p:spPr>
+        <p:txBody>
+          <a:bodyPr wrap="square">
+            <a:spAutoFit/>
+          </a:bodyPr>
+          <a:lstStyle/>
+          <a:p>
+            <a:pPr>
+              <a:lnSpc>
+                <a:spcPct val="150000"/>
+              </a:lnSpc>
+              <a:spcAft>
+                <a:spcPts val="400"/>
+              </a:spcAft>
+            </a:pPr>
+            <a:r>
+              <a:rPr sz="2000" b="1">
+                <a:solidFill>
+                  <a:srgbClr val="00A0B0"/>
+                </a:solidFill>
+                <a:latin typeface="Calibri"/>
+              </a:rPr>
+              <a:t>▸  </a:t>
+            </a:r>
+            <a:r>
+              <a:rPr sz="2000">
+                <a:solidFill>
+                  <a:srgbClr val="1A1A2E"/>
+                </a:solidFill>
+                <a:latin typeface="Calibri"/>
+              </a:rPr>
+              <a:t>Studi GitHub (2022), Stanford (2023):</a:t>
+            </a:r>
+          </a:p>
+          <a:p>
+            <a:pPr>
+              <a:lnSpc>
+                <a:spcPct val="150000"/>
+              </a:lnSpc>
+              <a:spcAft>
+                <a:spcPts val="400"/>
+              </a:spcAft>
+            </a:pPr>
+            <a:r>
+              <a:rPr sz="2000" b="1">
+                <a:solidFill>
+                  <a:srgbClr val="00A0B0"/>
+                </a:solidFill>
+                <a:latin typeface="Calibri"/>
+              </a:rPr>
+              <a:t>▸  </a:t>
+            </a:r>
+            <a:r>
+              <a:rPr sz="2000">
+                <a:solidFill>
+                  <a:srgbClr val="1A1A2E"/>
+                </a:solidFill>
+                <a:latin typeface="Calibri"/>
+              </a:rPr>
+              <a:t/>
+            </a:r>
+          </a:p>
+          <a:p>
+            <a:pPr>
+              <a:lnSpc>
+                <a:spcPct val="150000"/>
+              </a:lnSpc>
+              <a:spcAft>
+                <a:spcPts val="400"/>
+              </a:spcAft>
+            </a:pPr>
+            <a:r>
+              <a:rPr sz="2000" b="1">
+                <a:solidFill>
+                  <a:srgbClr val="00A0B0"/>
+                </a:solidFill>
+                <a:latin typeface="Calibri"/>
+              </a:rPr>
+              <a:t>▸  </a:t>
+            </a:r>
+            <a:r>
+              <a:rPr sz="2000">
+                <a:solidFill>
+                  <a:srgbClr val="1A1A2E"/>
+                </a:solidFill>
+                <a:latin typeface="Calibri"/>
+              </a:rPr>
+              <a:t>~40% dei suggerimenti Copilot in scenari di sicurezza</a:t>
+            </a:r>
+          </a:p>
+          <a:p>
+            <a:pPr>
+              <a:lnSpc>
+                <a:spcPct val="150000"/>
+              </a:lnSpc>
+              <a:spcAft>
+                <a:spcPts val="400"/>
+              </a:spcAft>
+            </a:pPr>
+            <a:r>
+              <a:rPr sz="2000" b="1">
+                <a:solidFill>
+                  <a:srgbClr val="00A0B0"/>
+                </a:solidFill>
+                <a:latin typeface="Calibri"/>
+              </a:rPr>
+              <a:t>▸  </a:t>
+            </a:r>
+            <a:r>
+              <a:rPr sz="2000">
+                <a:solidFill>
+                  <a:srgbClr val="1A1A2E"/>
+                </a:solidFill>
+                <a:latin typeface="Calibri"/>
+              </a:rPr>
+              <a:t>contengono vulnerabilità</a:t>
+            </a:r>
+          </a:p>
+          <a:p>
+            <a:pPr>
+              <a:lnSpc>
+                <a:spcPct val="150000"/>
+              </a:lnSpc>
+              <a:spcAft>
+                <a:spcPts val="400"/>
+              </a:spcAft>
+            </a:pPr>
+            <a:r>
+              <a:rPr sz="2000" b="1">
+                <a:solidFill>
+                  <a:srgbClr val="00A0B0"/>
+                </a:solidFill>
+                <a:latin typeface="Calibri"/>
+              </a:rPr>
+              <a:t>▸  </a:t>
+            </a:r>
+            <a:r>
+              <a:rPr sz="2000">
+                <a:solidFill>
+                  <a:srgbClr val="1A1A2E"/>
+                </a:solidFill>
+                <a:latin typeface="Calibri"/>
+              </a:rPr>
+              <a:t/>
+            </a:r>
+          </a:p>
+          <a:p>
+            <a:pPr>
+              <a:lnSpc>
+                <a:spcPct val="150000"/>
+              </a:lnSpc>
+              <a:spcAft>
+                <a:spcPts val="400"/>
+              </a:spcAft>
+            </a:pPr>
+            <a:r>
+              <a:rPr sz="2000" b="1">
+                <a:solidFill>
+                  <a:srgbClr val="00A0B0"/>
+                </a:solidFill>
+                <a:latin typeface="Calibri"/>
+              </a:rPr>
+              <a:t>▸  </a:t>
+            </a:r>
+            <a:r>
+              <a:rPr sz="2000">
+                <a:solidFill>
+                  <a:srgbClr val="1A1A2E"/>
+                </a:solidFill>
+                <a:latin typeface="Calibri"/>
+              </a:rPr>
+              <a:t>Gli sviluppatori con AI scrivono codice MENO sicuro,</a:t>
+            </a:r>
+          </a:p>
+          <a:p>
+            <a:pPr>
+              <a:lnSpc>
+                <a:spcPct val="150000"/>
+              </a:lnSpc>
+              <a:spcAft>
+                <a:spcPts val="400"/>
+              </a:spcAft>
+            </a:pPr>
+            <a:r>
+              <a:rPr sz="2000" b="1">
+                <a:solidFill>
+                  <a:srgbClr val="00A0B0"/>
+                </a:solidFill>
+                <a:latin typeface="Calibri"/>
+              </a:rPr>
+              <a:t>▸  </a:t>
+            </a:r>
+            <a:r>
+              <a:rPr sz="2000">
+                <a:solidFill>
+                  <a:srgbClr val="1A1A2E"/>
+                </a:solidFill>
+                <a:latin typeface="Calibri"/>
+              </a:rPr>
+              <a:t>ma sono PIÙ CONVINTI che sia sicuro (bias cognitivo)</a:t>
+            </a:r>
+          </a:p>
+          <a:p>
+            <a:pPr>
+              <a:lnSpc>
+                <a:spcPct val="150000"/>
+              </a:lnSpc>
+              <a:spcAft>
+                <a:spcPts val="400"/>
+              </a:spcAft>
+            </a:pPr>
+            <a:r>
+              <a:rPr sz="2000" b="1">
+                <a:solidFill>
+                  <a:srgbClr val="00A0B0"/>
+                </a:solidFill>
+                <a:latin typeface="Calibri"/>
+              </a:rPr>
+              <a:t>▸  </a:t>
+            </a:r>
+            <a:r>
+              <a:rPr sz="2000">
+                <a:solidFill>
+                  <a:srgbClr val="1A1A2E"/>
+                </a:solidFill>
+                <a:latin typeface="Calibri"/>
+              </a:rPr>
+              <a:t/>
+            </a:r>
+          </a:p>
+          <a:p>
+            <a:pPr>
+              <a:lnSpc>
+                <a:spcPct val="150000"/>
+              </a:lnSpc>
+              <a:spcAft>
+                <a:spcPts val="400"/>
+              </a:spcAft>
+            </a:pPr>
+            <a:r>
+              <a:rPr sz="2000" b="1">
+                <a:solidFill>
+                  <a:srgbClr val="00A0B0"/>
+                </a:solidFill>
+                <a:latin typeface="Calibri"/>
+              </a:rPr>
+              <a:t>▸  </a:t>
+            </a:r>
+            <a:r>
+              <a:rPr sz="2000">
+                <a:solidFill>
+                  <a:srgbClr val="1A1A2E"/>
+                </a:solidFill>
+                <a:latin typeface="Calibri"/>
+              </a:rPr>
+              <a:t>Tradotto: l'IA è uno strumento potente, non un revisore di sicurezza</a:t>
+            </a:r>
+          </a:p>
+        </p:txBody>
+      </p:sp>
+      <p:cxnSp>
+        <p:nvCxnSpPr>
+          <p:cNvPr id="5" name="Connector 4"/>
+          <p:cNvCxnSpPr/>
+          <p:nvPr/>
+        </p:nvCxnSpPr>
+        <p:spPr>
+          <a:xfrm>
+            <a:off x="457200" y="6446520"/>
+            <a:ext cx="11274552" cy="0"/>
+          </a:xfrm>
+          <a:prstGeom prst="line">
+            <a:avLst/>
+          </a:prstGeom>
+          <a:ln w="19050">
+            <a:solidFill>
+              <a:srgbClr val="00A0B0"/>
+            </a:solidFill>
+          </a:ln>
+        </p:spPr>
+        <p:style>
+          <a:lnRef idx="2">
+            <a:schemeClr val="accent1"/>
+          </a:lnRef>
+          <a:fillRef idx="0">
+            <a:schemeClr val="accent1"/>
+          </a:fillRef>
+          <a:effectRef idx="1">
+            <a:schemeClr val="accent1"/>
+          </a:effectRef>
+          <a:fontRef idx="minor">
+            <a:schemeClr val="tx1"/>
+          </a:fontRef>
+        </p:style>
+      </p:cxnSp>
+      <p:sp>
+        <p:nvSpPr>
+          <p:cNvPr id="6" name="TextBox 5"/>
+          <p:cNvSpPr txBox="1"/>
+          <p:nvPr/>
+        </p:nvSpPr>
+        <p:spPr>
+          <a:xfrm>
+            <a:off x="457200" y="6473952"/>
+            <a:ext cx="7315200" cy="292608"/>
+          </a:xfrm>
+          <a:prstGeom prst="rect">
+            <a:avLst/>
+          </a:prstGeom>
+          <a:noFill/>
+        </p:spPr>
+        <p:txBody>
+          <a:bodyPr wrap="square" lIns="45720" rIns="45720" tIns="18288" bIns="18288" anchor="t">
+            <a:spAutoFit/>
+          </a:bodyPr>
+          <a:lstStyle/>
+          <a:p>
+            <a:pPr algn="l"/>
+            <a:r>
+              <a:rPr sz="1000" b="0" i="0">
+                <a:solidFill>
+                  <a:srgbClr val="6B7280"/>
+                </a:solidFill>
+                <a:latin typeface="Calibri"/>
+              </a:rPr>
+              <a:t>Secure Coding · Corso IFTS STEM · A. Manneschi · 2024/2025</a:t>
+            </a:r>
+          </a:p>
+        </p:txBody>
+      </p:sp>
+      <p:sp>
+        <p:nvSpPr>
+          <p:cNvPr id="7" name="TextBox 6"/>
+          <p:cNvSpPr txBox="1"/>
+          <p:nvPr/>
+        </p:nvSpPr>
+        <p:spPr>
+          <a:xfrm>
+            <a:off x="10515600" y="6473952"/>
+            <a:ext cx="1188720" cy="292608"/>
+          </a:xfrm>
+          <a:prstGeom prst="rect">
+            <a:avLst/>
+          </a:prstGeom>
+          <a:noFill/>
+        </p:spPr>
+        <p:txBody>
+          <a:bodyPr wrap="square" lIns="45720" rIns="45720" tIns="18288" bIns="18288" anchor="t">
+            <a:spAutoFit/>
+          </a:bodyPr>
+          <a:lstStyle/>
+          <a:p>
+            <a:pPr algn="r"/>
+            <a:r>
+              <a:rPr sz="1000" b="1" i="0">
+                <a:solidFill>
+                  <a:srgbClr val="6B7280"/>
+                </a:solidFill>
+                <a:latin typeface="Calibri"/>
+              </a:rPr>
+              <a:t>L7  ·  8/14</a:t>
+            </a:r>
+          </a:p>
+        </p:txBody>
+      </p:sp>
+    </p:spTree>
+  </p:cSld>
+  <p:clrMapOvr>
+    <a:masterClrMapping/>
+  </p:clrMapOvr>
+</p:sld>
+</file>
+
+<file path=ppt/slides/slide9.xml><?xml version="1.0" encoding="utf-8"?>
+<p:sld xmlns:a="http://schemas.openxmlformats.org/drawingml/2006/main" xmlns:p="http://schemas.openxmlformats.org/presentationml/2006/main" xmlns:r="http://schemas.openxmlformats.org/officeDocument/2006/relationships">
+  <p:cSld>
+    <p:spTree>
+      <p:nvGrpSpPr>
+        <p:cNvPr id="1" name=""/>
+        <p:cNvGrpSpPr/>
+        <p:nvPr/>
+      </p:nvGrpSpPr>
+      <p:grpSpPr/>
+      <p:sp>
+        <p:nvSpPr>
+          <p:cNvPr id="2" name="Rectangle 1"/>
+          <p:cNvSpPr/>
+          <p:nvPr/>
+        </p:nvSpPr>
+        <p:spPr>
+          <a:xfrm>
+            <a:off x="0" y="0"/>
+            <a:ext cx="12191695" cy="777240"/>
+          </a:xfrm>
+          <a:prstGeom prst="rect">
+            <a:avLst/>
+          </a:prstGeom>
+          <a:solidFill>
+            <a:srgbClr val="0F2D52"/>
+          </a:solidFill>
+          <a:ln>
+            <a:noFill/>
+          </a:ln>
+        </p:spPr>
+        <p:style>
+          <a:lnRef idx="1">
+            <a:schemeClr val="accent1"/>
+          </a:lnRef>
+          <a:fillRef idx="3">
+            <a:schemeClr val="accent1"/>
+          </a:fillRef>
+          <a:effectRef idx="2">
+            <a:schemeClr val="accent1"/>
+          </a:effectRef>
+          <a:fontRef idx="minor">
+            <a:schemeClr val="lt1"/>
+          </a:fontRef>
+        </p:style>
+        <p:txBody>
+          <a:bodyPr rtlCol="0" anchor="ctr"/>
+          <a:lstStyle/>
+          <a:p>
+            <a:pPr algn="ctr"/>
+          </a:p>
+        </p:txBody>
+      </p:sp>
+      <p:sp>
+        <p:nvSpPr>
+          <p:cNvPr id="3" name="TextBox 2"/>
+          <p:cNvSpPr txBox="1"/>
+          <p:nvPr/>
+        </p:nvSpPr>
+        <p:spPr>
+          <a:xfrm>
+            <a:off x="457200" y="164592"/>
+            <a:ext cx="10972800" cy="502920"/>
+          </a:xfrm>
+          <a:prstGeom prst="rect">
+            <a:avLst/>
+          </a:prstGeom>
+          <a:noFill/>
+        </p:spPr>
+        <p:txBody>
+          <a:bodyPr wrap="square" lIns="45720" rIns="45720" tIns="18288" bIns="18288" anchor="ctr">
+            <a:spAutoFit/>
+          </a:bodyPr>
+          <a:lstStyle/>
+          <a:p>
+            <a:pPr algn="l"/>
+            <a:r>
+              <a:rPr sz="2400" b="1" i="0">
+                <a:solidFill>
+                  <a:srgbClr val="FFFFFF"/>
+                </a:solidFill>
+                <a:latin typeface="Calibri"/>
+              </a:rPr>
+              <a:t>I 7 errori tipici del codice IA</a:t>
             </a:r>
           </a:p>
         </p:txBody>
@@ -7241,7 +10141,7 @@
         </p:nvGraphicFramePr>
         <p:xfrm>
           <a:off x="457200" y="1188720"/>
-          <a:ext cx="11247120" cy="5029200"/>
+          <a:ext cx="11247120" cy="4937760"/>
         </p:xfrm>
         <a:graphic>
           <a:graphicData uri="http://schemas.openxmlformats.org/drawingml/2006/table">
@@ -7254,7 +10154,7 @@
                 <a:gridCol w="3749040"/>
                 <a:gridCol w="3749040"/>
               </a:tblGrid>
-              <a:tr h="838200">
+              <a:tr h="617220">
                 <a:tc>
                   <a:txBody>
                     <a:bodyPr/>
@@ -7262,13 +10162,13 @@
                     <a:p>
                       <a:pPr algn="ctr"/>
                       <a:r>
-                        <a:rPr sz="1400" b="1">
+                        <a:rPr sz="1300" b="1">
                           <a:solidFill>
                             <a:srgbClr val="FFFFFF"/>
                           </a:solidFill>
                           <a:latin typeface="Calibri"/>
                         </a:rPr>
-                        <a:t>Controllo</a:t>
+                        <a:t>#</a:t>
                       </a:r>
                     </a:p>
                   </a:txBody>
@@ -7285,13 +10185,13 @@
                     <a:p>
                       <a:pPr algn="ctr"/>
                       <a:r>
-                        <a:rPr sz="1400" b="1">
+                        <a:rPr sz="1300" b="1">
                           <a:solidFill>
                             <a:srgbClr val="FFFFFF"/>
                           </a:solidFill>
                           <a:latin typeface="Calibri"/>
                         </a:rPr>
-                        <a:t>Stato</a:t>
+                        <a:t>Errore</a:t>
                       </a:r>
                     </a:p>
                   </a:txBody>
@@ -7308,13 +10208,13 @@
                     <a:p>
                       <a:pPr algn="ctr"/>
                       <a:r>
-                        <a:rPr sz="1400" b="1">
+                        <a:rPr sz="1300" b="1">
                           <a:solidFill>
                             <a:srgbClr val="FFFFFF"/>
                           </a:solidFill>
                           <a:latin typeface="Calibri"/>
                         </a:rPr>
-                        <a:t>Dettaglio</a:t>
+                        <a:t>Soluzione</a:t>
                       </a:r>
                     </a:p>
                   </a:txBody>
@@ -7325,21 +10225,20 @@
                   </a:tcPr>
                 </a:tc>
               </a:tr>
-              <a:tr h="838200">
+              <a:tr h="617220">
                 <a:tc>
                   <a:txBody>
                     <a:bodyPr/>
                     <a:lstStyle/>
                     <a:p>
-                      <a:pPr algn="l"/>
                       <a:r>
-                        <a:rPr sz="1200">
+                        <a:rPr sz="1100">
                           <a:solidFill>
                             <a:srgbClr val="1A1A2E"/>
                           </a:solidFill>
                           <a:latin typeface="Calibri"/>
                         </a:rPr>
-                        <a:t>Hashing password</a:t>
+                        <a:t>1</a:t>
                       </a:r>
                     </a:p>
                   </a:txBody>
@@ -7354,15 +10253,14 @@
                     <a:bodyPr/>
                     <a:lstStyle/>
                     <a:p>
-                      <a:pPr algn="l"/>
                       <a:r>
-                        <a:rPr sz="1200">
+                        <a:rPr sz="1100">
                           <a:solidFill>
                             <a:srgbClr val="1A1A2E"/>
                           </a:solidFill>
                           <a:latin typeface="Calibri"/>
                         </a:rPr>
-                        <a:t>✅ Implementato</a:t>
+                        <a:t>SQL Injection con f-string</a:t>
                       </a:r>
                     </a:p>
                   </a:txBody>
@@ -7377,15 +10275,14 @@
                     <a:bodyPr/>
                     <a:lstStyle/>
                     <a:p>
-                      <a:pPr algn="l"/>
                       <a:r>
-                        <a:rPr sz="1200">
+                        <a:rPr sz="1100">
                           <a:solidFill>
                             <a:srgbClr val="1A1A2E"/>
                           </a:solidFill>
                           <a:latin typeface="Calibri"/>
                         </a:rPr>
-                        <a:t>bcrypt cost=12</a:t>
+                        <a:t>Query parametrizzate</a:t>
                       </a:r>
                     </a:p>
                   </a:txBody>
@@ -7396,21 +10293,20 @@
                   </a:tcPr>
                 </a:tc>
               </a:tr>
-              <a:tr h="838200">
+              <a:tr h="617220">
                 <a:tc>
                   <a:txBody>
                     <a:bodyPr/>
                     <a:lstStyle/>
                     <a:p>
-                      <a:pPr algn="l"/>
                       <a:r>
-                        <a:rPr sz="1200">
+                        <a:rPr sz="1100">
                           <a:solidFill>
                             <a:srgbClr val="1A1A2E"/>
                           </a:solidFill>
                           <a:latin typeface="Calibri"/>
                         </a:rPr>
-                        <a:t>MFA</a:t>
+                        <a:t>2</a:t>
                       </a:r>
                     </a:p>
                   </a:txBody>
@@ -7425,15 +10321,14 @@
                     <a:bodyPr/>
                     <a:lstStyle/>
                     <a:p>
-                      <a:pPr algn="l"/>
                       <a:r>
-                        <a:rPr sz="1200">
+                        <a:rPr sz="1100">
                           <a:solidFill>
                             <a:srgbClr val="1A1A2E"/>
                           </a:solidFill>
                           <a:latin typeface="Calibri"/>
                         </a:rPr>
-                        <a:t>⚠ Parziale</a:t>
+                        <a:t>Hash deboli (SHA-256) per password</a:t>
                       </a:r>
                     </a:p>
                   </a:txBody>
@@ -7448,15 +10343,14 @@
                     <a:bodyPr/>
                     <a:lstStyle/>
                     <a:p>
-                      <a:pPr algn="l"/>
                       <a:r>
-                        <a:rPr sz="1200">
+                        <a:rPr sz="1100">
                           <a:solidFill>
                             <a:srgbClr val="1A1A2E"/>
                           </a:solidFill>
                           <a:latin typeface="Calibri"/>
                         </a:rPr>
-                        <a:t>TOTP solo per admin</a:t>
+                        <a:t>bcrypt / Argon2id</a:t>
                       </a:r>
                     </a:p>
                   </a:txBody>
@@ -7467,21 +10361,20 @@
                   </a:tcPr>
                 </a:tc>
               </a:tr>
-              <a:tr h="838200">
+              <a:tr h="617220">
                 <a:tc>
                   <a:txBody>
                     <a:bodyPr/>
                     <a:lstStyle/>
                     <a:p>
-                      <a:pPr algn="l"/>
                       <a:r>
-                        <a:rPr sz="1200">
+                        <a:rPr sz="1100">
                           <a:solidFill>
                             <a:srgbClr val="1A1A2E"/>
                           </a:solidFill>
                           <a:latin typeface="Calibri"/>
                         </a:rPr>
-                        <a:t>Rate limit login</a:t>
+                        <a:t>3</a:t>
                       </a:r>
                     </a:p>
                   </a:txBody>
@@ -7496,15 +10389,14 @@
                     <a:bodyPr/>
                     <a:lstStyle/>
                     <a:p>
-                      <a:pPr algn="l"/>
                       <a:r>
-                        <a:rPr sz="1200">
+                        <a:rPr sz="1100">
                           <a:solidFill>
                             <a:srgbClr val="1A1A2E"/>
                           </a:solidFill>
                           <a:latin typeface="Calibri"/>
                         </a:rPr>
-                        <a:t>✅ Implementato</a:t>
+                        <a:t>Manca authorization check</a:t>
                       </a:r>
                     </a:p>
                   </a:txBody>
@@ -7519,15 +10411,14 @@
                     <a:bodyPr/>
                     <a:lstStyle/>
                     <a:p>
-                      <a:pPr algn="l"/>
                       <a:r>
-                        <a:rPr sz="1200">
+                        <a:rPr sz="1100">
                           <a:solidFill>
                             <a:srgbClr val="1A1A2E"/>
                           </a:solidFill>
                           <a:latin typeface="Calibri"/>
                         </a:rPr>
-                        <a:t>5/min via flask-limiter</a:t>
+                        <a:t>Ownership check</a:t>
                       </a:r>
                     </a:p>
                   </a:txBody>
@@ -7538,21 +10429,20 @@
                   </a:tcPr>
                 </a:tc>
               </a:tr>
-              <a:tr h="838200">
+              <a:tr h="617220">
                 <a:tc>
                   <a:txBody>
                     <a:bodyPr/>
                     <a:lstStyle/>
                     <a:p>
-                      <a:pPr algn="l"/>
                       <a:r>
-                        <a:rPr sz="1200">
+                        <a:rPr sz="1100">
                           <a:solidFill>
                             <a:srgbClr val="1A1A2E"/>
                           </a:solidFill>
                           <a:latin typeface="Calibri"/>
                         </a:rPr>
-                        <a:t>Risposta uniforme errori</a:t>
+                        <a:t>4</a:t>
                       </a:r>
                     </a:p>
                   </a:txBody>
@@ -7567,15 +10457,14 @@
                     <a:bodyPr/>
                     <a:lstStyle/>
                     <a:p>
-                      <a:pPr algn="l"/>
                       <a:r>
-                        <a:rPr sz="1200">
+                        <a:rPr sz="1100">
                           <a:solidFill>
                             <a:srgbClr val="1A1A2E"/>
                           </a:solidFill>
                           <a:latin typeface="Calibri"/>
                         </a:rPr>
-                        <a:t>✅ Implementato</a:t>
+                        <a:t>Template senza escape</a:t>
                       </a:r>
                     </a:p>
                   </a:txBody>
@@ -7590,15 +10479,14 @@
                     <a:bodyPr/>
                     <a:lstStyle/>
                     <a:p>
-                      <a:pPr algn="l"/>
                       <a:r>
-                        <a:rPr sz="1200">
+                        <a:rPr sz="1100">
                           <a:solidFill>
                             <a:srgbClr val="1A1A2E"/>
                           </a:solidFill>
                           <a:latin typeface="Calibri"/>
                         </a:rPr>
-                        <a:t>stesso msg email/password</a:t>
+                        <a:t>Jinja2/Twig auto-escape</a:t>
                       </a:r>
                     </a:p>
                   </a:txBody>
@@ -7609,21 +10497,20 @@
                   </a:tcPr>
                 </a:tc>
               </a:tr>
-              <a:tr h="838200">
+              <a:tr h="617220">
                 <a:tc>
                   <a:txBody>
                     <a:bodyPr/>
                     <a:lstStyle/>
                     <a:p>
-                      <a:pPr algn="l"/>
                       <a:r>
-                        <a:rPr sz="1200">
+                        <a:rPr sz="1100">
                           <a:solidFill>
                             <a:srgbClr val="1A1A2E"/>
                           </a:solidFill>
                           <a:latin typeface="Calibri"/>
                         </a:rPr>
-                        <a:t>Session ID rigenerato</a:t>
+                        <a:t>5</a:t>
                       </a:r>
                     </a:p>
                   </a:txBody>
@@ -7638,15 +10525,14 @@
                     <a:bodyPr/>
                     <a:lstStyle/>
                     <a:p>
-                      <a:pPr algn="l"/>
                       <a:r>
-                        <a:rPr sz="1200">
+                        <a:rPr sz="1100">
                           <a:solidFill>
                             <a:srgbClr val="1A1A2E"/>
                           </a:solidFill>
                           <a:latin typeface="Calibri"/>
                         </a:rPr>
-                        <a:t>✅ Implementato</a:t>
+                        <a:t>CORS troppo permissivo (origins: '*')</a:t>
                       </a:r>
                     </a:p>
                   </a:txBody>
@@ -7661,15 +10547,150 @@
                     <a:bodyPr/>
                     <a:lstStyle/>
                     <a:p>
-                      <a:pPr algn="l"/>
                       <a:r>
-                        <a:rPr sz="1200">
+                        <a:rPr sz="1100">
                           <a:solidFill>
                             <a:srgbClr val="1A1A2E"/>
                           </a:solidFill>
                           <a:latin typeface="Calibri"/>
                         </a:rPr>
-                        <a:t>Flask-Login default</a:t>
+                        <a:t>Whitelist origini</a:t>
+                      </a:r>
+                    </a:p>
+                  </a:txBody>
+                  <a:tcPr>
+                    <a:solidFill>
+                      <a:srgbClr val="F1F4F8"/>
+                    </a:solidFill>
+                  </a:tcPr>
+                </a:tc>
+              </a:tr>
+              <a:tr h="617220">
+                <a:tc>
+                  <a:txBody>
+                    <a:bodyPr/>
+                    <a:lstStyle/>
+                    <a:p>
+                      <a:r>
+                        <a:rPr sz="1100">
+                          <a:solidFill>
+                            <a:srgbClr val="1A1A2E"/>
+                          </a:solidFill>
+                          <a:latin typeface="Calibri"/>
+                        </a:rPr>
+                        <a:t>6</a:t>
+                      </a:r>
+                    </a:p>
+                  </a:txBody>
+                  <a:tcPr>
+                    <a:solidFill>
+                      <a:srgbClr val="FFFFFF"/>
+                    </a:solidFill>
+                  </a:tcPr>
+                </a:tc>
+                <a:tc>
+                  <a:txBody>
+                    <a:bodyPr/>
+                    <a:lstStyle/>
+                    <a:p>
+                      <a:r>
+                        <a:rPr sz="1100">
+                          <a:solidFill>
+                            <a:srgbClr val="1A1A2E"/>
+                          </a:solidFill>
+                          <a:latin typeface="Calibri"/>
+                        </a:rPr>
+                        <a:t>Catch-all che falliscono in modo aperto</a:t>
+                      </a:r>
+                    </a:p>
+                  </a:txBody>
+                  <a:tcPr>
+                    <a:solidFill>
+                      <a:srgbClr val="FFFFFF"/>
+                    </a:solidFill>
+                  </a:tcPr>
+                </a:tc>
+                <a:tc>
+                  <a:txBody>
+                    <a:bodyPr/>
+                    <a:lstStyle/>
+                    <a:p>
+                      <a:r>
+                        <a:rPr sz="1100">
+                          <a:solidFill>
+                            <a:srgbClr val="1A1A2E"/>
+                          </a:solidFill>
+                          <a:latin typeface="Calibri"/>
+                        </a:rPr>
+                        <a:t>Fail Secure</a:t>
+                      </a:r>
+                    </a:p>
+                  </a:txBody>
+                  <a:tcPr>
+                    <a:solidFill>
+                      <a:srgbClr val="FFFFFF"/>
+                    </a:solidFill>
+                  </a:tcPr>
+                </a:tc>
+              </a:tr>
+              <a:tr h="617220">
+                <a:tc>
+                  <a:txBody>
+                    <a:bodyPr/>
+                    <a:lstStyle/>
+                    <a:p>
+                      <a:r>
+                        <a:rPr sz="1100">
+                          <a:solidFill>
+                            <a:srgbClr val="1A1A2E"/>
+                          </a:solidFill>
+                          <a:latin typeface="Calibri"/>
+                        </a:rPr>
+                        <a:t>7</a:t>
+                      </a:r>
+                    </a:p>
+                  </a:txBody>
+                  <a:tcPr>
+                    <a:solidFill>
+                      <a:srgbClr val="F1F4F8"/>
+                    </a:solidFill>
+                  </a:tcPr>
+                </a:tc>
+                <a:tc>
+                  <a:txBody>
+                    <a:bodyPr/>
+                    <a:lstStyle/>
+                    <a:p>
+                      <a:r>
+                        <a:rPr sz="1100">
+                          <a:solidFill>
+                            <a:srgbClr val="1A1A2E"/>
+                          </a:solidFill>
+                          <a:latin typeface="Calibri"/>
+                        </a:rPr>
+                        <a:t>Segreti hardcoded ('change-me')</a:t>
+                      </a:r>
+                    </a:p>
+                  </a:txBody>
+                  <a:tcPr>
+                    <a:solidFill>
+                      <a:srgbClr val="F1F4F8"/>
+                    </a:solidFill>
+                  </a:tcPr>
+                </a:tc>
+                <a:tc>
+                  <a:txBody>
+                    <a:bodyPr/>
+                    <a:lstStyle/>
+                    <a:p>
+                      <a:r>
+                        <a:rPr sz="1100">
+                          <a:solidFill>
+                            <a:srgbClr val="1A1A2E"/>
+                          </a:solidFill>
+                          <a:latin typeface="Calibri"/>
+                        </a:rPr>
+                        <a:t>Env var</a:t>
                       </a:r>
                     </a:p>
                   </a:txBody>
@@ -7728,7 +10749,7 @@
         <p:spPr>
           <a:xfrm>
             <a:off x="457200" y="6473952"/>
-            <a:ext cx="7315200" cy="320040"/>
+            <a:ext cx="7315200" cy="292608"/>
           </a:xfrm>
           <a:prstGeom prst="rect">
             <a:avLst/>
@@ -7749,7 +10770,7 @@
                 </a:solidFill>
                 <a:latin typeface="Calibri"/>
               </a:rPr>
-              <a:t>Secure Coding · Corso IFTS STEM · A. Manneschi</a:t>
+              <a:t>Secure Coding · Corso IFTS STEM · A. Manneschi · 2024/2025</a:t>
             </a:r>
           </a:p>
         </p:txBody>
@@ -7763,938 +10784,7 @@
         <p:spPr>
           <a:xfrm>
             <a:off x="10515600" y="6473952"/>
-            <a:ext cx="1188720" cy="320040"/>
-          </a:xfrm>
-          <a:prstGeom prst="rect">
-            <a:avLst/>
-          </a:prstGeom>
-          <a:noFill/>
-        </p:spPr>
-        <p:txBody>
-          <a:bodyPr wrap="square" lIns="45720" rIns="45720" tIns="18288" bIns="18288" anchor="t">
-            <a:spAutoFit/>
-          </a:bodyPr>
-          <a:lstStyle/>
-          <a:p>
-            <a:pPr algn="r"/>
-            <a:r>
-              <a:rPr sz="1000" b="1" i="0">
-                <a:solidFill>
-                  <a:srgbClr val="6B7280"/>
-                </a:solidFill>
-                <a:latin typeface="Calibri"/>
-              </a:rPr>
-              <a:t>L7  ·  6/14</a:t>
-            </a:r>
-          </a:p>
-        </p:txBody>
-      </p:sp>
-    </p:spTree>
-  </p:cSld>
-  <p:clrMapOvr>
-    <a:masterClrMapping/>
-  </p:clrMapOvr>
-</p:sld>
-</file>
-
-<file path=ppt/slides/slide7.xml><?xml version="1.0" encoding="utf-8"?>
-<p:sld xmlns:a="http://schemas.openxmlformats.org/drawingml/2006/main" xmlns:p="http://schemas.openxmlformats.org/presentationml/2006/main" xmlns:r="http://schemas.openxmlformats.org/officeDocument/2006/relationships">
-  <p:cSld>
-    <p:spTree>
-      <p:nvGrpSpPr>
-        <p:cNvPr id="1" name=""/>
-        <p:cNvGrpSpPr/>
-        <p:nvPr/>
-      </p:nvGrpSpPr>
-      <p:grpSpPr/>
-      <p:sp>
-        <p:nvSpPr>
-          <p:cNvPr id="2" name="Rectangle 1"/>
-          <p:cNvSpPr/>
-          <p:nvPr/>
-        </p:nvSpPr>
-        <p:spPr>
-          <a:xfrm>
-            <a:off x="0" y="0"/>
-            <a:ext cx="12191695" cy="777240"/>
-          </a:xfrm>
-          <a:prstGeom prst="rect">
-            <a:avLst/>
-          </a:prstGeom>
-          <a:solidFill>
-            <a:srgbClr val="0F2D52"/>
-          </a:solidFill>
-          <a:ln>
-            <a:noFill/>
-          </a:ln>
-        </p:spPr>
-        <p:style>
-          <a:lnRef idx="1">
-            <a:schemeClr val="accent1"/>
-          </a:lnRef>
-          <a:fillRef idx="3">
-            <a:schemeClr val="accent1"/>
-          </a:fillRef>
-          <a:effectRef idx="2">
-            <a:schemeClr val="accent1"/>
-          </a:effectRef>
-          <a:fontRef idx="minor">
-            <a:schemeClr val="lt1"/>
-          </a:fontRef>
-        </p:style>
-        <p:txBody>
-          <a:bodyPr rtlCol="0" anchor="ctr"/>
-          <a:lstStyle/>
-          <a:p>
-            <a:pPr algn="ctr"/>
-          </a:p>
-        </p:txBody>
-      </p:sp>
-      <p:sp>
-        <p:nvSpPr>
-          <p:cNvPr id="3" name="TextBox 2"/>
-          <p:cNvSpPr txBox="1"/>
-          <p:nvPr/>
-        </p:nvSpPr>
-        <p:spPr>
-          <a:xfrm>
-            <a:off x="457200" y="164592"/>
-            <a:ext cx="10972800" cy="502920"/>
-          </a:xfrm>
-          <a:prstGeom prst="rect">
-            <a:avLst/>
-          </a:prstGeom>
-          <a:noFill/>
-        </p:spPr>
-        <p:txBody>
-          <a:bodyPr wrap="square" lIns="45720" rIns="45720" tIns="18288" bIns="18288" anchor="ctr">
-            <a:spAutoFit/>
-          </a:bodyPr>
-          <a:lstStyle/>
-          <a:p>
-            <a:pPr algn="l"/>
-            <a:r>
-              <a:rPr sz="2400" b="1" i="0">
-                <a:solidFill>
-                  <a:srgbClr val="FFFFFF"/>
-                </a:solidFill>
-                <a:latin typeface="Calibri"/>
-              </a:rPr>
-              <a:t>Collegamento con UF 7</a:t>
-            </a:r>
-          </a:p>
-        </p:txBody>
-      </p:sp>
-      <p:sp>
-        <p:nvSpPr>
-          <p:cNvPr id="4" name="TextBox 3"/>
-          <p:cNvSpPr txBox="1"/>
-          <p:nvPr/>
-        </p:nvSpPr>
-        <p:spPr>
-          <a:xfrm>
-            <a:off x="640080" y="1005840"/>
-            <a:ext cx="10972800" cy="5029200"/>
-          </a:xfrm>
-          <a:prstGeom prst="rect">
-            <a:avLst/>
-          </a:prstGeom>
-          <a:noFill/>
-        </p:spPr>
-        <p:txBody>
-          <a:bodyPr wrap="square">
-            <a:spAutoFit/>
-          </a:bodyPr>
-          <a:lstStyle/>
-          <a:p>
-            <a:pPr>
-              <a:lnSpc>
-                <a:spcPct val="150000"/>
-              </a:lnSpc>
-            </a:pPr>
-            <a:r>
-              <a:rPr sz="2000" b="1">
-                <a:solidFill>
-                  <a:srgbClr val="00A0B0"/>
-                </a:solidFill>
-                <a:latin typeface="Calibri"/>
-              </a:rPr>
-              <a:t>▸  </a:t>
-            </a:r>
-            <a:r>
-              <a:rPr sz="2000">
-                <a:solidFill>
-                  <a:srgbClr val="1A1A2E"/>
-                </a:solidFill>
-                <a:latin typeface="Calibri"/>
-              </a:rPr>
-              <a:t>UF 7 — Tecniche di redazione documentazione tecnica</a:t>
-            </a:r>
-          </a:p>
-          <a:p>
-            <a:pPr>
-              <a:lnSpc>
-                <a:spcPct val="150000"/>
-              </a:lnSpc>
-            </a:pPr>
-            <a:r>
-              <a:rPr sz="2000" b="1">
-                <a:solidFill>
-                  <a:srgbClr val="00A0B0"/>
-                </a:solidFill>
-                <a:latin typeface="Calibri"/>
-              </a:rPr>
-              <a:t>▸  </a:t>
-            </a:r>
-            <a:r>
-              <a:rPr sz="2000">
-                <a:solidFill>
-                  <a:srgbClr val="1A1A2E"/>
-                </a:solidFill>
-                <a:latin typeface="Calibri"/>
-              </a:rPr>
-              <a:t>ti dà le basi: chiarezza, struttura, stile</a:t>
-            </a:r>
-          </a:p>
-          <a:p>
-            <a:pPr>
-              <a:lnSpc>
-                <a:spcPct val="150000"/>
-              </a:lnSpc>
-            </a:pPr>
-            <a:r>
-              <a:rPr sz="2000" b="1">
-                <a:solidFill>
-                  <a:srgbClr val="00A0B0"/>
-                </a:solidFill>
-                <a:latin typeface="Calibri"/>
-              </a:rPr>
-              <a:t>▸  </a:t>
-            </a:r>
-            <a:r>
-              <a:rPr sz="2000">
-                <a:solidFill>
-                  <a:srgbClr val="1A1A2E"/>
-                </a:solidFill>
-                <a:latin typeface="Calibri"/>
-              </a:rPr>
-              <a:t/>
-            </a:r>
-          </a:p>
-          <a:p>
-            <a:pPr>
-              <a:lnSpc>
-                <a:spcPct val="150000"/>
-              </a:lnSpc>
-            </a:pPr>
-            <a:r>
-              <a:rPr sz="2000" b="1">
-                <a:solidFill>
-                  <a:srgbClr val="00A0B0"/>
-                </a:solidFill>
-                <a:latin typeface="Calibri"/>
-              </a:rPr>
-              <a:t>▸  </a:t>
-            </a:r>
-            <a:r>
-              <a:rPr sz="2000">
-                <a:solidFill>
-                  <a:srgbClr val="1A1A2E"/>
-                </a:solidFill>
-                <a:latin typeface="Calibri"/>
-              </a:rPr>
-              <a:t>Applica quei principi a SECURITY.md</a:t>
-            </a:r>
-          </a:p>
-          <a:p>
-            <a:pPr>
-              <a:lnSpc>
-                <a:spcPct val="150000"/>
-              </a:lnSpc>
-            </a:pPr>
-            <a:r>
-              <a:rPr sz="2000" b="1">
-                <a:solidFill>
-                  <a:srgbClr val="00A0B0"/>
-                </a:solidFill>
-                <a:latin typeface="Calibri"/>
-              </a:rPr>
-              <a:t>▸  </a:t>
-            </a:r>
-            <a:r>
-              <a:rPr sz="2000">
-                <a:solidFill>
-                  <a:srgbClr val="1A1A2E"/>
-                </a:solidFill>
-                <a:latin typeface="Calibri"/>
-              </a:rPr>
-              <a:t/>
-            </a:r>
-          </a:p>
-          <a:p>
-            <a:pPr>
-              <a:lnSpc>
-                <a:spcPct val="150000"/>
-              </a:lnSpc>
-            </a:pPr>
-            <a:r>
-              <a:rPr sz="2000" b="1">
-                <a:solidFill>
-                  <a:srgbClr val="00A0B0"/>
-                </a:solidFill>
-                <a:latin typeface="Calibri"/>
-              </a:rPr>
-              <a:t>▸  </a:t>
-            </a:r>
-            <a:r>
-              <a:rPr sz="2000">
-                <a:solidFill>
-                  <a:srgbClr val="1A1A2E"/>
-                </a:solidFill>
-                <a:latin typeface="Calibri"/>
-              </a:rPr>
-              <a:t>Esercizio raccomandato: per il TUO progetto di stage,</a:t>
-            </a:r>
-          </a:p>
-          <a:p>
-            <a:pPr>
-              <a:lnSpc>
-                <a:spcPct val="150000"/>
-              </a:lnSpc>
-            </a:pPr>
-            <a:r>
-              <a:rPr sz="2000" b="1">
-                <a:solidFill>
-                  <a:srgbClr val="00A0B0"/>
-                </a:solidFill>
-                <a:latin typeface="Calibri"/>
-              </a:rPr>
-              <a:t>▸  </a:t>
-            </a:r>
-            <a:r>
-              <a:rPr sz="2000">
-                <a:solidFill>
-                  <a:srgbClr val="1A1A2E"/>
-                </a:solidFill>
-                <a:latin typeface="Calibri"/>
-              </a:rPr>
-              <a:t>mantieni un SECURITY.md compilato fin dall'inizio.</a:t>
-            </a:r>
-          </a:p>
-          <a:p>
-            <a:pPr>
-              <a:lnSpc>
-                <a:spcPct val="150000"/>
-              </a:lnSpc>
-            </a:pPr>
-            <a:r>
-              <a:rPr sz="2000" b="1">
-                <a:solidFill>
-                  <a:srgbClr val="00A0B0"/>
-                </a:solidFill>
-                <a:latin typeface="Calibri"/>
-              </a:rPr>
-              <a:t>▸  </a:t>
-            </a:r>
-            <a:r>
-              <a:rPr sz="2000">
-                <a:solidFill>
-                  <a:srgbClr val="1A1A2E"/>
-                </a:solidFill>
-                <a:latin typeface="Calibri"/>
-              </a:rPr>
-              <a:t>Sarà uno degli output più apprezzati in azienda.</a:t>
-            </a:r>
-          </a:p>
-        </p:txBody>
-      </p:sp>
-      <p:cxnSp>
-        <p:nvCxnSpPr>
-          <p:cNvPr id="5" name="Connector 4"/>
-          <p:cNvCxnSpPr/>
-          <p:nvPr/>
-        </p:nvCxnSpPr>
-        <p:spPr>
-          <a:xfrm>
-            <a:off x="457200" y="6446520"/>
-            <a:ext cx="11274552" cy="0"/>
-          </a:xfrm>
-          <a:prstGeom prst="line">
-            <a:avLst/>
-          </a:prstGeom>
-          <a:ln w="19050">
-            <a:solidFill>
-              <a:srgbClr val="00A0B0"/>
-            </a:solidFill>
-          </a:ln>
-        </p:spPr>
-        <p:style>
-          <a:lnRef idx="2">
-            <a:schemeClr val="accent1"/>
-          </a:lnRef>
-          <a:fillRef idx="0">
-            <a:schemeClr val="accent1"/>
-          </a:fillRef>
-          <a:effectRef idx="1">
-            <a:schemeClr val="accent1"/>
-          </a:effectRef>
-          <a:fontRef idx="minor">
-            <a:schemeClr val="tx1"/>
-          </a:fontRef>
-        </p:style>
-      </p:cxnSp>
-      <p:sp>
-        <p:nvSpPr>
-          <p:cNvPr id="6" name="TextBox 5"/>
-          <p:cNvSpPr txBox="1"/>
-          <p:nvPr/>
-        </p:nvSpPr>
-        <p:spPr>
-          <a:xfrm>
-            <a:off x="457200" y="6473952"/>
-            <a:ext cx="7315200" cy="320040"/>
-          </a:xfrm>
-          <a:prstGeom prst="rect">
-            <a:avLst/>
-          </a:prstGeom>
-          <a:noFill/>
-        </p:spPr>
-        <p:txBody>
-          <a:bodyPr wrap="square" lIns="45720" rIns="45720" tIns="18288" bIns="18288" anchor="t">
-            <a:spAutoFit/>
-          </a:bodyPr>
-          <a:lstStyle/>
-          <a:p>
-            <a:pPr algn="l"/>
-            <a:r>
-              <a:rPr sz="1000" b="0" i="0">
-                <a:solidFill>
-                  <a:srgbClr val="6B7280"/>
-                </a:solidFill>
-                <a:latin typeface="Calibri"/>
-              </a:rPr>
-              <a:t>Secure Coding · Corso IFTS STEM · A. Manneschi</a:t>
-            </a:r>
-          </a:p>
-        </p:txBody>
-      </p:sp>
-      <p:sp>
-        <p:nvSpPr>
-          <p:cNvPr id="7" name="TextBox 6"/>
-          <p:cNvSpPr txBox="1"/>
-          <p:nvPr/>
-        </p:nvSpPr>
-        <p:spPr>
-          <a:xfrm>
-            <a:off x="10515600" y="6473952"/>
-            <a:ext cx="1188720" cy="320040"/>
-          </a:xfrm>
-          <a:prstGeom prst="rect">
-            <a:avLst/>
-          </a:prstGeom>
-          <a:noFill/>
-        </p:spPr>
-        <p:txBody>
-          <a:bodyPr wrap="square" lIns="45720" rIns="45720" tIns="18288" bIns="18288" anchor="t">
-            <a:spAutoFit/>
-          </a:bodyPr>
-          <a:lstStyle/>
-          <a:p>
-            <a:pPr algn="r"/>
-            <a:r>
-              <a:rPr sz="1000" b="1" i="0">
-                <a:solidFill>
-                  <a:srgbClr val="6B7280"/>
-                </a:solidFill>
-                <a:latin typeface="Calibri"/>
-              </a:rPr>
-              <a:t>L7  ·  7/14</a:t>
-            </a:r>
-          </a:p>
-        </p:txBody>
-      </p:sp>
-    </p:spTree>
-  </p:cSld>
-  <p:clrMapOvr>
-    <a:masterClrMapping/>
-  </p:clrMapOvr>
-</p:sld>
-</file>
-
-<file path=ppt/slides/slide8.xml><?xml version="1.0" encoding="utf-8"?>
-<p:sld xmlns:a="http://schemas.openxmlformats.org/drawingml/2006/main" xmlns:p="http://schemas.openxmlformats.org/presentationml/2006/main" xmlns:r="http://schemas.openxmlformats.org/officeDocument/2006/relationships">
-  <p:cSld>
-    <p:spTree>
-      <p:nvGrpSpPr>
-        <p:cNvPr id="1" name=""/>
-        <p:cNvGrpSpPr/>
-        <p:nvPr/>
-      </p:nvGrpSpPr>
-      <p:grpSpPr/>
-      <p:sp>
-        <p:nvSpPr>
-          <p:cNvPr id="2" name="Rectangle 1"/>
-          <p:cNvSpPr/>
-          <p:nvPr/>
-        </p:nvSpPr>
-        <p:spPr>
-          <a:xfrm>
-            <a:off x="0" y="0"/>
-            <a:ext cx="2286000" cy="6858000"/>
-          </a:xfrm>
-          <a:prstGeom prst="rect">
-            <a:avLst/>
-          </a:prstGeom>
-          <a:solidFill>
-            <a:srgbClr val="0F2D52"/>
-          </a:solidFill>
-          <a:ln>
-            <a:noFill/>
-          </a:ln>
-        </p:spPr>
-        <p:style>
-          <a:lnRef idx="1">
-            <a:schemeClr val="accent1"/>
-          </a:lnRef>
-          <a:fillRef idx="3">
-            <a:schemeClr val="accent1"/>
-          </a:fillRef>
-          <a:effectRef idx="2">
-            <a:schemeClr val="accent1"/>
-          </a:effectRef>
-          <a:fontRef idx="minor">
-            <a:schemeClr val="lt1"/>
-          </a:fontRef>
-        </p:style>
-        <p:txBody>
-          <a:bodyPr rtlCol="0" anchor="ctr"/>
-          <a:lstStyle/>
-          <a:p>
-            <a:pPr algn="ctr"/>
-          </a:p>
-        </p:txBody>
-      </p:sp>
-      <p:sp>
-        <p:nvSpPr>
-          <p:cNvPr id="3" name="TextBox 2"/>
-          <p:cNvSpPr txBox="1"/>
-          <p:nvPr/>
-        </p:nvSpPr>
-        <p:spPr>
-          <a:xfrm>
-            <a:off x="274320" y="2286000"/>
-            <a:ext cx="1828800" cy="1828800"/>
-          </a:xfrm>
-          <a:prstGeom prst="rect">
-            <a:avLst/>
-          </a:prstGeom>
-          <a:noFill/>
-        </p:spPr>
-        <p:txBody>
-          <a:bodyPr wrap="square" lIns="45720" rIns="45720" tIns="18288" bIns="18288" anchor="t">
-            <a:spAutoFit/>
-          </a:bodyPr>
-          <a:lstStyle/>
-          <a:p>
-            <a:pPr algn="ctr"/>
-            <a:r>
-              <a:rPr sz="12000" b="1" i="0">
-                <a:solidFill>
-                  <a:srgbClr val="00A0B0"/>
-                </a:solidFill>
-                <a:latin typeface="Calibri"/>
-              </a:rPr>
-              <a:t>02</a:t>
-            </a:r>
-          </a:p>
-        </p:txBody>
-      </p:sp>
-      <p:sp>
-        <p:nvSpPr>
-          <p:cNvPr id="4" name="TextBox 3"/>
-          <p:cNvSpPr txBox="1"/>
-          <p:nvPr/>
-        </p:nvSpPr>
-        <p:spPr>
-          <a:xfrm>
-            <a:off x="2743200" y="2560320"/>
-            <a:ext cx="8961120" cy="1371600"/>
-          </a:xfrm>
-          <a:prstGeom prst="rect">
-            <a:avLst/>
-          </a:prstGeom>
-          <a:noFill/>
-        </p:spPr>
-        <p:txBody>
-          <a:bodyPr wrap="square" lIns="45720" rIns="45720" tIns="18288" bIns="18288" anchor="t">
-            <a:spAutoFit/>
-          </a:bodyPr>
-          <a:lstStyle/>
-          <a:p>
-            <a:pPr algn="l"/>
-            <a:r>
-              <a:rPr sz="4200" b="1" i="0">
-                <a:solidFill>
-                  <a:srgbClr val="0F2D52"/>
-                </a:solidFill>
-                <a:latin typeface="Calibri"/>
-              </a:rPr>
-              <a:t>Uso responsabile dell'IA</a:t>
-            </a:r>
-          </a:p>
-        </p:txBody>
-      </p:sp>
-      <p:sp>
-        <p:nvSpPr>
-          <p:cNvPr id="5" name="TextBox 4"/>
-          <p:cNvSpPr txBox="1"/>
-          <p:nvPr/>
-        </p:nvSpPr>
-        <p:spPr>
-          <a:xfrm>
-            <a:off x="2743200" y="3931920"/>
-            <a:ext cx="8961120" cy="1828800"/>
-          </a:xfrm>
-          <a:prstGeom prst="rect">
-            <a:avLst/>
-          </a:prstGeom>
-          <a:noFill/>
-        </p:spPr>
-        <p:txBody>
-          <a:bodyPr wrap="square" lIns="45720" rIns="45720" tIns="18288" bIns="18288" anchor="t">
-            <a:spAutoFit/>
-          </a:bodyPr>
-          <a:lstStyle/>
-          <a:p>
-            <a:pPr algn="l"/>
-            <a:r>
-              <a:rPr sz="1800" b="0" i="1">
-                <a:solidFill>
-                  <a:srgbClr val="6B7280"/>
-                </a:solidFill>
-                <a:latin typeface="Calibri"/>
-              </a:rPr>
-              <a:t>Copilot, Claude, ChatGPT, Cursor: moltiplicatori di produttività... e di errori</a:t>
-            </a:r>
-          </a:p>
-        </p:txBody>
-      </p:sp>
-      <p:cxnSp>
-        <p:nvCxnSpPr>
-          <p:cNvPr id="6" name="Connector 5"/>
-          <p:cNvCxnSpPr/>
-          <p:nvPr/>
-        </p:nvCxnSpPr>
-        <p:spPr>
-          <a:xfrm>
-            <a:off x="457200" y="6446520"/>
-            <a:ext cx="11274552" cy="0"/>
-          </a:xfrm>
-          <a:prstGeom prst="line">
-            <a:avLst/>
-          </a:prstGeom>
-          <a:ln w="19050">
-            <a:solidFill>
-              <a:srgbClr val="00A0B0"/>
-            </a:solidFill>
-          </a:ln>
-        </p:spPr>
-        <p:style>
-          <a:lnRef idx="2">
-            <a:schemeClr val="accent1"/>
-          </a:lnRef>
-          <a:fillRef idx="0">
-            <a:schemeClr val="accent1"/>
-          </a:fillRef>
-          <a:effectRef idx="1">
-            <a:schemeClr val="accent1"/>
-          </a:effectRef>
-          <a:fontRef idx="minor">
-            <a:schemeClr val="tx1"/>
-          </a:fontRef>
-        </p:style>
-      </p:cxnSp>
-      <p:sp>
-        <p:nvSpPr>
-          <p:cNvPr id="7" name="TextBox 6"/>
-          <p:cNvSpPr txBox="1"/>
-          <p:nvPr/>
-        </p:nvSpPr>
-        <p:spPr>
-          <a:xfrm>
-            <a:off x="457200" y="6473952"/>
-            <a:ext cx="7315200" cy="320040"/>
-          </a:xfrm>
-          <a:prstGeom prst="rect">
-            <a:avLst/>
-          </a:prstGeom>
-          <a:noFill/>
-        </p:spPr>
-        <p:txBody>
-          <a:bodyPr wrap="square" lIns="45720" rIns="45720" tIns="18288" bIns="18288" anchor="t">
-            <a:spAutoFit/>
-          </a:bodyPr>
-          <a:lstStyle/>
-          <a:p>
-            <a:pPr algn="l"/>
-            <a:r>
-              <a:rPr sz="1000" b="0" i="0">
-                <a:solidFill>
-                  <a:srgbClr val="6B7280"/>
-                </a:solidFill>
-                <a:latin typeface="Calibri"/>
-              </a:rPr>
-              <a:t>Secure Coding · Corso IFTS STEM · A. Manneschi</a:t>
-            </a:r>
-          </a:p>
-        </p:txBody>
-      </p:sp>
-      <p:sp>
-        <p:nvSpPr>
-          <p:cNvPr id="8" name="TextBox 7"/>
-          <p:cNvSpPr txBox="1"/>
-          <p:nvPr/>
-        </p:nvSpPr>
-        <p:spPr>
-          <a:xfrm>
-            <a:off x="10515600" y="6473952"/>
-            <a:ext cx="1188720" cy="320040"/>
-          </a:xfrm>
-          <a:prstGeom prst="rect">
-            <a:avLst/>
-          </a:prstGeom>
-          <a:noFill/>
-        </p:spPr>
-        <p:txBody>
-          <a:bodyPr wrap="square" lIns="45720" rIns="45720" tIns="18288" bIns="18288" anchor="t">
-            <a:spAutoFit/>
-          </a:bodyPr>
-          <a:lstStyle/>
-          <a:p>
-            <a:pPr algn="r"/>
-            <a:r>
-              <a:rPr sz="1000" b="1" i="0">
-                <a:solidFill>
-                  <a:srgbClr val="6B7280"/>
-                </a:solidFill>
-                <a:latin typeface="Calibri"/>
-              </a:rPr>
-              <a:t>L7  ·  8/14</a:t>
-            </a:r>
-          </a:p>
-        </p:txBody>
-      </p:sp>
-    </p:spTree>
-  </p:cSld>
-  <p:clrMapOvr>
-    <a:masterClrMapping/>
-  </p:clrMapOvr>
-</p:sld>
-</file>
-
-<file path=ppt/slides/slide9.xml><?xml version="1.0" encoding="utf-8"?>
-<p:sld xmlns:a="http://schemas.openxmlformats.org/drawingml/2006/main" xmlns:p="http://schemas.openxmlformats.org/presentationml/2006/main" xmlns:r="http://schemas.openxmlformats.org/officeDocument/2006/relationships">
-  <p:cSld>
-    <p:spTree>
-      <p:nvGrpSpPr>
-        <p:cNvPr id="1" name=""/>
-        <p:cNvGrpSpPr/>
-        <p:nvPr/>
-      </p:nvGrpSpPr>
-      <p:grpSpPr/>
-      <p:sp>
-        <p:nvSpPr>
-          <p:cNvPr id="2" name="Rectangle 1"/>
-          <p:cNvSpPr/>
-          <p:nvPr/>
-        </p:nvSpPr>
-        <p:spPr>
-          <a:xfrm>
-            <a:off x="0" y="0"/>
-            <a:ext cx="12191695" cy="6858000"/>
-          </a:xfrm>
-          <a:prstGeom prst="rect">
-            <a:avLst/>
-          </a:prstGeom>
-          <a:solidFill>
-            <a:srgbClr val="F1F4F8"/>
-          </a:solidFill>
-          <a:ln>
-            <a:noFill/>
-          </a:ln>
-        </p:spPr>
-        <p:style>
-          <a:lnRef idx="1">
-            <a:schemeClr val="accent1"/>
-          </a:lnRef>
-          <a:fillRef idx="3">
-            <a:schemeClr val="accent1"/>
-          </a:fillRef>
-          <a:effectRef idx="2">
-            <a:schemeClr val="accent1"/>
-          </a:effectRef>
-          <a:fontRef idx="minor">
-            <a:schemeClr val="lt1"/>
-          </a:fontRef>
-        </p:style>
-        <p:txBody>
-          <a:bodyPr rtlCol="0" anchor="ctr"/>
-          <a:lstStyle/>
-          <a:p>
-            <a:pPr algn="ctr"/>
-          </a:p>
-        </p:txBody>
-      </p:sp>
-      <p:sp>
-        <p:nvSpPr>
-          <p:cNvPr id="3" name="TextBox 2"/>
-          <p:cNvSpPr txBox="1"/>
-          <p:nvPr/>
-        </p:nvSpPr>
-        <p:spPr>
-          <a:xfrm>
-            <a:off x="457200" y="731520"/>
-            <a:ext cx="1828800" cy="1828800"/>
-          </a:xfrm>
-          <a:prstGeom prst="rect">
-            <a:avLst/>
-          </a:prstGeom>
-          <a:noFill/>
-        </p:spPr>
-        <p:txBody>
-          <a:bodyPr wrap="square" lIns="45720" rIns="45720" tIns="18288" bIns="18288" anchor="t">
-            <a:spAutoFit/>
-          </a:bodyPr>
-          <a:lstStyle/>
-          <a:p>
-            <a:pPr algn="l"/>
-            <a:r>
-              <a:rPr sz="20000" b="1" i="0">
-                <a:solidFill>
-                  <a:srgbClr val="00A0B0"/>
-                </a:solidFill>
-                <a:latin typeface="Georgia"/>
-              </a:rPr>
-              <a:t>“</a:t>
-            </a:r>
-          </a:p>
-        </p:txBody>
-      </p:sp>
-      <p:sp>
-        <p:nvSpPr>
-          <p:cNvPr id="4" name="TextBox 3"/>
-          <p:cNvSpPr txBox="1"/>
-          <p:nvPr/>
-        </p:nvSpPr>
-        <p:spPr>
-          <a:xfrm>
-            <a:off x="2286000" y="1828800"/>
-            <a:ext cx="9144000" cy="3200400"/>
-          </a:xfrm>
-          <a:prstGeom prst="rect">
-            <a:avLst/>
-          </a:prstGeom>
-          <a:noFill/>
-        </p:spPr>
-        <p:txBody>
-          <a:bodyPr wrap="square" lIns="45720" rIns="45720" tIns="18288" bIns="18288" anchor="ctr">
-            <a:spAutoFit/>
-          </a:bodyPr>
-          <a:lstStyle/>
-          <a:p>
-            <a:pPr algn="l"/>
-            <a:r>
-              <a:rPr sz="3200" b="1" i="1">
-                <a:solidFill>
-                  <a:srgbClr val="0F2D52"/>
-                </a:solidFill>
-                <a:latin typeface="Calibri"/>
-              </a:rPr>
-              <a:t>L'IA non sa di sicurezza. Tu devi.</a:t>
-            </a:r>
-          </a:p>
-        </p:txBody>
-      </p:sp>
-      <p:cxnSp>
-        <p:nvCxnSpPr>
-          <p:cNvPr id="5" name="Connector 4"/>
-          <p:cNvCxnSpPr/>
-          <p:nvPr/>
-        </p:nvCxnSpPr>
-        <p:spPr>
-          <a:xfrm>
-            <a:off x="457200" y="6446520"/>
-            <a:ext cx="11274552" cy="0"/>
-          </a:xfrm>
-          <a:prstGeom prst="line">
-            <a:avLst/>
-          </a:prstGeom>
-          <a:ln w="19050">
-            <a:solidFill>
-              <a:srgbClr val="00A0B0"/>
-            </a:solidFill>
-          </a:ln>
-        </p:spPr>
-        <p:style>
-          <a:lnRef idx="2">
-            <a:schemeClr val="accent1"/>
-          </a:lnRef>
-          <a:fillRef idx="0">
-            <a:schemeClr val="accent1"/>
-          </a:fillRef>
-          <a:effectRef idx="1">
-            <a:schemeClr val="accent1"/>
-          </a:effectRef>
-          <a:fontRef idx="minor">
-            <a:schemeClr val="tx1"/>
-          </a:fontRef>
-        </p:style>
-      </p:cxnSp>
-      <p:sp>
-        <p:nvSpPr>
-          <p:cNvPr id="6" name="TextBox 5"/>
-          <p:cNvSpPr txBox="1"/>
-          <p:nvPr/>
-        </p:nvSpPr>
-        <p:spPr>
-          <a:xfrm>
-            <a:off x="457200" y="6473952"/>
-            <a:ext cx="7315200" cy="320040"/>
-          </a:xfrm>
-          <a:prstGeom prst="rect">
-            <a:avLst/>
-          </a:prstGeom>
-          <a:noFill/>
-        </p:spPr>
-        <p:txBody>
-          <a:bodyPr wrap="square" lIns="45720" rIns="45720" tIns="18288" bIns="18288" anchor="t">
-            <a:spAutoFit/>
-          </a:bodyPr>
-          <a:lstStyle/>
-          <a:p>
-            <a:pPr algn="l"/>
-            <a:r>
-              <a:rPr sz="1000" b="0" i="0">
-                <a:solidFill>
-                  <a:srgbClr val="6B7280"/>
-                </a:solidFill>
-                <a:latin typeface="Calibri"/>
-              </a:rPr>
-              <a:t>Secure Coding · Corso IFTS STEM · A. Manneschi</a:t>
-            </a:r>
-          </a:p>
-        </p:txBody>
-      </p:sp>
-      <p:sp>
-        <p:nvSpPr>
-          <p:cNvPr id="7" name="TextBox 6"/>
-          <p:cNvSpPr txBox="1"/>
-          <p:nvPr/>
-        </p:nvSpPr>
-        <p:spPr>
-          <a:xfrm>
-            <a:off x="10515600" y="6473952"/>
-            <a:ext cx="1188720" cy="320040"/>
+            <a:ext cx="1188720" cy="292608"/>
           </a:xfrm>
           <a:prstGeom prst="rect">
             <a:avLst/>

--- a/slide/L7_documentazione_ai.pptx
+++ b/slide/L7_documentazione_ai.pptx
@@ -19,6 +19,8 @@
     <p:sldId id="267" r:id="rId18"/>
     <p:sldId id="268" r:id="rId19"/>
     <p:sldId id="269" r:id="rId20"/>
+    <p:sldId id="270" r:id="rId21"/>
+    <p:sldId id="271" r:id="rId22"/>
   </p:sldIdLst>
   <p:sldSz cx="12191695" cy="6858000" type="screen4x3"/>
   <p:notesSz cx="6858000" cy="9144000"/>
@@ -4106,7 +4108,7 @@
                 </a:solidFill>
                 <a:latin typeface="Calibri"/>
               </a:rPr>
-              <a:t>L7  ·  10/14</a:t>
+              <a:t>L7  ·  10/16</a:t>
             </a:r>
           </a:p>
         </p:txBody>
@@ -4202,21 +4204,148 @@
                 </a:solidFill>
                 <a:latin typeface="Calibri"/>
               </a:rPr>
-              <a:t>🛑  Quando NON usare l'IA</a:t>
-            </a:r>
-          </a:p>
-        </p:txBody>
-      </p:sp>
-      <p:sp>
-        <p:nvSpPr>
-          <p:cNvPr id="4" name="TextBox 3"/>
+              <a:t>Prompting per la sicurezza: vago vs specifico</a:t>
+            </a:r>
+          </a:p>
+        </p:txBody>
+      </p:sp>
+      <p:sp>
+        <p:nvSpPr>
+          <p:cNvPr id="4" name="Rounded Rectangle 3"/>
+          <p:cNvSpPr/>
+          <p:nvPr/>
+        </p:nvSpPr>
+        <p:spPr>
+          <a:xfrm>
+            <a:off x="457200" y="1051560"/>
+            <a:ext cx="5486400" cy="640080"/>
+          </a:xfrm>
+          <a:prstGeom prst="roundRect">
+            <a:avLst>
+              <a:gd name="adj" fmla="val 8000"/>
+            </a:avLst>
+          </a:prstGeom>
+          <a:solidFill>
+            <a:srgbClr val="E63946"/>
+          </a:solidFill>
+          <a:ln>
+            <a:noFill/>
+          </a:ln>
+        </p:spPr>
+        <p:style>
+          <a:lnRef idx="1">
+            <a:schemeClr val="accent1"/>
+          </a:lnRef>
+          <a:fillRef idx="3">
+            <a:schemeClr val="accent1"/>
+          </a:fillRef>
+          <a:effectRef idx="2">
+            <a:schemeClr val="accent1"/>
+          </a:effectRef>
+          <a:fontRef idx="minor">
+            <a:schemeClr val="lt1"/>
+          </a:fontRef>
+        </p:style>
+        <p:txBody>
+          <a:bodyPr rtlCol="0" anchor="ctr"/>
+          <a:lstStyle/>
+          <a:p>
+            <a:pPr algn="ctr"/>
+          </a:p>
+        </p:txBody>
+      </p:sp>
+      <p:sp>
+        <p:nvSpPr>
+          <p:cNvPr id="5" name="TextBox 4"/>
           <p:cNvSpPr txBox="1"/>
           <p:nvPr/>
         </p:nvSpPr>
         <p:spPr>
           <a:xfrm>
-            <a:off x="640080" y="1097280"/>
-            <a:ext cx="10972800" cy="5029200"/>
+            <a:off x="457200" y="1051560"/>
+            <a:ext cx="5486400" cy="640080"/>
+          </a:xfrm>
+          <a:prstGeom prst="rect">
+            <a:avLst/>
+          </a:prstGeom>
+          <a:noFill/>
+        </p:spPr>
+        <p:txBody>
+          <a:bodyPr wrap="square" lIns="45720" rIns="45720" tIns="18288" bIns="18288" anchor="ctr">
+            <a:spAutoFit/>
+          </a:bodyPr>
+          <a:lstStyle/>
+          <a:p>
+            <a:pPr algn="ctr"/>
+            <a:r>
+              <a:rPr sz="1800" b="1" i="0">
+                <a:solidFill>
+                  <a:srgbClr val="FFFFFF"/>
+                </a:solidFill>
+                <a:latin typeface="Calibri"/>
+              </a:rPr>
+              <a:t>❌ Prompt VAGO (rischioso)</a:t>
+            </a:r>
+          </a:p>
+        </p:txBody>
+      </p:sp>
+      <p:sp>
+        <p:nvSpPr>
+          <p:cNvPr id="6" name="Rounded Rectangle 5"/>
+          <p:cNvSpPr/>
+          <p:nvPr/>
+        </p:nvSpPr>
+        <p:spPr>
+          <a:xfrm>
+            <a:off x="457200" y="1737360"/>
+            <a:ext cx="5486400" cy="4572000"/>
+          </a:xfrm>
+          <a:prstGeom prst="roundRect">
+            <a:avLst>
+              <a:gd name="adj" fmla="val 8000"/>
+            </a:avLst>
+          </a:prstGeom>
+          <a:solidFill>
+            <a:srgbClr val="FBFBFD"/>
+          </a:solidFill>
+          <a:ln w="25400">
+            <a:solidFill>
+              <a:srgbClr val="E63946"/>
+            </a:solidFill>
+          </a:ln>
+        </p:spPr>
+        <p:style>
+          <a:lnRef idx="1">
+            <a:schemeClr val="accent1"/>
+          </a:lnRef>
+          <a:fillRef idx="3">
+            <a:schemeClr val="accent1"/>
+          </a:fillRef>
+          <a:effectRef idx="2">
+            <a:schemeClr val="accent1"/>
+          </a:effectRef>
+          <a:fontRef idx="minor">
+            <a:schemeClr val="lt1"/>
+          </a:fontRef>
+        </p:style>
+        <p:txBody>
+          <a:bodyPr rtlCol="0" anchor="ctr"/>
+          <a:lstStyle/>
+          <a:p>
+            <a:pPr algn="ctr"/>
+          </a:p>
+        </p:txBody>
+      </p:sp>
+      <p:sp>
+        <p:nvSpPr>
+          <p:cNvPr id="7" name="TextBox 6"/>
+          <p:cNvSpPr txBox="1"/>
+          <p:nvPr/>
+        </p:nvSpPr>
+        <p:spPr>
+          <a:xfrm>
+            <a:off x="640080" y="1874519"/>
+            <a:ext cx="5120640" cy="4572000"/>
           </a:xfrm>
           <a:prstGeom prst="rect">
             <a:avLst/>
@@ -4238,22 +4367,22 @@
               </a:spcAft>
             </a:pPr>
             <a:r>
-              <a:rPr sz="2000" b="1">
-                <a:solidFill>
-                  <a:srgbClr val="00A0B0"/>
+              <a:rPr sz="1500" b="1">
+                <a:solidFill>
+                  <a:srgbClr val="E63946"/>
                 </a:solidFill>
                 <a:latin typeface="Calibri"/>
               </a:rPr>
               <a:t>▸  </a:t>
             </a:r>
             <a:r>
-              <a:rPr sz="2000">
+              <a:rPr sz="1500">
                 <a:solidFill>
                   <a:srgbClr val="1A1A2E"/>
                 </a:solidFill>
                 <a:latin typeface="Calibri"/>
               </a:rPr>
-              <a:t>Crittografia 'fatta in casa' (usa librerie standard)</a:t>
+              <a:t>'Scrivi un endpoint Flask</a:t>
             </a:r>
           </a:p>
           <a:p>
@@ -4266,22 +4395,22 @@
               </a:spcAft>
             </a:pPr>
             <a:r>
-              <a:rPr sz="2000" b="1">
-                <a:solidFill>
-                  <a:srgbClr val="00A0B0"/>
+              <a:rPr sz="1500" b="1">
+                <a:solidFill>
+                  <a:srgbClr val="E63946"/>
                 </a:solidFill>
                 <a:latin typeface="Calibri"/>
               </a:rPr>
               <a:t>▸  </a:t>
             </a:r>
             <a:r>
-              <a:rPr sz="2000">
+              <a:rPr sz="1500">
                 <a:solidFill>
                   <a:srgbClr val="1A1A2E"/>
                 </a:solidFill>
                 <a:latin typeface="Calibri"/>
               </a:rPr>
-              <a:t>Codice di sicurezza critico (authn/authz)</a:t>
+              <a:t>per login'</a:t>
             </a:r>
           </a:p>
           <a:p>
@@ -4294,22 +4423,22 @@
               </a:spcAft>
             </a:pPr>
             <a:r>
-              <a:rPr sz="2000" b="1">
-                <a:solidFill>
-                  <a:srgbClr val="00A0B0"/>
+              <a:rPr sz="1500" b="1">
+                <a:solidFill>
+                  <a:srgbClr val="E63946"/>
                 </a:solidFill>
                 <a:latin typeface="Calibri"/>
               </a:rPr>
               <a:t>▸  </a:t>
             </a:r>
             <a:r>
-              <a:rPr sz="2000">
+              <a:rPr sz="1500">
                 <a:solidFill>
                   <a:srgbClr val="1A1A2E"/>
                 </a:solidFill>
                 <a:latin typeface="Calibri"/>
               </a:rPr>
-              <a:t>Compliance e legale (privacy policy, validation IBAN/CF)</a:t>
+              <a:t/>
             </a:r>
           </a:p>
           <a:p>
@@ -4322,22 +4451,22 @@
               </a:spcAft>
             </a:pPr>
             <a:r>
-              <a:rPr sz="2000" b="1">
-                <a:solidFill>
-                  <a:srgbClr val="00A0B0"/>
+              <a:rPr sz="1500" b="1">
+                <a:solidFill>
+                  <a:srgbClr val="E63946"/>
                 </a:solidFill>
                 <a:latin typeface="Calibri"/>
               </a:rPr>
               <a:t>▸  </a:t>
             </a:r>
             <a:r>
-              <a:rPr sz="2000">
+              <a:rPr sz="1500">
                 <a:solidFill>
                   <a:srgbClr val="1A1A2E"/>
                 </a:solidFill>
                 <a:latin typeface="Calibri"/>
               </a:rPr>
-              <a:t>Quando NON sai validare (impara prima)</a:t>
+              <a:t>L'IA produce la versione</a:t>
             </a:r>
           </a:p>
           <a:p>
@@ -4350,22 +4479,22 @@
               </a:spcAft>
             </a:pPr>
             <a:r>
-              <a:rPr sz="2000" b="1">
-                <a:solidFill>
-                  <a:srgbClr val="00A0B0"/>
+              <a:rPr sz="1500" b="1">
+                <a:solidFill>
+                  <a:srgbClr val="E63946"/>
                 </a:solidFill>
                 <a:latin typeface="Calibri"/>
               </a:rPr>
               <a:t>▸  </a:t>
             </a:r>
             <a:r>
-              <a:rPr sz="2000">
+              <a:rPr sz="1500">
                 <a:solidFill>
                   <a:srgbClr val="1A1A2E"/>
                 </a:solidFill>
                 <a:latin typeface="Calibri"/>
               </a:rPr>
-              <a:t/>
+              <a:t>MEDIA: spesso vulnerabile</a:t>
             </a:r>
           </a:p>
           <a:p>
@@ -4378,22 +4507,22 @@
               </a:spcAft>
             </a:pPr>
             <a:r>
-              <a:rPr sz="2000" b="1">
-                <a:solidFill>
-                  <a:srgbClr val="00A0B0"/>
+              <a:rPr sz="1500" b="1">
+                <a:solidFill>
+                  <a:srgbClr val="E63946"/>
                 </a:solidFill>
                 <a:latin typeface="Calibri"/>
               </a:rPr>
               <a:t>▸  </a:t>
             </a:r>
             <a:r>
-              <a:rPr sz="2000">
+              <a:rPr sz="1500">
                 <a:solidFill>
                   <a:srgbClr val="1A1A2E"/>
                 </a:solidFill>
                 <a:latin typeface="Calibri"/>
               </a:rPr>
-              <a:t>Caso reale: Samsung 2023</a:t>
+              <a:t/>
             </a:r>
           </a:p>
           <a:p>
@@ -4406,22 +4535,22 @@
               </a:spcAft>
             </a:pPr>
             <a:r>
-              <a:rPr sz="2000" b="1">
-                <a:solidFill>
-                  <a:srgbClr val="00A0B0"/>
+              <a:rPr sz="1500" b="1">
+                <a:solidFill>
+                  <a:srgbClr val="E63946"/>
                 </a:solidFill>
                 <a:latin typeface="Calibri"/>
               </a:rPr>
               <a:t>▸  </a:t>
             </a:r>
             <a:r>
-              <a:rPr sz="2000">
+              <a:rPr sz="1500">
                 <a:solidFill>
                   <a:srgbClr val="1A1A2E"/>
                 </a:solidFill>
                 <a:latin typeface="Calibri"/>
               </a:rPr>
-              <a:t>Dipendenti incollarono codice proprietario in ChatGPT</a:t>
+              <a:t>Risultato tipico:</a:t>
             </a:r>
           </a:p>
           <a:p>
@@ -4434,22 +4563,22 @@
               </a:spcAft>
             </a:pPr>
             <a:r>
-              <a:rPr sz="2000" b="1">
-                <a:solidFill>
-                  <a:srgbClr val="00A0B0"/>
+              <a:rPr sz="1500" b="1">
+                <a:solidFill>
+                  <a:srgbClr val="E63946"/>
                 </a:solidFill>
                 <a:latin typeface="Calibri"/>
               </a:rPr>
               <a:t>▸  </a:t>
             </a:r>
             <a:r>
-              <a:rPr sz="2000">
+              <a:rPr sz="1500">
                 <a:solidFill>
                   <a:srgbClr val="1A1A2E"/>
                 </a:solidFill>
                 <a:latin typeface="Calibri"/>
               </a:rPr>
-              <a:t>OpenAI lo usò per training → codice leakato indirettamente</a:t>
+              <a:t>  password con SHA-256</a:t>
             </a:r>
           </a:p>
           <a:p>
@@ -4462,29 +4591,543 @@
               </a:spcAft>
             </a:pPr>
             <a:r>
-              <a:rPr sz="2000" b="1">
-                <a:solidFill>
-                  <a:srgbClr val="00A0B0"/>
+              <a:rPr sz="1500" b="1">
+                <a:solidFill>
+                  <a:srgbClr val="E63946"/>
                 </a:solidFill>
                 <a:latin typeface="Calibri"/>
               </a:rPr>
               <a:t>▸  </a:t>
             </a:r>
             <a:r>
-              <a:rPr sz="2000">
+              <a:rPr sz="1500">
                 <a:solidFill>
                   <a:srgbClr val="1A1A2E"/>
                 </a:solidFill>
                 <a:latin typeface="Calibri"/>
               </a:rPr>
-              <a:t>Samsung dovette vietare ChatGPT internamente</a:t>
+              <a:t>  nessun rate limit</a:t>
+            </a:r>
+          </a:p>
+          <a:p>
+            <a:pPr>
+              <a:lnSpc>
+                <a:spcPct val="150000"/>
+              </a:lnSpc>
+              <a:spcAft>
+                <a:spcPts val="400"/>
+              </a:spcAft>
+            </a:pPr>
+            <a:r>
+              <a:rPr sz="1500" b="1">
+                <a:solidFill>
+                  <a:srgbClr val="E63946"/>
+                </a:solidFill>
+                <a:latin typeface="Calibri"/>
+              </a:rPr>
+              <a:t>▸  </a:t>
+            </a:r>
+            <a:r>
+              <a:rPr sz="1500">
+                <a:solidFill>
+                  <a:srgbClr val="1A1A2E"/>
+                </a:solidFill>
+                <a:latin typeface="Calibri"/>
+              </a:rPr>
+              <a:t>  cookie senza HttpOnly</a:t>
+            </a:r>
+          </a:p>
+          <a:p>
+            <a:pPr>
+              <a:lnSpc>
+                <a:spcPct val="150000"/>
+              </a:lnSpc>
+              <a:spcAft>
+                <a:spcPts val="400"/>
+              </a:spcAft>
+            </a:pPr>
+            <a:r>
+              <a:rPr sz="1500" b="1">
+                <a:solidFill>
+                  <a:srgbClr val="E63946"/>
+                </a:solidFill>
+                <a:latin typeface="Calibri"/>
+              </a:rPr>
+              <a:t>▸  </a:t>
+            </a:r>
+            <a:r>
+              <a:rPr sz="1500">
+                <a:solidFill>
+                  <a:srgbClr val="1A1A2E"/>
+                </a:solidFill>
+                <a:latin typeface="Calibri"/>
+              </a:rPr>
+              <a:t>  query con f-string</a:t>
+            </a:r>
+          </a:p>
+        </p:txBody>
+      </p:sp>
+      <p:sp>
+        <p:nvSpPr>
+          <p:cNvPr id="8" name="Rounded Rectangle 7"/>
+          <p:cNvSpPr/>
+          <p:nvPr/>
+        </p:nvSpPr>
+        <p:spPr>
+          <a:xfrm>
+            <a:off x="6217920" y="1051560"/>
+            <a:ext cx="5486400" cy="640080"/>
+          </a:xfrm>
+          <a:prstGeom prst="roundRect">
+            <a:avLst>
+              <a:gd name="adj" fmla="val 8000"/>
+            </a:avLst>
+          </a:prstGeom>
+          <a:solidFill>
+            <a:srgbClr val="06A77D"/>
+          </a:solidFill>
+          <a:ln>
+            <a:noFill/>
+          </a:ln>
+        </p:spPr>
+        <p:style>
+          <a:lnRef idx="1">
+            <a:schemeClr val="accent1"/>
+          </a:lnRef>
+          <a:fillRef idx="3">
+            <a:schemeClr val="accent1"/>
+          </a:fillRef>
+          <a:effectRef idx="2">
+            <a:schemeClr val="accent1"/>
+          </a:effectRef>
+          <a:fontRef idx="minor">
+            <a:schemeClr val="lt1"/>
+          </a:fontRef>
+        </p:style>
+        <p:txBody>
+          <a:bodyPr rtlCol="0" anchor="ctr"/>
+          <a:lstStyle/>
+          <a:p>
+            <a:pPr algn="ctr"/>
+          </a:p>
+        </p:txBody>
+      </p:sp>
+      <p:sp>
+        <p:nvSpPr>
+          <p:cNvPr id="9" name="TextBox 8"/>
+          <p:cNvSpPr txBox="1"/>
+          <p:nvPr/>
+        </p:nvSpPr>
+        <p:spPr>
+          <a:xfrm>
+            <a:off x="6217920" y="1051560"/>
+            <a:ext cx="5486400" cy="640080"/>
+          </a:xfrm>
+          <a:prstGeom prst="rect">
+            <a:avLst/>
+          </a:prstGeom>
+          <a:noFill/>
+        </p:spPr>
+        <p:txBody>
+          <a:bodyPr wrap="square" lIns="45720" rIns="45720" tIns="18288" bIns="18288" anchor="ctr">
+            <a:spAutoFit/>
+          </a:bodyPr>
+          <a:lstStyle/>
+          <a:p>
+            <a:pPr algn="ctr"/>
+            <a:r>
+              <a:rPr sz="1800" b="1" i="0">
+                <a:solidFill>
+                  <a:srgbClr val="FFFFFF"/>
+                </a:solidFill>
+                <a:latin typeface="Calibri"/>
+              </a:rPr>
+              <a:t>✅ Prompt SPECIFICO (sicuro)</a:t>
+            </a:r>
+          </a:p>
+        </p:txBody>
+      </p:sp>
+      <p:sp>
+        <p:nvSpPr>
+          <p:cNvPr id="10" name="Rounded Rectangle 9"/>
+          <p:cNvSpPr/>
+          <p:nvPr/>
+        </p:nvSpPr>
+        <p:spPr>
+          <a:xfrm>
+            <a:off x="6217920" y="1737360"/>
+            <a:ext cx="5486400" cy="4572000"/>
+          </a:xfrm>
+          <a:prstGeom prst="roundRect">
+            <a:avLst>
+              <a:gd name="adj" fmla="val 8000"/>
+            </a:avLst>
+          </a:prstGeom>
+          <a:solidFill>
+            <a:srgbClr val="FBFBFD"/>
+          </a:solidFill>
+          <a:ln w="25400">
+            <a:solidFill>
+              <a:srgbClr val="06A77D"/>
+            </a:solidFill>
+          </a:ln>
+        </p:spPr>
+        <p:style>
+          <a:lnRef idx="1">
+            <a:schemeClr val="accent1"/>
+          </a:lnRef>
+          <a:fillRef idx="3">
+            <a:schemeClr val="accent1"/>
+          </a:fillRef>
+          <a:effectRef idx="2">
+            <a:schemeClr val="accent1"/>
+          </a:effectRef>
+          <a:fontRef idx="minor">
+            <a:schemeClr val="lt1"/>
+          </a:fontRef>
+        </p:style>
+        <p:txBody>
+          <a:bodyPr rtlCol="0" anchor="ctr"/>
+          <a:lstStyle/>
+          <a:p>
+            <a:pPr algn="ctr"/>
+          </a:p>
+        </p:txBody>
+      </p:sp>
+      <p:sp>
+        <p:nvSpPr>
+          <p:cNvPr id="11" name="TextBox 10"/>
+          <p:cNvSpPr txBox="1"/>
+          <p:nvPr/>
+        </p:nvSpPr>
+        <p:spPr>
+          <a:xfrm>
+            <a:off x="6400800" y="1874519"/>
+            <a:ext cx="5120640" cy="4572000"/>
+          </a:xfrm>
+          <a:prstGeom prst="rect">
+            <a:avLst/>
+          </a:prstGeom>
+          <a:noFill/>
+        </p:spPr>
+        <p:txBody>
+          <a:bodyPr wrap="square">
+            <a:spAutoFit/>
+          </a:bodyPr>
+          <a:lstStyle/>
+          <a:p>
+            <a:pPr>
+              <a:lnSpc>
+                <a:spcPct val="150000"/>
+              </a:lnSpc>
+              <a:spcAft>
+                <a:spcPts val="400"/>
+              </a:spcAft>
+            </a:pPr>
+            <a:r>
+              <a:rPr sz="1500" b="1">
+                <a:solidFill>
+                  <a:srgbClr val="06A77D"/>
+                </a:solidFill>
+                <a:latin typeface="Calibri"/>
+              </a:rPr>
+              <a:t>▸  </a:t>
+            </a:r>
+            <a:r>
+              <a:rPr sz="1500">
+                <a:solidFill>
+                  <a:srgbClr val="1A1A2E"/>
+                </a:solidFill>
+                <a:latin typeface="Calibri"/>
+              </a:rPr>
+              <a:t>'Scrivi /login POST che:</a:t>
+            </a:r>
+          </a:p>
+          <a:p>
+            <a:pPr>
+              <a:lnSpc>
+                <a:spcPct val="150000"/>
+              </a:lnSpc>
+              <a:spcAft>
+                <a:spcPts val="400"/>
+              </a:spcAft>
+            </a:pPr>
+            <a:r>
+              <a:rPr sz="1500" b="1">
+                <a:solidFill>
+                  <a:srgbClr val="06A77D"/>
+                </a:solidFill>
+                <a:latin typeface="Calibri"/>
+              </a:rPr>
+              <a:t>▸  </a:t>
+            </a:r>
+            <a:r>
+              <a:rPr sz="1500">
+                <a:solidFill>
+                  <a:srgbClr val="1A1A2E"/>
+                </a:solidFill>
+                <a:latin typeface="Calibri"/>
+              </a:rPr>
+              <a:t>- bcrypt per password</a:t>
+            </a:r>
+          </a:p>
+          <a:p>
+            <a:pPr>
+              <a:lnSpc>
+                <a:spcPct val="150000"/>
+              </a:lnSpc>
+              <a:spcAft>
+                <a:spcPts val="400"/>
+              </a:spcAft>
+            </a:pPr>
+            <a:r>
+              <a:rPr sz="1500" b="1">
+                <a:solidFill>
+                  <a:srgbClr val="06A77D"/>
+                </a:solidFill>
+                <a:latin typeface="Calibri"/>
+              </a:rPr>
+              <a:t>▸  </a:t>
+            </a:r>
+            <a:r>
+              <a:rPr sz="1500">
+                <a:solidFill>
+                  <a:srgbClr val="1A1A2E"/>
+                </a:solidFill>
+                <a:latin typeface="Calibri"/>
+              </a:rPr>
+              <a:t>- risposta uniforme</a:t>
+            </a:r>
+          </a:p>
+          <a:p>
+            <a:pPr>
+              <a:lnSpc>
+                <a:spcPct val="150000"/>
+              </a:lnSpc>
+              <a:spcAft>
+                <a:spcPts val="400"/>
+              </a:spcAft>
+            </a:pPr>
+            <a:r>
+              <a:rPr sz="1500" b="1">
+                <a:solidFill>
+                  <a:srgbClr val="06A77D"/>
+                </a:solidFill>
+                <a:latin typeface="Calibri"/>
+              </a:rPr>
+              <a:t>▸  </a:t>
+            </a:r>
+            <a:r>
+              <a:rPr sz="1500">
+                <a:solidFill>
+                  <a:srgbClr val="1A1A2E"/>
+                </a:solidFill>
+                <a:latin typeface="Calibri"/>
+              </a:rPr>
+              <a:t>  (no user enumeration)</a:t>
+            </a:r>
+          </a:p>
+          <a:p>
+            <a:pPr>
+              <a:lnSpc>
+                <a:spcPct val="150000"/>
+              </a:lnSpc>
+              <a:spcAft>
+                <a:spcPts val="400"/>
+              </a:spcAft>
+            </a:pPr>
+            <a:r>
+              <a:rPr sz="1500" b="1">
+                <a:solidFill>
+                  <a:srgbClr val="06A77D"/>
+                </a:solidFill>
+                <a:latin typeface="Calibri"/>
+              </a:rPr>
+              <a:t>▸  </a:t>
+            </a:r>
+            <a:r>
+              <a:rPr sz="1500">
+                <a:solidFill>
+                  <a:srgbClr val="1A1A2E"/>
+                </a:solidFill>
+                <a:latin typeface="Calibri"/>
+              </a:rPr>
+              <a:t>- rate limit 5/min</a:t>
+            </a:r>
+          </a:p>
+          <a:p>
+            <a:pPr>
+              <a:lnSpc>
+                <a:spcPct val="150000"/>
+              </a:lnSpc>
+              <a:spcAft>
+                <a:spcPts val="400"/>
+              </a:spcAft>
+            </a:pPr>
+            <a:r>
+              <a:rPr sz="1500" b="1">
+                <a:solidFill>
+                  <a:srgbClr val="06A77D"/>
+                </a:solidFill>
+                <a:latin typeface="Calibri"/>
+              </a:rPr>
+              <a:t>▸  </a:t>
+            </a:r>
+            <a:r>
+              <a:rPr sz="1500">
+                <a:solidFill>
+                  <a:srgbClr val="1A1A2E"/>
+                </a:solidFill>
+                <a:latin typeface="Calibri"/>
+              </a:rPr>
+              <a:t>- cookie Secure+HttpOnly</a:t>
+            </a:r>
+          </a:p>
+          <a:p>
+            <a:pPr>
+              <a:lnSpc>
+                <a:spcPct val="150000"/>
+              </a:lnSpc>
+              <a:spcAft>
+                <a:spcPts val="400"/>
+              </a:spcAft>
+            </a:pPr>
+            <a:r>
+              <a:rPr sz="1500" b="1">
+                <a:solidFill>
+                  <a:srgbClr val="06A77D"/>
+                </a:solidFill>
+                <a:latin typeface="Calibri"/>
+              </a:rPr>
+              <a:t>▸  </a:t>
+            </a:r>
+            <a:r>
+              <a:rPr sz="1500">
+                <a:solidFill>
+                  <a:srgbClr val="1A1A2E"/>
+                </a:solidFill>
+                <a:latin typeface="Calibri"/>
+              </a:rPr>
+              <a:t>  +SameSite=Lax</a:t>
+            </a:r>
+          </a:p>
+          <a:p>
+            <a:pPr>
+              <a:lnSpc>
+                <a:spcPct val="150000"/>
+              </a:lnSpc>
+              <a:spcAft>
+                <a:spcPts val="400"/>
+              </a:spcAft>
+            </a:pPr>
+            <a:r>
+              <a:rPr sz="1500" b="1">
+                <a:solidFill>
+                  <a:srgbClr val="06A77D"/>
+                </a:solidFill>
+                <a:latin typeface="Calibri"/>
+              </a:rPr>
+              <a:t>▸  </a:t>
+            </a:r>
+            <a:r>
+              <a:rPr sz="1500">
+                <a:solidFill>
+                  <a:srgbClr val="1A1A2E"/>
+                </a:solidFill>
+                <a:latin typeface="Calibri"/>
+              </a:rPr>
+              <a:t>- logga eventi auth in</a:t>
+            </a:r>
+          </a:p>
+          <a:p>
+            <a:pPr>
+              <a:lnSpc>
+                <a:spcPct val="150000"/>
+              </a:lnSpc>
+              <a:spcAft>
+                <a:spcPts val="400"/>
+              </a:spcAft>
+            </a:pPr>
+            <a:r>
+              <a:rPr sz="1500" b="1">
+                <a:solidFill>
+                  <a:srgbClr val="06A77D"/>
+                </a:solidFill>
+                <a:latin typeface="Calibri"/>
+              </a:rPr>
+              <a:t>▸  </a:t>
+            </a:r>
+            <a:r>
+              <a:rPr sz="1500">
+                <a:solidFill>
+                  <a:srgbClr val="1A1A2E"/>
+                </a:solidFill>
+                <a:latin typeface="Calibri"/>
+              </a:rPr>
+              <a:t>  formato JSON ECS'</a:t>
+            </a:r>
+          </a:p>
+          <a:p>
+            <a:pPr>
+              <a:lnSpc>
+                <a:spcPct val="150000"/>
+              </a:lnSpc>
+              <a:spcAft>
+                <a:spcPts val="400"/>
+              </a:spcAft>
+            </a:pPr>
+            <a:r>
+              <a:rPr sz="1500" b="1">
+                <a:solidFill>
+                  <a:srgbClr val="06A77D"/>
+                </a:solidFill>
+                <a:latin typeface="Calibri"/>
+              </a:rPr>
+              <a:t>▸  </a:t>
+            </a:r>
+            <a:r>
+              <a:rPr sz="1500">
+                <a:solidFill>
+                  <a:srgbClr val="1A1A2E"/>
+                </a:solidFill>
+                <a:latin typeface="Calibri"/>
+              </a:rPr>
+              <a:t/>
+            </a:r>
+          </a:p>
+          <a:p>
+            <a:pPr>
+              <a:lnSpc>
+                <a:spcPct val="150000"/>
+              </a:lnSpc>
+              <a:spcAft>
+                <a:spcPts val="400"/>
+              </a:spcAft>
+            </a:pPr>
+            <a:r>
+              <a:rPr sz="1500" b="1">
+                <a:solidFill>
+                  <a:srgbClr val="06A77D"/>
+                </a:solidFill>
+                <a:latin typeface="Calibri"/>
+              </a:rPr>
+              <a:t>▸  </a:t>
+            </a:r>
+            <a:r>
+              <a:rPr sz="1500">
+                <a:solidFill>
+                  <a:srgbClr val="1A1A2E"/>
+                </a:solidFill>
+                <a:latin typeface="Calibri"/>
+              </a:rPr>
+              <a:t>Risultato vicino a giusto</a:t>
             </a:r>
           </a:p>
         </p:txBody>
       </p:sp>
       <p:cxnSp>
         <p:nvCxnSpPr>
-          <p:cNvPr id="5" name="Connector 4"/>
+          <p:cNvPr id="12" name="Connector 11"/>
           <p:cNvCxnSpPr/>
           <p:nvPr/>
         </p:nvCxnSpPr>
@@ -4519,7 +5162,7 @@
       </p:cxnSp>
       <p:sp>
         <p:nvSpPr>
-          <p:cNvPr id="6" name="TextBox 5"/>
+          <p:cNvPr id="13" name="TextBox 12"/>
           <p:cNvSpPr txBox="1"/>
           <p:nvPr/>
         </p:nvSpPr>
@@ -4554,7 +5197,7 @@
       </p:sp>
       <p:sp>
         <p:nvSpPr>
-          <p:cNvPr id="7" name="TextBox 6"/>
+          <p:cNvPr id="14" name="TextBox 13"/>
           <p:cNvSpPr txBox="1"/>
           <p:nvPr/>
         </p:nvSpPr>
@@ -4582,7 +5225,7 @@
                 </a:solidFill>
                 <a:latin typeface="Calibri"/>
               </a:rPr>
-              <a:t>L7  ·  11/14</a:t>
+              <a:t>L7  ·  11/16</a:t>
             </a:r>
           </a:p>
         </p:txBody>
@@ -4678,64 +5321,21 @@
                 </a:solidFill>
                 <a:latin typeface="Calibri"/>
               </a:rPr>
-              <a:t>📌  Cosa portare a casa</a:t>
-            </a:r>
-          </a:p>
-        </p:txBody>
-      </p:sp>
-      <p:sp>
-        <p:nvSpPr>
-          <p:cNvPr id="4" name="Oval 3"/>
-          <p:cNvSpPr/>
-          <p:nvPr/>
-        </p:nvSpPr>
-        <p:spPr>
-          <a:xfrm>
-            <a:off x="914400" y="1440180"/>
-            <a:ext cx="777240" cy="777240"/>
-          </a:xfrm>
-          <a:prstGeom prst="ellipse">
-            <a:avLst/>
-          </a:prstGeom>
-          <a:solidFill>
-            <a:srgbClr val="00A0B0"/>
-          </a:solidFill>
-          <a:ln>
-            <a:noFill/>
-          </a:ln>
-        </p:spPr>
-        <p:style>
-          <a:lnRef idx="1">
-            <a:schemeClr val="accent1"/>
-          </a:lnRef>
-          <a:fillRef idx="3">
-            <a:schemeClr val="accent1"/>
-          </a:fillRef>
-          <a:effectRef idx="2">
-            <a:schemeClr val="accent1"/>
-          </a:effectRef>
-          <a:fontRef idx="minor">
-            <a:schemeClr val="lt1"/>
-          </a:fontRef>
-        </p:style>
-        <p:txBody>
-          <a:bodyPr rtlCol="0" anchor="ctr"/>
-          <a:lstStyle/>
-          <a:p>
-            <a:pPr algn="ctr"/>
-          </a:p>
-        </p:txBody>
-      </p:sp>
-      <p:sp>
-        <p:nvSpPr>
-          <p:cNvPr id="5" name="TextBox 4"/>
+              <a:t>🛑  Quando NON usare l'IA</a:t>
+            </a:r>
+          </a:p>
+        </p:txBody>
+      </p:sp>
+      <p:sp>
+        <p:nvSpPr>
+          <p:cNvPr id="4" name="TextBox 3"/>
           <p:cNvSpPr txBox="1"/>
           <p:nvPr/>
         </p:nvSpPr>
         <p:spPr>
           <a:xfrm>
-            <a:off x="914400" y="1440180"/>
-            <a:ext cx="777240" cy="777240"/>
+            <a:off x="640080" y="1097280"/>
+            <a:ext cx="10972800" cy="5029200"/>
           </a:xfrm>
           <a:prstGeom prst="rect">
             <a:avLst/>
@@ -4743,749 +5343,267 @@
           <a:noFill/>
         </p:spPr>
         <p:txBody>
-          <a:bodyPr wrap="square" lIns="45720" rIns="45720" tIns="18288" bIns="18288" anchor="ctr">
+          <a:bodyPr wrap="square">
             <a:spAutoFit/>
           </a:bodyPr>
           <a:lstStyle/>
           <a:p>
-            <a:pPr algn="ctr"/>
-            <a:r>
-              <a:rPr sz="2800" b="1" i="0">
-                <a:solidFill>
-                  <a:srgbClr val="FFFFFF"/>
-                </a:solidFill>
-                <a:latin typeface="Calibri"/>
-              </a:rPr>
-              <a:t>1</a:t>
-            </a:r>
-          </a:p>
-        </p:txBody>
-      </p:sp>
-      <p:sp>
-        <p:nvSpPr>
-          <p:cNvPr id="6" name="Rounded Rectangle 5"/>
-          <p:cNvSpPr/>
-          <p:nvPr/>
-        </p:nvSpPr>
-        <p:spPr>
-          <a:xfrm>
-            <a:off x="2011680" y="1440180"/>
-            <a:ext cx="9144000" cy="777240"/>
-          </a:xfrm>
-          <a:prstGeom prst="roundRect">
-            <a:avLst>
-              <a:gd name="adj" fmla="val 8000"/>
-            </a:avLst>
-          </a:prstGeom>
-          <a:solidFill>
-            <a:srgbClr val="FBFBFD"/>
-          </a:solidFill>
-          <a:ln w="19050">
-            <a:solidFill>
-              <a:srgbClr val="00A0B0"/>
-            </a:solidFill>
-          </a:ln>
-        </p:spPr>
-        <p:style>
-          <a:lnRef idx="1">
-            <a:schemeClr val="accent1"/>
-          </a:lnRef>
-          <a:fillRef idx="3">
-            <a:schemeClr val="accent1"/>
-          </a:fillRef>
-          <a:effectRef idx="2">
-            <a:schemeClr val="accent1"/>
-          </a:effectRef>
-          <a:fontRef idx="minor">
-            <a:schemeClr val="lt1"/>
-          </a:fontRef>
-        </p:style>
-        <p:txBody>
-          <a:bodyPr rtlCol="0" anchor="ctr"/>
-          <a:lstStyle/>
-          <a:p>
-            <a:pPr algn="ctr"/>
-          </a:p>
-        </p:txBody>
-      </p:sp>
-      <p:sp>
-        <p:nvSpPr>
-          <p:cNvPr id="7" name="TextBox 6"/>
-          <p:cNvSpPr txBox="1"/>
-          <p:nvPr/>
-        </p:nvSpPr>
-        <p:spPr>
-          <a:xfrm>
-            <a:off x="2286000" y="1440180"/>
-            <a:ext cx="8686800" cy="777240"/>
-          </a:xfrm>
-          <a:prstGeom prst="rect">
-            <a:avLst/>
-          </a:prstGeom>
-          <a:noFill/>
-        </p:spPr>
-        <p:txBody>
-          <a:bodyPr wrap="square" lIns="45720" rIns="45720" tIns="18288" bIns="18288" anchor="ctr">
-            <a:spAutoFit/>
-          </a:bodyPr>
-          <a:lstStyle/>
-          <a:p>
-            <a:pPr algn="l"/>
-            <a:r>
-              <a:rPr sz="1800" b="0" i="0">
+            <a:pPr>
+              <a:lnSpc>
+                <a:spcPct val="150000"/>
+              </a:lnSpc>
+              <a:spcAft>
+                <a:spcPts val="400"/>
+              </a:spcAft>
+            </a:pPr>
+            <a:r>
+              <a:rPr sz="2000" b="1">
+                <a:solidFill>
+                  <a:srgbClr val="00A0B0"/>
+                </a:solidFill>
+                <a:latin typeface="Calibri"/>
+              </a:rPr>
+              <a:t>▸  </a:t>
+            </a:r>
+            <a:r>
+              <a:rPr sz="2000">
                 <a:solidFill>
                   <a:srgbClr val="1A1A2E"/>
                 </a:solidFill>
                 <a:latin typeface="Calibri"/>
               </a:rPr>
-              <a:t>Documentare la sicurezza è un REQUISITO legale e operativo</a:t>
-            </a:r>
-          </a:p>
-        </p:txBody>
-      </p:sp>
-      <p:sp>
-        <p:nvSpPr>
-          <p:cNvPr id="8" name="Oval 7"/>
-          <p:cNvSpPr/>
-          <p:nvPr/>
-        </p:nvSpPr>
-        <p:spPr>
-          <a:xfrm>
-            <a:off x="914400" y="2354580"/>
-            <a:ext cx="777240" cy="777240"/>
-          </a:xfrm>
-          <a:prstGeom prst="ellipse">
-            <a:avLst/>
-          </a:prstGeom>
-          <a:solidFill>
-            <a:srgbClr val="00A0B0"/>
-          </a:solidFill>
-          <a:ln>
-            <a:noFill/>
-          </a:ln>
-        </p:spPr>
-        <p:style>
-          <a:lnRef idx="1">
-            <a:schemeClr val="accent1"/>
-          </a:lnRef>
-          <a:fillRef idx="3">
-            <a:schemeClr val="accent1"/>
-          </a:fillRef>
-          <a:effectRef idx="2">
-            <a:schemeClr val="accent1"/>
-          </a:effectRef>
-          <a:fontRef idx="minor">
-            <a:schemeClr val="lt1"/>
-          </a:fontRef>
-        </p:style>
-        <p:txBody>
-          <a:bodyPr rtlCol="0" anchor="ctr"/>
-          <a:lstStyle/>
-          <a:p>
-            <a:pPr algn="ctr"/>
-          </a:p>
-        </p:txBody>
-      </p:sp>
-      <p:sp>
-        <p:nvSpPr>
-          <p:cNvPr id="9" name="TextBox 8"/>
-          <p:cNvSpPr txBox="1"/>
-          <p:nvPr/>
-        </p:nvSpPr>
-        <p:spPr>
-          <a:xfrm>
-            <a:off x="914400" y="2354580"/>
-            <a:ext cx="777240" cy="777240"/>
-          </a:xfrm>
-          <a:prstGeom prst="rect">
-            <a:avLst/>
-          </a:prstGeom>
-          <a:noFill/>
-        </p:spPr>
-        <p:txBody>
-          <a:bodyPr wrap="square" lIns="45720" rIns="45720" tIns="18288" bIns="18288" anchor="ctr">
-            <a:spAutoFit/>
-          </a:bodyPr>
-          <a:lstStyle/>
-          <a:p>
-            <a:pPr algn="ctr"/>
-            <a:r>
-              <a:rPr sz="2800" b="1" i="0">
-                <a:solidFill>
-                  <a:srgbClr val="FFFFFF"/>
-                </a:solidFill>
-                <a:latin typeface="Calibri"/>
-              </a:rPr>
-              <a:t>2</a:t>
-            </a:r>
-          </a:p>
-        </p:txBody>
-      </p:sp>
-      <p:sp>
-        <p:nvSpPr>
-          <p:cNvPr id="10" name="Rounded Rectangle 9"/>
-          <p:cNvSpPr/>
-          <p:nvPr/>
-        </p:nvSpPr>
-        <p:spPr>
-          <a:xfrm>
-            <a:off x="2011680" y="2354580"/>
-            <a:ext cx="9144000" cy="777240"/>
-          </a:xfrm>
-          <a:prstGeom prst="roundRect">
-            <a:avLst>
-              <a:gd name="adj" fmla="val 8000"/>
-            </a:avLst>
-          </a:prstGeom>
-          <a:solidFill>
-            <a:srgbClr val="FBFBFD"/>
-          </a:solidFill>
-          <a:ln w="19050">
-            <a:solidFill>
-              <a:srgbClr val="00A0B0"/>
-            </a:solidFill>
-          </a:ln>
-        </p:spPr>
-        <p:style>
-          <a:lnRef idx="1">
-            <a:schemeClr val="accent1"/>
-          </a:lnRef>
-          <a:fillRef idx="3">
-            <a:schemeClr val="accent1"/>
-          </a:fillRef>
-          <a:effectRef idx="2">
-            <a:schemeClr val="accent1"/>
-          </a:effectRef>
-          <a:fontRef idx="minor">
-            <a:schemeClr val="lt1"/>
-          </a:fontRef>
-        </p:style>
-        <p:txBody>
-          <a:bodyPr rtlCol="0" anchor="ctr"/>
-          <a:lstStyle/>
-          <a:p>
-            <a:pPr algn="ctr"/>
-          </a:p>
-        </p:txBody>
-      </p:sp>
-      <p:sp>
-        <p:nvSpPr>
-          <p:cNvPr id="11" name="TextBox 10"/>
-          <p:cNvSpPr txBox="1"/>
-          <p:nvPr/>
-        </p:nvSpPr>
-        <p:spPr>
-          <a:xfrm>
-            <a:off x="2286000" y="2354580"/>
-            <a:ext cx="8686800" cy="777240"/>
-          </a:xfrm>
-          <a:prstGeom prst="rect">
-            <a:avLst/>
-          </a:prstGeom>
-          <a:noFill/>
-        </p:spPr>
-        <p:txBody>
-          <a:bodyPr wrap="square" lIns="45720" rIns="45720" tIns="18288" bIns="18288" anchor="ctr">
-            <a:spAutoFit/>
-          </a:bodyPr>
-          <a:lstStyle/>
-          <a:p>
-            <a:pPr algn="l"/>
-            <a:r>
-              <a:rPr sz="1800" b="0" i="0">
+              <a:t>Crittografia 'fatta in casa' (usa librerie standard)</a:t>
+            </a:r>
+          </a:p>
+          <a:p>
+            <a:pPr>
+              <a:lnSpc>
+                <a:spcPct val="150000"/>
+              </a:lnSpc>
+              <a:spcAft>
+                <a:spcPts val="400"/>
+              </a:spcAft>
+            </a:pPr>
+            <a:r>
+              <a:rPr sz="2000" b="1">
+                <a:solidFill>
+                  <a:srgbClr val="00A0B0"/>
+                </a:solidFill>
+                <a:latin typeface="Calibri"/>
+              </a:rPr>
+              <a:t>▸  </a:t>
+            </a:r>
+            <a:r>
+              <a:rPr sz="2000">
                 <a:solidFill>
                   <a:srgbClr val="1A1A2E"/>
                 </a:solidFill>
                 <a:latin typeface="Calibri"/>
               </a:rPr>
-              <a:t>SECURITY.md versionato con il codice</a:t>
-            </a:r>
-          </a:p>
-        </p:txBody>
-      </p:sp>
-      <p:sp>
-        <p:nvSpPr>
-          <p:cNvPr id="12" name="Oval 11"/>
-          <p:cNvSpPr/>
-          <p:nvPr/>
-        </p:nvSpPr>
-        <p:spPr>
-          <a:xfrm>
-            <a:off x="914400" y="3268980"/>
-            <a:ext cx="777240" cy="777240"/>
-          </a:xfrm>
-          <a:prstGeom prst="ellipse">
-            <a:avLst/>
-          </a:prstGeom>
-          <a:solidFill>
-            <a:srgbClr val="00A0B0"/>
-          </a:solidFill>
-          <a:ln>
-            <a:noFill/>
-          </a:ln>
-        </p:spPr>
-        <p:style>
-          <a:lnRef idx="1">
-            <a:schemeClr val="accent1"/>
-          </a:lnRef>
-          <a:fillRef idx="3">
-            <a:schemeClr val="accent1"/>
-          </a:fillRef>
-          <a:effectRef idx="2">
-            <a:schemeClr val="accent1"/>
-          </a:effectRef>
-          <a:fontRef idx="minor">
-            <a:schemeClr val="lt1"/>
-          </a:fontRef>
-        </p:style>
-        <p:txBody>
-          <a:bodyPr rtlCol="0" anchor="ctr"/>
-          <a:lstStyle/>
-          <a:p>
-            <a:pPr algn="ctr"/>
-          </a:p>
-        </p:txBody>
-      </p:sp>
-      <p:sp>
-        <p:nvSpPr>
-          <p:cNvPr id="13" name="TextBox 12"/>
-          <p:cNvSpPr txBox="1"/>
-          <p:nvPr/>
-        </p:nvSpPr>
-        <p:spPr>
-          <a:xfrm>
-            <a:off x="914400" y="3268980"/>
-            <a:ext cx="777240" cy="777240"/>
-          </a:xfrm>
-          <a:prstGeom prst="rect">
-            <a:avLst/>
-          </a:prstGeom>
-          <a:noFill/>
-        </p:spPr>
-        <p:txBody>
-          <a:bodyPr wrap="square" lIns="45720" rIns="45720" tIns="18288" bIns="18288" anchor="ctr">
-            <a:spAutoFit/>
-          </a:bodyPr>
-          <a:lstStyle/>
-          <a:p>
-            <a:pPr algn="ctr"/>
-            <a:r>
-              <a:rPr sz="2800" b="1" i="0">
-                <a:solidFill>
-                  <a:srgbClr val="FFFFFF"/>
-                </a:solidFill>
-                <a:latin typeface="Calibri"/>
-              </a:rPr>
-              <a:t>3</a:t>
-            </a:r>
-          </a:p>
-        </p:txBody>
-      </p:sp>
-      <p:sp>
-        <p:nvSpPr>
-          <p:cNvPr id="14" name="Rounded Rectangle 13"/>
-          <p:cNvSpPr/>
-          <p:nvPr/>
-        </p:nvSpPr>
-        <p:spPr>
-          <a:xfrm>
-            <a:off x="2011680" y="3268980"/>
-            <a:ext cx="9144000" cy="777240"/>
-          </a:xfrm>
-          <a:prstGeom prst="roundRect">
-            <a:avLst>
-              <a:gd name="adj" fmla="val 8000"/>
-            </a:avLst>
-          </a:prstGeom>
-          <a:solidFill>
-            <a:srgbClr val="FBFBFD"/>
-          </a:solidFill>
-          <a:ln w="19050">
-            <a:solidFill>
-              <a:srgbClr val="00A0B0"/>
-            </a:solidFill>
-          </a:ln>
-        </p:spPr>
-        <p:style>
-          <a:lnRef idx="1">
-            <a:schemeClr val="accent1"/>
-          </a:lnRef>
-          <a:fillRef idx="3">
-            <a:schemeClr val="accent1"/>
-          </a:fillRef>
-          <a:effectRef idx="2">
-            <a:schemeClr val="accent1"/>
-          </a:effectRef>
-          <a:fontRef idx="minor">
-            <a:schemeClr val="lt1"/>
-          </a:fontRef>
-        </p:style>
-        <p:txBody>
-          <a:bodyPr rtlCol="0" anchor="ctr"/>
-          <a:lstStyle/>
-          <a:p>
-            <a:pPr algn="ctr"/>
-          </a:p>
-        </p:txBody>
-      </p:sp>
-      <p:sp>
-        <p:nvSpPr>
-          <p:cNvPr id="15" name="TextBox 14"/>
-          <p:cNvSpPr txBox="1"/>
-          <p:nvPr/>
-        </p:nvSpPr>
-        <p:spPr>
-          <a:xfrm>
-            <a:off x="2286000" y="3268980"/>
-            <a:ext cx="8686800" cy="777240"/>
-          </a:xfrm>
-          <a:prstGeom prst="rect">
-            <a:avLst/>
-          </a:prstGeom>
-          <a:noFill/>
-        </p:spPr>
-        <p:txBody>
-          <a:bodyPr wrap="square" lIns="45720" rIns="45720" tIns="18288" bIns="18288" anchor="ctr">
-            <a:spAutoFit/>
-          </a:bodyPr>
-          <a:lstStyle/>
-          <a:p>
-            <a:pPr algn="l"/>
-            <a:r>
-              <a:rPr sz="1800" b="0" i="0">
+              <a:t>Codice di sicurezza critico (authn/authz)</a:t>
+            </a:r>
+          </a:p>
+          <a:p>
+            <a:pPr>
+              <a:lnSpc>
+                <a:spcPct val="150000"/>
+              </a:lnSpc>
+              <a:spcAft>
+                <a:spcPts val="400"/>
+              </a:spcAft>
+            </a:pPr>
+            <a:r>
+              <a:rPr sz="2000" b="1">
+                <a:solidFill>
+                  <a:srgbClr val="00A0B0"/>
+                </a:solidFill>
+                <a:latin typeface="Calibri"/>
+              </a:rPr>
+              <a:t>▸  </a:t>
+            </a:r>
+            <a:r>
+              <a:rPr sz="2000">
                 <a:solidFill>
                   <a:srgbClr val="1A1A2E"/>
                 </a:solidFill>
                 <a:latin typeface="Calibri"/>
               </a:rPr>
-              <a:t>L'IA non sa di sicurezza: validare ogni suggerimento</a:t>
-            </a:r>
-          </a:p>
-        </p:txBody>
-      </p:sp>
-      <p:sp>
-        <p:nvSpPr>
-          <p:cNvPr id="16" name="Oval 15"/>
-          <p:cNvSpPr/>
-          <p:nvPr/>
-        </p:nvSpPr>
-        <p:spPr>
-          <a:xfrm>
-            <a:off x="914400" y="4183380"/>
-            <a:ext cx="777240" cy="777240"/>
-          </a:xfrm>
-          <a:prstGeom prst="ellipse">
-            <a:avLst/>
-          </a:prstGeom>
-          <a:solidFill>
-            <a:srgbClr val="00A0B0"/>
-          </a:solidFill>
-          <a:ln>
-            <a:noFill/>
-          </a:ln>
-        </p:spPr>
-        <p:style>
-          <a:lnRef idx="1">
-            <a:schemeClr val="accent1"/>
-          </a:lnRef>
-          <a:fillRef idx="3">
-            <a:schemeClr val="accent1"/>
-          </a:fillRef>
-          <a:effectRef idx="2">
-            <a:schemeClr val="accent1"/>
-          </a:effectRef>
-          <a:fontRef idx="minor">
-            <a:schemeClr val="lt1"/>
-          </a:fontRef>
-        </p:style>
-        <p:txBody>
-          <a:bodyPr rtlCol="0" anchor="ctr"/>
-          <a:lstStyle/>
-          <a:p>
-            <a:pPr algn="ctr"/>
-          </a:p>
-        </p:txBody>
-      </p:sp>
-      <p:sp>
-        <p:nvSpPr>
-          <p:cNvPr id="17" name="TextBox 16"/>
-          <p:cNvSpPr txBox="1"/>
-          <p:nvPr/>
-        </p:nvSpPr>
-        <p:spPr>
-          <a:xfrm>
-            <a:off x="914400" y="4183380"/>
-            <a:ext cx="777240" cy="777240"/>
-          </a:xfrm>
-          <a:prstGeom prst="rect">
-            <a:avLst/>
-          </a:prstGeom>
-          <a:noFill/>
-        </p:spPr>
-        <p:txBody>
-          <a:bodyPr wrap="square" lIns="45720" rIns="45720" tIns="18288" bIns="18288" anchor="ctr">
-            <a:spAutoFit/>
-          </a:bodyPr>
-          <a:lstStyle/>
-          <a:p>
-            <a:pPr algn="ctr"/>
-            <a:r>
-              <a:rPr sz="2800" b="1" i="0">
-                <a:solidFill>
-                  <a:srgbClr val="FFFFFF"/>
-                </a:solidFill>
-                <a:latin typeface="Calibri"/>
-              </a:rPr>
-              <a:t>4</a:t>
-            </a:r>
-          </a:p>
-        </p:txBody>
-      </p:sp>
-      <p:sp>
-        <p:nvSpPr>
-          <p:cNvPr id="18" name="Rounded Rectangle 17"/>
-          <p:cNvSpPr/>
-          <p:nvPr/>
-        </p:nvSpPr>
-        <p:spPr>
-          <a:xfrm>
-            <a:off x="2011680" y="4183380"/>
-            <a:ext cx="9144000" cy="777240"/>
-          </a:xfrm>
-          <a:prstGeom prst="roundRect">
-            <a:avLst>
-              <a:gd name="adj" fmla="val 8000"/>
-            </a:avLst>
-          </a:prstGeom>
-          <a:solidFill>
-            <a:srgbClr val="FBFBFD"/>
-          </a:solidFill>
-          <a:ln w="19050">
-            <a:solidFill>
-              <a:srgbClr val="00A0B0"/>
-            </a:solidFill>
-          </a:ln>
-        </p:spPr>
-        <p:style>
-          <a:lnRef idx="1">
-            <a:schemeClr val="accent1"/>
-          </a:lnRef>
-          <a:fillRef idx="3">
-            <a:schemeClr val="accent1"/>
-          </a:fillRef>
-          <a:effectRef idx="2">
-            <a:schemeClr val="accent1"/>
-          </a:effectRef>
-          <a:fontRef idx="minor">
-            <a:schemeClr val="lt1"/>
-          </a:fontRef>
-        </p:style>
-        <p:txBody>
-          <a:bodyPr rtlCol="0" anchor="ctr"/>
-          <a:lstStyle/>
-          <a:p>
-            <a:pPr algn="ctr"/>
-          </a:p>
-        </p:txBody>
-      </p:sp>
-      <p:sp>
-        <p:nvSpPr>
-          <p:cNvPr id="19" name="TextBox 18"/>
-          <p:cNvSpPr txBox="1"/>
-          <p:nvPr/>
-        </p:nvSpPr>
-        <p:spPr>
-          <a:xfrm>
-            <a:off x="2286000" y="4183380"/>
-            <a:ext cx="8686800" cy="777240"/>
-          </a:xfrm>
-          <a:prstGeom prst="rect">
-            <a:avLst/>
-          </a:prstGeom>
-          <a:noFill/>
-        </p:spPr>
-        <p:txBody>
-          <a:bodyPr wrap="square" lIns="45720" rIns="45720" tIns="18288" bIns="18288" anchor="ctr">
-            <a:spAutoFit/>
-          </a:bodyPr>
-          <a:lstStyle/>
-          <a:p>
-            <a:pPr algn="l"/>
-            <a:r>
-              <a:rPr sz="1800" b="0" i="0">
+              <a:t>Compliance e legale (privacy policy, validation IBAN/CF)</a:t>
+            </a:r>
+          </a:p>
+          <a:p>
+            <a:pPr>
+              <a:lnSpc>
+                <a:spcPct val="150000"/>
+              </a:lnSpc>
+              <a:spcAft>
+                <a:spcPts val="400"/>
+              </a:spcAft>
+            </a:pPr>
+            <a:r>
+              <a:rPr sz="2000" b="1">
+                <a:solidFill>
+                  <a:srgbClr val="00A0B0"/>
+                </a:solidFill>
+                <a:latin typeface="Calibri"/>
+              </a:rPr>
+              <a:t>▸  </a:t>
+            </a:r>
+            <a:r>
+              <a:rPr sz="2000">
                 <a:solidFill>
                   <a:srgbClr val="1A1A2E"/>
                 </a:solidFill>
                 <a:latin typeface="Calibri"/>
               </a:rPr>
-              <a:t>I 7 errori tipici — riconoscerli a vista</a:t>
-            </a:r>
-          </a:p>
-        </p:txBody>
-      </p:sp>
-      <p:sp>
-        <p:nvSpPr>
-          <p:cNvPr id="20" name="Oval 19"/>
-          <p:cNvSpPr/>
-          <p:nvPr/>
-        </p:nvSpPr>
-        <p:spPr>
-          <a:xfrm>
-            <a:off x="914400" y="5097780"/>
-            <a:ext cx="777240" cy="777240"/>
-          </a:xfrm>
-          <a:prstGeom prst="ellipse">
-            <a:avLst/>
-          </a:prstGeom>
-          <a:solidFill>
-            <a:srgbClr val="00A0B0"/>
-          </a:solidFill>
-          <a:ln>
-            <a:noFill/>
-          </a:ln>
-        </p:spPr>
-        <p:style>
-          <a:lnRef idx="1">
-            <a:schemeClr val="accent1"/>
-          </a:lnRef>
-          <a:fillRef idx="3">
-            <a:schemeClr val="accent1"/>
-          </a:fillRef>
-          <a:effectRef idx="2">
-            <a:schemeClr val="accent1"/>
-          </a:effectRef>
-          <a:fontRef idx="minor">
-            <a:schemeClr val="lt1"/>
-          </a:fontRef>
-        </p:style>
-        <p:txBody>
-          <a:bodyPr rtlCol="0" anchor="ctr"/>
-          <a:lstStyle/>
-          <a:p>
-            <a:pPr algn="ctr"/>
-          </a:p>
-        </p:txBody>
-      </p:sp>
-      <p:sp>
-        <p:nvSpPr>
-          <p:cNvPr id="21" name="TextBox 20"/>
-          <p:cNvSpPr txBox="1"/>
-          <p:nvPr/>
-        </p:nvSpPr>
-        <p:spPr>
-          <a:xfrm>
-            <a:off x="914400" y="5097780"/>
-            <a:ext cx="777240" cy="777240"/>
-          </a:xfrm>
-          <a:prstGeom prst="rect">
-            <a:avLst/>
-          </a:prstGeom>
-          <a:noFill/>
-        </p:spPr>
-        <p:txBody>
-          <a:bodyPr wrap="square" lIns="45720" rIns="45720" tIns="18288" bIns="18288" anchor="ctr">
-            <a:spAutoFit/>
-          </a:bodyPr>
-          <a:lstStyle/>
-          <a:p>
-            <a:pPr algn="ctr"/>
-            <a:r>
-              <a:rPr sz="2800" b="1" i="0">
-                <a:solidFill>
-                  <a:srgbClr val="FFFFFF"/>
-                </a:solidFill>
-                <a:latin typeface="Calibri"/>
-              </a:rPr>
-              <a:t>5</a:t>
-            </a:r>
-          </a:p>
-        </p:txBody>
-      </p:sp>
-      <p:sp>
-        <p:nvSpPr>
-          <p:cNvPr id="22" name="Rounded Rectangle 21"/>
-          <p:cNvSpPr/>
-          <p:nvPr/>
-        </p:nvSpPr>
-        <p:spPr>
-          <a:xfrm>
-            <a:off x="2011680" y="5097780"/>
-            <a:ext cx="9144000" cy="777240"/>
-          </a:xfrm>
-          <a:prstGeom prst="roundRect">
-            <a:avLst>
-              <a:gd name="adj" fmla="val 8000"/>
-            </a:avLst>
-          </a:prstGeom>
-          <a:solidFill>
-            <a:srgbClr val="FBFBFD"/>
-          </a:solidFill>
-          <a:ln w="19050">
-            <a:solidFill>
-              <a:srgbClr val="00A0B0"/>
-            </a:solidFill>
-          </a:ln>
-        </p:spPr>
-        <p:style>
-          <a:lnRef idx="1">
-            <a:schemeClr val="accent1"/>
-          </a:lnRef>
-          <a:fillRef idx="3">
-            <a:schemeClr val="accent1"/>
-          </a:fillRef>
-          <a:effectRef idx="2">
-            <a:schemeClr val="accent1"/>
-          </a:effectRef>
-          <a:fontRef idx="minor">
-            <a:schemeClr val="lt1"/>
-          </a:fontRef>
-        </p:style>
-        <p:txBody>
-          <a:bodyPr rtlCol="0" anchor="ctr"/>
-          <a:lstStyle/>
-          <a:p>
-            <a:pPr algn="ctr"/>
-          </a:p>
-        </p:txBody>
-      </p:sp>
-      <p:sp>
-        <p:nvSpPr>
-          <p:cNvPr id="23" name="TextBox 22"/>
-          <p:cNvSpPr txBox="1"/>
-          <p:nvPr/>
-        </p:nvSpPr>
-        <p:spPr>
-          <a:xfrm>
-            <a:off x="2286000" y="5097780"/>
-            <a:ext cx="8686800" cy="777240"/>
-          </a:xfrm>
-          <a:prstGeom prst="rect">
-            <a:avLst/>
-          </a:prstGeom>
-          <a:noFill/>
-        </p:spPr>
-        <p:txBody>
-          <a:bodyPr wrap="square" lIns="45720" rIns="45720" tIns="18288" bIns="18288" anchor="ctr">
-            <a:spAutoFit/>
-          </a:bodyPr>
-          <a:lstStyle/>
-          <a:p>
-            <a:pPr algn="l"/>
-            <a:r>
-              <a:rPr sz="1800" b="0" i="0">
+              <a:t>Quando NON sai validare (impara prima)</a:t>
+            </a:r>
+          </a:p>
+          <a:p>
+            <a:pPr>
+              <a:lnSpc>
+                <a:spcPct val="150000"/>
+              </a:lnSpc>
+              <a:spcAft>
+                <a:spcPts val="400"/>
+              </a:spcAft>
+            </a:pPr>
+            <a:r>
+              <a:rPr sz="2000" b="1">
+                <a:solidFill>
+                  <a:srgbClr val="00A0B0"/>
+                </a:solidFill>
+                <a:latin typeface="Calibri"/>
+              </a:rPr>
+              <a:t>▸  </a:t>
+            </a:r>
+            <a:r>
+              <a:rPr sz="2000">
                 <a:solidFill>
                   <a:srgbClr val="1A1A2E"/>
                 </a:solidFill>
                 <a:latin typeface="Calibri"/>
               </a:rPr>
-              <a:t>Mai segreti nei prompt, mai crittografia da AI</a:t>
+              <a:t/>
+            </a:r>
+          </a:p>
+          <a:p>
+            <a:pPr>
+              <a:lnSpc>
+                <a:spcPct val="150000"/>
+              </a:lnSpc>
+              <a:spcAft>
+                <a:spcPts val="400"/>
+              </a:spcAft>
+            </a:pPr>
+            <a:r>
+              <a:rPr sz="2000" b="1">
+                <a:solidFill>
+                  <a:srgbClr val="00A0B0"/>
+                </a:solidFill>
+                <a:latin typeface="Calibri"/>
+              </a:rPr>
+              <a:t>▸  </a:t>
+            </a:r>
+            <a:r>
+              <a:rPr sz="2000">
+                <a:solidFill>
+                  <a:srgbClr val="1A1A2E"/>
+                </a:solidFill>
+                <a:latin typeface="Calibri"/>
+              </a:rPr>
+              <a:t>Caso reale: Samsung 2023</a:t>
+            </a:r>
+          </a:p>
+          <a:p>
+            <a:pPr>
+              <a:lnSpc>
+                <a:spcPct val="150000"/>
+              </a:lnSpc>
+              <a:spcAft>
+                <a:spcPts val="400"/>
+              </a:spcAft>
+            </a:pPr>
+            <a:r>
+              <a:rPr sz="2000" b="1">
+                <a:solidFill>
+                  <a:srgbClr val="00A0B0"/>
+                </a:solidFill>
+                <a:latin typeface="Calibri"/>
+              </a:rPr>
+              <a:t>▸  </a:t>
+            </a:r>
+            <a:r>
+              <a:rPr sz="2000">
+                <a:solidFill>
+                  <a:srgbClr val="1A1A2E"/>
+                </a:solidFill>
+                <a:latin typeface="Calibri"/>
+              </a:rPr>
+              <a:t>Dipendenti incollarono codice proprietario in ChatGPT</a:t>
+            </a:r>
+          </a:p>
+          <a:p>
+            <a:pPr>
+              <a:lnSpc>
+                <a:spcPct val="150000"/>
+              </a:lnSpc>
+              <a:spcAft>
+                <a:spcPts val="400"/>
+              </a:spcAft>
+            </a:pPr>
+            <a:r>
+              <a:rPr sz="2000" b="1">
+                <a:solidFill>
+                  <a:srgbClr val="00A0B0"/>
+                </a:solidFill>
+                <a:latin typeface="Calibri"/>
+              </a:rPr>
+              <a:t>▸  </a:t>
+            </a:r>
+            <a:r>
+              <a:rPr sz="2000">
+                <a:solidFill>
+                  <a:srgbClr val="1A1A2E"/>
+                </a:solidFill>
+                <a:latin typeface="Calibri"/>
+              </a:rPr>
+              <a:t>OpenAI lo usò per training → codice leakato indirettamente</a:t>
+            </a:r>
+          </a:p>
+          <a:p>
+            <a:pPr>
+              <a:lnSpc>
+                <a:spcPct val="150000"/>
+              </a:lnSpc>
+              <a:spcAft>
+                <a:spcPts val="400"/>
+              </a:spcAft>
+            </a:pPr>
+            <a:r>
+              <a:rPr sz="2000" b="1">
+                <a:solidFill>
+                  <a:srgbClr val="00A0B0"/>
+                </a:solidFill>
+                <a:latin typeface="Calibri"/>
+              </a:rPr>
+              <a:t>▸  </a:t>
+            </a:r>
+            <a:r>
+              <a:rPr sz="2000">
+                <a:solidFill>
+                  <a:srgbClr val="1A1A2E"/>
+                </a:solidFill>
+                <a:latin typeface="Calibri"/>
+              </a:rPr>
+              <a:t>Samsung dovette vietare ChatGPT internamente</a:t>
             </a:r>
           </a:p>
         </p:txBody>
       </p:sp>
       <p:cxnSp>
         <p:nvCxnSpPr>
-          <p:cNvPr id="24" name="Connector 23"/>
+          <p:cNvPr id="5" name="Connector 4"/>
           <p:cNvCxnSpPr/>
           <p:nvPr/>
         </p:nvCxnSpPr>
@@ -5520,7 +5638,7 @@
       </p:cxnSp>
       <p:sp>
         <p:nvSpPr>
-          <p:cNvPr id="25" name="TextBox 24"/>
+          <p:cNvPr id="6" name="TextBox 5"/>
           <p:cNvSpPr txBox="1"/>
           <p:nvPr/>
         </p:nvSpPr>
@@ -5555,7 +5673,7 @@
       </p:sp>
       <p:sp>
         <p:nvSpPr>
-          <p:cNvPr id="26" name="TextBox 25"/>
+          <p:cNvPr id="7" name="TextBox 6"/>
           <p:cNvSpPr txBox="1"/>
           <p:nvPr/>
         </p:nvSpPr>
@@ -5583,7 +5701,7 @@
                 </a:solidFill>
                 <a:latin typeface="Calibri"/>
               </a:rPr>
-              <a:t>L7  ·  12/14</a:t>
+              <a:t>L7  ·  12/16</a:t>
             </a:r>
           </a:p>
         </p:txBody>
@@ -5615,13 +5733,13 @@
         <p:spPr>
           <a:xfrm>
             <a:off x="0" y="0"/>
-            <a:ext cx="4114800" cy="6858000"/>
+            <a:ext cx="12191695" cy="777240"/>
           </a:xfrm>
           <a:prstGeom prst="rect">
             <a:avLst/>
           </a:prstGeom>
           <a:solidFill>
-            <a:srgbClr val="081B33"/>
+            <a:srgbClr val="0F2D52"/>
           </a:solidFill>
           <a:ln>
             <a:noFill/>
@@ -5651,100 +5769,49 @@
       </p:sp>
       <p:sp>
         <p:nvSpPr>
-          <p:cNvPr id="3" name="Rectangle 2"/>
-          <p:cNvSpPr/>
-          <p:nvPr/>
-        </p:nvSpPr>
-        <p:spPr>
-          <a:xfrm>
-            <a:off x="4114800" y="0"/>
-            <a:ext cx="8046720" cy="6858000"/>
+          <p:cNvPr id="3" name="TextBox 2"/>
+          <p:cNvSpPr txBox="1"/>
+          <p:nvPr/>
+        </p:nvSpPr>
+        <p:spPr>
+          <a:xfrm>
+            <a:off x="457200" y="164592"/>
+            <a:ext cx="10972800" cy="502920"/>
           </a:xfrm>
           <a:prstGeom prst="rect">
             <a:avLst/>
           </a:prstGeom>
-          <a:solidFill>
-            <a:srgbClr val="F1F4F8"/>
-          </a:solidFill>
-          <a:ln>
-            <a:noFill/>
-          </a:ln>
-        </p:spPr>
-        <p:style>
-          <a:lnRef idx="1">
-            <a:schemeClr val="accent1"/>
-          </a:lnRef>
-          <a:fillRef idx="3">
-            <a:schemeClr val="accent1"/>
-          </a:fillRef>
-          <a:effectRef idx="2">
-            <a:schemeClr val="accent1"/>
-          </a:effectRef>
-          <a:fontRef idx="minor">
-            <a:schemeClr val="lt1"/>
-          </a:fontRef>
-        </p:style>
-        <p:txBody>
-          <a:bodyPr rtlCol="0" anchor="ctr"/>
-          <a:lstStyle/>
-          <a:p>
-            <a:pPr algn="ctr"/>
-          </a:p>
-        </p:txBody>
-      </p:sp>
-      <p:sp>
-        <p:nvSpPr>
-          <p:cNvPr id="4" name="Rectangle 3"/>
-          <p:cNvSpPr/>
-          <p:nvPr/>
-        </p:nvSpPr>
-        <p:spPr>
-          <a:xfrm>
-            <a:off x="4114800" y="0"/>
-            <a:ext cx="137160" cy="6858000"/>
-          </a:xfrm>
-          <a:prstGeom prst="rect">
-            <a:avLst/>
-          </a:prstGeom>
-          <a:solidFill>
-            <a:srgbClr val="00A0B0"/>
-          </a:solidFill>
-          <a:ln>
-            <a:noFill/>
-          </a:ln>
-        </p:spPr>
-        <p:style>
-          <a:lnRef idx="1">
-            <a:schemeClr val="accent1"/>
-          </a:lnRef>
-          <a:fillRef idx="3">
-            <a:schemeClr val="accent1"/>
-          </a:fillRef>
-          <a:effectRef idx="2">
-            <a:schemeClr val="accent1"/>
-          </a:effectRef>
-          <a:fontRef idx="minor">
-            <a:schemeClr val="lt1"/>
-          </a:fontRef>
-        </p:style>
-        <p:txBody>
-          <a:bodyPr rtlCol="0" anchor="ctr"/>
-          <a:lstStyle/>
-          <a:p>
-            <a:pPr algn="ctr"/>
-          </a:p>
-        </p:txBody>
-      </p:sp>
-      <p:sp>
-        <p:nvSpPr>
-          <p:cNvPr id="5" name="TextBox 4"/>
+          <a:noFill/>
+        </p:spPr>
+        <p:txBody>
+          <a:bodyPr wrap="square" lIns="45720" rIns="45720" tIns="18288" bIns="18288" anchor="ctr">
+            <a:spAutoFit/>
+          </a:bodyPr>
+          <a:lstStyle/>
+          <a:p>
+            <a:pPr algn="l"/>
+            <a:r>
+              <a:rPr sz="2400" b="1" i="0">
+                <a:solidFill>
+                  <a:srgbClr val="FFFFFF"/>
+                </a:solidFill>
+                <a:latin typeface="Calibri"/>
+              </a:rPr>
+              <a:t>⚖  EU AI Act — la cornice normativa</a:t>
+            </a:r>
+          </a:p>
+        </p:txBody>
+      </p:sp>
+      <p:sp>
+        <p:nvSpPr>
+          <p:cNvPr id="4" name="TextBox 3"/>
           <p:cNvSpPr txBox="1"/>
           <p:nvPr/>
         </p:nvSpPr>
         <p:spPr>
           <a:xfrm>
-            <a:off x="274320" y="2103120"/>
-            <a:ext cx="3657600" cy="2286000"/>
+            <a:off x="457200" y="914400"/>
+            <a:ext cx="11247120" cy="457200"/>
           </a:xfrm>
           <a:prstGeom prst="rect">
             <a:avLst/>
@@ -5757,29 +5824,29 @@
           </a:bodyPr>
           <a:lstStyle/>
           <a:p>
-            <a:pPr algn="ctr"/>
-            <a:r>
-              <a:rPr sz="17000" b="1" i="0">
+            <a:pPr algn="l"/>
+            <a:r>
+              <a:rPr sz="1500" b="0" i="1">
                 <a:solidFill>
                   <a:srgbClr val="00A0B0"/>
                 </a:solidFill>
                 <a:latin typeface="Calibri"/>
               </a:rPr>
-              <a:t>03</a:t>
-            </a:r>
-          </a:p>
-        </p:txBody>
-      </p:sp>
-      <p:sp>
-        <p:nvSpPr>
-          <p:cNvPr id="6" name="TextBox 5"/>
+              <a:t>Sanzioni fino a 35M€ o 7% fatturato per sistemi proibiti</a:t>
+            </a:r>
+          </a:p>
+        </p:txBody>
+      </p:sp>
+      <p:sp>
+        <p:nvSpPr>
+          <p:cNvPr id="5" name="TextBox 4"/>
           <p:cNvSpPr txBox="1"/>
           <p:nvPr/>
         </p:nvSpPr>
         <p:spPr>
           <a:xfrm>
-            <a:off x="274320" y="4572000"/>
-            <a:ext cx="3657600" cy="457200"/>
+            <a:off x="640080" y="1554480"/>
+            <a:ext cx="10972800" cy="5029200"/>
           </a:xfrm>
           <a:prstGeom prst="rect">
             <a:avLst/>
@@ -5787,97 +5854,351 @@
           <a:noFill/>
         </p:spPr>
         <p:txBody>
-          <a:bodyPr wrap="square" lIns="45720" rIns="45720" tIns="18288" bIns="18288" anchor="t">
+          <a:bodyPr wrap="square">
             <a:spAutoFit/>
           </a:bodyPr>
           <a:lstStyle/>
           <a:p>
-            <a:pPr algn="ctr"/>
-            <a:r>
-              <a:rPr sz="2000" b="1" i="0">
-                <a:solidFill>
-                  <a:srgbClr val="6FD8E0"/>
-                </a:solidFill>
-                <a:latin typeface="Calibri"/>
-              </a:rPr>
-              <a:t>PARTE</a:t>
-            </a:r>
-          </a:p>
-        </p:txBody>
-      </p:sp>
-      <p:sp>
-        <p:nvSpPr>
-          <p:cNvPr id="7" name="TextBox 6"/>
-          <p:cNvSpPr txBox="1"/>
-          <p:nvPr/>
-        </p:nvSpPr>
-        <p:spPr>
-          <a:xfrm>
-            <a:off x="4572000" y="2286000"/>
-            <a:ext cx="7315200" cy="1645920"/>
-          </a:xfrm>
-          <a:prstGeom prst="rect">
-            <a:avLst/>
-          </a:prstGeom>
-          <a:noFill/>
-        </p:spPr>
-        <p:txBody>
-          <a:bodyPr wrap="square" lIns="45720" rIns="45720" tIns="18288" bIns="18288" anchor="t">
-            <a:spAutoFit/>
-          </a:bodyPr>
-          <a:lstStyle/>
-          <a:p>
-            <a:pPr algn="l"/>
-            <a:r>
-              <a:rPr sz="4400" b="1" i="0">
-                <a:solidFill>
-                  <a:srgbClr val="0F2D52"/>
-                </a:solidFill>
-                <a:latin typeface="Calibri"/>
-              </a:rPr>
-              <a:t>Lab in aula</a:t>
-            </a:r>
-          </a:p>
-        </p:txBody>
-      </p:sp>
-      <p:sp>
-        <p:nvSpPr>
-          <p:cNvPr id="8" name="TextBox 7"/>
-          <p:cNvSpPr txBox="1"/>
-          <p:nvPr/>
-        </p:nvSpPr>
-        <p:spPr>
-          <a:xfrm>
-            <a:off x="4572000" y="3931920"/>
-            <a:ext cx="7315200" cy="1828800"/>
-          </a:xfrm>
-          <a:prstGeom prst="rect">
-            <a:avLst/>
-          </a:prstGeom>
-          <a:noFill/>
-        </p:spPr>
-        <p:txBody>
-          <a:bodyPr wrap="square" lIns="45720" rIns="45720" tIns="18288" bIns="18288" anchor="t">
-            <a:spAutoFit/>
-          </a:bodyPr>
-          <a:lstStyle/>
-          <a:p>
-            <a:pPr algn="l"/>
-            <a:r>
-              <a:rPr sz="1800" b="0" i="1">
-                <a:solidFill>
-                  <a:srgbClr val="6B7280"/>
-                </a:solidFill>
-                <a:latin typeface="Calibri"/>
-              </a:rPr>
-              <a:t>Validation collettiva di codice AI vulnerabile</a:t>
+            <a:pPr>
+              <a:lnSpc>
+                <a:spcPct val="150000"/>
+              </a:lnSpc>
+              <a:spcAft>
+                <a:spcPts val="400"/>
+              </a:spcAft>
+            </a:pPr>
+            <a:r>
+              <a:rPr sz="2000" b="1">
+                <a:solidFill>
+                  <a:srgbClr val="00A0B0"/>
+                </a:solidFill>
+                <a:latin typeface="Calibri"/>
+              </a:rPr>
+              <a:t>▸  </a:t>
+            </a:r>
+            <a:r>
+              <a:rPr sz="2000">
+                <a:solidFill>
+                  <a:srgbClr val="1A1A2E"/>
+                </a:solidFill>
+                <a:latin typeface="Calibri"/>
+              </a:rPr>
+              <a:t>Regolamento (UE) 2024/1689 — in vigore agosto 2024</a:t>
+            </a:r>
+          </a:p>
+          <a:p>
+            <a:pPr>
+              <a:lnSpc>
+                <a:spcPct val="150000"/>
+              </a:lnSpc>
+              <a:spcAft>
+                <a:spcPts val="400"/>
+              </a:spcAft>
+            </a:pPr>
+            <a:r>
+              <a:rPr sz="2000" b="1">
+                <a:solidFill>
+                  <a:srgbClr val="00A0B0"/>
+                </a:solidFill>
+                <a:latin typeface="Calibri"/>
+              </a:rPr>
+              <a:t>▸  </a:t>
+            </a:r>
+            <a:r>
+              <a:rPr sz="2000">
+                <a:solidFill>
+                  <a:srgbClr val="1A1A2E"/>
+                </a:solidFill>
+                <a:latin typeface="Calibri"/>
+              </a:rPr>
+              <a:t>Piena applicazione: agosto 2026 — alcune disposizioni 2027</a:t>
+            </a:r>
+          </a:p>
+          <a:p>
+            <a:pPr>
+              <a:lnSpc>
+                <a:spcPct val="150000"/>
+              </a:lnSpc>
+              <a:spcAft>
+                <a:spcPts val="400"/>
+              </a:spcAft>
+            </a:pPr>
+            <a:r>
+              <a:rPr sz="2000" b="1">
+                <a:solidFill>
+                  <a:srgbClr val="00A0B0"/>
+                </a:solidFill>
+                <a:latin typeface="Calibri"/>
+              </a:rPr>
+              <a:t>▸  </a:t>
+            </a:r>
+            <a:r>
+              <a:rPr sz="2000">
+                <a:solidFill>
+                  <a:srgbClr val="1A1A2E"/>
+                </a:solidFill>
+                <a:latin typeface="Calibri"/>
+              </a:rPr>
+              <a:t/>
+            </a:r>
+          </a:p>
+          <a:p>
+            <a:pPr>
+              <a:lnSpc>
+                <a:spcPct val="150000"/>
+              </a:lnSpc>
+              <a:spcAft>
+                <a:spcPts val="400"/>
+              </a:spcAft>
+            </a:pPr>
+            <a:r>
+              <a:rPr sz="2000" b="1">
+                <a:solidFill>
+                  <a:srgbClr val="00A0B0"/>
+                </a:solidFill>
+                <a:latin typeface="Calibri"/>
+              </a:rPr>
+              <a:t>▸  </a:t>
+            </a:r>
+            <a:r>
+              <a:rPr sz="2000">
+                <a:solidFill>
+                  <a:srgbClr val="1A1A2E"/>
+                </a:solidFill>
+                <a:latin typeface="Calibri"/>
+              </a:rPr>
+              <a:t>Approccio risk-based: 4 categorie</a:t>
+            </a:r>
+          </a:p>
+          <a:p>
+            <a:pPr>
+              <a:lnSpc>
+                <a:spcPct val="150000"/>
+              </a:lnSpc>
+              <a:spcAft>
+                <a:spcPts val="400"/>
+              </a:spcAft>
+            </a:pPr>
+            <a:r>
+              <a:rPr sz="2000" b="1">
+                <a:solidFill>
+                  <a:srgbClr val="00A0B0"/>
+                </a:solidFill>
+                <a:latin typeface="Calibri"/>
+              </a:rPr>
+              <a:t>▸  </a:t>
+            </a:r>
+            <a:r>
+              <a:rPr sz="2000">
+                <a:solidFill>
+                  <a:srgbClr val="1A1A2E"/>
+                </a:solidFill>
+                <a:latin typeface="Calibri"/>
+              </a:rPr>
+              <a:t>  Rischio INACCETTABILE → vietati (social scoring, ecc.)</a:t>
+            </a:r>
+          </a:p>
+          <a:p>
+            <a:pPr>
+              <a:lnSpc>
+                <a:spcPct val="150000"/>
+              </a:lnSpc>
+              <a:spcAft>
+                <a:spcPts val="400"/>
+              </a:spcAft>
+            </a:pPr>
+            <a:r>
+              <a:rPr sz="2000" b="1">
+                <a:solidFill>
+                  <a:srgbClr val="00A0B0"/>
+                </a:solidFill>
+                <a:latin typeface="Calibri"/>
+              </a:rPr>
+              <a:t>▸  </a:t>
+            </a:r>
+            <a:r>
+              <a:rPr sz="2000">
+                <a:solidFill>
+                  <a:srgbClr val="1A1A2E"/>
+                </a:solidFill>
+                <a:latin typeface="Calibri"/>
+              </a:rPr>
+              <a:t>  Rischio ALTO → obblighi stringenti (recruitment, scoring credito)</a:t>
+            </a:r>
+          </a:p>
+          <a:p>
+            <a:pPr>
+              <a:lnSpc>
+                <a:spcPct val="150000"/>
+              </a:lnSpc>
+              <a:spcAft>
+                <a:spcPts val="400"/>
+              </a:spcAft>
+            </a:pPr>
+            <a:r>
+              <a:rPr sz="2000" b="1">
+                <a:solidFill>
+                  <a:srgbClr val="00A0B0"/>
+                </a:solidFill>
+                <a:latin typeface="Calibri"/>
+              </a:rPr>
+              <a:t>▸  </a:t>
+            </a:r>
+            <a:r>
+              <a:rPr sz="2000">
+                <a:solidFill>
+                  <a:srgbClr val="1A1A2E"/>
+                </a:solidFill>
+                <a:latin typeface="Calibri"/>
+              </a:rPr>
+              <a:t>  Rischio LIMITATO → trasparenza (chatbot, deepfake)</a:t>
+            </a:r>
+          </a:p>
+          <a:p>
+            <a:pPr>
+              <a:lnSpc>
+                <a:spcPct val="150000"/>
+              </a:lnSpc>
+              <a:spcAft>
+                <a:spcPts val="400"/>
+              </a:spcAft>
+            </a:pPr>
+            <a:r>
+              <a:rPr sz="2000" b="1">
+                <a:solidFill>
+                  <a:srgbClr val="00A0B0"/>
+                </a:solidFill>
+                <a:latin typeface="Calibri"/>
+              </a:rPr>
+              <a:t>▸  </a:t>
+            </a:r>
+            <a:r>
+              <a:rPr sz="2000">
+                <a:solidFill>
+                  <a:srgbClr val="1A1A2E"/>
+                </a:solidFill>
+                <a:latin typeface="Calibri"/>
+              </a:rPr>
+              <a:t>  Rischio MINIMO → liberi (la maggioranza)</a:t>
+            </a:r>
+          </a:p>
+          <a:p>
+            <a:pPr>
+              <a:lnSpc>
+                <a:spcPct val="150000"/>
+              </a:lnSpc>
+              <a:spcAft>
+                <a:spcPts val="400"/>
+              </a:spcAft>
+            </a:pPr>
+            <a:r>
+              <a:rPr sz="2000" b="1">
+                <a:solidFill>
+                  <a:srgbClr val="00A0B0"/>
+                </a:solidFill>
+                <a:latin typeface="Calibri"/>
+              </a:rPr>
+              <a:t>▸  </a:t>
+            </a:r>
+            <a:r>
+              <a:rPr sz="2000">
+                <a:solidFill>
+                  <a:srgbClr val="1A1A2E"/>
+                </a:solidFill>
+                <a:latin typeface="Calibri"/>
+              </a:rPr>
+              <a:t/>
+            </a:r>
+          </a:p>
+          <a:p>
+            <a:pPr>
+              <a:lnSpc>
+                <a:spcPct val="150000"/>
+              </a:lnSpc>
+              <a:spcAft>
+                <a:spcPts val="400"/>
+              </a:spcAft>
+            </a:pPr>
+            <a:r>
+              <a:rPr sz="2000" b="1">
+                <a:solidFill>
+                  <a:srgbClr val="00A0B0"/>
+                </a:solidFill>
+                <a:latin typeface="Calibri"/>
+              </a:rPr>
+              <a:t>▸  </a:t>
+            </a:r>
+            <a:r>
+              <a:rPr sz="2000">
+                <a:solidFill>
+                  <a:srgbClr val="1A1A2E"/>
+                </a:solidFill>
+                <a:latin typeface="Calibri"/>
+              </a:rPr>
+              <a:t>Per chi USA AI per scrivere codice: nessun obbligo diretto</a:t>
+            </a:r>
+          </a:p>
+          <a:p>
+            <a:pPr>
+              <a:lnSpc>
+                <a:spcPct val="150000"/>
+              </a:lnSpc>
+              <a:spcAft>
+                <a:spcPts val="400"/>
+              </a:spcAft>
+            </a:pPr>
+            <a:r>
+              <a:rPr sz="2000" b="1">
+                <a:solidFill>
+                  <a:srgbClr val="00A0B0"/>
+                </a:solidFill>
+                <a:latin typeface="Calibri"/>
+              </a:rPr>
+              <a:t>▸  </a:t>
+            </a:r>
+            <a:r>
+              <a:rPr sz="2000">
+                <a:solidFill>
+                  <a:srgbClr val="1A1A2E"/>
+                </a:solidFill>
+                <a:latin typeface="Calibri"/>
+              </a:rPr>
+              <a:t>Per chi INTEGRA AI ad alto rischio in prodotti: documentazione,</a:t>
+            </a:r>
+          </a:p>
+          <a:p>
+            <a:pPr>
+              <a:lnSpc>
+                <a:spcPct val="150000"/>
+              </a:lnSpc>
+              <a:spcAft>
+                <a:spcPts val="400"/>
+              </a:spcAft>
+            </a:pPr>
+            <a:r>
+              <a:rPr sz="2000" b="1">
+                <a:solidFill>
+                  <a:srgbClr val="00A0B0"/>
+                </a:solidFill>
+                <a:latin typeface="Calibri"/>
+              </a:rPr>
+              <a:t>▸  </a:t>
+            </a:r>
+            <a:r>
+              <a:rPr sz="2000">
+                <a:solidFill>
+                  <a:srgbClr val="1A1A2E"/>
+                </a:solidFill>
+                <a:latin typeface="Calibri"/>
+              </a:rPr>
+              <a:t>trasparenza, supervisione umana, dataset governance</a:t>
             </a:r>
           </a:p>
         </p:txBody>
       </p:sp>
       <p:cxnSp>
         <p:nvCxnSpPr>
-          <p:cNvPr id="9" name="Connector 8"/>
+          <p:cNvPr id="6" name="Connector 5"/>
           <p:cNvCxnSpPr/>
           <p:nvPr/>
         </p:nvCxnSpPr>
@@ -5912,7 +6233,7 @@
       </p:cxnSp>
       <p:sp>
         <p:nvSpPr>
-          <p:cNvPr id="10" name="TextBox 9"/>
+          <p:cNvPr id="7" name="TextBox 6"/>
           <p:cNvSpPr txBox="1"/>
           <p:nvPr/>
         </p:nvSpPr>
@@ -5947,7 +6268,7 @@
       </p:sp>
       <p:sp>
         <p:nvSpPr>
-          <p:cNvPr id="11" name="TextBox 10"/>
+          <p:cNvPr id="8" name="TextBox 7"/>
           <p:cNvSpPr txBox="1"/>
           <p:nvPr/>
         </p:nvSpPr>
@@ -5975,7 +6296,7 @@
                 </a:solidFill>
                 <a:latin typeface="Calibri"/>
               </a:rPr>
-              <a:t>L7  ·  13/14</a:t>
+              <a:t>L7  ·  13/16</a:t>
             </a:r>
           </a:p>
         </p:txBody>
@@ -6007,7 +6328,1008 @@
         <p:spPr>
           <a:xfrm>
             <a:off x="0" y="0"/>
-            <a:ext cx="12191695" cy="6858000"/>
+            <a:ext cx="12191695" cy="777240"/>
+          </a:xfrm>
+          <a:prstGeom prst="rect">
+            <a:avLst/>
+          </a:prstGeom>
+          <a:solidFill>
+            <a:srgbClr val="0F2D52"/>
+          </a:solidFill>
+          <a:ln>
+            <a:noFill/>
+          </a:ln>
+        </p:spPr>
+        <p:style>
+          <a:lnRef idx="1">
+            <a:schemeClr val="accent1"/>
+          </a:lnRef>
+          <a:fillRef idx="3">
+            <a:schemeClr val="accent1"/>
+          </a:fillRef>
+          <a:effectRef idx="2">
+            <a:schemeClr val="accent1"/>
+          </a:effectRef>
+          <a:fontRef idx="minor">
+            <a:schemeClr val="lt1"/>
+          </a:fontRef>
+        </p:style>
+        <p:txBody>
+          <a:bodyPr rtlCol="0" anchor="ctr"/>
+          <a:lstStyle/>
+          <a:p>
+            <a:pPr algn="ctr"/>
+          </a:p>
+        </p:txBody>
+      </p:sp>
+      <p:sp>
+        <p:nvSpPr>
+          <p:cNvPr id="3" name="TextBox 2"/>
+          <p:cNvSpPr txBox="1"/>
+          <p:nvPr/>
+        </p:nvSpPr>
+        <p:spPr>
+          <a:xfrm>
+            <a:off x="457200" y="164592"/>
+            <a:ext cx="10972800" cy="502920"/>
+          </a:xfrm>
+          <a:prstGeom prst="rect">
+            <a:avLst/>
+          </a:prstGeom>
+          <a:noFill/>
+        </p:spPr>
+        <p:txBody>
+          <a:bodyPr wrap="square" lIns="45720" rIns="45720" tIns="18288" bIns="18288" anchor="ctr">
+            <a:spAutoFit/>
+          </a:bodyPr>
+          <a:lstStyle/>
+          <a:p>
+            <a:pPr algn="l"/>
+            <a:r>
+              <a:rPr sz="2400" b="1" i="0">
+                <a:solidFill>
+                  <a:srgbClr val="FFFFFF"/>
+                </a:solidFill>
+                <a:latin typeface="Calibri"/>
+              </a:rPr>
+              <a:t>📌  Cosa portare a casa</a:t>
+            </a:r>
+          </a:p>
+        </p:txBody>
+      </p:sp>
+      <p:sp>
+        <p:nvSpPr>
+          <p:cNvPr id="4" name="Oval 3"/>
+          <p:cNvSpPr/>
+          <p:nvPr/>
+        </p:nvSpPr>
+        <p:spPr>
+          <a:xfrm>
+            <a:off x="914400" y="1440180"/>
+            <a:ext cx="777240" cy="777240"/>
+          </a:xfrm>
+          <a:prstGeom prst="ellipse">
+            <a:avLst/>
+          </a:prstGeom>
+          <a:solidFill>
+            <a:srgbClr val="00A0B0"/>
+          </a:solidFill>
+          <a:ln>
+            <a:noFill/>
+          </a:ln>
+        </p:spPr>
+        <p:style>
+          <a:lnRef idx="1">
+            <a:schemeClr val="accent1"/>
+          </a:lnRef>
+          <a:fillRef idx="3">
+            <a:schemeClr val="accent1"/>
+          </a:fillRef>
+          <a:effectRef idx="2">
+            <a:schemeClr val="accent1"/>
+          </a:effectRef>
+          <a:fontRef idx="minor">
+            <a:schemeClr val="lt1"/>
+          </a:fontRef>
+        </p:style>
+        <p:txBody>
+          <a:bodyPr rtlCol="0" anchor="ctr"/>
+          <a:lstStyle/>
+          <a:p>
+            <a:pPr algn="ctr"/>
+          </a:p>
+        </p:txBody>
+      </p:sp>
+      <p:sp>
+        <p:nvSpPr>
+          <p:cNvPr id="5" name="TextBox 4"/>
+          <p:cNvSpPr txBox="1"/>
+          <p:nvPr/>
+        </p:nvSpPr>
+        <p:spPr>
+          <a:xfrm>
+            <a:off x="914400" y="1440180"/>
+            <a:ext cx="777240" cy="777240"/>
+          </a:xfrm>
+          <a:prstGeom prst="rect">
+            <a:avLst/>
+          </a:prstGeom>
+          <a:noFill/>
+        </p:spPr>
+        <p:txBody>
+          <a:bodyPr wrap="square" lIns="45720" rIns="45720" tIns="18288" bIns="18288" anchor="ctr">
+            <a:spAutoFit/>
+          </a:bodyPr>
+          <a:lstStyle/>
+          <a:p>
+            <a:pPr algn="ctr"/>
+            <a:r>
+              <a:rPr sz="2800" b="1" i="0">
+                <a:solidFill>
+                  <a:srgbClr val="FFFFFF"/>
+                </a:solidFill>
+                <a:latin typeface="Calibri"/>
+              </a:rPr>
+              <a:t>1</a:t>
+            </a:r>
+          </a:p>
+        </p:txBody>
+      </p:sp>
+      <p:sp>
+        <p:nvSpPr>
+          <p:cNvPr id="6" name="Rounded Rectangle 5"/>
+          <p:cNvSpPr/>
+          <p:nvPr/>
+        </p:nvSpPr>
+        <p:spPr>
+          <a:xfrm>
+            <a:off x="2011680" y="1440180"/>
+            <a:ext cx="9144000" cy="777240"/>
+          </a:xfrm>
+          <a:prstGeom prst="roundRect">
+            <a:avLst>
+              <a:gd name="adj" fmla="val 8000"/>
+            </a:avLst>
+          </a:prstGeom>
+          <a:solidFill>
+            <a:srgbClr val="FBFBFD"/>
+          </a:solidFill>
+          <a:ln w="19050">
+            <a:solidFill>
+              <a:srgbClr val="00A0B0"/>
+            </a:solidFill>
+          </a:ln>
+        </p:spPr>
+        <p:style>
+          <a:lnRef idx="1">
+            <a:schemeClr val="accent1"/>
+          </a:lnRef>
+          <a:fillRef idx="3">
+            <a:schemeClr val="accent1"/>
+          </a:fillRef>
+          <a:effectRef idx="2">
+            <a:schemeClr val="accent1"/>
+          </a:effectRef>
+          <a:fontRef idx="minor">
+            <a:schemeClr val="lt1"/>
+          </a:fontRef>
+        </p:style>
+        <p:txBody>
+          <a:bodyPr rtlCol="0" anchor="ctr"/>
+          <a:lstStyle/>
+          <a:p>
+            <a:pPr algn="ctr"/>
+          </a:p>
+        </p:txBody>
+      </p:sp>
+      <p:sp>
+        <p:nvSpPr>
+          <p:cNvPr id="7" name="TextBox 6"/>
+          <p:cNvSpPr txBox="1"/>
+          <p:nvPr/>
+        </p:nvSpPr>
+        <p:spPr>
+          <a:xfrm>
+            <a:off x="2286000" y="1440180"/>
+            <a:ext cx="8686800" cy="777240"/>
+          </a:xfrm>
+          <a:prstGeom prst="rect">
+            <a:avLst/>
+          </a:prstGeom>
+          <a:noFill/>
+        </p:spPr>
+        <p:txBody>
+          <a:bodyPr wrap="square" lIns="45720" rIns="45720" tIns="18288" bIns="18288" anchor="ctr">
+            <a:spAutoFit/>
+          </a:bodyPr>
+          <a:lstStyle/>
+          <a:p>
+            <a:pPr algn="l"/>
+            <a:r>
+              <a:rPr sz="1800" b="0" i="0">
+                <a:solidFill>
+                  <a:srgbClr val="1A1A2E"/>
+                </a:solidFill>
+                <a:latin typeface="Calibri"/>
+              </a:rPr>
+              <a:t>Documentare la sicurezza è un REQUISITO legale e operativo</a:t>
+            </a:r>
+          </a:p>
+        </p:txBody>
+      </p:sp>
+      <p:sp>
+        <p:nvSpPr>
+          <p:cNvPr id="8" name="Oval 7"/>
+          <p:cNvSpPr/>
+          <p:nvPr/>
+        </p:nvSpPr>
+        <p:spPr>
+          <a:xfrm>
+            <a:off x="914400" y="2354580"/>
+            <a:ext cx="777240" cy="777240"/>
+          </a:xfrm>
+          <a:prstGeom prst="ellipse">
+            <a:avLst/>
+          </a:prstGeom>
+          <a:solidFill>
+            <a:srgbClr val="00A0B0"/>
+          </a:solidFill>
+          <a:ln>
+            <a:noFill/>
+          </a:ln>
+        </p:spPr>
+        <p:style>
+          <a:lnRef idx="1">
+            <a:schemeClr val="accent1"/>
+          </a:lnRef>
+          <a:fillRef idx="3">
+            <a:schemeClr val="accent1"/>
+          </a:fillRef>
+          <a:effectRef idx="2">
+            <a:schemeClr val="accent1"/>
+          </a:effectRef>
+          <a:fontRef idx="minor">
+            <a:schemeClr val="lt1"/>
+          </a:fontRef>
+        </p:style>
+        <p:txBody>
+          <a:bodyPr rtlCol="0" anchor="ctr"/>
+          <a:lstStyle/>
+          <a:p>
+            <a:pPr algn="ctr"/>
+          </a:p>
+        </p:txBody>
+      </p:sp>
+      <p:sp>
+        <p:nvSpPr>
+          <p:cNvPr id="9" name="TextBox 8"/>
+          <p:cNvSpPr txBox="1"/>
+          <p:nvPr/>
+        </p:nvSpPr>
+        <p:spPr>
+          <a:xfrm>
+            <a:off x="914400" y="2354580"/>
+            <a:ext cx="777240" cy="777240"/>
+          </a:xfrm>
+          <a:prstGeom prst="rect">
+            <a:avLst/>
+          </a:prstGeom>
+          <a:noFill/>
+        </p:spPr>
+        <p:txBody>
+          <a:bodyPr wrap="square" lIns="45720" rIns="45720" tIns="18288" bIns="18288" anchor="ctr">
+            <a:spAutoFit/>
+          </a:bodyPr>
+          <a:lstStyle/>
+          <a:p>
+            <a:pPr algn="ctr"/>
+            <a:r>
+              <a:rPr sz="2800" b="1" i="0">
+                <a:solidFill>
+                  <a:srgbClr val="FFFFFF"/>
+                </a:solidFill>
+                <a:latin typeface="Calibri"/>
+              </a:rPr>
+              <a:t>2</a:t>
+            </a:r>
+          </a:p>
+        </p:txBody>
+      </p:sp>
+      <p:sp>
+        <p:nvSpPr>
+          <p:cNvPr id="10" name="Rounded Rectangle 9"/>
+          <p:cNvSpPr/>
+          <p:nvPr/>
+        </p:nvSpPr>
+        <p:spPr>
+          <a:xfrm>
+            <a:off x="2011680" y="2354580"/>
+            <a:ext cx="9144000" cy="777240"/>
+          </a:xfrm>
+          <a:prstGeom prst="roundRect">
+            <a:avLst>
+              <a:gd name="adj" fmla="val 8000"/>
+            </a:avLst>
+          </a:prstGeom>
+          <a:solidFill>
+            <a:srgbClr val="FBFBFD"/>
+          </a:solidFill>
+          <a:ln w="19050">
+            <a:solidFill>
+              <a:srgbClr val="00A0B0"/>
+            </a:solidFill>
+          </a:ln>
+        </p:spPr>
+        <p:style>
+          <a:lnRef idx="1">
+            <a:schemeClr val="accent1"/>
+          </a:lnRef>
+          <a:fillRef idx="3">
+            <a:schemeClr val="accent1"/>
+          </a:fillRef>
+          <a:effectRef idx="2">
+            <a:schemeClr val="accent1"/>
+          </a:effectRef>
+          <a:fontRef idx="minor">
+            <a:schemeClr val="lt1"/>
+          </a:fontRef>
+        </p:style>
+        <p:txBody>
+          <a:bodyPr rtlCol="0" anchor="ctr"/>
+          <a:lstStyle/>
+          <a:p>
+            <a:pPr algn="ctr"/>
+          </a:p>
+        </p:txBody>
+      </p:sp>
+      <p:sp>
+        <p:nvSpPr>
+          <p:cNvPr id="11" name="TextBox 10"/>
+          <p:cNvSpPr txBox="1"/>
+          <p:nvPr/>
+        </p:nvSpPr>
+        <p:spPr>
+          <a:xfrm>
+            <a:off x="2286000" y="2354580"/>
+            <a:ext cx="8686800" cy="777240"/>
+          </a:xfrm>
+          <a:prstGeom prst="rect">
+            <a:avLst/>
+          </a:prstGeom>
+          <a:noFill/>
+        </p:spPr>
+        <p:txBody>
+          <a:bodyPr wrap="square" lIns="45720" rIns="45720" tIns="18288" bIns="18288" anchor="ctr">
+            <a:spAutoFit/>
+          </a:bodyPr>
+          <a:lstStyle/>
+          <a:p>
+            <a:pPr algn="l"/>
+            <a:r>
+              <a:rPr sz="1800" b="0" i="0">
+                <a:solidFill>
+                  <a:srgbClr val="1A1A2E"/>
+                </a:solidFill>
+                <a:latin typeface="Calibri"/>
+              </a:rPr>
+              <a:t>SECURITY.md versionato con il codice</a:t>
+            </a:r>
+          </a:p>
+        </p:txBody>
+      </p:sp>
+      <p:sp>
+        <p:nvSpPr>
+          <p:cNvPr id="12" name="Oval 11"/>
+          <p:cNvSpPr/>
+          <p:nvPr/>
+        </p:nvSpPr>
+        <p:spPr>
+          <a:xfrm>
+            <a:off x="914400" y="3268980"/>
+            <a:ext cx="777240" cy="777240"/>
+          </a:xfrm>
+          <a:prstGeom prst="ellipse">
+            <a:avLst/>
+          </a:prstGeom>
+          <a:solidFill>
+            <a:srgbClr val="00A0B0"/>
+          </a:solidFill>
+          <a:ln>
+            <a:noFill/>
+          </a:ln>
+        </p:spPr>
+        <p:style>
+          <a:lnRef idx="1">
+            <a:schemeClr val="accent1"/>
+          </a:lnRef>
+          <a:fillRef idx="3">
+            <a:schemeClr val="accent1"/>
+          </a:fillRef>
+          <a:effectRef idx="2">
+            <a:schemeClr val="accent1"/>
+          </a:effectRef>
+          <a:fontRef idx="minor">
+            <a:schemeClr val="lt1"/>
+          </a:fontRef>
+        </p:style>
+        <p:txBody>
+          <a:bodyPr rtlCol="0" anchor="ctr"/>
+          <a:lstStyle/>
+          <a:p>
+            <a:pPr algn="ctr"/>
+          </a:p>
+        </p:txBody>
+      </p:sp>
+      <p:sp>
+        <p:nvSpPr>
+          <p:cNvPr id="13" name="TextBox 12"/>
+          <p:cNvSpPr txBox="1"/>
+          <p:nvPr/>
+        </p:nvSpPr>
+        <p:spPr>
+          <a:xfrm>
+            <a:off x="914400" y="3268980"/>
+            <a:ext cx="777240" cy="777240"/>
+          </a:xfrm>
+          <a:prstGeom prst="rect">
+            <a:avLst/>
+          </a:prstGeom>
+          <a:noFill/>
+        </p:spPr>
+        <p:txBody>
+          <a:bodyPr wrap="square" lIns="45720" rIns="45720" tIns="18288" bIns="18288" anchor="ctr">
+            <a:spAutoFit/>
+          </a:bodyPr>
+          <a:lstStyle/>
+          <a:p>
+            <a:pPr algn="ctr"/>
+            <a:r>
+              <a:rPr sz="2800" b="1" i="0">
+                <a:solidFill>
+                  <a:srgbClr val="FFFFFF"/>
+                </a:solidFill>
+                <a:latin typeface="Calibri"/>
+              </a:rPr>
+              <a:t>3</a:t>
+            </a:r>
+          </a:p>
+        </p:txBody>
+      </p:sp>
+      <p:sp>
+        <p:nvSpPr>
+          <p:cNvPr id="14" name="Rounded Rectangle 13"/>
+          <p:cNvSpPr/>
+          <p:nvPr/>
+        </p:nvSpPr>
+        <p:spPr>
+          <a:xfrm>
+            <a:off x="2011680" y="3268980"/>
+            <a:ext cx="9144000" cy="777240"/>
+          </a:xfrm>
+          <a:prstGeom prst="roundRect">
+            <a:avLst>
+              <a:gd name="adj" fmla="val 8000"/>
+            </a:avLst>
+          </a:prstGeom>
+          <a:solidFill>
+            <a:srgbClr val="FBFBFD"/>
+          </a:solidFill>
+          <a:ln w="19050">
+            <a:solidFill>
+              <a:srgbClr val="00A0B0"/>
+            </a:solidFill>
+          </a:ln>
+        </p:spPr>
+        <p:style>
+          <a:lnRef idx="1">
+            <a:schemeClr val="accent1"/>
+          </a:lnRef>
+          <a:fillRef idx="3">
+            <a:schemeClr val="accent1"/>
+          </a:fillRef>
+          <a:effectRef idx="2">
+            <a:schemeClr val="accent1"/>
+          </a:effectRef>
+          <a:fontRef idx="minor">
+            <a:schemeClr val="lt1"/>
+          </a:fontRef>
+        </p:style>
+        <p:txBody>
+          <a:bodyPr rtlCol="0" anchor="ctr"/>
+          <a:lstStyle/>
+          <a:p>
+            <a:pPr algn="ctr"/>
+          </a:p>
+        </p:txBody>
+      </p:sp>
+      <p:sp>
+        <p:nvSpPr>
+          <p:cNvPr id="15" name="TextBox 14"/>
+          <p:cNvSpPr txBox="1"/>
+          <p:nvPr/>
+        </p:nvSpPr>
+        <p:spPr>
+          <a:xfrm>
+            <a:off x="2286000" y="3268980"/>
+            <a:ext cx="8686800" cy="777240"/>
+          </a:xfrm>
+          <a:prstGeom prst="rect">
+            <a:avLst/>
+          </a:prstGeom>
+          <a:noFill/>
+        </p:spPr>
+        <p:txBody>
+          <a:bodyPr wrap="square" lIns="45720" rIns="45720" tIns="18288" bIns="18288" anchor="ctr">
+            <a:spAutoFit/>
+          </a:bodyPr>
+          <a:lstStyle/>
+          <a:p>
+            <a:pPr algn="l"/>
+            <a:r>
+              <a:rPr sz="1800" b="0" i="0">
+                <a:solidFill>
+                  <a:srgbClr val="1A1A2E"/>
+                </a:solidFill>
+                <a:latin typeface="Calibri"/>
+              </a:rPr>
+              <a:t>L'IA non sa di sicurezza: validare ogni suggerimento</a:t>
+            </a:r>
+          </a:p>
+        </p:txBody>
+      </p:sp>
+      <p:sp>
+        <p:nvSpPr>
+          <p:cNvPr id="16" name="Oval 15"/>
+          <p:cNvSpPr/>
+          <p:nvPr/>
+        </p:nvSpPr>
+        <p:spPr>
+          <a:xfrm>
+            <a:off x="914400" y="4183380"/>
+            <a:ext cx="777240" cy="777240"/>
+          </a:xfrm>
+          <a:prstGeom prst="ellipse">
+            <a:avLst/>
+          </a:prstGeom>
+          <a:solidFill>
+            <a:srgbClr val="00A0B0"/>
+          </a:solidFill>
+          <a:ln>
+            <a:noFill/>
+          </a:ln>
+        </p:spPr>
+        <p:style>
+          <a:lnRef idx="1">
+            <a:schemeClr val="accent1"/>
+          </a:lnRef>
+          <a:fillRef idx="3">
+            <a:schemeClr val="accent1"/>
+          </a:fillRef>
+          <a:effectRef idx="2">
+            <a:schemeClr val="accent1"/>
+          </a:effectRef>
+          <a:fontRef idx="minor">
+            <a:schemeClr val="lt1"/>
+          </a:fontRef>
+        </p:style>
+        <p:txBody>
+          <a:bodyPr rtlCol="0" anchor="ctr"/>
+          <a:lstStyle/>
+          <a:p>
+            <a:pPr algn="ctr"/>
+          </a:p>
+        </p:txBody>
+      </p:sp>
+      <p:sp>
+        <p:nvSpPr>
+          <p:cNvPr id="17" name="TextBox 16"/>
+          <p:cNvSpPr txBox="1"/>
+          <p:nvPr/>
+        </p:nvSpPr>
+        <p:spPr>
+          <a:xfrm>
+            <a:off x="914400" y="4183380"/>
+            <a:ext cx="777240" cy="777240"/>
+          </a:xfrm>
+          <a:prstGeom prst="rect">
+            <a:avLst/>
+          </a:prstGeom>
+          <a:noFill/>
+        </p:spPr>
+        <p:txBody>
+          <a:bodyPr wrap="square" lIns="45720" rIns="45720" tIns="18288" bIns="18288" anchor="ctr">
+            <a:spAutoFit/>
+          </a:bodyPr>
+          <a:lstStyle/>
+          <a:p>
+            <a:pPr algn="ctr"/>
+            <a:r>
+              <a:rPr sz="2800" b="1" i="0">
+                <a:solidFill>
+                  <a:srgbClr val="FFFFFF"/>
+                </a:solidFill>
+                <a:latin typeface="Calibri"/>
+              </a:rPr>
+              <a:t>4</a:t>
+            </a:r>
+          </a:p>
+        </p:txBody>
+      </p:sp>
+      <p:sp>
+        <p:nvSpPr>
+          <p:cNvPr id="18" name="Rounded Rectangle 17"/>
+          <p:cNvSpPr/>
+          <p:nvPr/>
+        </p:nvSpPr>
+        <p:spPr>
+          <a:xfrm>
+            <a:off x="2011680" y="4183380"/>
+            <a:ext cx="9144000" cy="777240"/>
+          </a:xfrm>
+          <a:prstGeom prst="roundRect">
+            <a:avLst>
+              <a:gd name="adj" fmla="val 8000"/>
+            </a:avLst>
+          </a:prstGeom>
+          <a:solidFill>
+            <a:srgbClr val="FBFBFD"/>
+          </a:solidFill>
+          <a:ln w="19050">
+            <a:solidFill>
+              <a:srgbClr val="00A0B0"/>
+            </a:solidFill>
+          </a:ln>
+        </p:spPr>
+        <p:style>
+          <a:lnRef idx="1">
+            <a:schemeClr val="accent1"/>
+          </a:lnRef>
+          <a:fillRef idx="3">
+            <a:schemeClr val="accent1"/>
+          </a:fillRef>
+          <a:effectRef idx="2">
+            <a:schemeClr val="accent1"/>
+          </a:effectRef>
+          <a:fontRef idx="minor">
+            <a:schemeClr val="lt1"/>
+          </a:fontRef>
+        </p:style>
+        <p:txBody>
+          <a:bodyPr rtlCol="0" anchor="ctr"/>
+          <a:lstStyle/>
+          <a:p>
+            <a:pPr algn="ctr"/>
+          </a:p>
+        </p:txBody>
+      </p:sp>
+      <p:sp>
+        <p:nvSpPr>
+          <p:cNvPr id="19" name="TextBox 18"/>
+          <p:cNvSpPr txBox="1"/>
+          <p:nvPr/>
+        </p:nvSpPr>
+        <p:spPr>
+          <a:xfrm>
+            <a:off x="2286000" y="4183380"/>
+            <a:ext cx="8686800" cy="777240"/>
+          </a:xfrm>
+          <a:prstGeom prst="rect">
+            <a:avLst/>
+          </a:prstGeom>
+          <a:noFill/>
+        </p:spPr>
+        <p:txBody>
+          <a:bodyPr wrap="square" lIns="45720" rIns="45720" tIns="18288" bIns="18288" anchor="ctr">
+            <a:spAutoFit/>
+          </a:bodyPr>
+          <a:lstStyle/>
+          <a:p>
+            <a:pPr algn="l"/>
+            <a:r>
+              <a:rPr sz="1800" b="0" i="0">
+                <a:solidFill>
+                  <a:srgbClr val="1A1A2E"/>
+                </a:solidFill>
+                <a:latin typeface="Calibri"/>
+              </a:rPr>
+              <a:t>Prompt specifici = codice più sicuro per default</a:t>
+            </a:r>
+          </a:p>
+        </p:txBody>
+      </p:sp>
+      <p:sp>
+        <p:nvSpPr>
+          <p:cNvPr id="20" name="Oval 19"/>
+          <p:cNvSpPr/>
+          <p:nvPr/>
+        </p:nvSpPr>
+        <p:spPr>
+          <a:xfrm>
+            <a:off x="914400" y="5097780"/>
+            <a:ext cx="777240" cy="777240"/>
+          </a:xfrm>
+          <a:prstGeom prst="ellipse">
+            <a:avLst/>
+          </a:prstGeom>
+          <a:solidFill>
+            <a:srgbClr val="00A0B0"/>
+          </a:solidFill>
+          <a:ln>
+            <a:noFill/>
+          </a:ln>
+        </p:spPr>
+        <p:style>
+          <a:lnRef idx="1">
+            <a:schemeClr val="accent1"/>
+          </a:lnRef>
+          <a:fillRef idx="3">
+            <a:schemeClr val="accent1"/>
+          </a:fillRef>
+          <a:effectRef idx="2">
+            <a:schemeClr val="accent1"/>
+          </a:effectRef>
+          <a:fontRef idx="minor">
+            <a:schemeClr val="lt1"/>
+          </a:fontRef>
+        </p:style>
+        <p:txBody>
+          <a:bodyPr rtlCol="0" anchor="ctr"/>
+          <a:lstStyle/>
+          <a:p>
+            <a:pPr algn="ctr"/>
+          </a:p>
+        </p:txBody>
+      </p:sp>
+      <p:sp>
+        <p:nvSpPr>
+          <p:cNvPr id="21" name="TextBox 20"/>
+          <p:cNvSpPr txBox="1"/>
+          <p:nvPr/>
+        </p:nvSpPr>
+        <p:spPr>
+          <a:xfrm>
+            <a:off x="914400" y="5097780"/>
+            <a:ext cx="777240" cy="777240"/>
+          </a:xfrm>
+          <a:prstGeom prst="rect">
+            <a:avLst/>
+          </a:prstGeom>
+          <a:noFill/>
+        </p:spPr>
+        <p:txBody>
+          <a:bodyPr wrap="square" lIns="45720" rIns="45720" tIns="18288" bIns="18288" anchor="ctr">
+            <a:spAutoFit/>
+          </a:bodyPr>
+          <a:lstStyle/>
+          <a:p>
+            <a:pPr algn="ctr"/>
+            <a:r>
+              <a:rPr sz="2800" b="1" i="0">
+                <a:solidFill>
+                  <a:srgbClr val="FFFFFF"/>
+                </a:solidFill>
+                <a:latin typeface="Calibri"/>
+              </a:rPr>
+              <a:t>5</a:t>
+            </a:r>
+          </a:p>
+        </p:txBody>
+      </p:sp>
+      <p:sp>
+        <p:nvSpPr>
+          <p:cNvPr id="22" name="Rounded Rectangle 21"/>
+          <p:cNvSpPr/>
+          <p:nvPr/>
+        </p:nvSpPr>
+        <p:spPr>
+          <a:xfrm>
+            <a:off x="2011680" y="5097780"/>
+            <a:ext cx="9144000" cy="777240"/>
+          </a:xfrm>
+          <a:prstGeom prst="roundRect">
+            <a:avLst>
+              <a:gd name="adj" fmla="val 8000"/>
+            </a:avLst>
+          </a:prstGeom>
+          <a:solidFill>
+            <a:srgbClr val="FBFBFD"/>
+          </a:solidFill>
+          <a:ln w="19050">
+            <a:solidFill>
+              <a:srgbClr val="00A0B0"/>
+            </a:solidFill>
+          </a:ln>
+        </p:spPr>
+        <p:style>
+          <a:lnRef idx="1">
+            <a:schemeClr val="accent1"/>
+          </a:lnRef>
+          <a:fillRef idx="3">
+            <a:schemeClr val="accent1"/>
+          </a:fillRef>
+          <a:effectRef idx="2">
+            <a:schemeClr val="accent1"/>
+          </a:effectRef>
+          <a:fontRef idx="minor">
+            <a:schemeClr val="lt1"/>
+          </a:fontRef>
+        </p:style>
+        <p:txBody>
+          <a:bodyPr rtlCol="0" anchor="ctr"/>
+          <a:lstStyle/>
+          <a:p>
+            <a:pPr algn="ctr"/>
+          </a:p>
+        </p:txBody>
+      </p:sp>
+      <p:sp>
+        <p:nvSpPr>
+          <p:cNvPr id="23" name="TextBox 22"/>
+          <p:cNvSpPr txBox="1"/>
+          <p:nvPr/>
+        </p:nvSpPr>
+        <p:spPr>
+          <a:xfrm>
+            <a:off x="2286000" y="5097780"/>
+            <a:ext cx="8686800" cy="777240"/>
+          </a:xfrm>
+          <a:prstGeom prst="rect">
+            <a:avLst/>
+          </a:prstGeom>
+          <a:noFill/>
+        </p:spPr>
+        <p:txBody>
+          <a:bodyPr wrap="square" lIns="45720" rIns="45720" tIns="18288" bIns="18288" anchor="ctr">
+            <a:spAutoFit/>
+          </a:bodyPr>
+          <a:lstStyle/>
+          <a:p>
+            <a:pPr algn="l"/>
+            <a:r>
+              <a:rPr sz="1800" b="0" i="0">
+                <a:solidFill>
+                  <a:srgbClr val="1A1A2E"/>
+                </a:solidFill>
+                <a:latin typeface="Calibri"/>
+              </a:rPr>
+              <a:t>EU AI Act dal 2026: documentazione + supervisione umana</a:t>
+            </a:r>
+          </a:p>
+        </p:txBody>
+      </p:sp>
+      <p:cxnSp>
+        <p:nvCxnSpPr>
+          <p:cNvPr id="24" name="Connector 23"/>
+          <p:cNvCxnSpPr/>
+          <p:nvPr/>
+        </p:nvCxnSpPr>
+        <p:spPr>
+          <a:xfrm>
+            <a:off x="457200" y="6446520"/>
+            <a:ext cx="11274552" cy="0"/>
+          </a:xfrm>
+          <a:prstGeom prst="line">
+            <a:avLst/>
+          </a:prstGeom>
+          <a:ln w="19050">
+            <a:solidFill>
+              <a:srgbClr val="00A0B0"/>
+            </a:solidFill>
+          </a:ln>
+        </p:spPr>
+        <p:style>
+          <a:lnRef idx="2">
+            <a:schemeClr val="accent1"/>
+          </a:lnRef>
+          <a:fillRef idx="0">
+            <a:schemeClr val="accent1"/>
+          </a:fillRef>
+          <a:effectRef idx="1">
+            <a:schemeClr val="accent1"/>
+          </a:effectRef>
+          <a:fontRef idx="minor">
+            <a:schemeClr val="tx1"/>
+          </a:fontRef>
+        </p:style>
+      </p:cxnSp>
+      <p:sp>
+        <p:nvSpPr>
+          <p:cNvPr id="25" name="TextBox 24"/>
+          <p:cNvSpPr txBox="1"/>
+          <p:nvPr/>
+        </p:nvSpPr>
+        <p:spPr>
+          <a:xfrm>
+            <a:off x="457200" y="6473952"/>
+            <a:ext cx="7315200" cy="292608"/>
+          </a:xfrm>
+          <a:prstGeom prst="rect">
+            <a:avLst/>
+          </a:prstGeom>
+          <a:noFill/>
+        </p:spPr>
+        <p:txBody>
+          <a:bodyPr wrap="square" lIns="45720" rIns="45720" tIns="18288" bIns="18288" anchor="t">
+            <a:spAutoFit/>
+          </a:bodyPr>
+          <a:lstStyle/>
+          <a:p>
+            <a:pPr algn="l"/>
+            <a:r>
+              <a:rPr sz="1000" b="0" i="0">
+                <a:solidFill>
+                  <a:srgbClr val="6B7280"/>
+                </a:solidFill>
+                <a:latin typeface="Calibri"/>
+              </a:rPr>
+              <a:t>Secure Coding · Corso IFTS STEM · A. Manneschi · 2024/2025</a:t>
+            </a:r>
+          </a:p>
+        </p:txBody>
+      </p:sp>
+      <p:sp>
+        <p:nvSpPr>
+          <p:cNvPr id="26" name="TextBox 25"/>
+          <p:cNvSpPr txBox="1"/>
+          <p:nvPr/>
+        </p:nvSpPr>
+        <p:spPr>
+          <a:xfrm>
+            <a:off x="10515600" y="6473952"/>
+            <a:ext cx="1188720" cy="292608"/>
+          </a:xfrm>
+          <a:prstGeom prst="rect">
+            <a:avLst/>
+          </a:prstGeom>
+          <a:noFill/>
+        </p:spPr>
+        <p:txBody>
+          <a:bodyPr wrap="square" lIns="45720" rIns="45720" tIns="18288" bIns="18288" anchor="t">
+            <a:spAutoFit/>
+          </a:bodyPr>
+          <a:lstStyle/>
+          <a:p>
+            <a:pPr algn="r"/>
+            <a:r>
+              <a:rPr sz="1000" b="1" i="0">
+                <a:solidFill>
+                  <a:srgbClr val="6B7280"/>
+                </a:solidFill>
+                <a:latin typeface="Calibri"/>
+              </a:rPr>
+              <a:t>L7  ·  14/16</a:t>
+            </a:r>
+          </a:p>
+        </p:txBody>
+      </p:sp>
+    </p:spTree>
+  </p:cSld>
+  <p:clrMapOvr>
+    <a:masterClrMapping/>
+  </p:clrMapOvr>
+</p:sld>
+</file>
+
+<file path=ppt/slides/slide15.xml><?xml version="1.0" encoding="utf-8"?>
+<p:sld xmlns:a="http://schemas.openxmlformats.org/drawingml/2006/main" xmlns:p="http://schemas.openxmlformats.org/presentationml/2006/main" xmlns:r="http://schemas.openxmlformats.org/officeDocument/2006/relationships">
+  <p:cSld>
+    <p:spTree>
+      <p:nvGrpSpPr>
+        <p:cNvPr id="1" name=""/>
+        <p:cNvGrpSpPr/>
+        <p:nvPr/>
+      </p:nvGrpSpPr>
+      <p:grpSpPr/>
+      <p:sp>
+        <p:nvSpPr>
+          <p:cNvPr id="2" name="Rectangle 1"/>
+          <p:cNvSpPr/>
+          <p:nvPr/>
+        </p:nvSpPr>
+        <p:spPr>
+          <a:xfrm>
+            <a:off x="0" y="0"/>
+            <a:ext cx="4114800" cy="6858000"/>
           </a:xfrm>
           <a:prstGeom prst="rect">
             <a:avLst/>
@@ -6043,6 +7365,398 @@
       </p:sp>
       <p:sp>
         <p:nvSpPr>
+          <p:cNvPr id="3" name="Rectangle 2"/>
+          <p:cNvSpPr/>
+          <p:nvPr/>
+        </p:nvSpPr>
+        <p:spPr>
+          <a:xfrm>
+            <a:off x="4114800" y="0"/>
+            <a:ext cx="8046720" cy="6858000"/>
+          </a:xfrm>
+          <a:prstGeom prst="rect">
+            <a:avLst/>
+          </a:prstGeom>
+          <a:solidFill>
+            <a:srgbClr val="F1F4F8"/>
+          </a:solidFill>
+          <a:ln>
+            <a:noFill/>
+          </a:ln>
+        </p:spPr>
+        <p:style>
+          <a:lnRef idx="1">
+            <a:schemeClr val="accent1"/>
+          </a:lnRef>
+          <a:fillRef idx="3">
+            <a:schemeClr val="accent1"/>
+          </a:fillRef>
+          <a:effectRef idx="2">
+            <a:schemeClr val="accent1"/>
+          </a:effectRef>
+          <a:fontRef idx="minor">
+            <a:schemeClr val="lt1"/>
+          </a:fontRef>
+        </p:style>
+        <p:txBody>
+          <a:bodyPr rtlCol="0" anchor="ctr"/>
+          <a:lstStyle/>
+          <a:p>
+            <a:pPr algn="ctr"/>
+          </a:p>
+        </p:txBody>
+      </p:sp>
+      <p:sp>
+        <p:nvSpPr>
+          <p:cNvPr id="4" name="Rectangle 3"/>
+          <p:cNvSpPr/>
+          <p:nvPr/>
+        </p:nvSpPr>
+        <p:spPr>
+          <a:xfrm>
+            <a:off x="4114800" y="0"/>
+            <a:ext cx="137160" cy="6858000"/>
+          </a:xfrm>
+          <a:prstGeom prst="rect">
+            <a:avLst/>
+          </a:prstGeom>
+          <a:solidFill>
+            <a:srgbClr val="00A0B0"/>
+          </a:solidFill>
+          <a:ln>
+            <a:noFill/>
+          </a:ln>
+        </p:spPr>
+        <p:style>
+          <a:lnRef idx="1">
+            <a:schemeClr val="accent1"/>
+          </a:lnRef>
+          <a:fillRef idx="3">
+            <a:schemeClr val="accent1"/>
+          </a:fillRef>
+          <a:effectRef idx="2">
+            <a:schemeClr val="accent1"/>
+          </a:effectRef>
+          <a:fontRef idx="minor">
+            <a:schemeClr val="lt1"/>
+          </a:fontRef>
+        </p:style>
+        <p:txBody>
+          <a:bodyPr rtlCol="0" anchor="ctr"/>
+          <a:lstStyle/>
+          <a:p>
+            <a:pPr algn="ctr"/>
+          </a:p>
+        </p:txBody>
+      </p:sp>
+      <p:sp>
+        <p:nvSpPr>
+          <p:cNvPr id="5" name="TextBox 4"/>
+          <p:cNvSpPr txBox="1"/>
+          <p:nvPr/>
+        </p:nvSpPr>
+        <p:spPr>
+          <a:xfrm>
+            <a:off x="274320" y="2103120"/>
+            <a:ext cx="3657600" cy="2286000"/>
+          </a:xfrm>
+          <a:prstGeom prst="rect">
+            <a:avLst/>
+          </a:prstGeom>
+          <a:noFill/>
+        </p:spPr>
+        <p:txBody>
+          <a:bodyPr wrap="square" lIns="45720" rIns="45720" tIns="18288" bIns="18288" anchor="t">
+            <a:spAutoFit/>
+          </a:bodyPr>
+          <a:lstStyle/>
+          <a:p>
+            <a:pPr algn="ctr"/>
+            <a:r>
+              <a:rPr sz="17000" b="1" i="0">
+                <a:solidFill>
+                  <a:srgbClr val="00A0B0"/>
+                </a:solidFill>
+                <a:latin typeface="Calibri"/>
+              </a:rPr>
+              <a:t>03</a:t>
+            </a:r>
+          </a:p>
+        </p:txBody>
+      </p:sp>
+      <p:sp>
+        <p:nvSpPr>
+          <p:cNvPr id="6" name="TextBox 5"/>
+          <p:cNvSpPr txBox="1"/>
+          <p:nvPr/>
+        </p:nvSpPr>
+        <p:spPr>
+          <a:xfrm>
+            <a:off x="274320" y="4572000"/>
+            <a:ext cx="3657600" cy="457200"/>
+          </a:xfrm>
+          <a:prstGeom prst="rect">
+            <a:avLst/>
+          </a:prstGeom>
+          <a:noFill/>
+        </p:spPr>
+        <p:txBody>
+          <a:bodyPr wrap="square" lIns="45720" rIns="45720" tIns="18288" bIns="18288" anchor="t">
+            <a:spAutoFit/>
+          </a:bodyPr>
+          <a:lstStyle/>
+          <a:p>
+            <a:pPr algn="ctr"/>
+            <a:r>
+              <a:rPr sz="2000" b="1" i="0">
+                <a:solidFill>
+                  <a:srgbClr val="6FD8E0"/>
+                </a:solidFill>
+                <a:latin typeface="Calibri"/>
+              </a:rPr>
+              <a:t>PARTE</a:t>
+            </a:r>
+          </a:p>
+        </p:txBody>
+      </p:sp>
+      <p:sp>
+        <p:nvSpPr>
+          <p:cNvPr id="7" name="TextBox 6"/>
+          <p:cNvSpPr txBox="1"/>
+          <p:nvPr/>
+        </p:nvSpPr>
+        <p:spPr>
+          <a:xfrm>
+            <a:off x="4572000" y="2286000"/>
+            <a:ext cx="7315200" cy="1645920"/>
+          </a:xfrm>
+          <a:prstGeom prst="rect">
+            <a:avLst/>
+          </a:prstGeom>
+          <a:noFill/>
+        </p:spPr>
+        <p:txBody>
+          <a:bodyPr wrap="square" lIns="45720" rIns="45720" tIns="18288" bIns="18288" anchor="t">
+            <a:spAutoFit/>
+          </a:bodyPr>
+          <a:lstStyle/>
+          <a:p>
+            <a:pPr algn="l"/>
+            <a:r>
+              <a:rPr sz="4400" b="1" i="0">
+                <a:solidFill>
+                  <a:srgbClr val="0F2D52"/>
+                </a:solidFill>
+                <a:latin typeface="Calibri"/>
+              </a:rPr>
+              <a:t>Lab in aula</a:t>
+            </a:r>
+          </a:p>
+        </p:txBody>
+      </p:sp>
+      <p:sp>
+        <p:nvSpPr>
+          <p:cNvPr id="8" name="TextBox 7"/>
+          <p:cNvSpPr txBox="1"/>
+          <p:nvPr/>
+        </p:nvSpPr>
+        <p:spPr>
+          <a:xfrm>
+            <a:off x="4572000" y="3931920"/>
+            <a:ext cx="7315200" cy="1828800"/>
+          </a:xfrm>
+          <a:prstGeom prst="rect">
+            <a:avLst/>
+          </a:prstGeom>
+          <a:noFill/>
+        </p:spPr>
+        <p:txBody>
+          <a:bodyPr wrap="square" lIns="45720" rIns="45720" tIns="18288" bIns="18288" anchor="t">
+            <a:spAutoFit/>
+          </a:bodyPr>
+          <a:lstStyle/>
+          <a:p>
+            <a:pPr algn="l"/>
+            <a:r>
+              <a:rPr sz="1800" b="0" i="1">
+                <a:solidFill>
+                  <a:srgbClr val="6B7280"/>
+                </a:solidFill>
+                <a:latin typeface="Calibri"/>
+              </a:rPr>
+              <a:t>Validation collettiva di codice AI vulnerabile</a:t>
+            </a:r>
+          </a:p>
+        </p:txBody>
+      </p:sp>
+      <p:cxnSp>
+        <p:nvCxnSpPr>
+          <p:cNvPr id="9" name="Connector 8"/>
+          <p:cNvCxnSpPr/>
+          <p:nvPr/>
+        </p:nvCxnSpPr>
+        <p:spPr>
+          <a:xfrm>
+            <a:off x="457200" y="6446520"/>
+            <a:ext cx="11274552" cy="0"/>
+          </a:xfrm>
+          <a:prstGeom prst="line">
+            <a:avLst/>
+          </a:prstGeom>
+          <a:ln w="19050">
+            <a:solidFill>
+              <a:srgbClr val="00A0B0"/>
+            </a:solidFill>
+          </a:ln>
+        </p:spPr>
+        <p:style>
+          <a:lnRef idx="2">
+            <a:schemeClr val="accent1"/>
+          </a:lnRef>
+          <a:fillRef idx="0">
+            <a:schemeClr val="accent1"/>
+          </a:fillRef>
+          <a:effectRef idx="1">
+            <a:schemeClr val="accent1"/>
+          </a:effectRef>
+          <a:fontRef idx="minor">
+            <a:schemeClr val="tx1"/>
+          </a:fontRef>
+        </p:style>
+      </p:cxnSp>
+      <p:sp>
+        <p:nvSpPr>
+          <p:cNvPr id="10" name="TextBox 9"/>
+          <p:cNvSpPr txBox="1"/>
+          <p:nvPr/>
+        </p:nvSpPr>
+        <p:spPr>
+          <a:xfrm>
+            <a:off x="457200" y="6473952"/>
+            <a:ext cx="7315200" cy="292608"/>
+          </a:xfrm>
+          <a:prstGeom prst="rect">
+            <a:avLst/>
+          </a:prstGeom>
+          <a:noFill/>
+        </p:spPr>
+        <p:txBody>
+          <a:bodyPr wrap="square" lIns="45720" rIns="45720" tIns="18288" bIns="18288" anchor="t">
+            <a:spAutoFit/>
+          </a:bodyPr>
+          <a:lstStyle/>
+          <a:p>
+            <a:pPr algn="l"/>
+            <a:r>
+              <a:rPr sz="1000" b="0" i="0">
+                <a:solidFill>
+                  <a:srgbClr val="6B7280"/>
+                </a:solidFill>
+                <a:latin typeface="Calibri"/>
+              </a:rPr>
+              <a:t>Secure Coding · Corso IFTS STEM · A. Manneschi · 2024/2025</a:t>
+            </a:r>
+          </a:p>
+        </p:txBody>
+      </p:sp>
+      <p:sp>
+        <p:nvSpPr>
+          <p:cNvPr id="11" name="TextBox 10"/>
+          <p:cNvSpPr txBox="1"/>
+          <p:nvPr/>
+        </p:nvSpPr>
+        <p:spPr>
+          <a:xfrm>
+            <a:off x="10515600" y="6473952"/>
+            <a:ext cx="1188720" cy="292608"/>
+          </a:xfrm>
+          <a:prstGeom prst="rect">
+            <a:avLst/>
+          </a:prstGeom>
+          <a:noFill/>
+        </p:spPr>
+        <p:txBody>
+          <a:bodyPr wrap="square" lIns="45720" rIns="45720" tIns="18288" bIns="18288" anchor="t">
+            <a:spAutoFit/>
+          </a:bodyPr>
+          <a:lstStyle/>
+          <a:p>
+            <a:pPr algn="r"/>
+            <a:r>
+              <a:rPr sz="1000" b="1" i="0">
+                <a:solidFill>
+                  <a:srgbClr val="6B7280"/>
+                </a:solidFill>
+                <a:latin typeface="Calibri"/>
+              </a:rPr>
+              <a:t>L7  ·  15/16</a:t>
+            </a:r>
+          </a:p>
+        </p:txBody>
+      </p:sp>
+    </p:spTree>
+  </p:cSld>
+  <p:clrMapOvr>
+    <a:masterClrMapping/>
+  </p:clrMapOvr>
+</p:sld>
+</file>
+
+<file path=ppt/slides/slide16.xml><?xml version="1.0" encoding="utf-8"?>
+<p:sld xmlns:a="http://schemas.openxmlformats.org/drawingml/2006/main" xmlns:p="http://schemas.openxmlformats.org/presentationml/2006/main" xmlns:r="http://schemas.openxmlformats.org/officeDocument/2006/relationships">
+  <p:cSld>
+    <p:spTree>
+      <p:nvGrpSpPr>
+        <p:cNvPr id="1" name=""/>
+        <p:cNvGrpSpPr/>
+        <p:nvPr/>
+      </p:nvGrpSpPr>
+      <p:grpSpPr/>
+      <p:sp>
+        <p:nvSpPr>
+          <p:cNvPr id="2" name="Rectangle 1"/>
+          <p:cNvSpPr/>
+          <p:nvPr/>
+        </p:nvSpPr>
+        <p:spPr>
+          <a:xfrm>
+            <a:off x="0" y="0"/>
+            <a:ext cx="12191695" cy="6858000"/>
+          </a:xfrm>
+          <a:prstGeom prst="rect">
+            <a:avLst/>
+          </a:prstGeom>
+          <a:solidFill>
+            <a:srgbClr val="081B33"/>
+          </a:solidFill>
+          <a:ln>
+            <a:noFill/>
+          </a:ln>
+        </p:spPr>
+        <p:style>
+          <a:lnRef idx="1">
+            <a:schemeClr val="accent1"/>
+          </a:lnRef>
+          <a:fillRef idx="3">
+            <a:schemeClr val="accent1"/>
+          </a:fillRef>
+          <a:effectRef idx="2">
+            <a:schemeClr val="accent1"/>
+          </a:effectRef>
+          <a:fontRef idx="minor">
+            <a:schemeClr val="lt1"/>
+          </a:fontRef>
+        </p:style>
+        <p:txBody>
+          <a:bodyPr rtlCol="0" anchor="ctr"/>
+          <a:lstStyle/>
+          <a:p>
+            <a:pPr algn="ctr"/>
+          </a:p>
+        </p:txBody>
+      </p:sp>
+      <p:sp>
+        <p:nvSpPr>
           <p:cNvPr id="3" name="Oval 2"/>
           <p:cNvSpPr/>
           <p:nvPr/>
@@ -6455,7 +8169,7 @@
                 </a:solidFill>
                 <a:latin typeface="Calibri"/>
               </a:rPr>
-              <a:t>L7  ·  14/14</a:t>
+              <a:t>L7  ·  16/16</a:t>
             </a:r>
           </a:p>
         </p:txBody>
@@ -7291,7 +9005,7 @@
                 </a:solidFill>
                 <a:latin typeface="Calibri"/>
               </a:rPr>
-              <a:t>L7  ·  2/14</a:t>
+              <a:t>L7  ·  2/16</a:t>
             </a:r>
           </a:p>
         </p:txBody>
@@ -7683,7 +9397,7 @@
                 </a:solidFill>
                 <a:latin typeface="Calibri"/>
               </a:rPr>
-              <a:t>L7  ·  3/14</a:t>
+              <a:t>L7  ·  3/16</a:t>
             </a:r>
           </a:p>
         </p:txBody>
@@ -8159,7 +9873,7 @@
                 </a:solidFill>
                 <a:latin typeface="Calibri"/>
               </a:rPr>
-              <a:t>L7  ·  4/14</a:t>
+              <a:t>L7  ·  4/16</a:t>
             </a:r>
           </a:p>
         </p:txBody>
@@ -8848,7 +10562,7 @@
                 </a:solidFill>
                 <a:latin typeface="Calibri"/>
               </a:rPr>
-              <a:t>L7  ·  5/14</a:t>
+              <a:t>L7  ·  5/16</a:t>
             </a:r>
           </a:p>
         </p:txBody>
@@ -9240,7 +10954,7 @@
                 </a:solidFill>
                 <a:latin typeface="Calibri"/>
               </a:rPr>
-              <a:t>L7  ·  6/14</a:t>
+              <a:t>L7  ·  6/16</a:t>
             </a:r>
           </a:p>
         </p:txBody>
@@ -9554,7 +11268,7 @@
                 </a:solidFill>
                 <a:latin typeface="Calibri"/>
               </a:rPr>
-              <a:t>L7  ·  7/14</a:t>
+              <a:t>L7  ·  7/16</a:t>
             </a:r>
           </a:p>
         </p:txBody>
@@ -10030,7 +11744,7 @@
                 </a:solidFill>
                 <a:latin typeface="Calibri"/>
               </a:rPr>
-              <a:t>L7  ·  8/14</a:t>
+              <a:t>L7  ·  8/16</a:t>
             </a:r>
           </a:p>
         </p:txBody>
@@ -10805,7 +12519,7 @@
                 </a:solidFill>
                 <a:latin typeface="Calibri"/>
               </a:rPr>
-              <a:t>L7  ·  9/14</a:t>
+              <a:t>L7  ·  9/16</a:t>
             </a:r>
           </a:p>
         </p:txBody>
